--- a/_wp移行素材/★引継ぎ資料/★ASPATH_サイト運用マニュアル_基本編.pptx
+++ b/_wp移行素材/★引継ぎ資料/★ASPATH_サイト運用マニュアル_基本編.pptx
@@ -2014,7 +2014,7 @@
     <p:bg>
       <p:bgPr>
         <a:solidFill>
-          <a:srgbClr val="264653"/>
+          <a:srgbClr val="F4E9D8"/>
         </a:solidFill>
       </p:bgPr>
     </p:bg>
@@ -2034,14 +2034,78 @@
       </p:grpSpPr>
       <p:sp>
         <p:nvSpPr>
-          <p:cNvPr id="2" name="Text 0"/>
-          <p:cNvSpPr txBox="1"/>
-          <p:nvPr/>
-        </p:nvSpPr>
-        <p:spPr>
-          <a:xfrm>
-            <a:off x="822960" y="1371600"/>
-            <a:ext cx="7315200" cy="548640"/>
+          <p:cNvPr id="2" name="Shape 0"/>
+          <p:cNvSpPr/>
+          <p:nvPr/>
+        </p:nvSpPr>
+        <p:spPr>
+          <a:xfrm>
+            <a:off x="0" y="0"/>
+            <a:ext cx="12198096" cy="146304"/>
+          </a:xfrm>
+          <a:prstGeom prst="rect">
+            <a:avLst/>
+          </a:prstGeom>
+          <a:solidFill>
+            <a:srgbClr val="264653"/>
+          </a:solidFill>
+          <a:ln/>
+        </p:spPr>
+      </p:sp>
+      <p:sp>
+        <p:nvSpPr>
+          <p:cNvPr id="3" name="Shape 1"/>
+          <p:cNvSpPr/>
+          <p:nvPr/>
+        </p:nvSpPr>
+        <p:spPr>
+          <a:xfrm>
+            <a:off x="0" y="6711696"/>
+            <a:ext cx="12198096" cy="146304"/>
+          </a:xfrm>
+          <a:prstGeom prst="rect">
+            <a:avLst/>
+          </a:prstGeom>
+          <a:solidFill>
+            <a:srgbClr val="F4A261"/>
+          </a:solidFill>
+          <a:ln/>
+        </p:spPr>
+      </p:sp>
+      <p:pic>
+        <p:nvPicPr>
+          <p:cNvPr id="4" name="Image 0" descr="/sessions/compassionate-sweet-heisenberg/mnt/dev-aspath-life-main/tools/assets/logo-deck.png">    </p:cNvPr>
+          <p:cNvPicPr>
+            <a:picLocks noChangeAspect="1"/>
+          </p:cNvPicPr>
+          <p:nvPr/>
+        </p:nvPicPr>
+        <p:blipFill>
+          <a:blip r:embed="rId1"/>
+          <a:stretch>
+            <a:fillRect/>
+          </a:stretch>
+        </p:blipFill>
+        <p:spPr>
+          <a:xfrm>
+            <a:off x="1051560" y="1874520"/>
+            <a:ext cx="2320246" cy="2834640"/>
+          </a:xfrm>
+          <a:prstGeom prst="rect">
+            <a:avLst/>
+          </a:prstGeom>
+        </p:spPr>
+      </p:pic>
+      <p:sp>
+        <p:nvSpPr>
+          <p:cNvPr id="5" name="Text 2"/>
+          <p:cNvSpPr txBox="1"/>
+          <p:nvPr/>
+        </p:nvSpPr>
+        <p:spPr>
+          <a:xfrm>
+            <a:off x="4892040" y="1572768"/>
+            <a:ext cx="6675120" cy="384048"/>
           </a:xfrm>
           <a:prstGeom prst="rect">
             <a:avLst/>
@@ -2057,7 +2121,7 @@
               <a:buNone/>
             </a:pPr>
             <a:r>
-              <a:rPr lang="en-US" sz="1800" b="1" spc="600" kern="0" dirty="0">
+              <a:rPr lang="en-US" sz="1500" b="1" spc="600" kern="0" dirty="0">
                 <a:solidFill>
                   <a:srgbClr val="F4A261"/>
                 </a:solidFill>
@@ -2067,20 +2131,20 @@
               </a:rPr>
               <a:t>ASPATH</a:t>
             </a:r>
-            <a:endParaRPr lang="en-US" sz="1800" dirty="0"/>
-          </a:p>
-        </p:txBody>
-      </p:sp>
-      <p:sp>
-        <p:nvSpPr>
-          <p:cNvPr id="3" name="Text 1"/>
-          <p:cNvSpPr txBox="1"/>
-          <p:nvPr/>
-        </p:nvSpPr>
-        <p:spPr>
-          <a:xfrm>
-            <a:off x="822960" y="1965960"/>
-            <a:ext cx="10058400" cy="914400"/>
+            <a:endParaRPr lang="en-US" sz="1500" dirty="0"/>
+          </a:p>
+        </p:txBody>
+      </p:sp>
+      <p:sp>
+        <p:nvSpPr>
+          <p:cNvPr id="6" name="Text 3"/>
+          <p:cNvSpPr txBox="1"/>
+          <p:nvPr/>
+        </p:nvSpPr>
+        <p:spPr>
+          <a:xfrm>
+            <a:off x="4892040" y="1993392"/>
+            <a:ext cx="6675120" cy="914400"/>
           </a:xfrm>
           <a:prstGeom prst="rect">
             <a:avLst/>
@@ -2093,12 +2157,15 @@
           <a:lstStyle/>
           <a:p>
             <a:pPr indent="0" marL="0">
-              <a:buNone/>
-            </a:pPr>
-            <a:r>
-              <a:rPr lang="en-US" sz="4400" b="1" dirty="0">
-                <a:solidFill>
-                  <a:srgbClr val="FFFFFF"/>
+              <a:lnSpc>
+                <a:spcPct val="120000"/>
+              </a:lnSpc>
+              <a:buNone/>
+            </a:pPr>
+            <a:r>
+              <a:rPr lang="en-US" sz="3600" b="1" dirty="0">
+                <a:solidFill>
+                  <a:srgbClr val="264653"/>
                 </a:solidFill>
                 <a:latin typeface="Meiryo" pitchFamily="34" charset="0"/>
                 <a:ea typeface="Meiryo" pitchFamily="34" charset="-122"/>
@@ -2106,20 +2173,20 @@
               </a:rPr>
               <a:t>サイト運用マニュアル</a:t>
             </a:r>
-            <a:endParaRPr lang="en-US" sz="4400" dirty="0"/>
-          </a:p>
-        </p:txBody>
-      </p:sp>
-      <p:sp>
-        <p:nvSpPr>
-          <p:cNvPr id="4" name="Shape 2"/>
+            <a:endParaRPr lang="en-US" sz="3600" dirty="0"/>
+          </a:p>
+        </p:txBody>
+      </p:sp>
+      <p:sp>
+        <p:nvSpPr>
+          <p:cNvPr id="7" name="Shape 4"/>
           <p:cNvSpPr/>
           <p:nvPr/>
         </p:nvSpPr>
         <p:spPr>
           <a:xfrm>
-            <a:off x="822960" y="3063240"/>
-            <a:ext cx="1920240" cy="603504"/>
+            <a:off x="4892040" y="2962656"/>
+            <a:ext cx="1920240" cy="548640"/>
           </a:xfrm>
           <a:prstGeom prst="roundRect">
             <a:avLst>
@@ -2134,14 +2201,14 @@
       </p:sp>
       <p:sp>
         <p:nvSpPr>
-          <p:cNvPr id="5" name="Text 3"/>
-          <p:cNvSpPr txBox="1"/>
-          <p:nvPr/>
-        </p:nvSpPr>
-        <p:spPr>
-          <a:xfrm>
-            <a:off x="822960" y="3063240"/>
-            <a:ext cx="1920240" cy="603504"/>
+          <p:cNvPr id="8" name="Text 5"/>
+          <p:cNvSpPr txBox="1"/>
+          <p:nvPr/>
+        </p:nvSpPr>
+        <p:spPr>
+          <a:xfrm>
+            <a:off x="4892040" y="2962656"/>
+            <a:ext cx="1920240" cy="548640"/>
           </a:xfrm>
           <a:prstGeom prst="rect">
             <a:avLst/>
@@ -2157,7 +2224,7 @@
               <a:buNone/>
             </a:pPr>
             <a:r>
-              <a:rPr lang="en-US" sz="1900" b="1" dirty="0">
+              <a:rPr lang="en-US" sz="1700" b="1" dirty="0">
                 <a:solidFill>
                   <a:srgbClr val="FFFFFF"/>
                 </a:solidFill>
@@ -2167,20 +2234,20 @@
               </a:rPr>
               <a:t>基 本 編</a:t>
             </a:r>
-            <a:endParaRPr lang="en-US" sz="1900" dirty="0"/>
-          </a:p>
-        </p:txBody>
-      </p:sp>
-      <p:sp>
-        <p:nvSpPr>
-          <p:cNvPr id="6" name="Text 4"/>
-          <p:cNvSpPr txBox="1"/>
-          <p:nvPr/>
-        </p:nvSpPr>
-        <p:spPr>
-          <a:xfrm>
-            <a:off x="822960" y="3977640"/>
-            <a:ext cx="9144000" cy="457200"/>
+            <a:endParaRPr lang="en-US" sz="1700" dirty="0"/>
+          </a:p>
+        </p:txBody>
+      </p:sp>
+      <p:sp>
+        <p:nvSpPr>
+          <p:cNvPr id="9" name="Text 6"/>
+          <p:cNvSpPr txBox="1"/>
+          <p:nvPr/>
+        </p:nvSpPr>
+        <p:spPr>
+          <a:xfrm>
+            <a:off x="4892040" y="3749040"/>
+            <a:ext cx="6675120" cy="548640"/>
           </a:xfrm>
           <a:prstGeom prst="rect">
             <a:avLst/>
@@ -2193,12 +2260,15 @@
           <a:lstStyle/>
           <a:p>
             <a:pPr indent="0" marL="0">
-              <a:buNone/>
-            </a:pPr>
-            <a:r>
-              <a:rPr lang="en-US" sz="1600" dirty="0">
-                <a:solidFill>
-                  <a:srgbClr val="CFE0E4"/>
+              <a:lnSpc>
+                <a:spcPct val="130000"/>
+              </a:lnSpc>
+              <a:buNone/>
+            </a:pPr>
+            <a:r>
+              <a:rPr lang="en-US" sz="1500" dirty="0">
+                <a:solidFill>
+                  <a:srgbClr val="52707A"/>
                 </a:solidFill>
                 <a:latin typeface="Meiryo" pitchFamily="34" charset="0"/>
                 <a:ea typeface="Meiryo" pitchFamily="34" charset="-122"/>
@@ -2206,20 +2276,40 @@
               </a:rPr>
               <a:t>この1冊で、日々の更新はひととおりできるようになります。</a:t>
             </a:r>
-            <a:endParaRPr lang="en-US" sz="1600" dirty="0"/>
-          </a:p>
-        </p:txBody>
-      </p:sp>
-      <p:sp>
-        <p:nvSpPr>
-          <p:cNvPr id="7" name="Text 5"/>
-          <p:cNvSpPr txBox="1"/>
-          <p:nvPr/>
-        </p:nvSpPr>
-        <p:spPr>
-          <a:xfrm>
-            <a:off x="822960" y="5760720"/>
-            <a:ext cx="7315200" cy="365760"/>
+            <a:endParaRPr lang="en-US" sz="1500" dirty="0"/>
+          </a:p>
+        </p:txBody>
+      </p:sp>
+      <p:sp>
+        <p:nvSpPr>
+          <p:cNvPr id="10" name="Shape 7"/>
+          <p:cNvSpPr/>
+          <p:nvPr/>
+        </p:nvSpPr>
+        <p:spPr>
+          <a:xfrm>
+            <a:off x="4892040" y="4736592"/>
+            <a:ext cx="1828800" cy="18288"/>
+          </a:xfrm>
+          <a:prstGeom prst="rect">
+            <a:avLst/>
+          </a:prstGeom>
+          <a:solidFill>
+            <a:srgbClr val="F4A261"/>
+          </a:solidFill>
+          <a:ln/>
+        </p:spPr>
+      </p:sp>
+      <p:sp>
+        <p:nvSpPr>
+          <p:cNvPr id="11" name="Text 8"/>
+          <p:cNvSpPr txBox="1"/>
+          <p:nvPr/>
+        </p:nvSpPr>
+        <p:spPr>
+          <a:xfrm>
+            <a:off x="4892040" y="4864608"/>
+            <a:ext cx="6675120" cy="292608"/>
           </a:xfrm>
           <a:prstGeom prst="rect">
             <a:avLst/>
@@ -2235,17 +2325,95 @@
               <a:buNone/>
             </a:pPr>
             <a:r>
-              <a:rPr lang="en-US" sz="1200" dirty="0">
-                <a:solidFill>
-                  <a:srgbClr val="9FBAC1"/>
-                </a:solidFill>
-                <a:latin typeface="Meiryo" pitchFamily="34" charset="0"/>
-                <a:ea typeface="Meiryo" pitchFamily="34" charset="-122"/>
-                <a:cs typeface="Meiryo" pitchFamily="34" charset="-120"/>
-              </a:rPr>
-              <a:t>2026年9月　ASPATH 様　ご納品資料</a:t>
-            </a:r>
-            <a:endParaRPr lang="en-US" sz="1200" dirty="0"/>
+              <a:rPr lang="en-US" sz="1250" b="1" dirty="0">
+                <a:solidFill>
+                  <a:srgbClr val="264653"/>
+                </a:solidFill>
+                <a:latin typeface="Meiryo" pitchFamily="34" charset="0"/>
+                <a:ea typeface="Meiryo" pitchFamily="34" charset="-122"/>
+                <a:cs typeface="Meiryo" pitchFamily="34" charset="-120"/>
+              </a:rPr>
+              <a:t>鹿児島のパーキンソン病専門トレーニングスタジオ</a:t>
+            </a:r>
+            <a:endParaRPr lang="en-US" sz="1250" dirty="0"/>
+          </a:p>
+        </p:txBody>
+      </p:sp>
+      <p:sp>
+        <p:nvSpPr>
+          <p:cNvPr id="12" name="Text 9"/>
+          <p:cNvSpPr txBox="1"/>
+          <p:nvPr/>
+        </p:nvSpPr>
+        <p:spPr>
+          <a:xfrm>
+            <a:off x="4892040" y="5193792"/>
+            <a:ext cx="6675120" cy="274320"/>
+          </a:xfrm>
+          <a:prstGeom prst="rect">
+            <a:avLst/>
+          </a:prstGeom>
+          <a:noFill/>
+          <a:ln/>
+        </p:spPr>
+        <p:txBody>
+          <a:bodyPr wrap="square" lIns="0" tIns="0" rIns="0" bIns="0" rtlCol="0" anchor="ctr"/>
+          <a:lstStyle/>
+          <a:p>
+            <a:pPr indent="0" marL="0">
+              <a:buNone/>
+            </a:pPr>
+            <a:r>
+              <a:rPr lang="en-US" sz="1150" dirty="0">
+                <a:solidFill>
+                  <a:srgbClr val="52707A"/>
+                </a:solidFill>
+                <a:latin typeface="Meiryo" pitchFamily="34" charset="0"/>
+                <a:ea typeface="Meiryo" pitchFamily="34" charset="-122"/>
+                <a:cs typeface="Meiryo" pitchFamily="34" charset="-120"/>
+              </a:rPr>
+              <a:t>動くことを楽しむ。明日につながる。</a:t>
+            </a:r>
+            <a:endParaRPr lang="en-US" sz="1150" dirty="0"/>
+          </a:p>
+        </p:txBody>
+      </p:sp>
+      <p:sp>
+        <p:nvSpPr>
+          <p:cNvPr id="13" name="Text 10"/>
+          <p:cNvSpPr txBox="1"/>
+          <p:nvPr/>
+        </p:nvSpPr>
+        <p:spPr>
+          <a:xfrm>
+            <a:off x="4892040" y="5596128"/>
+            <a:ext cx="6675120" cy="274320"/>
+          </a:xfrm>
+          <a:prstGeom prst="rect">
+            <a:avLst/>
+          </a:prstGeom>
+          <a:noFill/>
+          <a:ln/>
+        </p:spPr>
+        <p:txBody>
+          <a:bodyPr wrap="square" lIns="0" tIns="0" rIns="0" bIns="0" rtlCol="0" anchor="ctr"/>
+          <a:lstStyle/>
+          <a:p>
+            <a:pPr indent="0" marL="0">
+              <a:buNone/>
+            </a:pPr>
+            <a:r>
+              <a:rPr lang="en-US" sz="1050" dirty="0">
+                <a:solidFill>
+                  <a:srgbClr val="8A9CA2"/>
+                </a:solidFill>
+                <a:latin typeface="Meiryo" pitchFamily="34" charset="0"/>
+                <a:ea typeface="Meiryo" pitchFamily="34" charset="-122"/>
+                <a:cs typeface="Meiryo" pitchFamily="34" charset="-120"/>
+              </a:rPr>
+              <a:t>aspath-life.com　／　2026年9月　ASPATH 様　ご納品資料</a:t>
+            </a:r>
+            <a:endParaRPr lang="en-US" sz="1050" dirty="0"/>
           </a:p>
         </p:txBody>
       </p:sp>
@@ -2281,107 +2449,9 @@
           <a:chExt cx="0" cy="0"/>
         </a:xfrm>
       </p:grpSpPr>
-      <p:sp>
-        <p:nvSpPr>
-          <p:cNvPr id="2" name="Shape 0"/>
-          <p:cNvSpPr/>
-          <p:nvPr/>
-        </p:nvSpPr>
-        <p:spPr>
-          <a:xfrm>
-            <a:off x="548640" y="384048"/>
-            <a:ext cx="566928" cy="566928"/>
-          </a:xfrm>
-          <a:prstGeom prst="ellipse">
-            <a:avLst/>
-          </a:prstGeom>
-          <a:solidFill>
-            <a:srgbClr val="F4A261"/>
-          </a:solidFill>
-          <a:ln/>
-        </p:spPr>
-      </p:sp>
-      <p:sp>
-        <p:nvSpPr>
-          <p:cNvPr id="3" name="Text 1"/>
-          <p:cNvSpPr txBox="1"/>
-          <p:nvPr/>
-        </p:nvSpPr>
-        <p:spPr>
-          <a:xfrm>
-            <a:off x="548640" y="384048"/>
-            <a:ext cx="566928" cy="566928"/>
-          </a:xfrm>
-          <a:prstGeom prst="rect">
-            <a:avLst/>
-          </a:prstGeom>
-          <a:noFill/>
-          <a:ln/>
-        </p:spPr>
-        <p:txBody>
-          <a:bodyPr wrap="square" lIns="0" tIns="0" rIns="0" bIns="0" rtlCol="0" anchor="ctr"/>
-          <a:lstStyle/>
-          <a:p>
-            <a:pPr algn="ctr" indent="0" marL="0">
-              <a:buNone/>
-            </a:pPr>
-            <a:r>
-              <a:rPr lang="en-US" sz="2400" b="1" dirty="0">
-                <a:solidFill>
-                  <a:srgbClr val="FFFFFF"/>
-                </a:solidFill>
-                <a:latin typeface="Meiryo" pitchFamily="34" charset="0"/>
-                <a:ea typeface="Meiryo" pitchFamily="34" charset="-122"/>
-                <a:cs typeface="Meiryo" pitchFamily="34" charset="-120"/>
-              </a:rPr>
-              <a:t>3</a:t>
-            </a:r>
-            <a:endParaRPr lang="en-US" sz="2400" dirty="0"/>
-          </a:p>
-        </p:txBody>
-      </p:sp>
-      <p:sp>
-        <p:nvSpPr>
-          <p:cNvPr id="4" name="Text 2"/>
-          <p:cNvSpPr txBox="1"/>
-          <p:nvPr/>
-        </p:nvSpPr>
-        <p:spPr>
-          <a:xfrm>
-            <a:off x="1298448" y="347472"/>
-            <a:ext cx="10332720" cy="658368"/>
-          </a:xfrm>
-          <a:prstGeom prst="rect">
-            <a:avLst/>
-          </a:prstGeom>
-          <a:noFill/>
-          <a:ln/>
-        </p:spPr>
-        <p:txBody>
-          <a:bodyPr wrap="square" lIns="0" tIns="0" rIns="0" bIns="0" rtlCol="0" anchor="ctr"/>
-          <a:lstStyle/>
-          <a:p>
-            <a:pPr indent="0" marL="0">
-              <a:buNone/>
-            </a:pPr>
-            <a:r>
-              <a:rPr lang="en-US" sz="3000" b="1" dirty="0">
-                <a:solidFill>
-                  <a:srgbClr val="264653"/>
-                </a:solidFill>
-                <a:latin typeface="Meiryo" pitchFamily="34" charset="0"/>
-                <a:ea typeface="Meiryo" pitchFamily="34" charset="-122"/>
-                <a:cs typeface="Meiryo" pitchFamily="34" charset="-120"/>
-              </a:rPr>
-              <a:t>写真を差し替える</a:t>
-            </a:r>
-            <a:endParaRPr lang="en-US" sz="3000" dirty="0"/>
-          </a:p>
-        </p:txBody>
-      </p:sp>
       <p:pic>
         <p:nvPicPr>
-          <p:cNvPr id="5" name="Image 0" descr="/sessions/compassionate-sweet-heisenberg/mnt/outputs/レクチャー素材/crop/31_置換.jpg">    </p:cNvPr>
+          <p:cNvPr id="2" name="Image 0" descr="/sessions/compassionate-sweet-heisenberg/mnt/dev-aspath-life-main/tools/assets/logo-deck.png">    </p:cNvPr>
           <p:cNvPicPr>
             <a:picLocks noChangeAspect="1"/>
           </p:cNvPicPr>
@@ -2395,6 +2465,167 @@
         </p:blipFill>
         <p:spPr>
           <a:xfrm>
+            <a:off x="11458173" y="109728"/>
+            <a:ext cx="209571" cy="256032"/>
+          </a:xfrm>
+          <a:prstGeom prst="rect">
+            <a:avLst/>
+          </a:prstGeom>
+        </p:spPr>
+      </p:pic>
+      <p:sp>
+        <p:nvSpPr>
+          <p:cNvPr id="3" name="Text 0"/>
+          <p:cNvSpPr txBox="1"/>
+          <p:nvPr/>
+        </p:nvSpPr>
+        <p:spPr>
+          <a:xfrm>
+            <a:off x="8623533" y="128016"/>
+            <a:ext cx="2743200" cy="237744"/>
+          </a:xfrm>
+          <a:prstGeom prst="rect">
+            <a:avLst/>
+          </a:prstGeom>
+          <a:noFill/>
+          <a:ln/>
+        </p:spPr>
+        <p:txBody>
+          <a:bodyPr wrap="square" lIns="0" tIns="0" rIns="0" bIns="0" rtlCol="0" anchor="ctr"/>
+          <a:lstStyle/>
+          <a:p>
+            <a:pPr algn="r" indent="0" marL="0">
+              <a:buNone/>
+            </a:pPr>
+            <a:r>
+              <a:rPr lang="en-US" sz="750" dirty="0">
+                <a:solidFill>
+                  <a:srgbClr val="97A9AF"/>
+                </a:solidFill>
+                <a:latin typeface="Meiryo" pitchFamily="34" charset="0"/>
+                <a:ea typeface="Meiryo" pitchFamily="34" charset="-122"/>
+                <a:cs typeface="Meiryo" pitchFamily="34" charset="-120"/>
+              </a:rPr>
+              <a:t>鹿児島のパーキンソン病専門トレーニングスタジオ</a:t>
+            </a:r>
+            <a:endParaRPr lang="en-US" sz="750" dirty="0"/>
+          </a:p>
+        </p:txBody>
+      </p:sp>
+      <p:sp>
+        <p:nvSpPr>
+          <p:cNvPr id="4" name="Shape 1"/>
+          <p:cNvSpPr/>
+          <p:nvPr/>
+        </p:nvSpPr>
+        <p:spPr>
+          <a:xfrm>
+            <a:off x="548640" y="384048"/>
+            <a:ext cx="566928" cy="566928"/>
+          </a:xfrm>
+          <a:prstGeom prst="ellipse">
+            <a:avLst/>
+          </a:prstGeom>
+          <a:solidFill>
+            <a:srgbClr val="F4A261"/>
+          </a:solidFill>
+          <a:ln/>
+        </p:spPr>
+      </p:sp>
+      <p:sp>
+        <p:nvSpPr>
+          <p:cNvPr id="5" name="Text 2"/>
+          <p:cNvSpPr txBox="1"/>
+          <p:nvPr/>
+        </p:nvSpPr>
+        <p:spPr>
+          <a:xfrm>
+            <a:off x="548640" y="384048"/>
+            <a:ext cx="566928" cy="566928"/>
+          </a:xfrm>
+          <a:prstGeom prst="rect">
+            <a:avLst/>
+          </a:prstGeom>
+          <a:noFill/>
+          <a:ln/>
+        </p:spPr>
+        <p:txBody>
+          <a:bodyPr wrap="square" lIns="0" tIns="0" rIns="0" bIns="0" rtlCol="0" anchor="ctr"/>
+          <a:lstStyle/>
+          <a:p>
+            <a:pPr algn="ctr" indent="0" marL="0">
+              <a:buNone/>
+            </a:pPr>
+            <a:r>
+              <a:rPr lang="en-US" sz="2400" b="1" dirty="0">
+                <a:solidFill>
+                  <a:srgbClr val="FFFFFF"/>
+                </a:solidFill>
+                <a:latin typeface="Meiryo" pitchFamily="34" charset="0"/>
+                <a:ea typeface="Meiryo" pitchFamily="34" charset="-122"/>
+                <a:cs typeface="Meiryo" pitchFamily="34" charset="-120"/>
+              </a:rPr>
+              <a:t>3</a:t>
+            </a:r>
+            <a:endParaRPr lang="en-US" sz="2400" dirty="0"/>
+          </a:p>
+        </p:txBody>
+      </p:sp>
+      <p:sp>
+        <p:nvSpPr>
+          <p:cNvPr id="6" name="Text 3"/>
+          <p:cNvSpPr txBox="1"/>
+          <p:nvPr/>
+        </p:nvSpPr>
+        <p:spPr>
+          <a:xfrm>
+            <a:off x="1298448" y="347472"/>
+            <a:ext cx="10332720" cy="658368"/>
+          </a:xfrm>
+          <a:prstGeom prst="rect">
+            <a:avLst/>
+          </a:prstGeom>
+          <a:noFill/>
+          <a:ln/>
+        </p:spPr>
+        <p:txBody>
+          <a:bodyPr wrap="square" lIns="0" tIns="0" rIns="0" bIns="0" rtlCol="0" anchor="ctr"/>
+          <a:lstStyle/>
+          <a:p>
+            <a:pPr indent="0" marL="0">
+              <a:buNone/>
+            </a:pPr>
+            <a:r>
+              <a:rPr lang="en-US" sz="3000" b="1" dirty="0">
+                <a:solidFill>
+                  <a:srgbClr val="264653"/>
+                </a:solidFill>
+                <a:latin typeface="Meiryo" pitchFamily="34" charset="0"/>
+                <a:ea typeface="Meiryo" pitchFamily="34" charset="-122"/>
+                <a:cs typeface="Meiryo" pitchFamily="34" charset="-120"/>
+              </a:rPr>
+              <a:t>写真を差し替える</a:t>
+            </a:r>
+            <a:endParaRPr lang="en-US" sz="3000" dirty="0"/>
+          </a:p>
+        </p:txBody>
+      </p:sp>
+      <p:pic>
+        <p:nvPicPr>
+          <p:cNvPr id="7" name="Image 1" descr="/sessions/compassionate-sweet-heisenberg/mnt/dev-aspath-life-main/_wp移行素材/★引継ぎ資料/レクチャー素材/crop/31_置換.jpg">    </p:cNvPr>
+          <p:cNvPicPr>
+            <a:picLocks noChangeAspect="1"/>
+          </p:cNvPicPr>
+          <p:nvPr/>
+        </p:nvPicPr>
+        <p:blipFill>
+          <a:blip r:embed="rId2"/>
+          <a:stretch>
+            <a:fillRect/>
+          </a:stretch>
+        </p:blipFill>
+        <p:spPr>
+          <a:xfrm>
             <a:off x="566928" y="1298448"/>
             <a:ext cx="7680960" cy="5138928"/>
           </a:xfrm>
@@ -2405,7 +2636,7 @@
       </p:pic>
       <p:sp>
         <p:nvSpPr>
-          <p:cNvPr id="6" name="Shape 3"/>
+          <p:cNvPr id="8" name="Shape 4"/>
           <p:cNvSpPr/>
           <p:nvPr/>
         </p:nvSpPr>
@@ -2432,7 +2663,7 @@
       </p:sp>
       <p:sp>
         <p:nvSpPr>
-          <p:cNvPr id="7" name="Shape 4"/>
+          <p:cNvPr id="9" name="Shape 5"/>
           <p:cNvSpPr/>
           <p:nvPr/>
         </p:nvSpPr>
@@ -2464,7 +2695,7 @@
       </p:sp>
       <p:sp>
         <p:nvSpPr>
-          <p:cNvPr id="8" name="Text 5"/>
+          <p:cNvPr id="10" name="Text 6"/>
           <p:cNvSpPr txBox="1"/>
           <p:nvPr/>
         </p:nvSpPr>
@@ -2503,7 +2734,7 @@
       </p:sp>
       <p:sp>
         <p:nvSpPr>
-          <p:cNvPr id="9" name="Shape 6"/>
+          <p:cNvPr id="11" name="Shape 7"/>
           <p:cNvSpPr/>
           <p:nvPr/>
         </p:nvSpPr>
@@ -2535,7 +2766,7 @@
       </p:sp>
       <p:sp>
         <p:nvSpPr>
-          <p:cNvPr id="10" name="Text 7"/>
+          <p:cNvPr id="12" name="Text 8"/>
           <p:cNvSpPr txBox="1"/>
           <p:nvPr/>
         </p:nvSpPr>
@@ -2574,7 +2805,7 @@
       </p:sp>
       <p:sp>
         <p:nvSpPr>
-          <p:cNvPr id="11" name="Shape 8"/>
+          <p:cNvPr id="13" name="Shape 9"/>
           <p:cNvSpPr/>
           <p:nvPr/>
         </p:nvSpPr>
@@ -2594,7 +2825,7 @@
       </p:sp>
       <p:sp>
         <p:nvSpPr>
-          <p:cNvPr id="12" name="Text 9"/>
+          <p:cNvPr id="14" name="Text 10"/>
           <p:cNvSpPr txBox="1"/>
           <p:nvPr/>
         </p:nvSpPr>
@@ -2633,7 +2864,7 @@
       </p:sp>
       <p:sp>
         <p:nvSpPr>
-          <p:cNvPr id="13" name="Text 10"/>
+          <p:cNvPr id="15" name="Text 11"/>
           <p:cNvSpPr txBox="1"/>
           <p:nvPr/>
         </p:nvSpPr>
@@ -2689,7 +2920,7 @@
       </p:sp>
       <p:sp>
         <p:nvSpPr>
-          <p:cNvPr id="14" name="Shape 11"/>
+          <p:cNvPr id="16" name="Shape 12"/>
           <p:cNvSpPr/>
           <p:nvPr/>
         </p:nvSpPr>
@@ -2709,7 +2940,7 @@
       </p:sp>
       <p:sp>
         <p:nvSpPr>
-          <p:cNvPr id="15" name="Text 12"/>
+          <p:cNvPr id="17" name="Text 13"/>
           <p:cNvSpPr txBox="1"/>
           <p:nvPr/>
         </p:nvSpPr>
@@ -2748,7 +2979,7 @@
       </p:sp>
       <p:sp>
         <p:nvSpPr>
-          <p:cNvPr id="16" name="Text 13"/>
+          <p:cNvPr id="18" name="Text 14"/>
           <p:cNvSpPr txBox="1"/>
           <p:nvPr/>
         </p:nvSpPr>
@@ -2804,7 +3035,7 @@
       </p:sp>
       <p:sp>
         <p:nvSpPr>
-          <p:cNvPr id="17" name="Shape 14"/>
+          <p:cNvPr id="19" name="Shape 15"/>
           <p:cNvSpPr/>
           <p:nvPr/>
         </p:nvSpPr>
@@ -2824,7 +3055,7 @@
       </p:sp>
       <p:sp>
         <p:nvSpPr>
-          <p:cNvPr id="18" name="Text 15"/>
+          <p:cNvPr id="20" name="Text 16"/>
           <p:cNvSpPr txBox="1"/>
           <p:nvPr/>
         </p:nvSpPr>
@@ -2863,7 +3094,7 @@
       </p:sp>
       <p:sp>
         <p:nvSpPr>
-          <p:cNvPr id="19" name="Text 16"/>
+          <p:cNvPr id="21" name="Text 17"/>
           <p:cNvSpPr txBox="1"/>
           <p:nvPr/>
         </p:nvSpPr>
@@ -2919,7 +3150,7 @@
       </p:sp>
       <p:sp>
         <p:nvSpPr>
-          <p:cNvPr id="20" name="Shape 17"/>
+          <p:cNvPr id="22" name="Shape 18"/>
           <p:cNvSpPr/>
           <p:nvPr/>
         </p:nvSpPr>
@@ -2939,7 +3170,7 @@
       </p:sp>
       <p:sp>
         <p:nvSpPr>
-          <p:cNvPr id="21" name="Text 18"/>
+          <p:cNvPr id="23" name="Text 19"/>
           <p:cNvSpPr txBox="1"/>
           <p:nvPr/>
         </p:nvSpPr>
@@ -2978,7 +3209,7 @@
       </p:sp>
       <p:sp>
         <p:nvSpPr>
-          <p:cNvPr id="22" name="Text 19"/>
+          <p:cNvPr id="24" name="Text 20"/>
           <p:cNvSpPr txBox="1"/>
           <p:nvPr/>
         </p:nvSpPr>
@@ -3034,7 +3265,7 @@
       </p:sp>
       <p:sp>
         <p:nvSpPr>
-          <p:cNvPr id="23" name="Shape 20"/>
+          <p:cNvPr id="25" name="Shape 21"/>
           <p:cNvSpPr/>
           <p:nvPr/>
         </p:nvSpPr>
@@ -3061,7 +3292,7 @@
       </p:sp>
       <p:sp>
         <p:nvSpPr>
-          <p:cNvPr id="24" name="Shape 21"/>
+          <p:cNvPr id="26" name="Shape 22"/>
           <p:cNvSpPr/>
           <p:nvPr/>
         </p:nvSpPr>
@@ -3081,7 +3312,7 @@
       </p:sp>
       <p:sp>
         <p:nvSpPr>
-          <p:cNvPr id="25" name="Text 22"/>
+          <p:cNvPr id="27" name="Text 23"/>
           <p:cNvSpPr txBox="1"/>
           <p:nvPr/>
         </p:nvSpPr>
@@ -3120,7 +3351,7 @@
       </p:sp>
       <p:sp>
         <p:nvSpPr>
-          <p:cNvPr id="26" name="Text 23"/>
+          <p:cNvPr id="28" name="Text 24"/>
           <p:cNvSpPr txBox="1"/>
           <p:nvPr/>
         </p:nvSpPr>
@@ -3206,107 +3437,9 @@
           <a:chExt cx="0" cy="0"/>
         </a:xfrm>
       </p:grpSpPr>
-      <p:sp>
-        <p:nvSpPr>
-          <p:cNvPr id="2" name="Shape 0"/>
-          <p:cNvSpPr/>
-          <p:nvPr/>
-        </p:nvSpPr>
-        <p:spPr>
-          <a:xfrm>
-            <a:off x="548640" y="384048"/>
-            <a:ext cx="566928" cy="566928"/>
-          </a:xfrm>
-          <a:prstGeom prst="ellipse">
-            <a:avLst/>
-          </a:prstGeom>
-          <a:solidFill>
-            <a:srgbClr val="F4A261"/>
-          </a:solidFill>
-          <a:ln/>
-        </p:spPr>
-      </p:sp>
-      <p:sp>
-        <p:nvSpPr>
-          <p:cNvPr id="3" name="Text 1"/>
-          <p:cNvSpPr txBox="1"/>
-          <p:nvPr/>
-        </p:nvSpPr>
-        <p:spPr>
-          <a:xfrm>
-            <a:off x="548640" y="384048"/>
-            <a:ext cx="566928" cy="566928"/>
-          </a:xfrm>
-          <a:prstGeom prst="rect">
-            <a:avLst/>
-          </a:prstGeom>
-          <a:noFill/>
-          <a:ln/>
-        </p:spPr>
-        <p:txBody>
-          <a:bodyPr wrap="square" lIns="0" tIns="0" rIns="0" bIns="0" rtlCol="0" anchor="ctr"/>
-          <a:lstStyle/>
-          <a:p>
-            <a:pPr algn="ctr" indent="0" marL="0">
-              <a:buNone/>
-            </a:pPr>
-            <a:r>
-              <a:rPr lang="en-US" sz="2400" b="1" dirty="0">
-                <a:solidFill>
-                  <a:srgbClr val="FFFFFF"/>
-                </a:solidFill>
-                <a:latin typeface="Meiryo" pitchFamily="34" charset="0"/>
-                <a:ea typeface="Meiryo" pitchFamily="34" charset="-122"/>
-                <a:cs typeface="Meiryo" pitchFamily="34" charset="-120"/>
-              </a:rPr>
-              <a:t>4</a:t>
-            </a:r>
-            <a:endParaRPr lang="en-US" sz="2400" dirty="0"/>
-          </a:p>
-        </p:txBody>
-      </p:sp>
-      <p:sp>
-        <p:nvSpPr>
-          <p:cNvPr id="4" name="Text 2"/>
-          <p:cNvSpPr txBox="1"/>
-          <p:nvPr/>
-        </p:nvSpPr>
-        <p:spPr>
-          <a:xfrm>
-            <a:off x="1298448" y="347472"/>
-            <a:ext cx="10332720" cy="658368"/>
-          </a:xfrm>
-          <a:prstGeom prst="rect">
-            <a:avLst/>
-          </a:prstGeom>
-          <a:noFill/>
-          <a:ln/>
-        </p:spPr>
-        <p:txBody>
-          <a:bodyPr wrap="square" lIns="0" tIns="0" rIns="0" bIns="0" rtlCol="0" anchor="ctr"/>
-          <a:lstStyle/>
-          <a:p>
-            <a:pPr indent="0" marL="0">
-              <a:buNone/>
-            </a:pPr>
-            <a:r>
-              <a:rPr lang="en-US" sz="3000" b="1" dirty="0">
-                <a:solidFill>
-                  <a:srgbClr val="264653"/>
-                </a:solidFill>
-                <a:latin typeface="Meiryo" pitchFamily="34" charset="0"/>
-                <a:ea typeface="Meiryo" pitchFamily="34" charset="-122"/>
-                <a:cs typeface="Meiryo" pitchFamily="34" charset="-120"/>
-              </a:rPr>
-              <a:t>コメントに対応する ─ 承認待ちを見る</a:t>
-            </a:r>
-            <a:endParaRPr lang="en-US" sz="3000" dirty="0"/>
-          </a:p>
-        </p:txBody>
-      </p:sp>
       <p:pic>
         <p:nvPicPr>
-          <p:cNvPr id="5" name="Image 0" descr="/sessions/compassionate-sweet-heisenberg/mnt/outputs/レクチャー素材/crop/41_コメント.jpg">    </p:cNvPr>
+          <p:cNvPr id="2" name="Image 0" descr="/sessions/compassionate-sweet-heisenberg/mnt/dev-aspath-life-main/tools/assets/logo-deck.png">    </p:cNvPr>
           <p:cNvPicPr>
             <a:picLocks noChangeAspect="1"/>
           </p:cNvPicPr>
@@ -3320,6 +3453,167 @@
         </p:blipFill>
         <p:spPr>
           <a:xfrm>
+            <a:off x="11458173" y="109728"/>
+            <a:ext cx="209571" cy="256032"/>
+          </a:xfrm>
+          <a:prstGeom prst="rect">
+            <a:avLst/>
+          </a:prstGeom>
+        </p:spPr>
+      </p:pic>
+      <p:sp>
+        <p:nvSpPr>
+          <p:cNvPr id="3" name="Text 0"/>
+          <p:cNvSpPr txBox="1"/>
+          <p:nvPr/>
+        </p:nvSpPr>
+        <p:spPr>
+          <a:xfrm>
+            <a:off x="8623533" y="128016"/>
+            <a:ext cx="2743200" cy="237744"/>
+          </a:xfrm>
+          <a:prstGeom prst="rect">
+            <a:avLst/>
+          </a:prstGeom>
+          <a:noFill/>
+          <a:ln/>
+        </p:spPr>
+        <p:txBody>
+          <a:bodyPr wrap="square" lIns="0" tIns="0" rIns="0" bIns="0" rtlCol="0" anchor="ctr"/>
+          <a:lstStyle/>
+          <a:p>
+            <a:pPr algn="r" indent="0" marL="0">
+              <a:buNone/>
+            </a:pPr>
+            <a:r>
+              <a:rPr lang="en-US" sz="750" dirty="0">
+                <a:solidFill>
+                  <a:srgbClr val="97A9AF"/>
+                </a:solidFill>
+                <a:latin typeface="Meiryo" pitchFamily="34" charset="0"/>
+                <a:ea typeface="Meiryo" pitchFamily="34" charset="-122"/>
+                <a:cs typeface="Meiryo" pitchFamily="34" charset="-120"/>
+              </a:rPr>
+              <a:t>鹿児島のパーキンソン病専門トレーニングスタジオ</a:t>
+            </a:r>
+            <a:endParaRPr lang="en-US" sz="750" dirty="0"/>
+          </a:p>
+        </p:txBody>
+      </p:sp>
+      <p:sp>
+        <p:nvSpPr>
+          <p:cNvPr id="4" name="Shape 1"/>
+          <p:cNvSpPr/>
+          <p:nvPr/>
+        </p:nvSpPr>
+        <p:spPr>
+          <a:xfrm>
+            <a:off x="548640" y="384048"/>
+            <a:ext cx="566928" cy="566928"/>
+          </a:xfrm>
+          <a:prstGeom prst="ellipse">
+            <a:avLst/>
+          </a:prstGeom>
+          <a:solidFill>
+            <a:srgbClr val="F4A261"/>
+          </a:solidFill>
+          <a:ln/>
+        </p:spPr>
+      </p:sp>
+      <p:sp>
+        <p:nvSpPr>
+          <p:cNvPr id="5" name="Text 2"/>
+          <p:cNvSpPr txBox="1"/>
+          <p:nvPr/>
+        </p:nvSpPr>
+        <p:spPr>
+          <a:xfrm>
+            <a:off x="548640" y="384048"/>
+            <a:ext cx="566928" cy="566928"/>
+          </a:xfrm>
+          <a:prstGeom prst="rect">
+            <a:avLst/>
+          </a:prstGeom>
+          <a:noFill/>
+          <a:ln/>
+        </p:spPr>
+        <p:txBody>
+          <a:bodyPr wrap="square" lIns="0" tIns="0" rIns="0" bIns="0" rtlCol="0" anchor="ctr"/>
+          <a:lstStyle/>
+          <a:p>
+            <a:pPr algn="ctr" indent="0" marL="0">
+              <a:buNone/>
+            </a:pPr>
+            <a:r>
+              <a:rPr lang="en-US" sz="2400" b="1" dirty="0">
+                <a:solidFill>
+                  <a:srgbClr val="FFFFFF"/>
+                </a:solidFill>
+                <a:latin typeface="Meiryo" pitchFamily="34" charset="0"/>
+                <a:ea typeface="Meiryo" pitchFamily="34" charset="-122"/>
+                <a:cs typeface="Meiryo" pitchFamily="34" charset="-120"/>
+              </a:rPr>
+              <a:t>4</a:t>
+            </a:r>
+            <a:endParaRPr lang="en-US" sz="2400" dirty="0"/>
+          </a:p>
+        </p:txBody>
+      </p:sp>
+      <p:sp>
+        <p:nvSpPr>
+          <p:cNvPr id="6" name="Text 3"/>
+          <p:cNvSpPr txBox="1"/>
+          <p:nvPr/>
+        </p:nvSpPr>
+        <p:spPr>
+          <a:xfrm>
+            <a:off x="1298448" y="347472"/>
+            <a:ext cx="10332720" cy="658368"/>
+          </a:xfrm>
+          <a:prstGeom prst="rect">
+            <a:avLst/>
+          </a:prstGeom>
+          <a:noFill/>
+          <a:ln/>
+        </p:spPr>
+        <p:txBody>
+          <a:bodyPr wrap="square" lIns="0" tIns="0" rIns="0" bIns="0" rtlCol="0" anchor="ctr"/>
+          <a:lstStyle/>
+          <a:p>
+            <a:pPr indent="0" marL="0">
+              <a:buNone/>
+            </a:pPr>
+            <a:r>
+              <a:rPr lang="en-US" sz="3000" b="1" dirty="0">
+                <a:solidFill>
+                  <a:srgbClr val="264653"/>
+                </a:solidFill>
+                <a:latin typeface="Meiryo" pitchFamily="34" charset="0"/>
+                <a:ea typeface="Meiryo" pitchFamily="34" charset="-122"/>
+                <a:cs typeface="Meiryo" pitchFamily="34" charset="-120"/>
+              </a:rPr>
+              <a:t>コメントに対応する ─ 承認待ちを見る</a:t>
+            </a:r>
+            <a:endParaRPr lang="en-US" sz="3000" dirty="0"/>
+          </a:p>
+        </p:txBody>
+      </p:sp>
+      <p:pic>
+        <p:nvPicPr>
+          <p:cNvPr id="7" name="Image 1" descr="/sessions/compassionate-sweet-heisenberg/mnt/dev-aspath-life-main/_wp移行素材/★引継ぎ資料/レクチャー素材/crop/41_コメント.jpg">    </p:cNvPr>
+          <p:cNvPicPr>
+            <a:picLocks noChangeAspect="1"/>
+          </p:cNvPicPr>
+          <p:nvPr/>
+        </p:nvPicPr>
+        <p:blipFill>
+          <a:blip r:embed="rId2"/>
+          <a:stretch>
+            <a:fillRect/>
+          </a:stretch>
+        </p:blipFill>
+        <p:spPr>
+          <a:xfrm>
             <a:off x="566928" y="1325880"/>
             <a:ext cx="11018520" cy="2423160"/>
           </a:xfrm>
@@ -3330,7 +3624,7 @@
       </p:pic>
       <p:sp>
         <p:nvSpPr>
-          <p:cNvPr id="6" name="Shape 3"/>
+          <p:cNvPr id="8" name="Shape 4"/>
           <p:cNvSpPr/>
           <p:nvPr/>
         </p:nvSpPr>
@@ -3357,7 +3651,7 @@
       </p:sp>
       <p:sp>
         <p:nvSpPr>
-          <p:cNvPr id="7" name="Shape 4"/>
+          <p:cNvPr id="9" name="Shape 5"/>
           <p:cNvSpPr/>
           <p:nvPr/>
         </p:nvSpPr>
@@ -3389,7 +3683,7 @@
       </p:sp>
       <p:sp>
         <p:nvSpPr>
-          <p:cNvPr id="8" name="Text 5"/>
+          <p:cNvPr id="10" name="Text 6"/>
           <p:cNvSpPr txBox="1"/>
           <p:nvPr/>
         </p:nvSpPr>
@@ -3428,7 +3722,7 @@
       </p:sp>
       <p:sp>
         <p:nvSpPr>
-          <p:cNvPr id="9" name="Shape 6"/>
+          <p:cNvPr id="11" name="Shape 7"/>
           <p:cNvSpPr/>
           <p:nvPr/>
         </p:nvSpPr>
@@ -3460,7 +3754,7 @@
       </p:sp>
       <p:sp>
         <p:nvSpPr>
-          <p:cNvPr id="10" name="Text 7"/>
+          <p:cNvPr id="12" name="Text 8"/>
           <p:cNvSpPr txBox="1"/>
           <p:nvPr/>
         </p:nvSpPr>
@@ -3499,7 +3793,7 @@
       </p:sp>
       <p:sp>
         <p:nvSpPr>
-          <p:cNvPr id="11" name="Shape 8"/>
+          <p:cNvPr id="13" name="Shape 9"/>
           <p:cNvSpPr/>
           <p:nvPr/>
         </p:nvSpPr>
@@ -3531,7 +3825,7 @@
       </p:sp>
       <p:sp>
         <p:nvSpPr>
-          <p:cNvPr id="12" name="Text 9"/>
+          <p:cNvPr id="14" name="Text 10"/>
           <p:cNvSpPr txBox="1"/>
           <p:nvPr/>
         </p:nvSpPr>
@@ -3570,7 +3864,7 @@
       </p:sp>
       <p:sp>
         <p:nvSpPr>
-          <p:cNvPr id="13" name="Shape 10"/>
+          <p:cNvPr id="15" name="Shape 11"/>
           <p:cNvSpPr/>
           <p:nvPr/>
         </p:nvSpPr>
@@ -3590,7 +3884,7 @@
       </p:sp>
       <p:sp>
         <p:nvSpPr>
-          <p:cNvPr id="14" name="Text 11"/>
+          <p:cNvPr id="16" name="Text 12"/>
           <p:cNvSpPr txBox="1"/>
           <p:nvPr/>
         </p:nvSpPr>
@@ -3629,7 +3923,7 @@
       </p:sp>
       <p:sp>
         <p:nvSpPr>
-          <p:cNvPr id="15" name="Text 12"/>
+          <p:cNvPr id="17" name="Text 13"/>
           <p:cNvSpPr txBox="1"/>
           <p:nvPr/>
         </p:nvSpPr>
@@ -3685,7 +3979,7 @@
       </p:sp>
       <p:sp>
         <p:nvSpPr>
-          <p:cNvPr id="16" name="Shape 13"/>
+          <p:cNvPr id="18" name="Shape 14"/>
           <p:cNvSpPr/>
           <p:nvPr/>
         </p:nvSpPr>
@@ -3705,7 +3999,7 @@
       </p:sp>
       <p:sp>
         <p:nvSpPr>
-          <p:cNvPr id="17" name="Text 14"/>
+          <p:cNvPr id="19" name="Text 15"/>
           <p:cNvSpPr txBox="1"/>
           <p:nvPr/>
         </p:nvSpPr>
@@ -3744,7 +4038,7 @@
       </p:sp>
       <p:sp>
         <p:nvSpPr>
-          <p:cNvPr id="18" name="Text 15"/>
+          <p:cNvPr id="20" name="Text 16"/>
           <p:cNvSpPr txBox="1"/>
           <p:nvPr/>
         </p:nvSpPr>
@@ -3800,7 +4094,7 @@
       </p:sp>
       <p:sp>
         <p:nvSpPr>
-          <p:cNvPr id="19" name="Shape 16"/>
+          <p:cNvPr id="21" name="Shape 17"/>
           <p:cNvSpPr/>
           <p:nvPr/>
         </p:nvSpPr>
@@ -3820,7 +4114,7 @@
       </p:sp>
       <p:sp>
         <p:nvSpPr>
-          <p:cNvPr id="20" name="Text 17"/>
+          <p:cNvPr id="22" name="Text 18"/>
           <p:cNvSpPr txBox="1"/>
           <p:nvPr/>
         </p:nvSpPr>
@@ -3859,7 +4153,7 @@
       </p:sp>
       <p:sp>
         <p:nvSpPr>
-          <p:cNvPr id="21" name="Text 18"/>
+          <p:cNvPr id="23" name="Text 19"/>
           <p:cNvSpPr txBox="1"/>
           <p:nvPr/>
         </p:nvSpPr>
@@ -3915,7 +4209,7 @@
       </p:sp>
       <p:sp>
         <p:nvSpPr>
-          <p:cNvPr id="22" name="Shape 19"/>
+          <p:cNvPr id="24" name="Shape 20"/>
           <p:cNvSpPr/>
           <p:nvPr/>
         </p:nvSpPr>
@@ -3942,7 +4236,7 @@
       </p:sp>
       <p:sp>
         <p:nvSpPr>
-          <p:cNvPr id="23" name="Shape 20"/>
+          <p:cNvPr id="25" name="Shape 21"/>
           <p:cNvSpPr/>
           <p:nvPr/>
         </p:nvSpPr>
@@ -3962,7 +4256,7 @@
       </p:sp>
       <p:sp>
         <p:nvSpPr>
-          <p:cNvPr id="24" name="Text 21"/>
+          <p:cNvPr id="26" name="Text 22"/>
           <p:cNvSpPr txBox="1"/>
           <p:nvPr/>
         </p:nvSpPr>
@@ -4001,7 +4295,7 @@
       </p:sp>
       <p:sp>
         <p:nvSpPr>
-          <p:cNvPr id="25" name="Text 22"/>
+          <p:cNvPr id="27" name="Text 23"/>
           <p:cNvSpPr txBox="1"/>
           <p:nvPr/>
         </p:nvSpPr>
@@ -4087,9 +4381,72 @@
           <a:chExt cx="0" cy="0"/>
         </a:xfrm>
       </p:grpSpPr>
-      <p:sp>
-        <p:nvSpPr>
-          <p:cNvPr id="2" name="Shape 0"/>
+      <p:pic>
+        <p:nvPicPr>
+          <p:cNvPr id="2" name="Image 0" descr="/sessions/compassionate-sweet-heisenberg/mnt/dev-aspath-life-main/tools/assets/logo-deck.png">    </p:cNvPr>
+          <p:cNvPicPr>
+            <a:picLocks noChangeAspect="1"/>
+          </p:cNvPicPr>
+          <p:nvPr/>
+        </p:nvPicPr>
+        <p:blipFill>
+          <a:blip r:embed="rId1"/>
+          <a:stretch>
+            <a:fillRect/>
+          </a:stretch>
+        </p:blipFill>
+        <p:spPr>
+          <a:xfrm>
+            <a:off x="11458173" y="109728"/>
+            <a:ext cx="209571" cy="256032"/>
+          </a:xfrm>
+          <a:prstGeom prst="rect">
+            <a:avLst/>
+          </a:prstGeom>
+        </p:spPr>
+      </p:pic>
+      <p:sp>
+        <p:nvSpPr>
+          <p:cNvPr id="3" name="Text 0"/>
+          <p:cNvSpPr txBox="1"/>
+          <p:nvPr/>
+        </p:nvSpPr>
+        <p:spPr>
+          <a:xfrm>
+            <a:off x="8623533" y="128016"/>
+            <a:ext cx="2743200" cy="237744"/>
+          </a:xfrm>
+          <a:prstGeom prst="rect">
+            <a:avLst/>
+          </a:prstGeom>
+          <a:noFill/>
+          <a:ln/>
+        </p:spPr>
+        <p:txBody>
+          <a:bodyPr wrap="square" lIns="0" tIns="0" rIns="0" bIns="0" rtlCol="0" anchor="ctr"/>
+          <a:lstStyle/>
+          <a:p>
+            <a:pPr algn="r" indent="0" marL="0">
+              <a:buNone/>
+            </a:pPr>
+            <a:r>
+              <a:rPr lang="en-US" sz="750" dirty="0">
+                <a:solidFill>
+                  <a:srgbClr val="97A9AF"/>
+                </a:solidFill>
+                <a:latin typeface="Meiryo" pitchFamily="34" charset="0"/>
+                <a:ea typeface="Meiryo" pitchFamily="34" charset="-122"/>
+                <a:cs typeface="Meiryo" pitchFamily="34" charset="-120"/>
+              </a:rPr>
+              <a:t>鹿児島のパーキンソン病専門トレーニングスタジオ</a:t>
+            </a:r>
+            <a:endParaRPr lang="en-US" sz="750" dirty="0"/>
+          </a:p>
+        </p:txBody>
+      </p:sp>
+      <p:sp>
+        <p:nvSpPr>
+          <p:cNvPr id="4" name="Shape 1"/>
           <p:cNvSpPr/>
           <p:nvPr/>
         </p:nvSpPr>
@@ -4109,7 +4466,7 @@
       </p:sp>
       <p:sp>
         <p:nvSpPr>
-          <p:cNvPr id="3" name="Text 1"/>
+          <p:cNvPr id="5" name="Text 2"/>
           <p:cNvSpPr txBox="1"/>
           <p:nvPr/>
         </p:nvSpPr>
@@ -4148,7 +4505,7 @@
       </p:sp>
       <p:sp>
         <p:nvSpPr>
-          <p:cNvPr id="4" name="Text 2"/>
+          <p:cNvPr id="6" name="Text 3"/>
           <p:cNvSpPr txBox="1"/>
           <p:nvPr/>
         </p:nvSpPr>
@@ -4187,7 +4544,7 @@
       </p:sp>
       <p:sp>
         <p:nvSpPr>
-          <p:cNvPr id="5" name="Text 3"/>
+          <p:cNvPr id="7" name="Text 4"/>
           <p:cNvSpPr txBox="1"/>
           <p:nvPr/>
         </p:nvSpPr>
@@ -4226,7 +4583,7 @@
       </p:sp>
       <p:sp>
         <p:nvSpPr>
-          <p:cNvPr id="6" name="Shape 4"/>
+          <p:cNvPr id="8" name="Shape 5"/>
           <p:cNvSpPr/>
           <p:nvPr/>
         </p:nvSpPr>
@@ -4253,7 +4610,7 @@
       </p:sp>
       <p:sp>
         <p:nvSpPr>
-          <p:cNvPr id="7" name="Shape 5"/>
+          <p:cNvPr id="9" name="Shape 6"/>
           <p:cNvSpPr/>
           <p:nvPr/>
         </p:nvSpPr>
@@ -4273,7 +4630,7 @@
       </p:sp>
       <p:sp>
         <p:nvSpPr>
-          <p:cNvPr id="8" name="Text 6"/>
+          <p:cNvPr id="10" name="Text 7"/>
           <p:cNvSpPr txBox="1"/>
           <p:nvPr/>
         </p:nvSpPr>
@@ -4312,7 +4669,7 @@
       </p:sp>
       <p:sp>
         <p:nvSpPr>
-          <p:cNvPr id="9" name="Text 7"/>
+          <p:cNvPr id="11" name="Text 8"/>
           <p:cNvSpPr txBox="1"/>
           <p:nvPr/>
         </p:nvSpPr>
@@ -4368,7 +4725,7 @@
       </p:sp>
       <p:sp>
         <p:nvSpPr>
-          <p:cNvPr id="10" name="Shape 8"/>
+          <p:cNvPr id="12" name="Shape 9"/>
           <p:cNvSpPr/>
           <p:nvPr/>
         </p:nvSpPr>
@@ -4395,7 +4752,7 @@
       </p:sp>
       <p:sp>
         <p:nvSpPr>
-          <p:cNvPr id="11" name="Shape 9"/>
+          <p:cNvPr id="13" name="Shape 10"/>
           <p:cNvSpPr/>
           <p:nvPr/>
         </p:nvSpPr>
@@ -4415,7 +4772,7 @@
       </p:sp>
       <p:sp>
         <p:nvSpPr>
-          <p:cNvPr id="12" name="Text 10"/>
+          <p:cNvPr id="14" name="Text 11"/>
           <p:cNvSpPr txBox="1"/>
           <p:nvPr/>
         </p:nvSpPr>
@@ -4454,7 +4811,7 @@
       </p:sp>
       <p:sp>
         <p:nvSpPr>
-          <p:cNvPr id="13" name="Text 11"/>
+          <p:cNvPr id="15" name="Text 12"/>
           <p:cNvSpPr txBox="1"/>
           <p:nvPr/>
         </p:nvSpPr>
@@ -4510,7 +4867,7 @@
       </p:sp>
       <p:sp>
         <p:nvSpPr>
-          <p:cNvPr id="14" name="Shape 12"/>
+          <p:cNvPr id="16" name="Shape 13"/>
           <p:cNvSpPr/>
           <p:nvPr/>
         </p:nvSpPr>
@@ -4537,7 +4894,7 @@
       </p:sp>
       <p:sp>
         <p:nvSpPr>
-          <p:cNvPr id="15" name="Shape 13"/>
+          <p:cNvPr id="17" name="Shape 14"/>
           <p:cNvSpPr/>
           <p:nvPr/>
         </p:nvSpPr>
@@ -4557,7 +4914,7 @@
       </p:sp>
       <p:sp>
         <p:nvSpPr>
-          <p:cNvPr id="16" name="Text 14"/>
+          <p:cNvPr id="18" name="Text 15"/>
           <p:cNvSpPr txBox="1"/>
           <p:nvPr/>
         </p:nvSpPr>
@@ -4596,7 +4953,7 @@
       </p:sp>
       <p:sp>
         <p:nvSpPr>
-          <p:cNvPr id="17" name="Text 15"/>
+          <p:cNvPr id="19" name="Text 16"/>
           <p:cNvSpPr txBox="1"/>
           <p:nvPr/>
         </p:nvSpPr>
@@ -4652,7 +5009,7 @@
       </p:sp>
       <p:sp>
         <p:nvSpPr>
-          <p:cNvPr id="18" name="Shape 16"/>
+          <p:cNvPr id="20" name="Shape 17"/>
           <p:cNvSpPr/>
           <p:nvPr/>
         </p:nvSpPr>
@@ -4679,7 +5036,7 @@
       </p:sp>
       <p:sp>
         <p:nvSpPr>
-          <p:cNvPr id="19" name="Shape 17"/>
+          <p:cNvPr id="21" name="Shape 18"/>
           <p:cNvSpPr/>
           <p:nvPr/>
         </p:nvSpPr>
@@ -4699,7 +5056,7 @@
       </p:sp>
       <p:sp>
         <p:nvSpPr>
-          <p:cNvPr id="20" name="Text 18"/>
+          <p:cNvPr id="22" name="Text 19"/>
           <p:cNvSpPr txBox="1"/>
           <p:nvPr/>
         </p:nvSpPr>
@@ -4738,7 +5095,7 @@
       </p:sp>
       <p:sp>
         <p:nvSpPr>
-          <p:cNvPr id="21" name="Text 19"/>
+          <p:cNvPr id="23" name="Text 20"/>
           <p:cNvSpPr txBox="1"/>
           <p:nvPr/>
         </p:nvSpPr>
@@ -4794,7 +5151,7 @@
       </p:sp>
       <p:sp>
         <p:nvSpPr>
-          <p:cNvPr id="22" name="Shape 20"/>
+          <p:cNvPr id="24" name="Shape 21"/>
           <p:cNvSpPr/>
           <p:nvPr/>
         </p:nvSpPr>
@@ -4821,7 +5178,7 @@
       </p:sp>
       <p:sp>
         <p:nvSpPr>
-          <p:cNvPr id="23" name="Shape 21"/>
+          <p:cNvPr id="25" name="Shape 22"/>
           <p:cNvSpPr/>
           <p:nvPr/>
         </p:nvSpPr>
@@ -4841,7 +5198,7 @@
       </p:sp>
       <p:sp>
         <p:nvSpPr>
-          <p:cNvPr id="24" name="Text 22"/>
+          <p:cNvPr id="26" name="Text 23"/>
           <p:cNvSpPr txBox="1"/>
           <p:nvPr/>
         </p:nvSpPr>
@@ -4880,7 +5237,7 @@
       </p:sp>
       <p:sp>
         <p:nvSpPr>
-          <p:cNvPr id="25" name="Text 23"/>
+          <p:cNvPr id="27" name="Text 24"/>
           <p:cNvSpPr txBox="1"/>
           <p:nvPr/>
         </p:nvSpPr>
@@ -4966,9 +5323,72 @@
           <a:chExt cx="0" cy="0"/>
         </a:xfrm>
       </p:grpSpPr>
-      <p:sp>
-        <p:nvSpPr>
-          <p:cNvPr id="2" name="Text 0"/>
+      <p:pic>
+        <p:nvPicPr>
+          <p:cNvPr id="2" name="Image 0" descr="/sessions/compassionate-sweet-heisenberg/mnt/dev-aspath-life-main/tools/assets/logo-deck.png">    </p:cNvPr>
+          <p:cNvPicPr>
+            <a:picLocks noChangeAspect="1"/>
+          </p:cNvPicPr>
+          <p:nvPr/>
+        </p:nvPicPr>
+        <p:blipFill>
+          <a:blip r:embed="rId1"/>
+          <a:stretch>
+            <a:fillRect/>
+          </a:stretch>
+        </p:blipFill>
+        <p:spPr>
+          <a:xfrm>
+            <a:off x="11458173" y="109728"/>
+            <a:ext cx="209571" cy="256032"/>
+          </a:xfrm>
+          <a:prstGeom prst="rect">
+            <a:avLst/>
+          </a:prstGeom>
+        </p:spPr>
+      </p:pic>
+      <p:sp>
+        <p:nvSpPr>
+          <p:cNvPr id="3" name="Text 0"/>
+          <p:cNvSpPr txBox="1"/>
+          <p:nvPr/>
+        </p:nvSpPr>
+        <p:spPr>
+          <a:xfrm>
+            <a:off x="8623533" y="128016"/>
+            <a:ext cx="2743200" cy="237744"/>
+          </a:xfrm>
+          <a:prstGeom prst="rect">
+            <a:avLst/>
+          </a:prstGeom>
+          <a:noFill/>
+          <a:ln/>
+        </p:spPr>
+        <p:txBody>
+          <a:bodyPr wrap="square" lIns="0" tIns="0" rIns="0" bIns="0" rtlCol="0" anchor="ctr"/>
+          <a:lstStyle/>
+          <a:p>
+            <a:pPr algn="r" indent="0" marL="0">
+              <a:buNone/>
+            </a:pPr>
+            <a:r>
+              <a:rPr lang="en-US" sz="750" dirty="0">
+                <a:solidFill>
+                  <a:srgbClr val="97A9AF"/>
+                </a:solidFill>
+                <a:latin typeface="Meiryo" pitchFamily="34" charset="0"/>
+                <a:ea typeface="Meiryo" pitchFamily="34" charset="-122"/>
+                <a:cs typeface="Meiryo" pitchFamily="34" charset="-120"/>
+              </a:rPr>
+              <a:t>鹿児島のパーキンソン病専門トレーニングスタジオ</a:t>
+            </a:r>
+            <a:endParaRPr lang="en-US" sz="750" dirty="0"/>
+          </a:p>
+        </p:txBody>
+      </p:sp>
+      <p:sp>
+        <p:nvSpPr>
+          <p:cNvPr id="4" name="Text 1"/>
           <p:cNvSpPr txBox="1"/>
           <p:nvPr/>
         </p:nvSpPr>
@@ -5007,7 +5427,7 @@
       </p:sp>
       <p:sp>
         <p:nvSpPr>
-          <p:cNvPr id="3" name="Shape 1"/>
+          <p:cNvPr id="5" name="Shape 2"/>
           <p:cNvSpPr/>
           <p:nvPr/>
         </p:nvSpPr>
@@ -5034,7 +5454,7 @@
       </p:sp>
       <p:sp>
         <p:nvSpPr>
-          <p:cNvPr id="4" name="Text 2"/>
+          <p:cNvPr id="6" name="Text 3"/>
           <p:cNvSpPr txBox="1"/>
           <p:nvPr/>
         </p:nvSpPr>
@@ -5073,7 +5493,7 @@
       </p:sp>
       <p:sp>
         <p:nvSpPr>
-          <p:cNvPr id="5" name="Text 3"/>
+          <p:cNvPr id="7" name="Text 4"/>
           <p:cNvSpPr txBox="1"/>
           <p:nvPr/>
         </p:nvSpPr>
@@ -5129,7 +5549,7 @@
       </p:sp>
       <p:sp>
         <p:nvSpPr>
-          <p:cNvPr id="6" name="Shape 4"/>
+          <p:cNvPr id="8" name="Shape 5"/>
           <p:cNvSpPr/>
           <p:nvPr/>
         </p:nvSpPr>
@@ -5156,7 +5576,7 @@
       </p:sp>
       <p:sp>
         <p:nvSpPr>
-          <p:cNvPr id="7" name="Text 5"/>
+          <p:cNvPr id="9" name="Text 6"/>
           <p:cNvSpPr txBox="1"/>
           <p:nvPr/>
         </p:nvSpPr>
@@ -5195,7 +5615,7 @@
       </p:sp>
       <p:sp>
         <p:nvSpPr>
-          <p:cNvPr id="8" name="Text 6"/>
+          <p:cNvPr id="10" name="Text 7"/>
           <p:cNvSpPr txBox="1"/>
           <p:nvPr/>
         </p:nvSpPr>
@@ -5251,7 +5671,7 @@
       </p:sp>
       <p:sp>
         <p:nvSpPr>
-          <p:cNvPr id="9" name="Shape 7"/>
+          <p:cNvPr id="11" name="Shape 8"/>
           <p:cNvSpPr/>
           <p:nvPr/>
         </p:nvSpPr>
@@ -5278,7 +5698,7 @@
       </p:sp>
       <p:sp>
         <p:nvSpPr>
-          <p:cNvPr id="10" name="Text 8"/>
+          <p:cNvPr id="12" name="Text 9"/>
           <p:cNvSpPr txBox="1"/>
           <p:nvPr/>
         </p:nvSpPr>
@@ -5317,7 +5737,7 @@
       </p:sp>
       <p:sp>
         <p:nvSpPr>
-          <p:cNvPr id="11" name="Text 9"/>
+          <p:cNvPr id="13" name="Text 10"/>
           <p:cNvSpPr txBox="1"/>
           <p:nvPr/>
         </p:nvSpPr>
@@ -5373,7 +5793,7 @@
       </p:sp>
       <p:sp>
         <p:nvSpPr>
-          <p:cNvPr id="12" name="Shape 10"/>
+          <p:cNvPr id="14" name="Shape 11"/>
           <p:cNvSpPr/>
           <p:nvPr/>
         </p:nvSpPr>
@@ -5400,7 +5820,7 @@
       </p:sp>
       <p:sp>
         <p:nvSpPr>
-          <p:cNvPr id="13" name="Text 11"/>
+          <p:cNvPr id="15" name="Text 12"/>
           <p:cNvSpPr txBox="1"/>
           <p:nvPr/>
         </p:nvSpPr>
@@ -5439,7 +5859,7 @@
       </p:sp>
       <p:sp>
         <p:nvSpPr>
-          <p:cNvPr id="14" name="Text 12"/>
+          <p:cNvPr id="16" name="Text 13"/>
           <p:cNvSpPr txBox="1"/>
           <p:nvPr/>
         </p:nvSpPr>
@@ -6181,9 +6601,72 @@
           <a:chExt cx="0" cy="0"/>
         </a:xfrm>
       </p:grpSpPr>
-      <p:sp>
-        <p:nvSpPr>
-          <p:cNvPr id="2" name="Text 0"/>
+      <p:pic>
+        <p:nvPicPr>
+          <p:cNvPr id="2" name="Image 0" descr="/sessions/compassionate-sweet-heisenberg/mnt/dev-aspath-life-main/tools/assets/logo-deck.png">    </p:cNvPr>
+          <p:cNvPicPr>
+            <a:picLocks noChangeAspect="1"/>
+          </p:cNvPicPr>
+          <p:nvPr/>
+        </p:nvPicPr>
+        <p:blipFill>
+          <a:blip r:embed="rId1"/>
+          <a:stretch>
+            <a:fillRect/>
+          </a:stretch>
+        </p:blipFill>
+        <p:spPr>
+          <a:xfrm>
+            <a:off x="11458173" y="109728"/>
+            <a:ext cx="209571" cy="256032"/>
+          </a:xfrm>
+          <a:prstGeom prst="rect">
+            <a:avLst/>
+          </a:prstGeom>
+        </p:spPr>
+      </p:pic>
+      <p:sp>
+        <p:nvSpPr>
+          <p:cNvPr id="3" name="Text 0"/>
+          <p:cNvSpPr txBox="1"/>
+          <p:nvPr/>
+        </p:nvSpPr>
+        <p:spPr>
+          <a:xfrm>
+            <a:off x="8623533" y="128016"/>
+            <a:ext cx="2743200" cy="237744"/>
+          </a:xfrm>
+          <a:prstGeom prst="rect">
+            <a:avLst/>
+          </a:prstGeom>
+          <a:noFill/>
+          <a:ln/>
+        </p:spPr>
+        <p:txBody>
+          <a:bodyPr wrap="square" lIns="0" tIns="0" rIns="0" bIns="0" rtlCol="0" anchor="ctr"/>
+          <a:lstStyle/>
+          <a:p>
+            <a:pPr algn="r" indent="0" marL="0">
+              <a:buNone/>
+            </a:pPr>
+            <a:r>
+              <a:rPr lang="en-US" sz="750" dirty="0">
+                <a:solidFill>
+                  <a:srgbClr val="97A9AF"/>
+                </a:solidFill>
+                <a:latin typeface="Meiryo" pitchFamily="34" charset="0"/>
+                <a:ea typeface="Meiryo" pitchFamily="34" charset="-122"/>
+                <a:cs typeface="Meiryo" pitchFamily="34" charset="-120"/>
+              </a:rPr>
+              <a:t>鹿児島のパーキンソン病専門トレーニングスタジオ</a:t>
+            </a:r>
+            <a:endParaRPr lang="en-US" sz="750" dirty="0"/>
+          </a:p>
+        </p:txBody>
+      </p:sp>
+      <p:sp>
+        <p:nvSpPr>
+          <p:cNvPr id="4" name="Text 1"/>
           <p:cNvSpPr txBox="1"/>
           <p:nvPr/>
         </p:nvSpPr>
@@ -6222,7 +6705,7 @@
       </p:sp>
       <p:sp>
         <p:nvSpPr>
-          <p:cNvPr id="3" name="Shape 1"/>
+          <p:cNvPr id="5" name="Shape 2"/>
           <p:cNvSpPr/>
           <p:nvPr/>
         </p:nvSpPr>
@@ -6249,7 +6732,7 @@
       </p:sp>
       <p:sp>
         <p:nvSpPr>
-          <p:cNvPr id="4" name="Shape 2"/>
+          <p:cNvPr id="6" name="Shape 3"/>
           <p:cNvSpPr/>
           <p:nvPr/>
         </p:nvSpPr>
@@ -6269,7 +6752,7 @@
       </p:sp>
       <p:sp>
         <p:nvSpPr>
-          <p:cNvPr id="5" name="Text 3"/>
+          <p:cNvPr id="7" name="Text 4"/>
           <p:cNvSpPr txBox="1"/>
           <p:nvPr/>
         </p:nvSpPr>
@@ -6308,7 +6791,7 @@
       </p:sp>
       <p:sp>
         <p:nvSpPr>
-          <p:cNvPr id="6" name="Text 4"/>
+          <p:cNvPr id="8" name="Text 5"/>
           <p:cNvSpPr txBox="1"/>
           <p:nvPr/>
         </p:nvSpPr>
@@ -6347,7 +6830,7 @@
       </p:sp>
       <p:sp>
         <p:nvSpPr>
-          <p:cNvPr id="7" name="Text 5"/>
+          <p:cNvPr id="9" name="Text 6"/>
           <p:cNvSpPr txBox="1"/>
           <p:nvPr/>
         </p:nvSpPr>
@@ -6409,7 +6892,7 @@
       </p:sp>
       <p:sp>
         <p:nvSpPr>
-          <p:cNvPr id="8" name="Shape 6"/>
+          <p:cNvPr id="10" name="Shape 7"/>
           <p:cNvSpPr/>
           <p:nvPr/>
         </p:nvSpPr>
@@ -6436,7 +6919,7 @@
       </p:sp>
       <p:sp>
         <p:nvSpPr>
-          <p:cNvPr id="9" name="Shape 7"/>
+          <p:cNvPr id="11" name="Shape 8"/>
           <p:cNvSpPr/>
           <p:nvPr/>
         </p:nvSpPr>
@@ -6456,7 +6939,7 @@
       </p:sp>
       <p:sp>
         <p:nvSpPr>
-          <p:cNvPr id="10" name="Text 8"/>
+          <p:cNvPr id="12" name="Text 9"/>
           <p:cNvSpPr txBox="1"/>
           <p:nvPr/>
         </p:nvSpPr>
@@ -6495,7 +6978,7 @@
       </p:sp>
       <p:sp>
         <p:nvSpPr>
-          <p:cNvPr id="11" name="Text 9"/>
+          <p:cNvPr id="13" name="Text 10"/>
           <p:cNvSpPr txBox="1"/>
           <p:nvPr/>
         </p:nvSpPr>
@@ -6534,7 +7017,7 @@
       </p:sp>
       <p:sp>
         <p:nvSpPr>
-          <p:cNvPr id="12" name="Text 10"/>
+          <p:cNvPr id="14" name="Text 11"/>
           <p:cNvSpPr txBox="1"/>
           <p:nvPr/>
         </p:nvSpPr>
@@ -6596,7 +7079,7 @@
       </p:sp>
       <p:sp>
         <p:nvSpPr>
-          <p:cNvPr id="13" name="Shape 11"/>
+          <p:cNvPr id="15" name="Shape 12"/>
           <p:cNvSpPr/>
           <p:nvPr/>
         </p:nvSpPr>
@@ -6623,7 +7106,7 @@
       </p:sp>
       <p:sp>
         <p:nvSpPr>
-          <p:cNvPr id="14" name="Shape 12"/>
+          <p:cNvPr id="16" name="Shape 13"/>
           <p:cNvSpPr/>
           <p:nvPr/>
         </p:nvSpPr>
@@ -6643,7 +7126,7 @@
       </p:sp>
       <p:sp>
         <p:nvSpPr>
-          <p:cNvPr id="15" name="Text 13"/>
+          <p:cNvPr id="17" name="Text 14"/>
           <p:cNvSpPr txBox="1"/>
           <p:nvPr/>
         </p:nvSpPr>
@@ -6682,7 +7165,7 @@
       </p:sp>
       <p:sp>
         <p:nvSpPr>
-          <p:cNvPr id="16" name="Text 14"/>
+          <p:cNvPr id="18" name="Text 15"/>
           <p:cNvSpPr txBox="1"/>
           <p:nvPr/>
         </p:nvSpPr>
@@ -6721,7 +7204,7 @@
       </p:sp>
       <p:sp>
         <p:nvSpPr>
-          <p:cNvPr id="17" name="Text 15"/>
+          <p:cNvPr id="19" name="Text 16"/>
           <p:cNvSpPr txBox="1"/>
           <p:nvPr/>
         </p:nvSpPr>
@@ -6783,7 +7266,7 @@
       </p:sp>
       <p:sp>
         <p:nvSpPr>
-          <p:cNvPr id="18" name="Shape 16"/>
+          <p:cNvPr id="20" name="Shape 17"/>
           <p:cNvSpPr/>
           <p:nvPr/>
         </p:nvSpPr>
@@ -6810,7 +7293,7 @@
       </p:sp>
       <p:sp>
         <p:nvSpPr>
-          <p:cNvPr id="19" name="Shape 17"/>
+          <p:cNvPr id="21" name="Shape 18"/>
           <p:cNvSpPr/>
           <p:nvPr/>
         </p:nvSpPr>
@@ -6830,7 +7313,7 @@
       </p:sp>
       <p:sp>
         <p:nvSpPr>
-          <p:cNvPr id="20" name="Text 18"/>
+          <p:cNvPr id="22" name="Text 19"/>
           <p:cNvSpPr txBox="1"/>
           <p:nvPr/>
         </p:nvSpPr>
@@ -6869,7 +7352,7 @@
       </p:sp>
       <p:sp>
         <p:nvSpPr>
-          <p:cNvPr id="21" name="Text 19"/>
+          <p:cNvPr id="23" name="Text 20"/>
           <p:cNvSpPr txBox="1"/>
           <p:nvPr/>
         </p:nvSpPr>
@@ -6908,7 +7391,7 @@
       </p:sp>
       <p:sp>
         <p:nvSpPr>
-          <p:cNvPr id="22" name="Text 20"/>
+          <p:cNvPr id="24" name="Text 21"/>
           <p:cNvSpPr txBox="1"/>
           <p:nvPr/>
         </p:nvSpPr>
@@ -6970,7 +7453,7 @@
       </p:sp>
       <p:sp>
         <p:nvSpPr>
-          <p:cNvPr id="23" name="Shape 21"/>
+          <p:cNvPr id="25" name="Shape 22"/>
           <p:cNvSpPr/>
           <p:nvPr/>
         </p:nvSpPr>
@@ -6997,7 +7480,7 @@
       </p:sp>
       <p:sp>
         <p:nvSpPr>
-          <p:cNvPr id="24" name="Shape 22"/>
+          <p:cNvPr id="26" name="Shape 23"/>
           <p:cNvSpPr/>
           <p:nvPr/>
         </p:nvSpPr>
@@ -7017,7 +7500,7 @@
       </p:sp>
       <p:sp>
         <p:nvSpPr>
-          <p:cNvPr id="25" name="Text 23"/>
+          <p:cNvPr id="27" name="Text 24"/>
           <p:cNvSpPr txBox="1"/>
           <p:nvPr/>
         </p:nvSpPr>
@@ -7056,7 +7539,7 @@
       </p:sp>
       <p:sp>
         <p:nvSpPr>
-          <p:cNvPr id="26" name="Text 24"/>
+          <p:cNvPr id="28" name="Text 25"/>
           <p:cNvSpPr txBox="1"/>
           <p:nvPr/>
         </p:nvSpPr>
@@ -7142,493 +7625,9 @@
           <a:chExt cx="0" cy="0"/>
         </a:xfrm>
       </p:grpSpPr>
-      <p:sp>
-        <p:nvSpPr>
-          <p:cNvPr id="2" name="Text 0"/>
-          <p:cNvSpPr txBox="1"/>
-          <p:nvPr/>
-        </p:nvSpPr>
-        <p:spPr>
-          <a:xfrm>
-            <a:off x="548640" y="347472"/>
-            <a:ext cx="10332720" cy="658368"/>
-          </a:xfrm>
-          <a:prstGeom prst="rect">
-            <a:avLst/>
-          </a:prstGeom>
-          <a:noFill/>
-          <a:ln/>
-        </p:spPr>
-        <p:txBody>
-          <a:bodyPr wrap="square" lIns="0" tIns="0" rIns="0" bIns="0" rtlCol="0" anchor="ctr"/>
-          <a:lstStyle/>
-          <a:p>
-            <a:pPr indent="0" marL="0">
-              <a:buNone/>
-            </a:pPr>
-            <a:r>
-              <a:rPr lang="en-US" sz="3000" b="1" dirty="0">
-                <a:solidFill>
-                  <a:srgbClr val="264653"/>
-                </a:solidFill>
-                <a:latin typeface="Meiryo" pitchFamily="34" charset="0"/>
-                <a:ea typeface="Meiryo" pitchFamily="34" charset="-122"/>
-                <a:cs typeface="Meiryo" pitchFamily="34" charset="-120"/>
-              </a:rPr>
-              <a:t>はじめに ─ 管理画面の開き方</a:t>
-            </a:r>
-            <a:endParaRPr lang="en-US" sz="3000" dirty="0"/>
-          </a:p>
-        </p:txBody>
-      </p:sp>
-      <p:sp>
-        <p:nvSpPr>
-          <p:cNvPr id="3" name="Shape 1"/>
-          <p:cNvSpPr/>
-          <p:nvPr/>
-        </p:nvSpPr>
-        <p:spPr>
-          <a:xfrm>
-            <a:off x="566928" y="1417320"/>
-            <a:ext cx="5120640" cy="1371600"/>
-          </a:xfrm>
-          <a:prstGeom prst="roundRect">
-            <a:avLst>
-              <a:gd name="adj" fmla="val 8000"/>
-            </a:avLst>
-          </a:prstGeom>
-          <a:solidFill>
-            <a:srgbClr val="264653"/>
-          </a:solidFill>
-          <a:ln/>
-        </p:spPr>
-      </p:sp>
-      <p:sp>
-        <p:nvSpPr>
-          <p:cNvPr id="4" name="Text 2"/>
-          <p:cNvSpPr txBox="1"/>
-          <p:nvPr/>
-        </p:nvSpPr>
-        <p:spPr>
-          <a:xfrm>
-            <a:off x="777240" y="1600200"/>
-            <a:ext cx="4754880" cy="457200"/>
-          </a:xfrm>
-          <a:prstGeom prst="rect">
-            <a:avLst/>
-          </a:prstGeom>
-          <a:noFill/>
-          <a:ln/>
-        </p:spPr>
-        <p:txBody>
-          <a:bodyPr wrap="square" lIns="0" tIns="0" rIns="0" bIns="0" rtlCol="0" anchor="ctr"/>
-          <a:lstStyle/>
-          <a:p>
-            <a:pPr indent="0" marL="0">
-              <a:buNone/>
-            </a:pPr>
-            <a:r>
-              <a:rPr lang="en-US" sz="1500" b="1" dirty="0">
-                <a:solidFill>
-                  <a:srgbClr val="FFFFFF"/>
-                </a:solidFill>
-                <a:latin typeface="Meiryo" pitchFamily="34" charset="0"/>
-                <a:ea typeface="Meiryo" pitchFamily="34" charset="-122"/>
-                <a:cs typeface="Meiryo" pitchFamily="34" charset="-120"/>
-              </a:rPr>
-              <a:t>https://aspath-life.com/wp-admin/</a:t>
-            </a:r>
-            <a:endParaRPr lang="en-US" sz="1500" dirty="0"/>
-          </a:p>
-        </p:txBody>
-      </p:sp>
-      <p:sp>
-        <p:nvSpPr>
-          <p:cNvPr id="5" name="Text 3"/>
-          <p:cNvSpPr txBox="1"/>
-          <p:nvPr/>
-        </p:nvSpPr>
-        <p:spPr>
-          <a:xfrm>
-            <a:off x="777240" y="2084832"/>
-            <a:ext cx="4754880" cy="457200"/>
-          </a:xfrm>
-          <a:prstGeom prst="rect">
-            <a:avLst/>
-          </a:prstGeom>
-          <a:noFill/>
-          <a:ln/>
-        </p:spPr>
-        <p:txBody>
-          <a:bodyPr wrap="square" lIns="0" tIns="0" rIns="0" bIns="0" rtlCol="0" anchor="ctr"/>
-          <a:lstStyle/>
-          <a:p>
-            <a:pPr indent="0" marL="0">
-              <a:buNone/>
-            </a:pPr>
-            <a:r>
-              <a:rPr lang="en-US" sz="1200" dirty="0">
-                <a:solidFill>
-                  <a:srgbClr val="BBD2D8"/>
-                </a:solidFill>
-                <a:latin typeface="Meiryo" pitchFamily="34" charset="0"/>
-                <a:ea typeface="Meiryo" pitchFamily="34" charset="-122"/>
-                <a:cs typeface="Meiryo" pitchFamily="34" charset="-120"/>
-              </a:rPr>
-              <a:t>このURLをお気に入りに入れておくと便利です</a:t>
-            </a:r>
-            <a:endParaRPr lang="en-US" sz="1200" dirty="0"/>
-          </a:p>
-        </p:txBody>
-      </p:sp>
-      <p:sp>
-        <p:nvSpPr>
-          <p:cNvPr id="6" name="Shape 4"/>
-          <p:cNvSpPr/>
-          <p:nvPr/>
-        </p:nvSpPr>
-        <p:spPr>
-          <a:xfrm>
-            <a:off x="566928" y="3035808"/>
-            <a:ext cx="347472" cy="347472"/>
-          </a:xfrm>
-          <a:prstGeom prst="ellipse">
-            <a:avLst/>
-          </a:prstGeom>
-          <a:solidFill>
-            <a:srgbClr val="264653"/>
-          </a:solidFill>
-          <a:ln/>
-        </p:spPr>
-      </p:sp>
-      <p:sp>
-        <p:nvSpPr>
-          <p:cNvPr id="7" name="Text 5"/>
-          <p:cNvSpPr txBox="1"/>
-          <p:nvPr/>
-        </p:nvSpPr>
-        <p:spPr>
-          <a:xfrm>
-            <a:off x="566928" y="3035808"/>
-            <a:ext cx="347472" cy="347472"/>
-          </a:xfrm>
-          <a:prstGeom prst="rect">
-            <a:avLst/>
-          </a:prstGeom>
-          <a:noFill/>
-          <a:ln/>
-        </p:spPr>
-        <p:txBody>
-          <a:bodyPr wrap="square" lIns="0" tIns="0" rIns="0" bIns="0" rtlCol="0" anchor="ctr"/>
-          <a:lstStyle/>
-          <a:p>
-            <a:pPr algn="ctr" indent="0" marL="0">
-              <a:buNone/>
-            </a:pPr>
-            <a:r>
-              <a:rPr lang="en-US" sz="1300" b="1" dirty="0">
-                <a:solidFill>
-                  <a:srgbClr val="FFFFFF"/>
-                </a:solidFill>
-                <a:latin typeface="Meiryo" pitchFamily="34" charset="0"/>
-                <a:ea typeface="Meiryo" pitchFamily="34" charset="-122"/>
-                <a:cs typeface="Meiryo" pitchFamily="34" charset="-120"/>
-              </a:rPr>
-              <a:t>1</a:t>
-            </a:r>
-            <a:endParaRPr lang="en-US" sz="1300" dirty="0"/>
-          </a:p>
-        </p:txBody>
-      </p:sp>
-      <p:sp>
-        <p:nvSpPr>
-          <p:cNvPr id="8" name="Text 6"/>
-          <p:cNvSpPr txBox="1"/>
-          <p:nvPr/>
-        </p:nvSpPr>
-        <p:spPr>
-          <a:xfrm>
-            <a:off x="1069848" y="2962656"/>
-            <a:ext cx="4709160" cy="713232"/>
-          </a:xfrm>
-          <a:prstGeom prst="rect">
-            <a:avLst/>
-          </a:prstGeom>
-          <a:noFill/>
-          <a:ln/>
-        </p:spPr>
-        <p:txBody>
-          <a:bodyPr wrap="square" lIns="0" tIns="0" rIns="0" bIns="0" rtlCol="0" anchor="t"/>
-          <a:lstStyle/>
-          <a:p>
-            <a:pPr indent="0" marL="0">
-              <a:buNone/>
-            </a:pPr>
-            <a:r>
-              <a:rPr lang="en-US" sz="1500" b="1" dirty="0">
-                <a:solidFill>
-                  <a:srgbClr val="264653"/>
-                </a:solidFill>
-                <a:latin typeface="Meiryo" pitchFamily="34" charset="0"/>
-                <a:ea typeface="Meiryo" pitchFamily="34" charset="-122"/>
-                <a:cs typeface="Meiryo" pitchFamily="34" charset="-120"/>
-              </a:rPr>
-              <a:t>上のURLを開く</a:t>
-            </a:r>
-            <a:endParaRPr lang="en-US" sz="1500" dirty="0"/>
-          </a:p>
-          <a:p>
-            <a:pPr indent="0" marL="0">
-              <a:buNone/>
-            </a:pPr>
-            <a:r>
-              <a:rPr lang="en-US" sz="1300" dirty="0">
-                <a:solidFill>
-                  <a:srgbClr val="52707A"/>
-                </a:solidFill>
-                <a:latin typeface="Meiryo" pitchFamily="34" charset="0"/>
-                <a:ea typeface="Meiryo" pitchFamily="34" charset="-122"/>
-                <a:cs typeface="Meiryo" pitchFamily="34" charset="-120"/>
-              </a:rPr>
-              <a:t>ブラウザ（Chrome など）のアドレス欄に入力します</a:t>
-            </a:r>
-            <a:endParaRPr lang="en-US" sz="1500" dirty="0"/>
-          </a:p>
-        </p:txBody>
-      </p:sp>
-      <p:sp>
-        <p:nvSpPr>
-          <p:cNvPr id="9" name="Shape 7"/>
-          <p:cNvSpPr/>
-          <p:nvPr/>
-        </p:nvSpPr>
-        <p:spPr>
-          <a:xfrm>
-            <a:off x="566928" y="3749040"/>
-            <a:ext cx="347472" cy="347472"/>
-          </a:xfrm>
-          <a:prstGeom prst="ellipse">
-            <a:avLst/>
-          </a:prstGeom>
-          <a:solidFill>
-            <a:srgbClr val="264653"/>
-          </a:solidFill>
-          <a:ln/>
-        </p:spPr>
-      </p:sp>
-      <p:sp>
-        <p:nvSpPr>
-          <p:cNvPr id="10" name="Text 8"/>
-          <p:cNvSpPr txBox="1"/>
-          <p:nvPr/>
-        </p:nvSpPr>
-        <p:spPr>
-          <a:xfrm>
-            <a:off x="566928" y="3749040"/>
-            <a:ext cx="347472" cy="347472"/>
-          </a:xfrm>
-          <a:prstGeom prst="rect">
-            <a:avLst/>
-          </a:prstGeom>
-          <a:noFill/>
-          <a:ln/>
-        </p:spPr>
-        <p:txBody>
-          <a:bodyPr wrap="square" lIns="0" tIns="0" rIns="0" bIns="0" rtlCol="0" anchor="ctr"/>
-          <a:lstStyle/>
-          <a:p>
-            <a:pPr algn="ctr" indent="0" marL="0">
-              <a:buNone/>
-            </a:pPr>
-            <a:r>
-              <a:rPr lang="en-US" sz="1300" b="1" dirty="0">
-                <a:solidFill>
-                  <a:srgbClr val="FFFFFF"/>
-                </a:solidFill>
-                <a:latin typeface="Meiryo" pitchFamily="34" charset="0"/>
-                <a:ea typeface="Meiryo" pitchFamily="34" charset="-122"/>
-                <a:cs typeface="Meiryo" pitchFamily="34" charset="-120"/>
-              </a:rPr>
-              <a:t>2</a:t>
-            </a:r>
-            <a:endParaRPr lang="en-US" sz="1300" dirty="0"/>
-          </a:p>
-        </p:txBody>
-      </p:sp>
-      <p:sp>
-        <p:nvSpPr>
-          <p:cNvPr id="11" name="Text 9"/>
-          <p:cNvSpPr txBox="1"/>
-          <p:nvPr/>
-        </p:nvSpPr>
-        <p:spPr>
-          <a:xfrm>
-            <a:off x="1069848" y="3675888"/>
-            <a:ext cx="4709160" cy="713232"/>
-          </a:xfrm>
-          <a:prstGeom prst="rect">
-            <a:avLst/>
-          </a:prstGeom>
-          <a:noFill/>
-          <a:ln/>
-        </p:spPr>
-        <p:txBody>
-          <a:bodyPr wrap="square" lIns="0" tIns="0" rIns="0" bIns="0" rtlCol="0" anchor="t"/>
-          <a:lstStyle/>
-          <a:p>
-            <a:pPr indent="0" marL="0">
-              <a:buNone/>
-            </a:pPr>
-            <a:r>
-              <a:rPr lang="en-US" sz="1500" b="1" dirty="0">
-                <a:solidFill>
-                  <a:srgbClr val="264653"/>
-                </a:solidFill>
-                <a:latin typeface="Meiryo" pitchFamily="34" charset="0"/>
-                <a:ea typeface="Meiryo" pitchFamily="34" charset="-122"/>
-                <a:cs typeface="Meiryo" pitchFamily="34" charset="-120"/>
-              </a:rPr>
-              <a:t>ユーザー名とパスワードを入れる</a:t>
-            </a:r>
-            <a:endParaRPr lang="en-US" sz="1500" dirty="0"/>
-          </a:p>
-          <a:p>
-            <a:pPr indent="0" marL="0">
-              <a:buNone/>
-            </a:pPr>
-            <a:r>
-              <a:rPr lang="en-US" sz="1300" dirty="0">
-                <a:solidFill>
-                  <a:srgbClr val="52707A"/>
-                </a:solidFill>
-                <a:latin typeface="Meiryo" pitchFamily="34" charset="0"/>
-                <a:ea typeface="Meiryo" pitchFamily="34" charset="-122"/>
-                <a:cs typeface="Meiryo" pitchFamily="34" charset="-120"/>
-              </a:rPr>
-              <a:t>ASPATH のアカウントでログインします</a:t>
-            </a:r>
-            <a:endParaRPr lang="en-US" sz="1500" dirty="0"/>
-          </a:p>
-        </p:txBody>
-      </p:sp>
-      <p:sp>
-        <p:nvSpPr>
-          <p:cNvPr id="12" name="Shape 10"/>
-          <p:cNvSpPr/>
-          <p:nvPr/>
-        </p:nvSpPr>
-        <p:spPr>
-          <a:xfrm>
-            <a:off x="566928" y="4462272"/>
-            <a:ext cx="347472" cy="347472"/>
-          </a:xfrm>
-          <a:prstGeom prst="ellipse">
-            <a:avLst/>
-          </a:prstGeom>
-          <a:solidFill>
-            <a:srgbClr val="264653"/>
-          </a:solidFill>
-          <a:ln/>
-        </p:spPr>
-      </p:sp>
-      <p:sp>
-        <p:nvSpPr>
-          <p:cNvPr id="13" name="Text 11"/>
-          <p:cNvSpPr txBox="1"/>
-          <p:nvPr/>
-        </p:nvSpPr>
-        <p:spPr>
-          <a:xfrm>
-            <a:off x="566928" y="4462272"/>
-            <a:ext cx="347472" cy="347472"/>
-          </a:xfrm>
-          <a:prstGeom prst="rect">
-            <a:avLst/>
-          </a:prstGeom>
-          <a:noFill/>
-          <a:ln/>
-        </p:spPr>
-        <p:txBody>
-          <a:bodyPr wrap="square" lIns="0" tIns="0" rIns="0" bIns="0" rtlCol="0" anchor="ctr"/>
-          <a:lstStyle/>
-          <a:p>
-            <a:pPr algn="ctr" indent="0" marL="0">
-              <a:buNone/>
-            </a:pPr>
-            <a:r>
-              <a:rPr lang="en-US" sz="1300" b="1" dirty="0">
-                <a:solidFill>
-                  <a:srgbClr val="FFFFFF"/>
-                </a:solidFill>
-                <a:latin typeface="Meiryo" pitchFamily="34" charset="0"/>
-                <a:ea typeface="Meiryo" pitchFamily="34" charset="-122"/>
-                <a:cs typeface="Meiryo" pitchFamily="34" charset="-120"/>
-              </a:rPr>
-              <a:t>3</a:t>
-            </a:r>
-            <a:endParaRPr lang="en-US" sz="1300" dirty="0"/>
-          </a:p>
-        </p:txBody>
-      </p:sp>
-      <p:sp>
-        <p:nvSpPr>
-          <p:cNvPr id="14" name="Text 12"/>
-          <p:cNvSpPr txBox="1"/>
-          <p:nvPr/>
-        </p:nvSpPr>
-        <p:spPr>
-          <a:xfrm>
-            <a:off x="1069848" y="4389120"/>
-            <a:ext cx="4709160" cy="713232"/>
-          </a:xfrm>
-          <a:prstGeom prst="rect">
-            <a:avLst/>
-          </a:prstGeom>
-          <a:noFill/>
-          <a:ln/>
-        </p:spPr>
-        <p:txBody>
-          <a:bodyPr wrap="square" lIns="0" tIns="0" rIns="0" bIns="0" rtlCol="0" anchor="t"/>
-          <a:lstStyle/>
-          <a:p>
-            <a:pPr indent="0" marL="0">
-              <a:buNone/>
-            </a:pPr>
-            <a:r>
-              <a:rPr lang="en-US" sz="1500" b="1" dirty="0">
-                <a:solidFill>
-                  <a:srgbClr val="264653"/>
-                </a:solidFill>
-                <a:latin typeface="Meiryo" pitchFamily="34" charset="0"/>
-                <a:ea typeface="Meiryo" pitchFamily="34" charset="-122"/>
-                <a:cs typeface="Meiryo" pitchFamily="34" charset="-120"/>
-              </a:rPr>
-              <a:t>左側のメニューから作業を選ぶ</a:t>
-            </a:r>
-            <a:endParaRPr lang="en-US" sz="1500" dirty="0"/>
-          </a:p>
-          <a:p>
-            <a:pPr indent="0" marL="0">
-              <a:buNone/>
-            </a:pPr>
-            <a:r>
-              <a:rPr lang="en-US" sz="1300" dirty="0">
-                <a:solidFill>
-                  <a:srgbClr val="52707A"/>
-                </a:solidFill>
-                <a:latin typeface="Meiryo" pitchFamily="34" charset="0"/>
-                <a:ea typeface="Meiryo" pitchFamily="34" charset="-122"/>
-                <a:cs typeface="Meiryo" pitchFamily="34" charset="-120"/>
-              </a:rPr>
-              <a:t>使うのは「投稿」「初回体験の申込」「コメント」の3つです</a:t>
-            </a:r>
-            <a:endParaRPr lang="en-US" sz="1500" dirty="0"/>
-          </a:p>
-        </p:txBody>
-      </p:sp>
       <p:pic>
         <p:nvPicPr>
-          <p:cNvPr id="15" name="Image 0" descr="/sessions/compassionate-sweet-heisenberg/mnt/outputs/レクチャー素材/00_ダッシュボード.jpg">    </p:cNvPr>
+          <p:cNvPr id="2" name="Image 0" descr="/sessions/compassionate-sweet-heisenberg/mnt/dev-aspath-life-main/tools/assets/logo-deck.png">    </p:cNvPr>
           <p:cNvPicPr>
             <a:picLocks noChangeAspect="1"/>
           </p:cNvPicPr>
@@ -7642,6 +7641,553 @@
         </p:blipFill>
         <p:spPr>
           <a:xfrm>
+            <a:off x="11458173" y="109728"/>
+            <a:ext cx="209571" cy="256032"/>
+          </a:xfrm>
+          <a:prstGeom prst="rect">
+            <a:avLst/>
+          </a:prstGeom>
+        </p:spPr>
+      </p:pic>
+      <p:sp>
+        <p:nvSpPr>
+          <p:cNvPr id="3" name="Text 0"/>
+          <p:cNvSpPr txBox="1"/>
+          <p:nvPr/>
+        </p:nvSpPr>
+        <p:spPr>
+          <a:xfrm>
+            <a:off x="8623533" y="128016"/>
+            <a:ext cx="2743200" cy="237744"/>
+          </a:xfrm>
+          <a:prstGeom prst="rect">
+            <a:avLst/>
+          </a:prstGeom>
+          <a:noFill/>
+          <a:ln/>
+        </p:spPr>
+        <p:txBody>
+          <a:bodyPr wrap="square" lIns="0" tIns="0" rIns="0" bIns="0" rtlCol="0" anchor="ctr"/>
+          <a:lstStyle/>
+          <a:p>
+            <a:pPr algn="r" indent="0" marL="0">
+              <a:buNone/>
+            </a:pPr>
+            <a:r>
+              <a:rPr lang="en-US" sz="750" dirty="0">
+                <a:solidFill>
+                  <a:srgbClr val="97A9AF"/>
+                </a:solidFill>
+                <a:latin typeface="Meiryo" pitchFamily="34" charset="0"/>
+                <a:ea typeface="Meiryo" pitchFamily="34" charset="-122"/>
+                <a:cs typeface="Meiryo" pitchFamily="34" charset="-120"/>
+              </a:rPr>
+              <a:t>鹿児島のパーキンソン病専門トレーニングスタジオ</a:t>
+            </a:r>
+            <a:endParaRPr lang="en-US" sz="750" dirty="0"/>
+          </a:p>
+        </p:txBody>
+      </p:sp>
+      <p:sp>
+        <p:nvSpPr>
+          <p:cNvPr id="4" name="Text 1"/>
+          <p:cNvSpPr txBox="1"/>
+          <p:nvPr/>
+        </p:nvSpPr>
+        <p:spPr>
+          <a:xfrm>
+            <a:off x="548640" y="347472"/>
+            <a:ext cx="10332720" cy="658368"/>
+          </a:xfrm>
+          <a:prstGeom prst="rect">
+            <a:avLst/>
+          </a:prstGeom>
+          <a:noFill/>
+          <a:ln/>
+        </p:spPr>
+        <p:txBody>
+          <a:bodyPr wrap="square" lIns="0" tIns="0" rIns="0" bIns="0" rtlCol="0" anchor="ctr"/>
+          <a:lstStyle/>
+          <a:p>
+            <a:pPr indent="0" marL="0">
+              <a:buNone/>
+            </a:pPr>
+            <a:r>
+              <a:rPr lang="en-US" sz="3000" b="1" dirty="0">
+                <a:solidFill>
+                  <a:srgbClr val="264653"/>
+                </a:solidFill>
+                <a:latin typeface="Meiryo" pitchFamily="34" charset="0"/>
+                <a:ea typeface="Meiryo" pitchFamily="34" charset="-122"/>
+                <a:cs typeface="Meiryo" pitchFamily="34" charset="-120"/>
+              </a:rPr>
+              <a:t>はじめに ─ 管理画面の開き方</a:t>
+            </a:r>
+            <a:endParaRPr lang="en-US" sz="3000" dirty="0"/>
+          </a:p>
+        </p:txBody>
+      </p:sp>
+      <p:sp>
+        <p:nvSpPr>
+          <p:cNvPr id="5" name="Shape 2"/>
+          <p:cNvSpPr/>
+          <p:nvPr/>
+        </p:nvSpPr>
+        <p:spPr>
+          <a:xfrm>
+            <a:off x="566928" y="1417320"/>
+            <a:ext cx="5120640" cy="1371600"/>
+          </a:xfrm>
+          <a:prstGeom prst="roundRect">
+            <a:avLst>
+              <a:gd name="adj" fmla="val 8000"/>
+            </a:avLst>
+          </a:prstGeom>
+          <a:solidFill>
+            <a:srgbClr val="264653"/>
+          </a:solidFill>
+          <a:ln/>
+        </p:spPr>
+      </p:sp>
+      <p:sp>
+        <p:nvSpPr>
+          <p:cNvPr id="6" name="Text 3"/>
+          <p:cNvSpPr txBox="1"/>
+          <p:nvPr/>
+        </p:nvSpPr>
+        <p:spPr>
+          <a:xfrm>
+            <a:off x="777240" y="1600200"/>
+            <a:ext cx="4754880" cy="457200"/>
+          </a:xfrm>
+          <a:prstGeom prst="rect">
+            <a:avLst/>
+          </a:prstGeom>
+          <a:noFill/>
+          <a:ln/>
+        </p:spPr>
+        <p:txBody>
+          <a:bodyPr wrap="square" lIns="0" tIns="0" rIns="0" bIns="0" rtlCol="0" anchor="ctr"/>
+          <a:lstStyle/>
+          <a:p>
+            <a:pPr indent="0" marL="0">
+              <a:buNone/>
+            </a:pPr>
+            <a:r>
+              <a:rPr lang="en-US" sz="1500" b="1" dirty="0">
+                <a:solidFill>
+                  <a:srgbClr val="FFFFFF"/>
+                </a:solidFill>
+                <a:latin typeface="Meiryo" pitchFamily="34" charset="0"/>
+                <a:ea typeface="Meiryo" pitchFamily="34" charset="-122"/>
+                <a:cs typeface="Meiryo" pitchFamily="34" charset="-120"/>
+              </a:rPr>
+              <a:t>https://aspath-life.com/wp-admin/</a:t>
+            </a:r>
+            <a:endParaRPr lang="en-US" sz="1500" dirty="0"/>
+          </a:p>
+        </p:txBody>
+      </p:sp>
+      <p:sp>
+        <p:nvSpPr>
+          <p:cNvPr id="7" name="Text 4"/>
+          <p:cNvSpPr txBox="1"/>
+          <p:nvPr/>
+        </p:nvSpPr>
+        <p:spPr>
+          <a:xfrm>
+            <a:off x="777240" y="2084832"/>
+            <a:ext cx="4754880" cy="457200"/>
+          </a:xfrm>
+          <a:prstGeom prst="rect">
+            <a:avLst/>
+          </a:prstGeom>
+          <a:noFill/>
+          <a:ln/>
+        </p:spPr>
+        <p:txBody>
+          <a:bodyPr wrap="square" lIns="0" tIns="0" rIns="0" bIns="0" rtlCol="0" anchor="ctr"/>
+          <a:lstStyle/>
+          <a:p>
+            <a:pPr indent="0" marL="0">
+              <a:buNone/>
+            </a:pPr>
+            <a:r>
+              <a:rPr lang="en-US" sz="1200" dirty="0">
+                <a:solidFill>
+                  <a:srgbClr val="BBD2D8"/>
+                </a:solidFill>
+                <a:latin typeface="Meiryo" pitchFamily="34" charset="0"/>
+                <a:ea typeface="Meiryo" pitchFamily="34" charset="-122"/>
+                <a:cs typeface="Meiryo" pitchFamily="34" charset="-120"/>
+              </a:rPr>
+              <a:t>このURLをお気に入りに入れておくと便利です</a:t>
+            </a:r>
+            <a:endParaRPr lang="en-US" sz="1200" dirty="0"/>
+          </a:p>
+        </p:txBody>
+      </p:sp>
+      <p:sp>
+        <p:nvSpPr>
+          <p:cNvPr id="8" name="Shape 5"/>
+          <p:cNvSpPr/>
+          <p:nvPr/>
+        </p:nvSpPr>
+        <p:spPr>
+          <a:xfrm>
+            <a:off x="566928" y="3035808"/>
+            <a:ext cx="347472" cy="347472"/>
+          </a:xfrm>
+          <a:prstGeom prst="ellipse">
+            <a:avLst/>
+          </a:prstGeom>
+          <a:solidFill>
+            <a:srgbClr val="264653"/>
+          </a:solidFill>
+          <a:ln/>
+        </p:spPr>
+      </p:sp>
+      <p:sp>
+        <p:nvSpPr>
+          <p:cNvPr id="9" name="Text 6"/>
+          <p:cNvSpPr txBox="1"/>
+          <p:nvPr/>
+        </p:nvSpPr>
+        <p:spPr>
+          <a:xfrm>
+            <a:off x="566928" y="3035808"/>
+            <a:ext cx="347472" cy="347472"/>
+          </a:xfrm>
+          <a:prstGeom prst="rect">
+            <a:avLst/>
+          </a:prstGeom>
+          <a:noFill/>
+          <a:ln/>
+        </p:spPr>
+        <p:txBody>
+          <a:bodyPr wrap="square" lIns="0" tIns="0" rIns="0" bIns="0" rtlCol="0" anchor="ctr"/>
+          <a:lstStyle/>
+          <a:p>
+            <a:pPr algn="ctr" indent="0" marL="0">
+              <a:buNone/>
+            </a:pPr>
+            <a:r>
+              <a:rPr lang="en-US" sz="1300" b="1" dirty="0">
+                <a:solidFill>
+                  <a:srgbClr val="FFFFFF"/>
+                </a:solidFill>
+                <a:latin typeface="Meiryo" pitchFamily="34" charset="0"/>
+                <a:ea typeface="Meiryo" pitchFamily="34" charset="-122"/>
+                <a:cs typeface="Meiryo" pitchFamily="34" charset="-120"/>
+              </a:rPr>
+              <a:t>1</a:t>
+            </a:r>
+            <a:endParaRPr lang="en-US" sz="1300" dirty="0"/>
+          </a:p>
+        </p:txBody>
+      </p:sp>
+      <p:sp>
+        <p:nvSpPr>
+          <p:cNvPr id="10" name="Text 7"/>
+          <p:cNvSpPr txBox="1"/>
+          <p:nvPr/>
+        </p:nvSpPr>
+        <p:spPr>
+          <a:xfrm>
+            <a:off x="1069848" y="2962656"/>
+            <a:ext cx="4709160" cy="713232"/>
+          </a:xfrm>
+          <a:prstGeom prst="rect">
+            <a:avLst/>
+          </a:prstGeom>
+          <a:noFill/>
+          <a:ln/>
+        </p:spPr>
+        <p:txBody>
+          <a:bodyPr wrap="square" lIns="0" tIns="0" rIns="0" bIns="0" rtlCol="0" anchor="t"/>
+          <a:lstStyle/>
+          <a:p>
+            <a:pPr indent="0" marL="0">
+              <a:buNone/>
+            </a:pPr>
+            <a:r>
+              <a:rPr lang="en-US" sz="1500" b="1" dirty="0">
+                <a:solidFill>
+                  <a:srgbClr val="264653"/>
+                </a:solidFill>
+                <a:latin typeface="Meiryo" pitchFamily="34" charset="0"/>
+                <a:ea typeface="Meiryo" pitchFamily="34" charset="-122"/>
+                <a:cs typeface="Meiryo" pitchFamily="34" charset="-120"/>
+              </a:rPr>
+              <a:t>上のURLを開く</a:t>
+            </a:r>
+            <a:endParaRPr lang="en-US" sz="1500" dirty="0"/>
+          </a:p>
+          <a:p>
+            <a:pPr indent="0" marL="0">
+              <a:buNone/>
+            </a:pPr>
+            <a:r>
+              <a:rPr lang="en-US" sz="1300" dirty="0">
+                <a:solidFill>
+                  <a:srgbClr val="52707A"/>
+                </a:solidFill>
+                <a:latin typeface="Meiryo" pitchFamily="34" charset="0"/>
+                <a:ea typeface="Meiryo" pitchFamily="34" charset="-122"/>
+                <a:cs typeface="Meiryo" pitchFamily="34" charset="-120"/>
+              </a:rPr>
+              <a:t>ブラウザ（Chrome など）のアドレス欄に入力します</a:t>
+            </a:r>
+            <a:endParaRPr lang="en-US" sz="1500" dirty="0"/>
+          </a:p>
+        </p:txBody>
+      </p:sp>
+      <p:sp>
+        <p:nvSpPr>
+          <p:cNvPr id="11" name="Shape 8"/>
+          <p:cNvSpPr/>
+          <p:nvPr/>
+        </p:nvSpPr>
+        <p:spPr>
+          <a:xfrm>
+            <a:off x="566928" y="3749040"/>
+            <a:ext cx="347472" cy="347472"/>
+          </a:xfrm>
+          <a:prstGeom prst="ellipse">
+            <a:avLst/>
+          </a:prstGeom>
+          <a:solidFill>
+            <a:srgbClr val="264653"/>
+          </a:solidFill>
+          <a:ln/>
+        </p:spPr>
+      </p:sp>
+      <p:sp>
+        <p:nvSpPr>
+          <p:cNvPr id="12" name="Text 9"/>
+          <p:cNvSpPr txBox="1"/>
+          <p:nvPr/>
+        </p:nvSpPr>
+        <p:spPr>
+          <a:xfrm>
+            <a:off x="566928" y="3749040"/>
+            <a:ext cx="347472" cy="347472"/>
+          </a:xfrm>
+          <a:prstGeom prst="rect">
+            <a:avLst/>
+          </a:prstGeom>
+          <a:noFill/>
+          <a:ln/>
+        </p:spPr>
+        <p:txBody>
+          <a:bodyPr wrap="square" lIns="0" tIns="0" rIns="0" bIns="0" rtlCol="0" anchor="ctr"/>
+          <a:lstStyle/>
+          <a:p>
+            <a:pPr algn="ctr" indent="0" marL="0">
+              <a:buNone/>
+            </a:pPr>
+            <a:r>
+              <a:rPr lang="en-US" sz="1300" b="1" dirty="0">
+                <a:solidFill>
+                  <a:srgbClr val="FFFFFF"/>
+                </a:solidFill>
+                <a:latin typeface="Meiryo" pitchFamily="34" charset="0"/>
+                <a:ea typeface="Meiryo" pitchFamily="34" charset="-122"/>
+                <a:cs typeface="Meiryo" pitchFamily="34" charset="-120"/>
+              </a:rPr>
+              <a:t>2</a:t>
+            </a:r>
+            <a:endParaRPr lang="en-US" sz="1300" dirty="0"/>
+          </a:p>
+        </p:txBody>
+      </p:sp>
+      <p:sp>
+        <p:nvSpPr>
+          <p:cNvPr id="13" name="Text 10"/>
+          <p:cNvSpPr txBox="1"/>
+          <p:nvPr/>
+        </p:nvSpPr>
+        <p:spPr>
+          <a:xfrm>
+            <a:off x="1069848" y="3675888"/>
+            <a:ext cx="4709160" cy="713232"/>
+          </a:xfrm>
+          <a:prstGeom prst="rect">
+            <a:avLst/>
+          </a:prstGeom>
+          <a:noFill/>
+          <a:ln/>
+        </p:spPr>
+        <p:txBody>
+          <a:bodyPr wrap="square" lIns="0" tIns="0" rIns="0" bIns="0" rtlCol="0" anchor="t"/>
+          <a:lstStyle/>
+          <a:p>
+            <a:pPr indent="0" marL="0">
+              <a:buNone/>
+            </a:pPr>
+            <a:r>
+              <a:rPr lang="en-US" sz="1500" b="1" dirty="0">
+                <a:solidFill>
+                  <a:srgbClr val="264653"/>
+                </a:solidFill>
+                <a:latin typeface="Meiryo" pitchFamily="34" charset="0"/>
+                <a:ea typeface="Meiryo" pitchFamily="34" charset="-122"/>
+                <a:cs typeface="Meiryo" pitchFamily="34" charset="-120"/>
+              </a:rPr>
+              <a:t>ユーザー名とパスワードを入れる</a:t>
+            </a:r>
+            <a:endParaRPr lang="en-US" sz="1500" dirty="0"/>
+          </a:p>
+          <a:p>
+            <a:pPr indent="0" marL="0">
+              <a:buNone/>
+            </a:pPr>
+            <a:r>
+              <a:rPr lang="en-US" sz="1300" dirty="0">
+                <a:solidFill>
+                  <a:srgbClr val="52707A"/>
+                </a:solidFill>
+                <a:latin typeface="Meiryo" pitchFamily="34" charset="0"/>
+                <a:ea typeface="Meiryo" pitchFamily="34" charset="-122"/>
+                <a:cs typeface="Meiryo" pitchFamily="34" charset="-120"/>
+              </a:rPr>
+              <a:t>ASPATH のアカウントでログインします</a:t>
+            </a:r>
+            <a:endParaRPr lang="en-US" sz="1500" dirty="0"/>
+          </a:p>
+        </p:txBody>
+      </p:sp>
+      <p:sp>
+        <p:nvSpPr>
+          <p:cNvPr id="14" name="Shape 11"/>
+          <p:cNvSpPr/>
+          <p:nvPr/>
+        </p:nvSpPr>
+        <p:spPr>
+          <a:xfrm>
+            <a:off x="566928" y="4462272"/>
+            <a:ext cx="347472" cy="347472"/>
+          </a:xfrm>
+          <a:prstGeom prst="ellipse">
+            <a:avLst/>
+          </a:prstGeom>
+          <a:solidFill>
+            <a:srgbClr val="264653"/>
+          </a:solidFill>
+          <a:ln/>
+        </p:spPr>
+      </p:sp>
+      <p:sp>
+        <p:nvSpPr>
+          <p:cNvPr id="15" name="Text 12"/>
+          <p:cNvSpPr txBox="1"/>
+          <p:nvPr/>
+        </p:nvSpPr>
+        <p:spPr>
+          <a:xfrm>
+            <a:off x="566928" y="4462272"/>
+            <a:ext cx="347472" cy="347472"/>
+          </a:xfrm>
+          <a:prstGeom prst="rect">
+            <a:avLst/>
+          </a:prstGeom>
+          <a:noFill/>
+          <a:ln/>
+        </p:spPr>
+        <p:txBody>
+          <a:bodyPr wrap="square" lIns="0" tIns="0" rIns="0" bIns="0" rtlCol="0" anchor="ctr"/>
+          <a:lstStyle/>
+          <a:p>
+            <a:pPr algn="ctr" indent="0" marL="0">
+              <a:buNone/>
+            </a:pPr>
+            <a:r>
+              <a:rPr lang="en-US" sz="1300" b="1" dirty="0">
+                <a:solidFill>
+                  <a:srgbClr val="FFFFFF"/>
+                </a:solidFill>
+                <a:latin typeface="Meiryo" pitchFamily="34" charset="0"/>
+                <a:ea typeface="Meiryo" pitchFamily="34" charset="-122"/>
+                <a:cs typeface="Meiryo" pitchFamily="34" charset="-120"/>
+              </a:rPr>
+              <a:t>3</a:t>
+            </a:r>
+            <a:endParaRPr lang="en-US" sz="1300" dirty="0"/>
+          </a:p>
+        </p:txBody>
+      </p:sp>
+      <p:sp>
+        <p:nvSpPr>
+          <p:cNvPr id="16" name="Text 13"/>
+          <p:cNvSpPr txBox="1"/>
+          <p:nvPr/>
+        </p:nvSpPr>
+        <p:spPr>
+          <a:xfrm>
+            <a:off x="1069848" y="4389120"/>
+            <a:ext cx="4709160" cy="713232"/>
+          </a:xfrm>
+          <a:prstGeom prst="rect">
+            <a:avLst/>
+          </a:prstGeom>
+          <a:noFill/>
+          <a:ln/>
+        </p:spPr>
+        <p:txBody>
+          <a:bodyPr wrap="square" lIns="0" tIns="0" rIns="0" bIns="0" rtlCol="0" anchor="t"/>
+          <a:lstStyle/>
+          <a:p>
+            <a:pPr indent="0" marL="0">
+              <a:buNone/>
+            </a:pPr>
+            <a:r>
+              <a:rPr lang="en-US" sz="1500" b="1" dirty="0">
+                <a:solidFill>
+                  <a:srgbClr val="264653"/>
+                </a:solidFill>
+                <a:latin typeface="Meiryo" pitchFamily="34" charset="0"/>
+                <a:ea typeface="Meiryo" pitchFamily="34" charset="-122"/>
+                <a:cs typeface="Meiryo" pitchFamily="34" charset="-120"/>
+              </a:rPr>
+              <a:t>左側のメニューから作業を選ぶ</a:t>
+            </a:r>
+            <a:endParaRPr lang="en-US" sz="1500" dirty="0"/>
+          </a:p>
+          <a:p>
+            <a:pPr indent="0" marL="0">
+              <a:buNone/>
+            </a:pPr>
+            <a:r>
+              <a:rPr lang="en-US" sz="1300" dirty="0">
+                <a:solidFill>
+                  <a:srgbClr val="52707A"/>
+                </a:solidFill>
+                <a:latin typeface="Meiryo" pitchFamily="34" charset="0"/>
+                <a:ea typeface="Meiryo" pitchFamily="34" charset="-122"/>
+                <a:cs typeface="Meiryo" pitchFamily="34" charset="-120"/>
+              </a:rPr>
+              <a:t>使うのは「投稿」「初回体験の申込」「コメント」の3つです</a:t>
+            </a:r>
+            <a:endParaRPr lang="en-US" sz="1500" dirty="0"/>
+          </a:p>
+        </p:txBody>
+      </p:sp>
+      <p:pic>
+        <p:nvPicPr>
+          <p:cNvPr id="17" name="Image 1" descr="/sessions/compassionate-sweet-heisenberg/mnt/dev-aspath-life-main/_wp移行素材/★引継ぎ資料/レクチャー素材/00_ダッシュボード.jpg">    </p:cNvPr>
+          <p:cNvPicPr>
+            <a:picLocks noChangeAspect="1"/>
+          </p:cNvPicPr>
+          <p:nvPr/>
+        </p:nvPicPr>
+        <p:blipFill>
+          <a:blip r:embed="rId2"/>
+          <a:stretch>
+            <a:fillRect/>
+          </a:stretch>
+        </p:blipFill>
+        <p:spPr>
+          <a:xfrm>
             <a:off x="5989320" y="1417320"/>
             <a:ext cx="5623560" cy="2898648"/>
           </a:xfrm>
@@ -7652,7 +8198,7 @@
       </p:pic>
       <p:sp>
         <p:nvSpPr>
-          <p:cNvPr id="16" name="Shape 13"/>
+          <p:cNvPr id="18" name="Shape 14"/>
           <p:cNvSpPr/>
           <p:nvPr/>
         </p:nvSpPr>
@@ -7679,7 +8225,7 @@
       </p:sp>
       <p:sp>
         <p:nvSpPr>
-          <p:cNvPr id="17" name="Shape 14"/>
+          <p:cNvPr id="19" name="Shape 15"/>
           <p:cNvSpPr/>
           <p:nvPr/>
         </p:nvSpPr>
@@ -7706,7 +8252,7 @@
       </p:sp>
       <p:sp>
         <p:nvSpPr>
-          <p:cNvPr id="18" name="Shape 15"/>
+          <p:cNvPr id="20" name="Shape 16"/>
           <p:cNvSpPr/>
           <p:nvPr/>
         </p:nvSpPr>
@@ -7726,7 +8272,7 @@
       </p:sp>
       <p:sp>
         <p:nvSpPr>
-          <p:cNvPr id="19" name="Text 16"/>
+          <p:cNvPr id="21" name="Text 17"/>
           <p:cNvSpPr txBox="1"/>
           <p:nvPr/>
         </p:nvSpPr>
@@ -7765,7 +8311,7 @@
       </p:sp>
       <p:sp>
         <p:nvSpPr>
-          <p:cNvPr id="20" name="Text 17"/>
+          <p:cNvPr id="22" name="Text 18"/>
           <p:cNvSpPr txBox="1"/>
           <p:nvPr/>
         </p:nvSpPr>
@@ -7851,9 +8397,72 @@
           <a:chExt cx="0" cy="0"/>
         </a:xfrm>
       </p:grpSpPr>
-      <p:sp>
-        <p:nvSpPr>
-          <p:cNvPr id="2" name="Shape 0"/>
+      <p:pic>
+        <p:nvPicPr>
+          <p:cNvPr id="2" name="Image 0" descr="/sessions/compassionate-sweet-heisenberg/mnt/dev-aspath-life-main/tools/assets/logo-deck.png">    </p:cNvPr>
+          <p:cNvPicPr>
+            <a:picLocks noChangeAspect="1"/>
+          </p:cNvPicPr>
+          <p:nvPr/>
+        </p:nvPicPr>
+        <p:blipFill>
+          <a:blip r:embed="rId1"/>
+          <a:stretch>
+            <a:fillRect/>
+          </a:stretch>
+        </p:blipFill>
+        <p:spPr>
+          <a:xfrm>
+            <a:off x="11458173" y="109728"/>
+            <a:ext cx="209571" cy="256032"/>
+          </a:xfrm>
+          <a:prstGeom prst="rect">
+            <a:avLst/>
+          </a:prstGeom>
+        </p:spPr>
+      </p:pic>
+      <p:sp>
+        <p:nvSpPr>
+          <p:cNvPr id="3" name="Text 0"/>
+          <p:cNvSpPr txBox="1"/>
+          <p:nvPr/>
+        </p:nvSpPr>
+        <p:spPr>
+          <a:xfrm>
+            <a:off x="8623533" y="128016"/>
+            <a:ext cx="2743200" cy="237744"/>
+          </a:xfrm>
+          <a:prstGeom prst="rect">
+            <a:avLst/>
+          </a:prstGeom>
+          <a:noFill/>
+          <a:ln/>
+        </p:spPr>
+        <p:txBody>
+          <a:bodyPr wrap="square" lIns="0" tIns="0" rIns="0" bIns="0" rtlCol="0" anchor="ctr"/>
+          <a:lstStyle/>
+          <a:p>
+            <a:pPr algn="r" indent="0" marL="0">
+              <a:buNone/>
+            </a:pPr>
+            <a:r>
+              <a:rPr lang="en-US" sz="750" dirty="0">
+                <a:solidFill>
+                  <a:srgbClr val="97A9AF"/>
+                </a:solidFill>
+                <a:latin typeface="Meiryo" pitchFamily="34" charset="0"/>
+                <a:ea typeface="Meiryo" pitchFamily="34" charset="-122"/>
+                <a:cs typeface="Meiryo" pitchFamily="34" charset="-120"/>
+              </a:rPr>
+              <a:t>鹿児島のパーキンソン病専門トレーニングスタジオ</a:t>
+            </a:r>
+            <a:endParaRPr lang="en-US" sz="750" dirty="0"/>
+          </a:p>
+        </p:txBody>
+      </p:sp>
+      <p:sp>
+        <p:nvSpPr>
+          <p:cNvPr id="4" name="Shape 1"/>
           <p:cNvSpPr/>
           <p:nvPr/>
         </p:nvSpPr>
@@ -7873,7 +8482,7 @@
       </p:sp>
       <p:sp>
         <p:nvSpPr>
-          <p:cNvPr id="3" name="Text 1"/>
+          <p:cNvPr id="5" name="Text 2"/>
           <p:cNvSpPr txBox="1"/>
           <p:nvPr/>
         </p:nvSpPr>
@@ -7912,7 +8521,7 @@
       </p:sp>
       <p:sp>
         <p:nvSpPr>
-          <p:cNvPr id="4" name="Text 2"/>
+          <p:cNvPr id="6" name="Text 3"/>
           <p:cNvSpPr txBox="1"/>
           <p:nvPr/>
         </p:nvSpPr>
@@ -7951,7 +8560,7 @@
       </p:sp>
       <p:sp>
         <p:nvSpPr>
-          <p:cNvPr id="5" name="Shape 3"/>
+          <p:cNvPr id="7" name="Shape 4"/>
           <p:cNvSpPr/>
           <p:nvPr/>
         </p:nvSpPr>
@@ -7978,7 +8587,7 @@
       </p:sp>
       <p:sp>
         <p:nvSpPr>
-          <p:cNvPr id="6" name="Shape 4"/>
+          <p:cNvPr id="8" name="Shape 5"/>
           <p:cNvSpPr/>
           <p:nvPr/>
         </p:nvSpPr>
@@ -7998,7 +8607,7 @@
       </p:sp>
       <p:sp>
         <p:nvSpPr>
-          <p:cNvPr id="7" name="Text 5"/>
+          <p:cNvPr id="9" name="Text 6"/>
           <p:cNvSpPr txBox="1"/>
           <p:nvPr/>
         </p:nvSpPr>
@@ -8037,7 +8646,7 @@
       </p:sp>
       <p:sp>
         <p:nvSpPr>
-          <p:cNvPr id="8" name="Text 6"/>
+          <p:cNvPr id="10" name="Text 7"/>
           <p:cNvSpPr txBox="1"/>
           <p:nvPr/>
         </p:nvSpPr>
@@ -8076,7 +8685,7 @@
       </p:sp>
       <p:sp>
         <p:nvSpPr>
-          <p:cNvPr id="9" name="Text 7"/>
+          <p:cNvPr id="11" name="Text 8"/>
           <p:cNvSpPr txBox="1"/>
           <p:nvPr/>
         </p:nvSpPr>
@@ -8115,7 +8724,7 @@
       </p:sp>
       <p:sp>
         <p:nvSpPr>
-          <p:cNvPr id="10" name="Text 8"/>
+          <p:cNvPr id="12" name="Text 9"/>
           <p:cNvSpPr txBox="1"/>
           <p:nvPr/>
         </p:nvSpPr>
@@ -8154,7 +8763,7 @@
       </p:sp>
       <p:sp>
         <p:nvSpPr>
-          <p:cNvPr id="11" name="Shape 9"/>
+          <p:cNvPr id="13" name="Shape 10"/>
           <p:cNvSpPr/>
           <p:nvPr/>
         </p:nvSpPr>
@@ -8181,7 +8790,7 @@
       </p:sp>
       <p:sp>
         <p:nvSpPr>
-          <p:cNvPr id="12" name="Shape 10"/>
+          <p:cNvPr id="14" name="Shape 11"/>
           <p:cNvSpPr/>
           <p:nvPr/>
         </p:nvSpPr>
@@ -8201,7 +8810,7 @@
       </p:sp>
       <p:sp>
         <p:nvSpPr>
-          <p:cNvPr id="13" name="Text 11"/>
+          <p:cNvPr id="15" name="Text 12"/>
           <p:cNvSpPr txBox="1"/>
           <p:nvPr/>
         </p:nvSpPr>
@@ -8240,7 +8849,7 @@
       </p:sp>
       <p:sp>
         <p:nvSpPr>
-          <p:cNvPr id="14" name="Text 12"/>
+          <p:cNvPr id="16" name="Text 13"/>
           <p:cNvSpPr txBox="1"/>
           <p:nvPr/>
         </p:nvSpPr>
@@ -8279,7 +8888,7 @@
       </p:sp>
       <p:sp>
         <p:nvSpPr>
-          <p:cNvPr id="15" name="Text 13"/>
+          <p:cNvPr id="17" name="Text 14"/>
           <p:cNvSpPr txBox="1"/>
           <p:nvPr/>
         </p:nvSpPr>
@@ -8318,7 +8927,7 @@
       </p:sp>
       <p:sp>
         <p:nvSpPr>
-          <p:cNvPr id="16" name="Text 14"/>
+          <p:cNvPr id="18" name="Text 15"/>
           <p:cNvSpPr txBox="1"/>
           <p:nvPr/>
         </p:nvSpPr>
@@ -8357,7 +8966,7 @@
       </p:sp>
       <p:sp>
         <p:nvSpPr>
-          <p:cNvPr id="17" name="Shape 15"/>
+          <p:cNvPr id="19" name="Shape 16"/>
           <p:cNvSpPr/>
           <p:nvPr/>
         </p:nvSpPr>
@@ -8384,7 +8993,7 @@
       </p:sp>
       <p:sp>
         <p:nvSpPr>
-          <p:cNvPr id="18" name="Shape 16"/>
+          <p:cNvPr id="20" name="Shape 17"/>
           <p:cNvSpPr/>
           <p:nvPr/>
         </p:nvSpPr>
@@ -8404,7 +9013,7 @@
       </p:sp>
       <p:sp>
         <p:nvSpPr>
-          <p:cNvPr id="19" name="Text 17"/>
+          <p:cNvPr id="21" name="Text 18"/>
           <p:cNvSpPr txBox="1"/>
           <p:nvPr/>
         </p:nvSpPr>
@@ -8443,7 +9052,7 @@
       </p:sp>
       <p:sp>
         <p:nvSpPr>
-          <p:cNvPr id="20" name="Text 18"/>
+          <p:cNvPr id="22" name="Text 19"/>
           <p:cNvSpPr txBox="1"/>
           <p:nvPr/>
         </p:nvSpPr>
@@ -8482,7 +9091,7 @@
       </p:sp>
       <p:sp>
         <p:nvSpPr>
-          <p:cNvPr id="21" name="Text 19"/>
+          <p:cNvPr id="23" name="Text 20"/>
           <p:cNvSpPr txBox="1"/>
           <p:nvPr/>
         </p:nvSpPr>
@@ -8521,7 +9130,7 @@
       </p:sp>
       <p:sp>
         <p:nvSpPr>
-          <p:cNvPr id="22" name="Text 20"/>
+          <p:cNvPr id="24" name="Text 21"/>
           <p:cNvSpPr txBox="1"/>
           <p:nvPr/>
         </p:nvSpPr>
@@ -8560,7 +9169,7 @@
       </p:sp>
       <p:sp>
         <p:nvSpPr>
-          <p:cNvPr id="23" name="Shape 21"/>
+          <p:cNvPr id="25" name="Shape 22"/>
           <p:cNvSpPr/>
           <p:nvPr/>
         </p:nvSpPr>
@@ -8587,7 +9196,7 @@
       </p:sp>
       <p:sp>
         <p:nvSpPr>
-          <p:cNvPr id="24" name="Shape 22"/>
+          <p:cNvPr id="26" name="Shape 23"/>
           <p:cNvSpPr/>
           <p:nvPr/>
         </p:nvSpPr>
@@ -8607,7 +9216,7 @@
       </p:sp>
       <p:sp>
         <p:nvSpPr>
-          <p:cNvPr id="25" name="Text 23"/>
+          <p:cNvPr id="27" name="Text 24"/>
           <p:cNvSpPr txBox="1"/>
           <p:nvPr/>
         </p:nvSpPr>
@@ -8646,7 +9255,7 @@
       </p:sp>
       <p:sp>
         <p:nvSpPr>
-          <p:cNvPr id="26" name="Text 24"/>
+          <p:cNvPr id="28" name="Text 25"/>
           <p:cNvSpPr txBox="1"/>
           <p:nvPr/>
         </p:nvSpPr>
@@ -8685,7 +9294,7 @@
       </p:sp>
       <p:sp>
         <p:nvSpPr>
-          <p:cNvPr id="27" name="Text 25"/>
+          <p:cNvPr id="29" name="Text 26"/>
           <p:cNvSpPr txBox="1"/>
           <p:nvPr/>
         </p:nvSpPr>
@@ -8724,7 +9333,7 @@
       </p:sp>
       <p:sp>
         <p:nvSpPr>
-          <p:cNvPr id="28" name="Text 26"/>
+          <p:cNvPr id="30" name="Text 27"/>
           <p:cNvSpPr txBox="1"/>
           <p:nvPr/>
         </p:nvSpPr>
@@ -8763,7 +9372,7 @@
       </p:sp>
       <p:sp>
         <p:nvSpPr>
-          <p:cNvPr id="29" name="Shape 27"/>
+          <p:cNvPr id="31" name="Shape 28"/>
           <p:cNvSpPr/>
           <p:nvPr/>
         </p:nvSpPr>
@@ -8790,7 +9399,7 @@
       </p:sp>
       <p:sp>
         <p:nvSpPr>
-          <p:cNvPr id="30" name="Shape 28"/>
+          <p:cNvPr id="32" name="Shape 29"/>
           <p:cNvSpPr/>
           <p:nvPr/>
         </p:nvSpPr>
@@ -8810,7 +9419,7 @@
       </p:sp>
       <p:sp>
         <p:nvSpPr>
-          <p:cNvPr id="31" name="Text 29"/>
+          <p:cNvPr id="33" name="Text 30"/>
           <p:cNvSpPr txBox="1"/>
           <p:nvPr/>
         </p:nvSpPr>
@@ -8849,7 +9458,7 @@
       </p:sp>
       <p:sp>
         <p:nvSpPr>
-          <p:cNvPr id="32" name="Text 30"/>
+          <p:cNvPr id="34" name="Text 31"/>
           <p:cNvSpPr txBox="1"/>
           <p:nvPr/>
         </p:nvSpPr>
@@ -8888,7 +9497,7 @@
       </p:sp>
       <p:sp>
         <p:nvSpPr>
-          <p:cNvPr id="33" name="Text 31"/>
+          <p:cNvPr id="35" name="Text 32"/>
           <p:cNvSpPr txBox="1"/>
           <p:nvPr/>
         </p:nvSpPr>
@@ -8927,7 +9536,7 @@
       </p:sp>
       <p:sp>
         <p:nvSpPr>
-          <p:cNvPr id="34" name="Shape 32"/>
+          <p:cNvPr id="36" name="Shape 33"/>
           <p:cNvSpPr/>
           <p:nvPr/>
         </p:nvSpPr>
@@ -8954,7 +9563,7 @@
       </p:sp>
       <p:sp>
         <p:nvSpPr>
-          <p:cNvPr id="35" name="Shape 33"/>
+          <p:cNvPr id="37" name="Shape 34"/>
           <p:cNvSpPr/>
           <p:nvPr/>
         </p:nvSpPr>
@@ -8974,7 +9583,7 @@
       </p:sp>
       <p:sp>
         <p:nvSpPr>
-          <p:cNvPr id="36" name="Text 34"/>
+          <p:cNvPr id="38" name="Text 35"/>
           <p:cNvSpPr txBox="1"/>
           <p:nvPr/>
         </p:nvSpPr>
@@ -9013,7 +9622,7 @@
       </p:sp>
       <p:sp>
         <p:nvSpPr>
-          <p:cNvPr id="37" name="Text 35"/>
+          <p:cNvPr id="39" name="Text 36"/>
           <p:cNvSpPr txBox="1"/>
           <p:nvPr/>
         </p:nvSpPr>
@@ -9069,7 +9678,7 @@
       </p:sp>
       <p:sp>
         <p:nvSpPr>
-          <p:cNvPr id="38" name="Shape 36"/>
+          <p:cNvPr id="40" name="Shape 37"/>
           <p:cNvSpPr/>
           <p:nvPr/>
         </p:nvSpPr>
@@ -9096,7 +9705,7 @@
       </p:sp>
       <p:sp>
         <p:nvSpPr>
-          <p:cNvPr id="39" name="Shape 37"/>
+          <p:cNvPr id="41" name="Shape 38"/>
           <p:cNvSpPr/>
           <p:nvPr/>
         </p:nvSpPr>
@@ -9116,7 +9725,7 @@
       </p:sp>
       <p:sp>
         <p:nvSpPr>
-          <p:cNvPr id="40" name="Text 38"/>
+          <p:cNvPr id="42" name="Text 39"/>
           <p:cNvSpPr txBox="1"/>
           <p:nvPr/>
         </p:nvSpPr>
@@ -9155,7 +9764,7 @@
       </p:sp>
       <p:sp>
         <p:nvSpPr>
-          <p:cNvPr id="41" name="Text 39"/>
+          <p:cNvPr id="43" name="Text 40"/>
           <p:cNvSpPr txBox="1"/>
           <p:nvPr/>
         </p:nvSpPr>
@@ -9241,107 +9850,9 @@
           <a:chExt cx="0" cy="0"/>
         </a:xfrm>
       </p:grpSpPr>
-      <p:sp>
-        <p:nvSpPr>
-          <p:cNvPr id="2" name="Shape 0"/>
-          <p:cNvSpPr/>
-          <p:nvPr/>
-        </p:nvSpPr>
-        <p:spPr>
-          <a:xfrm>
-            <a:off x="548640" y="384048"/>
-            <a:ext cx="566928" cy="566928"/>
-          </a:xfrm>
-          <a:prstGeom prst="ellipse">
-            <a:avLst/>
-          </a:prstGeom>
-          <a:solidFill>
-            <a:srgbClr val="F4A261"/>
-          </a:solidFill>
-          <a:ln/>
-        </p:spPr>
-      </p:sp>
-      <p:sp>
-        <p:nvSpPr>
-          <p:cNvPr id="3" name="Text 1"/>
-          <p:cNvSpPr txBox="1"/>
-          <p:nvPr/>
-        </p:nvSpPr>
-        <p:spPr>
-          <a:xfrm>
-            <a:off x="548640" y="384048"/>
-            <a:ext cx="566928" cy="566928"/>
-          </a:xfrm>
-          <a:prstGeom prst="rect">
-            <a:avLst/>
-          </a:prstGeom>
-          <a:noFill/>
-          <a:ln/>
-        </p:spPr>
-        <p:txBody>
-          <a:bodyPr wrap="square" lIns="0" tIns="0" rIns="0" bIns="0" rtlCol="0" anchor="ctr"/>
-          <a:lstStyle/>
-          <a:p>
-            <a:pPr algn="ctr" indent="0" marL="0">
-              <a:buNone/>
-            </a:pPr>
-            <a:r>
-              <a:rPr lang="en-US" sz="2400" b="1" dirty="0">
-                <a:solidFill>
-                  <a:srgbClr val="FFFFFF"/>
-                </a:solidFill>
-                <a:latin typeface="Meiryo" pitchFamily="34" charset="0"/>
-                <a:ea typeface="Meiryo" pitchFamily="34" charset="-122"/>
-                <a:cs typeface="Meiryo" pitchFamily="34" charset="-120"/>
-              </a:rPr>
-              <a:t>1</a:t>
-            </a:r>
-            <a:endParaRPr lang="en-US" sz="2400" dirty="0"/>
-          </a:p>
-        </p:txBody>
-      </p:sp>
-      <p:sp>
-        <p:nvSpPr>
-          <p:cNvPr id="4" name="Text 2"/>
-          <p:cNvSpPr txBox="1"/>
-          <p:nvPr/>
-        </p:nvSpPr>
-        <p:spPr>
-          <a:xfrm>
-            <a:off x="1298448" y="347472"/>
-            <a:ext cx="10332720" cy="658368"/>
-          </a:xfrm>
-          <a:prstGeom prst="rect">
-            <a:avLst/>
-          </a:prstGeom>
-          <a:noFill/>
-          <a:ln/>
-        </p:spPr>
-        <p:txBody>
-          <a:bodyPr wrap="square" lIns="0" tIns="0" rIns="0" bIns="0" rtlCol="0" anchor="ctr"/>
-          <a:lstStyle/>
-          <a:p>
-            <a:pPr indent="0" marL="0">
-              <a:buNone/>
-            </a:pPr>
-            <a:r>
-              <a:rPr lang="en-US" sz="3000" b="1" dirty="0">
-                <a:solidFill>
-                  <a:srgbClr val="264653"/>
-                </a:solidFill>
-                <a:latin typeface="Meiryo" pitchFamily="34" charset="0"/>
-                <a:ea typeface="Meiryo" pitchFamily="34" charset="-122"/>
-                <a:cs typeface="Meiryo" pitchFamily="34" charset="-120"/>
-              </a:rPr>
-              <a:t>お知らせを出す ─ 題名と本文を書く</a:t>
-            </a:r>
-            <a:endParaRPr lang="en-US" sz="3000" dirty="0"/>
-          </a:p>
-        </p:txBody>
-      </p:sp>
       <p:pic>
         <p:nvPicPr>
-          <p:cNvPr id="5" name="Image 0" descr="/sessions/compassionate-sweet-heisenberg/mnt/outputs/レクチャー素材/crop/11_本文.jpg">    </p:cNvPr>
+          <p:cNvPr id="2" name="Image 0" descr="/sessions/compassionate-sweet-heisenberg/mnt/dev-aspath-life-main/tools/assets/logo-deck.png">    </p:cNvPr>
           <p:cNvPicPr>
             <a:picLocks noChangeAspect="1"/>
           </p:cNvPicPr>
@@ -9355,6 +9866,167 @@
         </p:blipFill>
         <p:spPr>
           <a:xfrm>
+            <a:off x="11458173" y="109728"/>
+            <a:ext cx="209571" cy="256032"/>
+          </a:xfrm>
+          <a:prstGeom prst="rect">
+            <a:avLst/>
+          </a:prstGeom>
+        </p:spPr>
+      </p:pic>
+      <p:sp>
+        <p:nvSpPr>
+          <p:cNvPr id="3" name="Text 0"/>
+          <p:cNvSpPr txBox="1"/>
+          <p:nvPr/>
+        </p:nvSpPr>
+        <p:spPr>
+          <a:xfrm>
+            <a:off x="8623533" y="128016"/>
+            <a:ext cx="2743200" cy="237744"/>
+          </a:xfrm>
+          <a:prstGeom prst="rect">
+            <a:avLst/>
+          </a:prstGeom>
+          <a:noFill/>
+          <a:ln/>
+        </p:spPr>
+        <p:txBody>
+          <a:bodyPr wrap="square" lIns="0" tIns="0" rIns="0" bIns="0" rtlCol="0" anchor="ctr"/>
+          <a:lstStyle/>
+          <a:p>
+            <a:pPr algn="r" indent="0" marL="0">
+              <a:buNone/>
+            </a:pPr>
+            <a:r>
+              <a:rPr lang="en-US" sz="750" dirty="0">
+                <a:solidFill>
+                  <a:srgbClr val="97A9AF"/>
+                </a:solidFill>
+                <a:latin typeface="Meiryo" pitchFamily="34" charset="0"/>
+                <a:ea typeface="Meiryo" pitchFamily="34" charset="-122"/>
+                <a:cs typeface="Meiryo" pitchFamily="34" charset="-120"/>
+              </a:rPr>
+              <a:t>鹿児島のパーキンソン病専門トレーニングスタジオ</a:t>
+            </a:r>
+            <a:endParaRPr lang="en-US" sz="750" dirty="0"/>
+          </a:p>
+        </p:txBody>
+      </p:sp>
+      <p:sp>
+        <p:nvSpPr>
+          <p:cNvPr id="4" name="Shape 1"/>
+          <p:cNvSpPr/>
+          <p:nvPr/>
+        </p:nvSpPr>
+        <p:spPr>
+          <a:xfrm>
+            <a:off x="548640" y="384048"/>
+            <a:ext cx="566928" cy="566928"/>
+          </a:xfrm>
+          <a:prstGeom prst="ellipse">
+            <a:avLst/>
+          </a:prstGeom>
+          <a:solidFill>
+            <a:srgbClr val="F4A261"/>
+          </a:solidFill>
+          <a:ln/>
+        </p:spPr>
+      </p:sp>
+      <p:sp>
+        <p:nvSpPr>
+          <p:cNvPr id="5" name="Text 2"/>
+          <p:cNvSpPr txBox="1"/>
+          <p:nvPr/>
+        </p:nvSpPr>
+        <p:spPr>
+          <a:xfrm>
+            <a:off x="548640" y="384048"/>
+            <a:ext cx="566928" cy="566928"/>
+          </a:xfrm>
+          <a:prstGeom prst="rect">
+            <a:avLst/>
+          </a:prstGeom>
+          <a:noFill/>
+          <a:ln/>
+        </p:spPr>
+        <p:txBody>
+          <a:bodyPr wrap="square" lIns="0" tIns="0" rIns="0" bIns="0" rtlCol="0" anchor="ctr"/>
+          <a:lstStyle/>
+          <a:p>
+            <a:pPr algn="ctr" indent="0" marL="0">
+              <a:buNone/>
+            </a:pPr>
+            <a:r>
+              <a:rPr lang="en-US" sz="2400" b="1" dirty="0">
+                <a:solidFill>
+                  <a:srgbClr val="FFFFFF"/>
+                </a:solidFill>
+                <a:latin typeface="Meiryo" pitchFamily="34" charset="0"/>
+                <a:ea typeface="Meiryo" pitchFamily="34" charset="-122"/>
+                <a:cs typeface="Meiryo" pitchFamily="34" charset="-120"/>
+              </a:rPr>
+              <a:t>1</a:t>
+            </a:r>
+            <a:endParaRPr lang="en-US" sz="2400" dirty="0"/>
+          </a:p>
+        </p:txBody>
+      </p:sp>
+      <p:sp>
+        <p:nvSpPr>
+          <p:cNvPr id="6" name="Text 3"/>
+          <p:cNvSpPr txBox="1"/>
+          <p:nvPr/>
+        </p:nvSpPr>
+        <p:spPr>
+          <a:xfrm>
+            <a:off x="1298448" y="347472"/>
+            <a:ext cx="10332720" cy="658368"/>
+          </a:xfrm>
+          <a:prstGeom prst="rect">
+            <a:avLst/>
+          </a:prstGeom>
+          <a:noFill/>
+          <a:ln/>
+        </p:spPr>
+        <p:txBody>
+          <a:bodyPr wrap="square" lIns="0" tIns="0" rIns="0" bIns="0" rtlCol="0" anchor="ctr"/>
+          <a:lstStyle/>
+          <a:p>
+            <a:pPr indent="0" marL="0">
+              <a:buNone/>
+            </a:pPr>
+            <a:r>
+              <a:rPr lang="en-US" sz="3000" b="1" dirty="0">
+                <a:solidFill>
+                  <a:srgbClr val="264653"/>
+                </a:solidFill>
+                <a:latin typeface="Meiryo" pitchFamily="34" charset="0"/>
+                <a:ea typeface="Meiryo" pitchFamily="34" charset="-122"/>
+                <a:cs typeface="Meiryo" pitchFamily="34" charset="-120"/>
+              </a:rPr>
+              <a:t>お知らせを出す ─ 題名と本文を書く</a:t>
+            </a:r>
+            <a:endParaRPr lang="en-US" sz="3000" dirty="0"/>
+          </a:p>
+        </p:txBody>
+      </p:sp>
+      <p:pic>
+        <p:nvPicPr>
+          <p:cNvPr id="7" name="Image 1" descr="/sessions/compassionate-sweet-heisenberg/mnt/dev-aspath-life-main/_wp移行素材/★引継ぎ資料/レクチャー素材/crop/11_本文.jpg">    </p:cNvPr>
+          <p:cNvPicPr>
+            <a:picLocks noChangeAspect="1"/>
+          </p:cNvPicPr>
+          <p:nvPr/>
+        </p:nvPicPr>
+        <p:blipFill>
+          <a:blip r:embed="rId2"/>
+          <a:stretch>
+            <a:fillRect/>
+          </a:stretch>
+        </p:blipFill>
+        <p:spPr>
+          <a:xfrm>
             <a:off x="566928" y="1325880"/>
             <a:ext cx="11018520" cy="2002536"/>
           </a:xfrm>
@@ -9365,7 +10037,7 @@
       </p:pic>
       <p:sp>
         <p:nvSpPr>
-          <p:cNvPr id="6" name="Shape 3"/>
+          <p:cNvPr id="8" name="Shape 4"/>
           <p:cNvSpPr/>
           <p:nvPr/>
         </p:nvSpPr>
@@ -9392,7 +10064,7 @@
       </p:sp>
       <p:sp>
         <p:nvSpPr>
-          <p:cNvPr id="7" name="Shape 4"/>
+          <p:cNvPr id="9" name="Shape 5"/>
           <p:cNvSpPr/>
           <p:nvPr/>
         </p:nvSpPr>
@@ -9424,7 +10096,7 @@
       </p:sp>
       <p:sp>
         <p:nvSpPr>
-          <p:cNvPr id="8" name="Text 5"/>
+          <p:cNvPr id="10" name="Text 6"/>
           <p:cNvSpPr txBox="1"/>
           <p:nvPr/>
         </p:nvSpPr>
@@ -9463,7 +10135,7 @@
       </p:sp>
       <p:sp>
         <p:nvSpPr>
-          <p:cNvPr id="9" name="Shape 6"/>
+          <p:cNvPr id="11" name="Shape 7"/>
           <p:cNvSpPr/>
           <p:nvPr/>
         </p:nvSpPr>
@@ -9495,7 +10167,7 @@
       </p:sp>
       <p:sp>
         <p:nvSpPr>
-          <p:cNvPr id="10" name="Text 7"/>
+          <p:cNvPr id="12" name="Text 8"/>
           <p:cNvSpPr txBox="1"/>
           <p:nvPr/>
         </p:nvSpPr>
@@ -9534,7 +10206,7 @@
       </p:sp>
       <p:sp>
         <p:nvSpPr>
-          <p:cNvPr id="11" name="Shape 8"/>
+          <p:cNvPr id="13" name="Shape 9"/>
           <p:cNvSpPr/>
           <p:nvPr/>
         </p:nvSpPr>
@@ -9566,7 +10238,7 @@
       </p:sp>
       <p:sp>
         <p:nvSpPr>
-          <p:cNvPr id="12" name="Text 9"/>
+          <p:cNvPr id="14" name="Text 10"/>
           <p:cNvSpPr txBox="1"/>
           <p:nvPr/>
         </p:nvSpPr>
@@ -9605,7 +10277,7 @@
       </p:sp>
       <p:sp>
         <p:nvSpPr>
-          <p:cNvPr id="13" name="Shape 10"/>
+          <p:cNvPr id="15" name="Shape 11"/>
           <p:cNvSpPr/>
           <p:nvPr/>
         </p:nvSpPr>
@@ -9637,7 +10309,7 @@
       </p:sp>
       <p:sp>
         <p:nvSpPr>
-          <p:cNvPr id="14" name="Text 11"/>
+          <p:cNvPr id="16" name="Text 12"/>
           <p:cNvSpPr txBox="1"/>
           <p:nvPr/>
         </p:nvSpPr>
@@ -9676,7 +10348,7 @@
       </p:sp>
       <p:sp>
         <p:nvSpPr>
-          <p:cNvPr id="15" name="Shape 12"/>
+          <p:cNvPr id="17" name="Shape 13"/>
           <p:cNvSpPr/>
           <p:nvPr/>
         </p:nvSpPr>
@@ -9696,7 +10368,7 @@
       </p:sp>
       <p:sp>
         <p:nvSpPr>
-          <p:cNvPr id="16" name="Text 13"/>
+          <p:cNvPr id="18" name="Text 14"/>
           <p:cNvSpPr txBox="1"/>
           <p:nvPr/>
         </p:nvSpPr>
@@ -9735,7 +10407,7 @@
       </p:sp>
       <p:sp>
         <p:nvSpPr>
-          <p:cNvPr id="17" name="Text 14"/>
+          <p:cNvPr id="19" name="Text 15"/>
           <p:cNvSpPr txBox="1"/>
           <p:nvPr/>
         </p:nvSpPr>
@@ -9791,7 +10463,7 @@
       </p:sp>
       <p:sp>
         <p:nvSpPr>
-          <p:cNvPr id="18" name="Shape 15"/>
+          <p:cNvPr id="20" name="Shape 16"/>
           <p:cNvSpPr/>
           <p:nvPr/>
         </p:nvSpPr>
@@ -9811,7 +10483,7 @@
       </p:sp>
       <p:sp>
         <p:nvSpPr>
-          <p:cNvPr id="19" name="Text 16"/>
+          <p:cNvPr id="21" name="Text 17"/>
           <p:cNvSpPr txBox="1"/>
           <p:nvPr/>
         </p:nvSpPr>
@@ -9850,7 +10522,7 @@
       </p:sp>
       <p:sp>
         <p:nvSpPr>
-          <p:cNvPr id="20" name="Text 17"/>
+          <p:cNvPr id="22" name="Text 18"/>
           <p:cNvSpPr txBox="1"/>
           <p:nvPr/>
         </p:nvSpPr>
@@ -9906,7 +10578,7 @@
       </p:sp>
       <p:sp>
         <p:nvSpPr>
-          <p:cNvPr id="21" name="Shape 18"/>
+          <p:cNvPr id="23" name="Shape 19"/>
           <p:cNvSpPr/>
           <p:nvPr/>
         </p:nvSpPr>
@@ -9926,7 +10598,7 @@
       </p:sp>
       <p:sp>
         <p:nvSpPr>
-          <p:cNvPr id="22" name="Text 19"/>
+          <p:cNvPr id="24" name="Text 20"/>
           <p:cNvSpPr txBox="1"/>
           <p:nvPr/>
         </p:nvSpPr>
@@ -9965,7 +10637,7 @@
       </p:sp>
       <p:sp>
         <p:nvSpPr>
-          <p:cNvPr id="23" name="Text 20"/>
+          <p:cNvPr id="25" name="Text 21"/>
           <p:cNvSpPr txBox="1"/>
           <p:nvPr/>
         </p:nvSpPr>
@@ -10021,7 +10693,7 @@
       </p:sp>
       <p:sp>
         <p:nvSpPr>
-          <p:cNvPr id="24" name="Shape 21"/>
+          <p:cNvPr id="26" name="Shape 22"/>
           <p:cNvSpPr/>
           <p:nvPr/>
         </p:nvSpPr>
@@ -10041,7 +10713,7 @@
       </p:sp>
       <p:sp>
         <p:nvSpPr>
-          <p:cNvPr id="25" name="Text 22"/>
+          <p:cNvPr id="27" name="Text 23"/>
           <p:cNvSpPr txBox="1"/>
           <p:nvPr/>
         </p:nvSpPr>
@@ -10080,7 +10752,7 @@
       </p:sp>
       <p:sp>
         <p:nvSpPr>
-          <p:cNvPr id="26" name="Text 23"/>
+          <p:cNvPr id="28" name="Text 24"/>
           <p:cNvSpPr txBox="1"/>
           <p:nvPr/>
         </p:nvSpPr>
@@ -10136,7 +10808,7 @@
       </p:sp>
       <p:sp>
         <p:nvSpPr>
-          <p:cNvPr id="27" name="Shape 24"/>
+          <p:cNvPr id="29" name="Shape 25"/>
           <p:cNvSpPr/>
           <p:nvPr/>
         </p:nvSpPr>
@@ -10163,7 +10835,7 @@
       </p:sp>
       <p:sp>
         <p:nvSpPr>
-          <p:cNvPr id="28" name="Shape 25"/>
+          <p:cNvPr id="30" name="Shape 26"/>
           <p:cNvSpPr/>
           <p:nvPr/>
         </p:nvSpPr>
@@ -10183,7 +10855,7 @@
       </p:sp>
       <p:sp>
         <p:nvSpPr>
-          <p:cNvPr id="29" name="Text 26"/>
+          <p:cNvPr id="31" name="Text 27"/>
           <p:cNvSpPr txBox="1"/>
           <p:nvPr/>
         </p:nvSpPr>
@@ -10222,7 +10894,7 @@
       </p:sp>
       <p:sp>
         <p:nvSpPr>
-          <p:cNvPr id="30" name="Text 27"/>
+          <p:cNvPr id="32" name="Text 28"/>
           <p:cNvSpPr txBox="1"/>
           <p:nvPr/>
         </p:nvSpPr>
@@ -10308,146 +10980,9 @@
           <a:chExt cx="0" cy="0"/>
         </a:xfrm>
       </p:grpSpPr>
-      <p:sp>
-        <p:nvSpPr>
-          <p:cNvPr id="2" name="Shape 0"/>
-          <p:cNvSpPr/>
-          <p:nvPr/>
-        </p:nvSpPr>
-        <p:spPr>
-          <a:xfrm>
-            <a:off x="548640" y="384048"/>
-            <a:ext cx="566928" cy="566928"/>
-          </a:xfrm>
-          <a:prstGeom prst="ellipse">
-            <a:avLst/>
-          </a:prstGeom>
-          <a:solidFill>
-            <a:srgbClr val="F4A261"/>
-          </a:solidFill>
-          <a:ln/>
-        </p:spPr>
-      </p:sp>
-      <p:sp>
-        <p:nvSpPr>
-          <p:cNvPr id="3" name="Text 1"/>
-          <p:cNvSpPr txBox="1"/>
-          <p:nvPr/>
-        </p:nvSpPr>
-        <p:spPr>
-          <a:xfrm>
-            <a:off x="548640" y="384048"/>
-            <a:ext cx="566928" cy="566928"/>
-          </a:xfrm>
-          <a:prstGeom prst="rect">
-            <a:avLst/>
-          </a:prstGeom>
-          <a:noFill/>
-          <a:ln/>
-        </p:spPr>
-        <p:txBody>
-          <a:bodyPr wrap="square" lIns="0" tIns="0" rIns="0" bIns="0" rtlCol="0" anchor="ctr"/>
-          <a:lstStyle/>
-          <a:p>
-            <a:pPr algn="ctr" indent="0" marL="0">
-              <a:buNone/>
-            </a:pPr>
-            <a:r>
-              <a:rPr lang="en-US" sz="2400" b="1" dirty="0">
-                <a:solidFill>
-                  <a:srgbClr val="FFFFFF"/>
-                </a:solidFill>
-                <a:latin typeface="Meiryo" pitchFamily="34" charset="0"/>
-                <a:ea typeface="Meiryo" pitchFamily="34" charset="-122"/>
-                <a:cs typeface="Meiryo" pitchFamily="34" charset="-120"/>
-              </a:rPr>
-              <a:t>1</a:t>
-            </a:r>
-            <a:endParaRPr lang="en-US" sz="2400" dirty="0"/>
-          </a:p>
-        </p:txBody>
-      </p:sp>
-      <p:sp>
-        <p:nvSpPr>
-          <p:cNvPr id="4" name="Text 2"/>
-          <p:cNvSpPr txBox="1"/>
-          <p:nvPr/>
-        </p:nvSpPr>
-        <p:spPr>
-          <a:xfrm>
-            <a:off x="1298448" y="347472"/>
-            <a:ext cx="10332720" cy="658368"/>
-          </a:xfrm>
-          <a:prstGeom prst="rect">
-            <a:avLst/>
-          </a:prstGeom>
-          <a:noFill/>
-          <a:ln/>
-        </p:spPr>
-        <p:txBody>
-          <a:bodyPr wrap="square" lIns="0" tIns="0" rIns="0" bIns="0" rtlCol="0" anchor="ctr"/>
-          <a:lstStyle/>
-          <a:p>
-            <a:pPr indent="0" marL="0">
-              <a:buNone/>
-            </a:pPr>
-            <a:r>
-              <a:rPr lang="en-US" sz="3000" b="1" dirty="0">
-                <a:solidFill>
-                  <a:srgbClr val="264653"/>
-                </a:solidFill>
-                <a:latin typeface="Meiryo" pitchFamily="34" charset="0"/>
-                <a:ea typeface="Meiryo" pitchFamily="34" charset="-122"/>
-                <a:cs typeface="Meiryo" pitchFamily="34" charset="-120"/>
-              </a:rPr>
-              <a:t>お知らせを出す ─ 「お知らせ」に分類する</a:t>
-            </a:r>
-            <a:endParaRPr lang="en-US" sz="3000" dirty="0"/>
-          </a:p>
-        </p:txBody>
-      </p:sp>
-      <p:sp>
-        <p:nvSpPr>
-          <p:cNvPr id="5" name="Text 3"/>
-          <p:cNvSpPr txBox="1"/>
-          <p:nvPr/>
-        </p:nvSpPr>
-        <p:spPr>
-          <a:xfrm>
-            <a:off x="566928" y="1298448"/>
-            <a:ext cx="6035040" cy="365760"/>
-          </a:xfrm>
-          <a:prstGeom prst="rect">
-            <a:avLst/>
-          </a:prstGeom>
-          <a:noFill/>
-          <a:ln/>
-        </p:spPr>
-        <p:txBody>
-          <a:bodyPr wrap="square" lIns="0" tIns="0" rIns="0" bIns="0" rtlCol="0" anchor="ctr"/>
-          <a:lstStyle/>
-          <a:p>
-            <a:pPr indent="0" marL="0">
-              <a:buNone/>
-            </a:pPr>
-            <a:r>
-              <a:rPr lang="en-US" sz="1500" b="1" dirty="0">
-                <a:solidFill>
-                  <a:srgbClr val="264653"/>
-                </a:solidFill>
-                <a:latin typeface="Meiryo" pitchFamily="34" charset="0"/>
-                <a:ea typeface="Meiryo" pitchFamily="34" charset="-122"/>
-                <a:cs typeface="Meiryo" pitchFamily="34" charset="-120"/>
-              </a:rPr>
-              <a:t>① 右上の四角いアイコンを押して、設定パネルを開く</a:t>
-            </a:r>
-            <a:endParaRPr lang="en-US" sz="1500" dirty="0"/>
-          </a:p>
-        </p:txBody>
-      </p:sp>
       <p:pic>
         <p:nvPicPr>
-          <p:cNvPr id="6" name="Image 0" descr="/sessions/compassionate-sweet-heisenberg/mnt/outputs/レクチャー素材/crop/12a_設定アイコン.jpg">    </p:cNvPr>
+          <p:cNvPr id="2" name="Image 0" descr="/sessions/compassionate-sweet-heisenberg/mnt/dev-aspath-life-main/tools/assets/logo-deck.png">    </p:cNvPr>
           <p:cNvPicPr>
             <a:picLocks noChangeAspect="1"/>
           </p:cNvPicPr>
@@ -10461,6 +10996,206 @@
         </p:blipFill>
         <p:spPr>
           <a:xfrm>
+            <a:off x="11458173" y="109728"/>
+            <a:ext cx="209571" cy="256032"/>
+          </a:xfrm>
+          <a:prstGeom prst="rect">
+            <a:avLst/>
+          </a:prstGeom>
+        </p:spPr>
+      </p:pic>
+      <p:sp>
+        <p:nvSpPr>
+          <p:cNvPr id="3" name="Text 0"/>
+          <p:cNvSpPr txBox="1"/>
+          <p:nvPr/>
+        </p:nvSpPr>
+        <p:spPr>
+          <a:xfrm>
+            <a:off x="8623533" y="128016"/>
+            <a:ext cx="2743200" cy="237744"/>
+          </a:xfrm>
+          <a:prstGeom prst="rect">
+            <a:avLst/>
+          </a:prstGeom>
+          <a:noFill/>
+          <a:ln/>
+        </p:spPr>
+        <p:txBody>
+          <a:bodyPr wrap="square" lIns="0" tIns="0" rIns="0" bIns="0" rtlCol="0" anchor="ctr"/>
+          <a:lstStyle/>
+          <a:p>
+            <a:pPr algn="r" indent="0" marL="0">
+              <a:buNone/>
+            </a:pPr>
+            <a:r>
+              <a:rPr lang="en-US" sz="750" dirty="0">
+                <a:solidFill>
+                  <a:srgbClr val="97A9AF"/>
+                </a:solidFill>
+                <a:latin typeface="Meiryo" pitchFamily="34" charset="0"/>
+                <a:ea typeface="Meiryo" pitchFamily="34" charset="-122"/>
+                <a:cs typeface="Meiryo" pitchFamily="34" charset="-120"/>
+              </a:rPr>
+              <a:t>鹿児島のパーキンソン病専門トレーニングスタジオ</a:t>
+            </a:r>
+            <a:endParaRPr lang="en-US" sz="750" dirty="0"/>
+          </a:p>
+        </p:txBody>
+      </p:sp>
+      <p:sp>
+        <p:nvSpPr>
+          <p:cNvPr id="4" name="Shape 1"/>
+          <p:cNvSpPr/>
+          <p:nvPr/>
+        </p:nvSpPr>
+        <p:spPr>
+          <a:xfrm>
+            <a:off x="548640" y="384048"/>
+            <a:ext cx="566928" cy="566928"/>
+          </a:xfrm>
+          <a:prstGeom prst="ellipse">
+            <a:avLst/>
+          </a:prstGeom>
+          <a:solidFill>
+            <a:srgbClr val="F4A261"/>
+          </a:solidFill>
+          <a:ln/>
+        </p:spPr>
+      </p:sp>
+      <p:sp>
+        <p:nvSpPr>
+          <p:cNvPr id="5" name="Text 2"/>
+          <p:cNvSpPr txBox="1"/>
+          <p:nvPr/>
+        </p:nvSpPr>
+        <p:spPr>
+          <a:xfrm>
+            <a:off x="548640" y="384048"/>
+            <a:ext cx="566928" cy="566928"/>
+          </a:xfrm>
+          <a:prstGeom prst="rect">
+            <a:avLst/>
+          </a:prstGeom>
+          <a:noFill/>
+          <a:ln/>
+        </p:spPr>
+        <p:txBody>
+          <a:bodyPr wrap="square" lIns="0" tIns="0" rIns="0" bIns="0" rtlCol="0" anchor="ctr"/>
+          <a:lstStyle/>
+          <a:p>
+            <a:pPr algn="ctr" indent="0" marL="0">
+              <a:buNone/>
+            </a:pPr>
+            <a:r>
+              <a:rPr lang="en-US" sz="2400" b="1" dirty="0">
+                <a:solidFill>
+                  <a:srgbClr val="FFFFFF"/>
+                </a:solidFill>
+                <a:latin typeface="Meiryo" pitchFamily="34" charset="0"/>
+                <a:ea typeface="Meiryo" pitchFamily="34" charset="-122"/>
+                <a:cs typeface="Meiryo" pitchFamily="34" charset="-120"/>
+              </a:rPr>
+              <a:t>1</a:t>
+            </a:r>
+            <a:endParaRPr lang="en-US" sz="2400" dirty="0"/>
+          </a:p>
+        </p:txBody>
+      </p:sp>
+      <p:sp>
+        <p:nvSpPr>
+          <p:cNvPr id="6" name="Text 3"/>
+          <p:cNvSpPr txBox="1"/>
+          <p:nvPr/>
+        </p:nvSpPr>
+        <p:spPr>
+          <a:xfrm>
+            <a:off x="1298448" y="347472"/>
+            <a:ext cx="10332720" cy="658368"/>
+          </a:xfrm>
+          <a:prstGeom prst="rect">
+            <a:avLst/>
+          </a:prstGeom>
+          <a:noFill/>
+          <a:ln/>
+        </p:spPr>
+        <p:txBody>
+          <a:bodyPr wrap="square" lIns="0" tIns="0" rIns="0" bIns="0" rtlCol="0" anchor="ctr"/>
+          <a:lstStyle/>
+          <a:p>
+            <a:pPr indent="0" marL="0">
+              <a:buNone/>
+            </a:pPr>
+            <a:r>
+              <a:rPr lang="en-US" sz="3000" b="1" dirty="0">
+                <a:solidFill>
+                  <a:srgbClr val="264653"/>
+                </a:solidFill>
+                <a:latin typeface="Meiryo" pitchFamily="34" charset="0"/>
+                <a:ea typeface="Meiryo" pitchFamily="34" charset="-122"/>
+                <a:cs typeface="Meiryo" pitchFamily="34" charset="-120"/>
+              </a:rPr>
+              <a:t>お知らせを出す ─ 「お知らせ」に分類する</a:t>
+            </a:r>
+            <a:endParaRPr lang="en-US" sz="3000" dirty="0"/>
+          </a:p>
+        </p:txBody>
+      </p:sp>
+      <p:sp>
+        <p:nvSpPr>
+          <p:cNvPr id="7" name="Text 4"/>
+          <p:cNvSpPr txBox="1"/>
+          <p:nvPr/>
+        </p:nvSpPr>
+        <p:spPr>
+          <a:xfrm>
+            <a:off x="566928" y="1298448"/>
+            <a:ext cx="6035040" cy="365760"/>
+          </a:xfrm>
+          <a:prstGeom prst="rect">
+            <a:avLst/>
+          </a:prstGeom>
+          <a:noFill/>
+          <a:ln/>
+        </p:spPr>
+        <p:txBody>
+          <a:bodyPr wrap="square" lIns="0" tIns="0" rIns="0" bIns="0" rtlCol="0" anchor="ctr"/>
+          <a:lstStyle/>
+          <a:p>
+            <a:pPr indent="0" marL="0">
+              <a:buNone/>
+            </a:pPr>
+            <a:r>
+              <a:rPr lang="en-US" sz="1500" b="1" dirty="0">
+                <a:solidFill>
+                  <a:srgbClr val="264653"/>
+                </a:solidFill>
+                <a:latin typeface="Meiryo" pitchFamily="34" charset="0"/>
+                <a:ea typeface="Meiryo" pitchFamily="34" charset="-122"/>
+                <a:cs typeface="Meiryo" pitchFamily="34" charset="-120"/>
+              </a:rPr>
+              <a:t>① 右上の四角いアイコンを押して、設定パネルを開く</a:t>
+            </a:r>
+            <a:endParaRPr lang="en-US" sz="1500" dirty="0"/>
+          </a:p>
+        </p:txBody>
+      </p:sp>
+      <p:pic>
+        <p:nvPicPr>
+          <p:cNvPr id="8" name="Image 1" descr="/sessions/compassionate-sweet-heisenberg/mnt/dev-aspath-life-main/_wp移行素材/★引継ぎ資料/レクチャー素材/crop/12a_設定アイコン.jpg">    </p:cNvPr>
+          <p:cNvPicPr>
+            <a:picLocks noChangeAspect="1"/>
+          </p:cNvPicPr>
+          <p:nvPr/>
+        </p:nvPicPr>
+        <p:blipFill>
+          <a:blip r:embed="rId2"/>
+          <a:stretch>
+            <a:fillRect/>
+          </a:stretch>
+        </p:blipFill>
+        <p:spPr>
+          <a:xfrm>
             <a:off x="566928" y="1737360"/>
             <a:ext cx="5120640" cy="2377440"/>
           </a:xfrm>
@@ -10471,7 +11206,7 @@
       </p:pic>
       <p:sp>
         <p:nvSpPr>
-          <p:cNvPr id="7" name="Shape 4"/>
+          <p:cNvPr id="9" name="Shape 5"/>
           <p:cNvSpPr/>
           <p:nvPr/>
         </p:nvSpPr>
@@ -10498,7 +11233,7 @@
       </p:sp>
       <p:sp>
         <p:nvSpPr>
-          <p:cNvPr id="8" name="Shape 5"/>
+          <p:cNvPr id="10" name="Shape 6"/>
           <p:cNvSpPr/>
           <p:nvPr/>
         </p:nvSpPr>
@@ -10530,7 +11265,7 @@
       </p:sp>
       <p:sp>
         <p:nvSpPr>
-          <p:cNvPr id="9" name="Text 6"/>
+          <p:cNvPr id="11" name="Text 7"/>
           <p:cNvSpPr txBox="1"/>
           <p:nvPr/>
         </p:nvSpPr>
@@ -10569,7 +11304,7 @@
       </p:sp>
       <p:sp>
         <p:nvSpPr>
-          <p:cNvPr id="10" name="Text 7"/>
+          <p:cNvPr id="12" name="Text 8"/>
           <p:cNvSpPr txBox="1"/>
           <p:nvPr/>
         </p:nvSpPr>
@@ -10608,14 +11343,14 @@
       </p:sp>
       <p:pic>
         <p:nvPicPr>
-          <p:cNvPr id="11" name="Image 1" descr="/sessions/compassionate-sweet-heisenberg/mnt/outputs/レクチャー素材/crop/12b_カテゴリ欄.jpg">    </p:cNvPr>
+          <p:cNvPr id="13" name="Image 2" descr="/sessions/compassionate-sweet-heisenberg/mnt/dev-aspath-life-main/_wp移行素材/★引継ぎ資料/レクチャー素材/crop/12b_カテゴリ欄.jpg">    </p:cNvPr>
           <p:cNvPicPr>
             <a:picLocks noChangeAspect="1"/>
           </p:cNvPicPr>
           <p:nvPr/>
         </p:nvPicPr>
         <p:blipFill>
-          <a:blip r:embed="rId2"/>
+          <a:blip r:embed="rId3"/>
           <a:stretch>
             <a:fillRect/>
           </a:stretch>
@@ -10632,7 +11367,7 @@
       </p:pic>
       <p:sp>
         <p:nvSpPr>
-          <p:cNvPr id="12" name="Shape 8"/>
+          <p:cNvPr id="14" name="Shape 9"/>
           <p:cNvSpPr/>
           <p:nvPr/>
         </p:nvSpPr>
@@ -10659,7 +11394,7 @@
       </p:sp>
       <p:sp>
         <p:nvSpPr>
-          <p:cNvPr id="13" name="Shape 9"/>
+          <p:cNvPr id="15" name="Shape 10"/>
           <p:cNvSpPr/>
           <p:nvPr/>
         </p:nvSpPr>
@@ -10691,7 +11426,7 @@
       </p:sp>
       <p:sp>
         <p:nvSpPr>
-          <p:cNvPr id="14" name="Text 10"/>
+          <p:cNvPr id="16" name="Text 11"/>
           <p:cNvSpPr txBox="1"/>
           <p:nvPr/>
         </p:nvSpPr>
@@ -10730,7 +11465,7 @@
       </p:sp>
       <p:sp>
         <p:nvSpPr>
-          <p:cNvPr id="15" name="Shape 11"/>
+          <p:cNvPr id="17" name="Shape 12"/>
           <p:cNvSpPr/>
           <p:nvPr/>
         </p:nvSpPr>
@@ -10757,7 +11492,7 @@
       </p:sp>
       <p:sp>
         <p:nvSpPr>
-          <p:cNvPr id="16" name="Shape 12"/>
+          <p:cNvPr id="18" name="Shape 13"/>
           <p:cNvSpPr/>
           <p:nvPr/>
         </p:nvSpPr>
@@ -10777,7 +11512,7 @@
       </p:sp>
       <p:sp>
         <p:nvSpPr>
-          <p:cNvPr id="17" name="Text 13"/>
+          <p:cNvPr id="19" name="Text 14"/>
           <p:cNvSpPr txBox="1"/>
           <p:nvPr/>
         </p:nvSpPr>
@@ -10816,7 +11551,7 @@
       </p:sp>
       <p:sp>
         <p:nvSpPr>
-          <p:cNvPr id="18" name="Text 14"/>
+          <p:cNvPr id="20" name="Text 15"/>
           <p:cNvSpPr txBox="1"/>
           <p:nvPr/>
         </p:nvSpPr>
@@ -10872,7 +11607,7 @@
       </p:sp>
       <p:sp>
         <p:nvSpPr>
-          <p:cNvPr id="19" name="Shape 15"/>
+          <p:cNvPr id="21" name="Shape 16"/>
           <p:cNvSpPr/>
           <p:nvPr/>
         </p:nvSpPr>
@@ -10899,7 +11634,7 @@
       </p:sp>
       <p:sp>
         <p:nvSpPr>
-          <p:cNvPr id="20" name="Shape 16"/>
+          <p:cNvPr id="22" name="Shape 17"/>
           <p:cNvSpPr/>
           <p:nvPr/>
         </p:nvSpPr>
@@ -10919,7 +11654,7 @@
       </p:sp>
       <p:sp>
         <p:nvSpPr>
-          <p:cNvPr id="21" name="Text 17"/>
+          <p:cNvPr id="23" name="Text 18"/>
           <p:cNvSpPr txBox="1"/>
           <p:nvPr/>
         </p:nvSpPr>
@@ -10958,7 +11693,7 @@
       </p:sp>
       <p:sp>
         <p:nvSpPr>
-          <p:cNvPr id="22" name="Text 18"/>
+          <p:cNvPr id="24" name="Text 19"/>
           <p:cNvSpPr txBox="1"/>
           <p:nvPr/>
         </p:nvSpPr>
@@ -11044,146 +11779,9 @@
           <a:chExt cx="0" cy="0"/>
         </a:xfrm>
       </p:grpSpPr>
-      <p:sp>
-        <p:nvSpPr>
-          <p:cNvPr id="2" name="Shape 0"/>
-          <p:cNvSpPr/>
-          <p:nvPr/>
-        </p:nvSpPr>
-        <p:spPr>
-          <a:xfrm>
-            <a:off x="548640" y="384048"/>
-            <a:ext cx="566928" cy="566928"/>
-          </a:xfrm>
-          <a:prstGeom prst="ellipse">
-            <a:avLst/>
-          </a:prstGeom>
-          <a:solidFill>
-            <a:srgbClr val="F4A261"/>
-          </a:solidFill>
-          <a:ln/>
-        </p:spPr>
-      </p:sp>
-      <p:sp>
-        <p:nvSpPr>
-          <p:cNvPr id="3" name="Text 1"/>
-          <p:cNvSpPr txBox="1"/>
-          <p:nvPr/>
-        </p:nvSpPr>
-        <p:spPr>
-          <a:xfrm>
-            <a:off x="548640" y="384048"/>
-            <a:ext cx="566928" cy="566928"/>
-          </a:xfrm>
-          <a:prstGeom prst="rect">
-            <a:avLst/>
-          </a:prstGeom>
-          <a:noFill/>
-          <a:ln/>
-        </p:spPr>
-        <p:txBody>
-          <a:bodyPr wrap="square" lIns="0" tIns="0" rIns="0" bIns="0" rtlCol="0" anchor="ctr"/>
-          <a:lstStyle/>
-          <a:p>
-            <a:pPr algn="ctr" indent="0" marL="0">
-              <a:buNone/>
-            </a:pPr>
-            <a:r>
-              <a:rPr lang="en-US" sz="2400" b="1" dirty="0">
-                <a:solidFill>
-                  <a:srgbClr val="FFFFFF"/>
-                </a:solidFill>
-                <a:latin typeface="Meiryo" pitchFamily="34" charset="0"/>
-                <a:ea typeface="Meiryo" pitchFamily="34" charset="-122"/>
-                <a:cs typeface="Meiryo" pitchFamily="34" charset="-120"/>
-              </a:rPr>
-              <a:t>1</a:t>
-            </a:r>
-            <a:endParaRPr lang="en-US" sz="2400" dirty="0"/>
-          </a:p>
-        </p:txBody>
-      </p:sp>
-      <p:sp>
-        <p:nvSpPr>
-          <p:cNvPr id="4" name="Text 2"/>
-          <p:cNvSpPr txBox="1"/>
-          <p:nvPr/>
-        </p:nvSpPr>
-        <p:spPr>
-          <a:xfrm>
-            <a:off x="1298448" y="347472"/>
-            <a:ext cx="10332720" cy="658368"/>
-          </a:xfrm>
-          <a:prstGeom prst="rect">
-            <a:avLst/>
-          </a:prstGeom>
-          <a:noFill/>
-          <a:ln/>
-        </p:spPr>
-        <p:txBody>
-          <a:bodyPr wrap="square" lIns="0" tIns="0" rIns="0" bIns="0" rtlCol="0" anchor="ctr"/>
-          <a:lstStyle/>
-          <a:p>
-            <a:pPr indent="0" marL="0">
-              <a:buNone/>
-            </a:pPr>
-            <a:r>
-              <a:rPr lang="en-US" sz="3000" b="1" dirty="0">
-                <a:solidFill>
-                  <a:srgbClr val="264653"/>
-                </a:solidFill>
-                <a:latin typeface="Meiryo" pitchFamily="34" charset="0"/>
-                <a:ea typeface="Meiryo" pitchFamily="34" charset="-122"/>
-                <a:cs typeface="Meiryo" pitchFamily="34" charset="-120"/>
-              </a:rPr>
-              <a:t>お知らせを出す ─ 大事なお知らせを先頭に固定する</a:t>
-            </a:r>
-            <a:endParaRPr lang="en-US" sz="3000" dirty="0"/>
-          </a:p>
-        </p:txBody>
-      </p:sp>
-      <p:sp>
-        <p:nvSpPr>
-          <p:cNvPr id="5" name="Text 3"/>
-          <p:cNvSpPr txBox="1"/>
-          <p:nvPr/>
-        </p:nvSpPr>
-        <p:spPr>
-          <a:xfrm>
-            <a:off x="566928" y="1298448"/>
-            <a:ext cx="5486400" cy="365760"/>
-          </a:xfrm>
-          <a:prstGeom prst="rect">
-            <a:avLst/>
-          </a:prstGeom>
-          <a:noFill/>
-          <a:ln/>
-        </p:spPr>
-        <p:txBody>
-          <a:bodyPr wrap="square" lIns="0" tIns="0" rIns="0" bIns="0" rtlCol="0" anchor="ctr"/>
-          <a:lstStyle/>
-          <a:p>
-            <a:pPr indent="0" marL="0">
-              <a:buNone/>
-            </a:pPr>
-            <a:r>
-              <a:rPr lang="en-US" sz="1500" b="1" dirty="0">
-                <a:solidFill>
-                  <a:srgbClr val="264653"/>
-                </a:solidFill>
-                <a:latin typeface="Meiryo" pitchFamily="34" charset="0"/>
-                <a:ea typeface="Meiryo" pitchFamily="34" charset="-122"/>
-                <a:cs typeface="Meiryo" pitchFamily="34" charset="-120"/>
-              </a:rPr>
-              <a:t>① 右側の「ステータス」の文字を押す</a:t>
-            </a:r>
-            <a:endParaRPr lang="en-US" sz="1500" dirty="0"/>
-          </a:p>
-        </p:txBody>
-      </p:sp>
       <p:pic>
         <p:nvPicPr>
-          <p:cNvPr id="6" name="Image 0" descr="/sessions/compassionate-sweet-heisenberg/mnt/outputs/レクチャー素材/crop/13a_ステータス.jpg">    </p:cNvPr>
+          <p:cNvPr id="2" name="Image 0" descr="/sessions/compassionate-sweet-heisenberg/mnt/dev-aspath-life-main/tools/assets/logo-deck.png">    </p:cNvPr>
           <p:cNvPicPr>
             <a:picLocks noChangeAspect="1"/>
           </p:cNvPicPr>
@@ -11197,6 +11795,206 @@
         </p:blipFill>
         <p:spPr>
           <a:xfrm>
+            <a:off x="11458173" y="109728"/>
+            <a:ext cx="209571" cy="256032"/>
+          </a:xfrm>
+          <a:prstGeom prst="rect">
+            <a:avLst/>
+          </a:prstGeom>
+        </p:spPr>
+      </p:pic>
+      <p:sp>
+        <p:nvSpPr>
+          <p:cNvPr id="3" name="Text 0"/>
+          <p:cNvSpPr txBox="1"/>
+          <p:nvPr/>
+        </p:nvSpPr>
+        <p:spPr>
+          <a:xfrm>
+            <a:off x="8623533" y="128016"/>
+            <a:ext cx="2743200" cy="237744"/>
+          </a:xfrm>
+          <a:prstGeom prst="rect">
+            <a:avLst/>
+          </a:prstGeom>
+          <a:noFill/>
+          <a:ln/>
+        </p:spPr>
+        <p:txBody>
+          <a:bodyPr wrap="square" lIns="0" tIns="0" rIns="0" bIns="0" rtlCol="0" anchor="ctr"/>
+          <a:lstStyle/>
+          <a:p>
+            <a:pPr algn="r" indent="0" marL="0">
+              <a:buNone/>
+            </a:pPr>
+            <a:r>
+              <a:rPr lang="en-US" sz="750" dirty="0">
+                <a:solidFill>
+                  <a:srgbClr val="97A9AF"/>
+                </a:solidFill>
+                <a:latin typeface="Meiryo" pitchFamily="34" charset="0"/>
+                <a:ea typeface="Meiryo" pitchFamily="34" charset="-122"/>
+                <a:cs typeface="Meiryo" pitchFamily="34" charset="-120"/>
+              </a:rPr>
+              <a:t>鹿児島のパーキンソン病専門トレーニングスタジオ</a:t>
+            </a:r>
+            <a:endParaRPr lang="en-US" sz="750" dirty="0"/>
+          </a:p>
+        </p:txBody>
+      </p:sp>
+      <p:sp>
+        <p:nvSpPr>
+          <p:cNvPr id="4" name="Shape 1"/>
+          <p:cNvSpPr/>
+          <p:nvPr/>
+        </p:nvSpPr>
+        <p:spPr>
+          <a:xfrm>
+            <a:off x="548640" y="384048"/>
+            <a:ext cx="566928" cy="566928"/>
+          </a:xfrm>
+          <a:prstGeom prst="ellipse">
+            <a:avLst/>
+          </a:prstGeom>
+          <a:solidFill>
+            <a:srgbClr val="F4A261"/>
+          </a:solidFill>
+          <a:ln/>
+        </p:spPr>
+      </p:sp>
+      <p:sp>
+        <p:nvSpPr>
+          <p:cNvPr id="5" name="Text 2"/>
+          <p:cNvSpPr txBox="1"/>
+          <p:nvPr/>
+        </p:nvSpPr>
+        <p:spPr>
+          <a:xfrm>
+            <a:off x="548640" y="384048"/>
+            <a:ext cx="566928" cy="566928"/>
+          </a:xfrm>
+          <a:prstGeom prst="rect">
+            <a:avLst/>
+          </a:prstGeom>
+          <a:noFill/>
+          <a:ln/>
+        </p:spPr>
+        <p:txBody>
+          <a:bodyPr wrap="square" lIns="0" tIns="0" rIns="0" bIns="0" rtlCol="0" anchor="ctr"/>
+          <a:lstStyle/>
+          <a:p>
+            <a:pPr algn="ctr" indent="0" marL="0">
+              <a:buNone/>
+            </a:pPr>
+            <a:r>
+              <a:rPr lang="en-US" sz="2400" b="1" dirty="0">
+                <a:solidFill>
+                  <a:srgbClr val="FFFFFF"/>
+                </a:solidFill>
+                <a:latin typeface="Meiryo" pitchFamily="34" charset="0"/>
+                <a:ea typeface="Meiryo" pitchFamily="34" charset="-122"/>
+                <a:cs typeface="Meiryo" pitchFamily="34" charset="-120"/>
+              </a:rPr>
+              <a:t>1</a:t>
+            </a:r>
+            <a:endParaRPr lang="en-US" sz="2400" dirty="0"/>
+          </a:p>
+        </p:txBody>
+      </p:sp>
+      <p:sp>
+        <p:nvSpPr>
+          <p:cNvPr id="6" name="Text 3"/>
+          <p:cNvSpPr txBox="1"/>
+          <p:nvPr/>
+        </p:nvSpPr>
+        <p:spPr>
+          <a:xfrm>
+            <a:off x="1298448" y="347472"/>
+            <a:ext cx="10332720" cy="658368"/>
+          </a:xfrm>
+          <a:prstGeom prst="rect">
+            <a:avLst/>
+          </a:prstGeom>
+          <a:noFill/>
+          <a:ln/>
+        </p:spPr>
+        <p:txBody>
+          <a:bodyPr wrap="square" lIns="0" tIns="0" rIns="0" bIns="0" rtlCol="0" anchor="ctr"/>
+          <a:lstStyle/>
+          <a:p>
+            <a:pPr indent="0" marL="0">
+              <a:buNone/>
+            </a:pPr>
+            <a:r>
+              <a:rPr lang="en-US" sz="3000" b="1" dirty="0">
+                <a:solidFill>
+                  <a:srgbClr val="264653"/>
+                </a:solidFill>
+                <a:latin typeface="Meiryo" pitchFamily="34" charset="0"/>
+                <a:ea typeface="Meiryo" pitchFamily="34" charset="-122"/>
+                <a:cs typeface="Meiryo" pitchFamily="34" charset="-120"/>
+              </a:rPr>
+              <a:t>お知らせを出す ─ 大事なお知らせを先頭に固定する</a:t>
+            </a:r>
+            <a:endParaRPr lang="en-US" sz="3000" dirty="0"/>
+          </a:p>
+        </p:txBody>
+      </p:sp>
+      <p:sp>
+        <p:nvSpPr>
+          <p:cNvPr id="7" name="Text 4"/>
+          <p:cNvSpPr txBox="1"/>
+          <p:nvPr/>
+        </p:nvSpPr>
+        <p:spPr>
+          <a:xfrm>
+            <a:off x="566928" y="1298448"/>
+            <a:ext cx="5486400" cy="365760"/>
+          </a:xfrm>
+          <a:prstGeom prst="rect">
+            <a:avLst/>
+          </a:prstGeom>
+          <a:noFill/>
+          <a:ln/>
+        </p:spPr>
+        <p:txBody>
+          <a:bodyPr wrap="square" lIns="0" tIns="0" rIns="0" bIns="0" rtlCol="0" anchor="ctr"/>
+          <a:lstStyle/>
+          <a:p>
+            <a:pPr indent="0" marL="0">
+              <a:buNone/>
+            </a:pPr>
+            <a:r>
+              <a:rPr lang="en-US" sz="1500" b="1" dirty="0">
+                <a:solidFill>
+                  <a:srgbClr val="264653"/>
+                </a:solidFill>
+                <a:latin typeface="Meiryo" pitchFamily="34" charset="0"/>
+                <a:ea typeface="Meiryo" pitchFamily="34" charset="-122"/>
+                <a:cs typeface="Meiryo" pitchFamily="34" charset="-120"/>
+              </a:rPr>
+              <a:t>① 右側の「ステータス」の文字を押す</a:t>
+            </a:r>
+            <a:endParaRPr lang="en-US" sz="1500" dirty="0"/>
+          </a:p>
+        </p:txBody>
+      </p:sp>
+      <p:pic>
+        <p:nvPicPr>
+          <p:cNvPr id="8" name="Image 1" descr="/sessions/compassionate-sweet-heisenberg/mnt/dev-aspath-life-main/_wp移行素材/★引継ぎ資料/レクチャー素材/crop/13a_ステータス.jpg">    </p:cNvPr>
+          <p:cNvPicPr>
+            <a:picLocks noChangeAspect="1"/>
+          </p:cNvPicPr>
+          <p:nvPr/>
+        </p:nvPicPr>
+        <p:blipFill>
+          <a:blip r:embed="rId2"/>
+          <a:stretch>
+            <a:fillRect/>
+          </a:stretch>
+        </p:blipFill>
+        <p:spPr>
+          <a:xfrm>
             <a:off x="566928" y="1737360"/>
             <a:ext cx="4937760" cy="859536"/>
           </a:xfrm>
@@ -11207,7 +12005,7 @@
       </p:pic>
       <p:sp>
         <p:nvSpPr>
-          <p:cNvPr id="7" name="Shape 4"/>
+          <p:cNvPr id="9" name="Shape 5"/>
           <p:cNvSpPr/>
           <p:nvPr/>
         </p:nvSpPr>
@@ -11234,7 +12032,7 @@
       </p:sp>
       <p:sp>
         <p:nvSpPr>
-          <p:cNvPr id="8" name="Shape 5"/>
+          <p:cNvPr id="10" name="Shape 6"/>
           <p:cNvSpPr/>
           <p:nvPr/>
         </p:nvSpPr>
@@ -11266,7 +12064,7 @@
       </p:sp>
       <p:sp>
         <p:nvSpPr>
-          <p:cNvPr id="9" name="Text 6"/>
+          <p:cNvPr id="11" name="Text 7"/>
           <p:cNvSpPr txBox="1"/>
           <p:nvPr/>
         </p:nvSpPr>
@@ -11305,7 +12103,7 @@
       </p:sp>
       <p:sp>
         <p:nvSpPr>
-          <p:cNvPr id="10" name="Text 7"/>
+          <p:cNvPr id="12" name="Text 8"/>
           <p:cNvSpPr txBox="1"/>
           <p:nvPr/>
         </p:nvSpPr>
@@ -11344,14 +12142,14 @@
       </p:sp>
       <p:pic>
         <p:nvPicPr>
-          <p:cNvPr id="11" name="Image 1" descr="/sessions/compassionate-sweet-heisenberg/mnt/outputs/レクチャー素材/crop/13b_固定ポップ.jpg">    </p:cNvPr>
+          <p:cNvPr id="13" name="Image 2" descr="/sessions/compassionate-sweet-heisenberg/mnt/dev-aspath-life-main/_wp移行素材/★引継ぎ資料/レクチャー素材/crop/13b_固定ポップ.jpg">    </p:cNvPr>
           <p:cNvPicPr>
             <a:picLocks noChangeAspect="1"/>
           </p:cNvPicPr>
           <p:nvPr/>
         </p:nvPicPr>
         <p:blipFill>
-          <a:blip r:embed="rId2"/>
+          <a:blip r:embed="rId3"/>
           <a:stretch>
             <a:fillRect/>
           </a:stretch>
@@ -11368,7 +12166,7 @@
       </p:pic>
       <p:sp>
         <p:nvSpPr>
-          <p:cNvPr id="12" name="Shape 8"/>
+          <p:cNvPr id="14" name="Shape 9"/>
           <p:cNvSpPr/>
           <p:nvPr/>
         </p:nvSpPr>
@@ -11395,7 +12193,7 @@
       </p:sp>
       <p:sp>
         <p:nvSpPr>
-          <p:cNvPr id="13" name="Shape 9"/>
+          <p:cNvPr id="15" name="Shape 10"/>
           <p:cNvSpPr/>
           <p:nvPr/>
         </p:nvSpPr>
@@ -11427,7 +12225,7 @@
       </p:sp>
       <p:sp>
         <p:nvSpPr>
-          <p:cNvPr id="14" name="Text 10"/>
+          <p:cNvPr id="16" name="Text 11"/>
           <p:cNvSpPr txBox="1"/>
           <p:nvPr/>
         </p:nvSpPr>
@@ -11466,7 +12264,7 @@
       </p:sp>
       <p:sp>
         <p:nvSpPr>
-          <p:cNvPr id="15" name="Shape 11"/>
+          <p:cNvPr id="17" name="Shape 12"/>
           <p:cNvSpPr/>
           <p:nvPr/>
         </p:nvSpPr>
@@ -11493,7 +12291,7 @@
       </p:sp>
       <p:sp>
         <p:nvSpPr>
-          <p:cNvPr id="16" name="Shape 12"/>
+          <p:cNvPr id="18" name="Shape 13"/>
           <p:cNvSpPr/>
           <p:nvPr/>
         </p:nvSpPr>
@@ -11513,7 +12311,7 @@
       </p:sp>
       <p:sp>
         <p:nvSpPr>
-          <p:cNvPr id="17" name="Text 13"/>
+          <p:cNvPr id="19" name="Text 14"/>
           <p:cNvSpPr txBox="1"/>
           <p:nvPr/>
         </p:nvSpPr>
@@ -11552,7 +12350,7 @@
       </p:sp>
       <p:sp>
         <p:nvSpPr>
-          <p:cNvPr id="18" name="Text 14"/>
+          <p:cNvPr id="20" name="Text 15"/>
           <p:cNvSpPr txBox="1"/>
           <p:nvPr/>
         </p:nvSpPr>
@@ -11608,7 +12406,7 @@
       </p:sp>
       <p:sp>
         <p:nvSpPr>
-          <p:cNvPr id="19" name="Shape 15"/>
+          <p:cNvPr id="21" name="Shape 16"/>
           <p:cNvSpPr/>
           <p:nvPr/>
         </p:nvSpPr>
@@ -11635,7 +12433,7 @@
       </p:sp>
       <p:sp>
         <p:nvSpPr>
-          <p:cNvPr id="20" name="Shape 16"/>
+          <p:cNvPr id="22" name="Shape 17"/>
           <p:cNvSpPr/>
           <p:nvPr/>
         </p:nvSpPr>
@@ -11655,7 +12453,7 @@
       </p:sp>
       <p:sp>
         <p:nvSpPr>
-          <p:cNvPr id="21" name="Text 17"/>
+          <p:cNvPr id="23" name="Text 18"/>
           <p:cNvSpPr txBox="1"/>
           <p:nvPr/>
         </p:nvSpPr>
@@ -11694,7 +12492,7 @@
       </p:sp>
       <p:sp>
         <p:nvSpPr>
-          <p:cNvPr id="22" name="Text 18"/>
+          <p:cNvPr id="24" name="Text 19"/>
           <p:cNvSpPr txBox="1"/>
           <p:nvPr/>
         </p:nvSpPr>
@@ -11780,107 +12578,9 @@
           <a:chExt cx="0" cy="0"/>
         </a:xfrm>
       </p:grpSpPr>
-      <p:sp>
-        <p:nvSpPr>
-          <p:cNvPr id="2" name="Shape 0"/>
-          <p:cNvSpPr/>
-          <p:nvPr/>
-        </p:nvSpPr>
-        <p:spPr>
-          <a:xfrm>
-            <a:off x="548640" y="384048"/>
-            <a:ext cx="566928" cy="566928"/>
-          </a:xfrm>
-          <a:prstGeom prst="ellipse">
-            <a:avLst/>
-          </a:prstGeom>
-          <a:solidFill>
-            <a:srgbClr val="F4A261"/>
-          </a:solidFill>
-          <a:ln/>
-        </p:spPr>
-      </p:sp>
-      <p:sp>
-        <p:nvSpPr>
-          <p:cNvPr id="3" name="Text 1"/>
-          <p:cNvSpPr txBox="1"/>
-          <p:nvPr/>
-        </p:nvSpPr>
-        <p:spPr>
-          <a:xfrm>
-            <a:off x="548640" y="384048"/>
-            <a:ext cx="566928" cy="566928"/>
-          </a:xfrm>
-          <a:prstGeom prst="rect">
-            <a:avLst/>
-          </a:prstGeom>
-          <a:noFill/>
-          <a:ln/>
-        </p:spPr>
-        <p:txBody>
-          <a:bodyPr wrap="square" lIns="0" tIns="0" rIns="0" bIns="0" rtlCol="0" anchor="ctr"/>
-          <a:lstStyle/>
-          <a:p>
-            <a:pPr algn="ctr" indent="0" marL="0">
-              <a:buNone/>
-            </a:pPr>
-            <a:r>
-              <a:rPr lang="en-US" sz="2400" b="1" dirty="0">
-                <a:solidFill>
-                  <a:srgbClr val="FFFFFF"/>
-                </a:solidFill>
-                <a:latin typeface="Meiryo" pitchFamily="34" charset="0"/>
-                <a:ea typeface="Meiryo" pitchFamily="34" charset="-122"/>
-                <a:cs typeface="Meiryo" pitchFamily="34" charset="-120"/>
-              </a:rPr>
-              <a:t>2</a:t>
-            </a:r>
-            <a:endParaRPr lang="en-US" sz="2400" dirty="0"/>
-          </a:p>
-        </p:txBody>
-      </p:sp>
-      <p:sp>
-        <p:nvSpPr>
-          <p:cNvPr id="4" name="Text 2"/>
-          <p:cNvSpPr txBox="1"/>
-          <p:nvPr/>
-        </p:nvSpPr>
-        <p:spPr>
-          <a:xfrm>
-            <a:off x="1298448" y="347472"/>
-            <a:ext cx="10332720" cy="658368"/>
-          </a:xfrm>
-          <a:prstGeom prst="rect">
-            <a:avLst/>
-          </a:prstGeom>
-          <a:noFill/>
-          <a:ln/>
-        </p:spPr>
-        <p:txBody>
-          <a:bodyPr wrap="square" lIns="0" tIns="0" rIns="0" bIns="0" rtlCol="0" anchor="ctr"/>
-          <a:lstStyle/>
-          <a:p>
-            <a:pPr indent="0" marL="0">
-              <a:buNone/>
-            </a:pPr>
-            <a:r>
-              <a:rPr lang="en-US" sz="3000" b="1" dirty="0">
-                <a:solidFill>
-                  <a:srgbClr val="264653"/>
-                </a:solidFill>
-                <a:latin typeface="Meiryo" pitchFamily="34" charset="0"/>
-                <a:ea typeface="Meiryo" pitchFamily="34" charset="-122"/>
-                <a:cs typeface="Meiryo" pitchFamily="34" charset="-120"/>
-              </a:rPr>
-              <a:t>初回体験の申込を見る ─ 一覧を開く</a:t>
-            </a:r>
-            <a:endParaRPr lang="en-US" sz="3000" dirty="0"/>
-          </a:p>
-        </p:txBody>
-      </p:sp>
       <p:pic>
         <p:nvPicPr>
-          <p:cNvPr id="5" name="Image 0" descr="/sessions/compassionate-sweet-heisenberg/mnt/outputs/レクチャー素材/crop/21_一覧.jpg">    </p:cNvPr>
+          <p:cNvPr id="2" name="Image 0" descr="/sessions/compassionate-sweet-heisenberg/mnt/dev-aspath-life-main/tools/assets/logo-deck.png">    </p:cNvPr>
           <p:cNvPicPr>
             <a:picLocks noChangeAspect="1"/>
           </p:cNvPicPr>
@@ -11894,6 +12594,167 @@
         </p:blipFill>
         <p:spPr>
           <a:xfrm>
+            <a:off x="11458173" y="109728"/>
+            <a:ext cx="209571" cy="256032"/>
+          </a:xfrm>
+          <a:prstGeom prst="rect">
+            <a:avLst/>
+          </a:prstGeom>
+        </p:spPr>
+      </p:pic>
+      <p:sp>
+        <p:nvSpPr>
+          <p:cNvPr id="3" name="Text 0"/>
+          <p:cNvSpPr txBox="1"/>
+          <p:nvPr/>
+        </p:nvSpPr>
+        <p:spPr>
+          <a:xfrm>
+            <a:off x="8623533" y="128016"/>
+            <a:ext cx="2743200" cy="237744"/>
+          </a:xfrm>
+          <a:prstGeom prst="rect">
+            <a:avLst/>
+          </a:prstGeom>
+          <a:noFill/>
+          <a:ln/>
+        </p:spPr>
+        <p:txBody>
+          <a:bodyPr wrap="square" lIns="0" tIns="0" rIns="0" bIns="0" rtlCol="0" anchor="ctr"/>
+          <a:lstStyle/>
+          <a:p>
+            <a:pPr algn="r" indent="0" marL="0">
+              <a:buNone/>
+            </a:pPr>
+            <a:r>
+              <a:rPr lang="en-US" sz="750" dirty="0">
+                <a:solidFill>
+                  <a:srgbClr val="97A9AF"/>
+                </a:solidFill>
+                <a:latin typeface="Meiryo" pitchFamily="34" charset="0"/>
+                <a:ea typeface="Meiryo" pitchFamily="34" charset="-122"/>
+                <a:cs typeface="Meiryo" pitchFamily="34" charset="-120"/>
+              </a:rPr>
+              <a:t>鹿児島のパーキンソン病専門トレーニングスタジオ</a:t>
+            </a:r>
+            <a:endParaRPr lang="en-US" sz="750" dirty="0"/>
+          </a:p>
+        </p:txBody>
+      </p:sp>
+      <p:sp>
+        <p:nvSpPr>
+          <p:cNvPr id="4" name="Shape 1"/>
+          <p:cNvSpPr/>
+          <p:nvPr/>
+        </p:nvSpPr>
+        <p:spPr>
+          <a:xfrm>
+            <a:off x="548640" y="384048"/>
+            <a:ext cx="566928" cy="566928"/>
+          </a:xfrm>
+          <a:prstGeom prst="ellipse">
+            <a:avLst/>
+          </a:prstGeom>
+          <a:solidFill>
+            <a:srgbClr val="F4A261"/>
+          </a:solidFill>
+          <a:ln/>
+        </p:spPr>
+      </p:sp>
+      <p:sp>
+        <p:nvSpPr>
+          <p:cNvPr id="5" name="Text 2"/>
+          <p:cNvSpPr txBox="1"/>
+          <p:nvPr/>
+        </p:nvSpPr>
+        <p:spPr>
+          <a:xfrm>
+            <a:off x="548640" y="384048"/>
+            <a:ext cx="566928" cy="566928"/>
+          </a:xfrm>
+          <a:prstGeom prst="rect">
+            <a:avLst/>
+          </a:prstGeom>
+          <a:noFill/>
+          <a:ln/>
+        </p:spPr>
+        <p:txBody>
+          <a:bodyPr wrap="square" lIns="0" tIns="0" rIns="0" bIns="0" rtlCol="0" anchor="ctr"/>
+          <a:lstStyle/>
+          <a:p>
+            <a:pPr algn="ctr" indent="0" marL="0">
+              <a:buNone/>
+            </a:pPr>
+            <a:r>
+              <a:rPr lang="en-US" sz="2400" b="1" dirty="0">
+                <a:solidFill>
+                  <a:srgbClr val="FFFFFF"/>
+                </a:solidFill>
+                <a:latin typeface="Meiryo" pitchFamily="34" charset="0"/>
+                <a:ea typeface="Meiryo" pitchFamily="34" charset="-122"/>
+                <a:cs typeface="Meiryo" pitchFamily="34" charset="-120"/>
+              </a:rPr>
+              <a:t>2</a:t>
+            </a:r>
+            <a:endParaRPr lang="en-US" sz="2400" dirty="0"/>
+          </a:p>
+        </p:txBody>
+      </p:sp>
+      <p:sp>
+        <p:nvSpPr>
+          <p:cNvPr id="6" name="Text 3"/>
+          <p:cNvSpPr txBox="1"/>
+          <p:nvPr/>
+        </p:nvSpPr>
+        <p:spPr>
+          <a:xfrm>
+            <a:off x="1298448" y="347472"/>
+            <a:ext cx="10332720" cy="658368"/>
+          </a:xfrm>
+          <a:prstGeom prst="rect">
+            <a:avLst/>
+          </a:prstGeom>
+          <a:noFill/>
+          <a:ln/>
+        </p:spPr>
+        <p:txBody>
+          <a:bodyPr wrap="square" lIns="0" tIns="0" rIns="0" bIns="0" rtlCol="0" anchor="ctr"/>
+          <a:lstStyle/>
+          <a:p>
+            <a:pPr indent="0" marL="0">
+              <a:buNone/>
+            </a:pPr>
+            <a:r>
+              <a:rPr lang="en-US" sz="3000" b="1" dirty="0">
+                <a:solidFill>
+                  <a:srgbClr val="264653"/>
+                </a:solidFill>
+                <a:latin typeface="Meiryo" pitchFamily="34" charset="0"/>
+                <a:ea typeface="Meiryo" pitchFamily="34" charset="-122"/>
+                <a:cs typeface="Meiryo" pitchFamily="34" charset="-120"/>
+              </a:rPr>
+              <a:t>初回体験の申込を見る ─ 一覧を開く</a:t>
+            </a:r>
+            <a:endParaRPr lang="en-US" sz="3000" dirty="0"/>
+          </a:p>
+        </p:txBody>
+      </p:sp>
+      <p:pic>
+        <p:nvPicPr>
+          <p:cNvPr id="7" name="Image 1" descr="/sessions/compassionate-sweet-heisenberg/mnt/dev-aspath-life-main/_wp移行素材/★引継ぎ資料/レクチャー素材/crop/21_一覧.jpg">    </p:cNvPr>
+          <p:cNvPicPr>
+            <a:picLocks noChangeAspect="1"/>
+          </p:cNvPicPr>
+          <p:nvPr/>
+        </p:nvPicPr>
+        <p:blipFill>
+          <a:blip r:embed="rId2"/>
+          <a:stretch>
+            <a:fillRect/>
+          </a:stretch>
+        </p:blipFill>
+        <p:spPr>
+          <a:xfrm>
             <a:off x="566928" y="1325880"/>
             <a:ext cx="11018520" cy="2039112"/>
           </a:xfrm>
@@ -11904,7 +12765,7 @@
       </p:pic>
       <p:sp>
         <p:nvSpPr>
-          <p:cNvPr id="6" name="Shape 3"/>
+          <p:cNvPr id="8" name="Shape 4"/>
           <p:cNvSpPr/>
           <p:nvPr/>
         </p:nvSpPr>
@@ -11931,7 +12792,7 @@
       </p:sp>
       <p:sp>
         <p:nvSpPr>
-          <p:cNvPr id="7" name="Shape 4"/>
+          <p:cNvPr id="9" name="Shape 5"/>
           <p:cNvSpPr/>
           <p:nvPr/>
         </p:nvSpPr>
@@ -11963,7 +12824,7 @@
       </p:sp>
       <p:sp>
         <p:nvSpPr>
-          <p:cNvPr id="8" name="Text 5"/>
+          <p:cNvPr id="10" name="Text 6"/>
           <p:cNvSpPr txBox="1"/>
           <p:nvPr/>
         </p:nvSpPr>
@@ -12002,7 +12863,7 @@
       </p:sp>
       <p:sp>
         <p:nvSpPr>
-          <p:cNvPr id="9" name="Shape 6"/>
+          <p:cNvPr id="11" name="Shape 7"/>
           <p:cNvSpPr/>
           <p:nvPr/>
         </p:nvSpPr>
@@ -12034,7 +12895,7 @@
       </p:sp>
       <p:sp>
         <p:nvSpPr>
-          <p:cNvPr id="10" name="Text 7"/>
+          <p:cNvPr id="12" name="Text 8"/>
           <p:cNvSpPr txBox="1"/>
           <p:nvPr/>
         </p:nvSpPr>
@@ -12073,7 +12934,7 @@
       </p:sp>
       <p:sp>
         <p:nvSpPr>
-          <p:cNvPr id="11" name="Shape 8"/>
+          <p:cNvPr id="13" name="Shape 9"/>
           <p:cNvSpPr/>
           <p:nvPr/>
         </p:nvSpPr>
@@ -12093,7 +12954,7 @@
       </p:sp>
       <p:sp>
         <p:nvSpPr>
-          <p:cNvPr id="12" name="Text 9"/>
+          <p:cNvPr id="14" name="Text 10"/>
           <p:cNvSpPr txBox="1"/>
           <p:nvPr/>
         </p:nvSpPr>
@@ -12132,7 +12993,7 @@
       </p:sp>
       <p:sp>
         <p:nvSpPr>
-          <p:cNvPr id="13" name="Text 10"/>
+          <p:cNvPr id="15" name="Text 11"/>
           <p:cNvSpPr txBox="1"/>
           <p:nvPr/>
         </p:nvSpPr>
@@ -12188,7 +13049,7 @@
       </p:sp>
       <p:sp>
         <p:nvSpPr>
-          <p:cNvPr id="14" name="Shape 11"/>
+          <p:cNvPr id="16" name="Shape 12"/>
           <p:cNvSpPr/>
           <p:nvPr/>
         </p:nvSpPr>
@@ -12208,7 +13069,7 @@
       </p:sp>
       <p:sp>
         <p:nvSpPr>
-          <p:cNvPr id="15" name="Text 12"/>
+          <p:cNvPr id="17" name="Text 13"/>
           <p:cNvSpPr txBox="1"/>
           <p:nvPr/>
         </p:nvSpPr>
@@ -12247,7 +13108,7 @@
       </p:sp>
       <p:sp>
         <p:nvSpPr>
-          <p:cNvPr id="16" name="Text 13"/>
+          <p:cNvPr id="18" name="Text 14"/>
           <p:cNvSpPr txBox="1"/>
           <p:nvPr/>
         </p:nvSpPr>
@@ -12303,7 +13164,7 @@
       </p:sp>
       <p:sp>
         <p:nvSpPr>
-          <p:cNvPr id="17" name="Shape 14"/>
+          <p:cNvPr id="19" name="Shape 15"/>
           <p:cNvSpPr/>
           <p:nvPr/>
         </p:nvSpPr>
@@ -12330,7 +13191,7 @@
       </p:sp>
       <p:sp>
         <p:nvSpPr>
-          <p:cNvPr id="18" name="Shape 15"/>
+          <p:cNvPr id="20" name="Shape 16"/>
           <p:cNvSpPr/>
           <p:nvPr/>
         </p:nvSpPr>
@@ -12350,7 +13211,7 @@
       </p:sp>
       <p:sp>
         <p:nvSpPr>
-          <p:cNvPr id="19" name="Text 16"/>
+          <p:cNvPr id="21" name="Text 17"/>
           <p:cNvSpPr txBox="1"/>
           <p:nvPr/>
         </p:nvSpPr>
@@ -12389,7 +13250,7 @@
       </p:sp>
       <p:sp>
         <p:nvSpPr>
-          <p:cNvPr id="20" name="Text 17"/>
+          <p:cNvPr id="22" name="Text 18"/>
           <p:cNvSpPr txBox="1"/>
           <p:nvPr/>
         </p:nvSpPr>
@@ -12475,107 +13336,9 @@
           <a:chExt cx="0" cy="0"/>
         </a:xfrm>
       </p:grpSpPr>
-      <p:sp>
-        <p:nvSpPr>
-          <p:cNvPr id="2" name="Shape 0"/>
-          <p:cNvSpPr/>
-          <p:nvPr/>
-        </p:nvSpPr>
-        <p:spPr>
-          <a:xfrm>
-            <a:off x="548640" y="384048"/>
-            <a:ext cx="566928" cy="566928"/>
-          </a:xfrm>
-          <a:prstGeom prst="ellipse">
-            <a:avLst/>
-          </a:prstGeom>
-          <a:solidFill>
-            <a:srgbClr val="F4A261"/>
-          </a:solidFill>
-          <a:ln/>
-        </p:spPr>
-      </p:sp>
-      <p:sp>
-        <p:nvSpPr>
-          <p:cNvPr id="3" name="Text 1"/>
-          <p:cNvSpPr txBox="1"/>
-          <p:nvPr/>
-        </p:nvSpPr>
-        <p:spPr>
-          <a:xfrm>
-            <a:off x="548640" y="384048"/>
-            <a:ext cx="566928" cy="566928"/>
-          </a:xfrm>
-          <a:prstGeom prst="rect">
-            <a:avLst/>
-          </a:prstGeom>
-          <a:noFill/>
-          <a:ln/>
-        </p:spPr>
-        <p:txBody>
-          <a:bodyPr wrap="square" lIns="0" tIns="0" rIns="0" bIns="0" rtlCol="0" anchor="ctr"/>
-          <a:lstStyle/>
-          <a:p>
-            <a:pPr algn="ctr" indent="0" marL="0">
-              <a:buNone/>
-            </a:pPr>
-            <a:r>
-              <a:rPr lang="en-US" sz="2400" b="1" dirty="0">
-                <a:solidFill>
-                  <a:srgbClr val="FFFFFF"/>
-                </a:solidFill>
-                <a:latin typeface="Meiryo" pitchFamily="34" charset="0"/>
-                <a:ea typeface="Meiryo" pitchFamily="34" charset="-122"/>
-                <a:cs typeface="Meiryo" pitchFamily="34" charset="-120"/>
-              </a:rPr>
-              <a:t>2</a:t>
-            </a:r>
-            <a:endParaRPr lang="en-US" sz="2400" dirty="0"/>
-          </a:p>
-        </p:txBody>
-      </p:sp>
-      <p:sp>
-        <p:nvSpPr>
-          <p:cNvPr id="4" name="Text 2"/>
-          <p:cNvSpPr txBox="1"/>
-          <p:nvPr/>
-        </p:nvSpPr>
-        <p:spPr>
-          <a:xfrm>
-            <a:off x="1298448" y="347472"/>
-            <a:ext cx="10332720" cy="658368"/>
-          </a:xfrm>
-          <a:prstGeom prst="rect">
-            <a:avLst/>
-          </a:prstGeom>
-          <a:noFill/>
-          <a:ln/>
-        </p:spPr>
-        <p:txBody>
-          <a:bodyPr wrap="square" lIns="0" tIns="0" rIns="0" bIns="0" rtlCol="0" anchor="ctr"/>
-          <a:lstStyle/>
-          <a:p>
-            <a:pPr indent="0" marL="0">
-              <a:buNone/>
-            </a:pPr>
-            <a:r>
-              <a:rPr lang="en-US" sz="3000" b="1" dirty="0">
-                <a:solidFill>
-                  <a:srgbClr val="264653"/>
-                </a:solidFill>
-                <a:latin typeface="Meiryo" pitchFamily="34" charset="0"/>
-                <a:ea typeface="Meiryo" pitchFamily="34" charset="-122"/>
-                <a:cs typeface="Meiryo" pitchFamily="34" charset="-120"/>
-              </a:rPr>
-              <a:t>初回体験の申込を見る ─ 中身を確認する</a:t>
-            </a:r>
-            <a:endParaRPr lang="en-US" sz="3000" dirty="0"/>
-          </a:p>
-        </p:txBody>
-      </p:sp>
       <p:pic>
         <p:nvPicPr>
-          <p:cNvPr id="5" name="Image 0" descr="/sessions/compassionate-sweet-heisenberg/mnt/outputs/レクチャー素材/crop/22_中身.jpg">    </p:cNvPr>
+          <p:cNvPr id="2" name="Image 0" descr="/sessions/compassionate-sweet-heisenberg/mnt/dev-aspath-life-main/tools/assets/logo-deck.png">    </p:cNvPr>
           <p:cNvPicPr>
             <a:picLocks noChangeAspect="1"/>
           </p:cNvPicPr>
@@ -12589,6 +13352,167 @@
         </p:blipFill>
         <p:spPr>
           <a:xfrm>
+            <a:off x="11458173" y="109728"/>
+            <a:ext cx="209571" cy="256032"/>
+          </a:xfrm>
+          <a:prstGeom prst="rect">
+            <a:avLst/>
+          </a:prstGeom>
+        </p:spPr>
+      </p:pic>
+      <p:sp>
+        <p:nvSpPr>
+          <p:cNvPr id="3" name="Text 0"/>
+          <p:cNvSpPr txBox="1"/>
+          <p:nvPr/>
+        </p:nvSpPr>
+        <p:spPr>
+          <a:xfrm>
+            <a:off x="8623533" y="128016"/>
+            <a:ext cx="2743200" cy="237744"/>
+          </a:xfrm>
+          <a:prstGeom prst="rect">
+            <a:avLst/>
+          </a:prstGeom>
+          <a:noFill/>
+          <a:ln/>
+        </p:spPr>
+        <p:txBody>
+          <a:bodyPr wrap="square" lIns="0" tIns="0" rIns="0" bIns="0" rtlCol="0" anchor="ctr"/>
+          <a:lstStyle/>
+          <a:p>
+            <a:pPr algn="r" indent="0" marL="0">
+              <a:buNone/>
+            </a:pPr>
+            <a:r>
+              <a:rPr lang="en-US" sz="750" dirty="0">
+                <a:solidFill>
+                  <a:srgbClr val="97A9AF"/>
+                </a:solidFill>
+                <a:latin typeface="Meiryo" pitchFamily="34" charset="0"/>
+                <a:ea typeface="Meiryo" pitchFamily="34" charset="-122"/>
+                <a:cs typeface="Meiryo" pitchFamily="34" charset="-120"/>
+              </a:rPr>
+              <a:t>鹿児島のパーキンソン病専門トレーニングスタジオ</a:t>
+            </a:r>
+            <a:endParaRPr lang="en-US" sz="750" dirty="0"/>
+          </a:p>
+        </p:txBody>
+      </p:sp>
+      <p:sp>
+        <p:nvSpPr>
+          <p:cNvPr id="4" name="Shape 1"/>
+          <p:cNvSpPr/>
+          <p:nvPr/>
+        </p:nvSpPr>
+        <p:spPr>
+          <a:xfrm>
+            <a:off x="548640" y="384048"/>
+            <a:ext cx="566928" cy="566928"/>
+          </a:xfrm>
+          <a:prstGeom prst="ellipse">
+            <a:avLst/>
+          </a:prstGeom>
+          <a:solidFill>
+            <a:srgbClr val="F4A261"/>
+          </a:solidFill>
+          <a:ln/>
+        </p:spPr>
+      </p:sp>
+      <p:sp>
+        <p:nvSpPr>
+          <p:cNvPr id="5" name="Text 2"/>
+          <p:cNvSpPr txBox="1"/>
+          <p:nvPr/>
+        </p:nvSpPr>
+        <p:spPr>
+          <a:xfrm>
+            <a:off x="548640" y="384048"/>
+            <a:ext cx="566928" cy="566928"/>
+          </a:xfrm>
+          <a:prstGeom prst="rect">
+            <a:avLst/>
+          </a:prstGeom>
+          <a:noFill/>
+          <a:ln/>
+        </p:spPr>
+        <p:txBody>
+          <a:bodyPr wrap="square" lIns="0" tIns="0" rIns="0" bIns="0" rtlCol="0" anchor="ctr"/>
+          <a:lstStyle/>
+          <a:p>
+            <a:pPr algn="ctr" indent="0" marL="0">
+              <a:buNone/>
+            </a:pPr>
+            <a:r>
+              <a:rPr lang="en-US" sz="2400" b="1" dirty="0">
+                <a:solidFill>
+                  <a:srgbClr val="FFFFFF"/>
+                </a:solidFill>
+                <a:latin typeface="Meiryo" pitchFamily="34" charset="0"/>
+                <a:ea typeface="Meiryo" pitchFamily="34" charset="-122"/>
+                <a:cs typeface="Meiryo" pitchFamily="34" charset="-120"/>
+              </a:rPr>
+              <a:t>2</a:t>
+            </a:r>
+            <a:endParaRPr lang="en-US" sz="2400" dirty="0"/>
+          </a:p>
+        </p:txBody>
+      </p:sp>
+      <p:sp>
+        <p:nvSpPr>
+          <p:cNvPr id="6" name="Text 3"/>
+          <p:cNvSpPr txBox="1"/>
+          <p:nvPr/>
+        </p:nvSpPr>
+        <p:spPr>
+          <a:xfrm>
+            <a:off x="1298448" y="347472"/>
+            <a:ext cx="10332720" cy="658368"/>
+          </a:xfrm>
+          <a:prstGeom prst="rect">
+            <a:avLst/>
+          </a:prstGeom>
+          <a:noFill/>
+          <a:ln/>
+        </p:spPr>
+        <p:txBody>
+          <a:bodyPr wrap="square" lIns="0" tIns="0" rIns="0" bIns="0" rtlCol="0" anchor="ctr"/>
+          <a:lstStyle/>
+          <a:p>
+            <a:pPr indent="0" marL="0">
+              <a:buNone/>
+            </a:pPr>
+            <a:r>
+              <a:rPr lang="en-US" sz="3000" b="1" dirty="0">
+                <a:solidFill>
+                  <a:srgbClr val="264653"/>
+                </a:solidFill>
+                <a:latin typeface="Meiryo" pitchFamily="34" charset="0"/>
+                <a:ea typeface="Meiryo" pitchFamily="34" charset="-122"/>
+                <a:cs typeface="Meiryo" pitchFamily="34" charset="-120"/>
+              </a:rPr>
+              <a:t>初回体験の申込を見る ─ 中身を確認する</a:t>
+            </a:r>
+            <a:endParaRPr lang="en-US" sz="3000" dirty="0"/>
+          </a:p>
+        </p:txBody>
+      </p:sp>
+      <p:pic>
+        <p:nvPicPr>
+          <p:cNvPr id="7" name="Image 1" descr="/sessions/compassionate-sweet-heisenberg/mnt/dev-aspath-life-main/_wp移行素材/★引継ぎ資料/レクチャー素材/crop/22_中身.jpg">    </p:cNvPr>
+          <p:cNvPicPr>
+            <a:picLocks noChangeAspect="1"/>
+          </p:cNvPicPr>
+          <p:nvPr/>
+        </p:nvPicPr>
+        <p:blipFill>
+          <a:blip r:embed="rId2"/>
+          <a:stretch>
+            <a:fillRect/>
+          </a:stretch>
+        </p:blipFill>
+        <p:spPr>
+          <a:xfrm>
             <a:off x="566928" y="1298448"/>
             <a:ext cx="7680960" cy="2624328"/>
           </a:xfrm>
@@ -12599,7 +13523,7 @@
       </p:pic>
       <p:sp>
         <p:nvSpPr>
-          <p:cNvPr id="6" name="Shape 3"/>
+          <p:cNvPr id="8" name="Shape 4"/>
           <p:cNvSpPr/>
           <p:nvPr/>
         </p:nvSpPr>
@@ -12626,7 +13550,7 @@
       </p:sp>
       <p:sp>
         <p:nvSpPr>
-          <p:cNvPr id="7" name="Text 4"/>
+          <p:cNvPr id="9" name="Text 5"/>
           <p:cNvSpPr txBox="1"/>
           <p:nvPr/>
         </p:nvSpPr>
@@ -12665,7 +13589,7 @@
       </p:sp>
       <p:sp>
         <p:nvSpPr>
-          <p:cNvPr id="8" name="Text 5"/>
+          <p:cNvPr id="10" name="Text 6"/>
           <p:cNvSpPr txBox="1"/>
           <p:nvPr/>
         </p:nvSpPr>
@@ -12876,7 +13800,7 @@
       </p:sp>
       <p:sp>
         <p:nvSpPr>
-          <p:cNvPr id="9" name="Shape 6"/>
+          <p:cNvPr id="11" name="Shape 7"/>
           <p:cNvSpPr/>
           <p:nvPr/>
         </p:nvSpPr>
@@ -12903,7 +13827,7 @@
       </p:sp>
       <p:sp>
         <p:nvSpPr>
-          <p:cNvPr id="10" name="Shape 7"/>
+          <p:cNvPr id="12" name="Shape 8"/>
           <p:cNvSpPr/>
           <p:nvPr/>
         </p:nvSpPr>
@@ -12923,7 +13847,7 @@
       </p:sp>
       <p:sp>
         <p:nvSpPr>
-          <p:cNvPr id="11" name="Text 8"/>
+          <p:cNvPr id="13" name="Text 9"/>
           <p:cNvSpPr txBox="1"/>
           <p:nvPr/>
         </p:nvSpPr>
@@ -12962,7 +13886,7 @@
       </p:sp>
       <p:sp>
         <p:nvSpPr>
-          <p:cNvPr id="12" name="Text 9"/>
+          <p:cNvPr id="14" name="Text 10"/>
           <p:cNvSpPr txBox="1"/>
           <p:nvPr/>
         </p:nvSpPr>
@@ -13018,7 +13942,7 @@
       </p:sp>
       <p:sp>
         <p:nvSpPr>
-          <p:cNvPr id="13" name="Shape 10"/>
+          <p:cNvPr id="15" name="Shape 11"/>
           <p:cNvSpPr/>
           <p:nvPr/>
         </p:nvSpPr>
@@ -13045,7 +13969,7 @@
       </p:sp>
       <p:sp>
         <p:nvSpPr>
-          <p:cNvPr id="14" name="Shape 11"/>
+          <p:cNvPr id="16" name="Shape 12"/>
           <p:cNvSpPr/>
           <p:nvPr/>
         </p:nvSpPr>
@@ -13065,7 +13989,7 @@
       </p:sp>
       <p:sp>
         <p:nvSpPr>
-          <p:cNvPr id="15" name="Text 12"/>
+          <p:cNvPr id="17" name="Text 13"/>
           <p:cNvSpPr txBox="1"/>
           <p:nvPr/>
         </p:nvSpPr>
@@ -13104,7 +14028,7 @@
       </p:sp>
       <p:sp>
         <p:nvSpPr>
-          <p:cNvPr id="16" name="Text 13"/>
+          <p:cNvPr id="18" name="Text 14"/>
           <p:cNvSpPr txBox="1"/>
           <p:nvPr/>
         </p:nvSpPr>

--- a/_wp移行素材/★引継ぎ資料/★ASPATH_サイト運用マニュアル_基本編.pptx
+++ b/_wp移行素材/★引継ぎ資料/★ASPATH_サイト運用マニュアル_基本編.pptx
@@ -5157,12 +5157,12 @@
         </p:nvSpPr>
         <p:spPr>
           <a:xfrm>
-            <a:off x="566928" y="4572000"/>
-            <a:ext cx="11018520" cy="1463040"/>
+            <a:off x="566928" y="4526280"/>
+            <a:ext cx="11018520" cy="1051560"/>
           </a:xfrm>
           <a:prstGeom prst="roundRect">
             <a:avLst>
-              <a:gd name="adj" fmla="val 7500"/>
+              <a:gd name="adj" fmla="val 10435"/>
             </a:avLst>
           </a:prstGeom>
           <a:solidFill>
@@ -5184,7 +5184,7 @@
         </p:nvSpPr>
         <p:spPr>
           <a:xfrm>
-            <a:off x="804672" y="4791456"/>
+            <a:off x="804672" y="4745736"/>
             <a:ext cx="310896" cy="310896"/>
           </a:xfrm>
           <a:prstGeom prst="ellipse">
@@ -5204,7 +5204,7 @@
         </p:nvSpPr>
         <p:spPr>
           <a:xfrm>
-            <a:off x="804672" y="4791456"/>
+            <a:off x="804672" y="4745736"/>
             <a:ext cx="310896" cy="310896"/>
           </a:xfrm>
           <a:prstGeom prst="rect">
@@ -5243,8 +5243,8 @@
         </p:nvSpPr>
         <p:spPr>
           <a:xfrm>
-            <a:off x="1252728" y="4736592"/>
-            <a:ext cx="10104120" cy="1170432"/>
+            <a:off x="1252728" y="4690872"/>
+            <a:ext cx="10104120" cy="758952"/>
           </a:xfrm>
           <a:prstGeom prst="rect">
             <a:avLst/>
@@ -5285,7 +5285,149 @@
                 <a:ea typeface="Meiryo" pitchFamily="34" charset="-122"/>
                 <a:cs typeface="Meiryo" pitchFamily="34" charset="-120"/>
               </a:rPr>
-              <a:t>承認すると、パーキンソン病専門サイトにカジノへのリンクが載ってしまいます。間違えて本物をスパムにしても、あとから戻せます。承認して載せてしまうより安全です。</a:t>
+              <a:t>承認すると、パーキンソン病専門サイトにカジノへのリンクが載ってしまいます。間違えて本物をスパムにしても、あとから戻せます。</a:t>
+            </a:r>
+            <a:endParaRPr lang="en-US" sz="1500" dirty="0"/>
+          </a:p>
+        </p:txBody>
+      </p:sp>
+      <p:sp>
+        <p:nvSpPr>
+          <p:cNvPr id="28" name="Shape 25"/>
+          <p:cNvSpPr/>
+          <p:nvPr/>
+        </p:nvSpPr>
+        <p:spPr>
+          <a:xfrm>
+            <a:off x="566928" y="5687568"/>
+            <a:ext cx="11018520" cy="777240"/>
+          </a:xfrm>
+          <a:prstGeom prst="roundRect">
+            <a:avLst>
+              <a:gd name="adj" fmla="val 14118"/>
+            </a:avLst>
+          </a:prstGeom>
+          <a:solidFill>
+            <a:srgbClr val="F4E9D8"/>
+          </a:solidFill>
+          <a:ln w="15875">
+            <a:solidFill>
+              <a:srgbClr val="264653"/>
+            </a:solidFill>
+            <a:prstDash val="solid"/>
+          </a:ln>
+        </p:spPr>
+      </p:sp>
+      <p:sp>
+        <p:nvSpPr>
+          <p:cNvPr id="29" name="Shape 26"/>
+          <p:cNvSpPr/>
+          <p:nvPr/>
+        </p:nvSpPr>
+        <p:spPr>
+          <a:xfrm>
+            <a:off x="804672" y="5907024"/>
+            <a:ext cx="310896" cy="310896"/>
+          </a:xfrm>
+          <a:prstGeom prst="ellipse">
+            <a:avLst/>
+          </a:prstGeom>
+          <a:solidFill>
+            <a:srgbClr val="264653"/>
+          </a:solidFill>
+          <a:ln/>
+        </p:spPr>
+      </p:sp>
+      <p:sp>
+        <p:nvSpPr>
+          <p:cNvPr id="30" name="Text 27"/>
+          <p:cNvSpPr txBox="1"/>
+          <p:nvPr/>
+        </p:nvSpPr>
+        <p:spPr>
+          <a:xfrm>
+            <a:off x="804672" y="5907024"/>
+            <a:ext cx="310896" cy="310896"/>
+          </a:xfrm>
+          <a:prstGeom prst="rect">
+            <a:avLst/>
+          </a:prstGeom>
+          <a:noFill/>
+          <a:ln/>
+        </p:spPr>
+        <p:txBody>
+          <a:bodyPr wrap="square" lIns="0" tIns="0" rIns="0" bIns="0" rtlCol="0" anchor="ctr"/>
+          <a:lstStyle/>
+          <a:p>
+            <a:pPr algn="ctr" indent="0" marL="0">
+              <a:buNone/>
+            </a:pPr>
+            <a:r>
+              <a:rPr lang="en-US" sz="1500" b="1" dirty="0">
+                <a:solidFill>
+                  <a:srgbClr val="FFFFFF"/>
+                </a:solidFill>
+                <a:latin typeface="Meiryo" pitchFamily="34" charset="0"/>
+                <a:ea typeface="Meiryo" pitchFamily="34" charset="-122"/>
+                <a:cs typeface="Meiryo" pitchFamily="34" charset="-120"/>
+              </a:rPr>
+              <a:t>i</a:t>
+            </a:r>
+            <a:endParaRPr lang="en-US" sz="1500" dirty="0"/>
+          </a:p>
+        </p:txBody>
+      </p:sp>
+      <p:sp>
+        <p:nvSpPr>
+          <p:cNvPr id="31" name="Text 28"/>
+          <p:cNvSpPr txBox="1"/>
+          <p:nvPr/>
+        </p:nvSpPr>
+        <p:spPr>
+          <a:xfrm>
+            <a:off x="1252728" y="5852160"/>
+            <a:ext cx="10104120" cy="484632"/>
+          </a:xfrm>
+          <a:prstGeom prst="rect">
+            <a:avLst/>
+          </a:prstGeom>
+          <a:noFill/>
+          <a:ln/>
+        </p:spPr>
+        <p:txBody>
+          <a:bodyPr wrap="square" lIns="0" tIns="0" rIns="0" bIns="0" rtlCol="0" anchor="t"/>
+          <a:lstStyle/>
+          <a:p>
+            <a:pPr indent="0" marL="0">
+              <a:buNone/>
+            </a:pPr>
+            <a:r>
+              <a:rPr lang="en-US" sz="1500" b="1" dirty="0">
+                <a:solidFill>
+                  <a:srgbClr val="264653"/>
+                </a:solidFill>
+                <a:latin typeface="Meiryo" pitchFamily="34" charset="0"/>
+                <a:ea typeface="Meiryo" pitchFamily="34" charset="-122"/>
+                <a:cs typeface="Meiryo" pitchFamily="34" charset="-120"/>
+              </a:rPr>
+              <a:t>承認したコメントは、長いものだけ自動で折りたたまれ「もっと見る」で開きます（2026年9月〜）</a:t>
+            </a:r>
+            <a:endParaRPr lang="en-US" sz="1500" dirty="0"/>
+          </a:p>
+          <a:p>
+            <a:pPr indent="0" marL="0">
+              <a:buNone/>
+            </a:pPr>
+            <a:r>
+              <a:rPr lang="en-US" sz="1300" dirty="0">
+                <a:solidFill>
+                  <a:srgbClr val="1E3A44"/>
+                </a:solidFill>
+                <a:latin typeface="Meiryo" pitchFamily="34" charset="0"/>
+                <a:ea typeface="Meiryo" pitchFamily="34" charset="-122"/>
+                <a:cs typeface="Meiryo" pitchFamily="34" charset="-120"/>
+              </a:rPr>
+              <a:t>文字も記事本文より少し小さくしてあります。次の方が書き込みやすいようにするための調整で、山口様の操作は不要です。</a:t>
             </a:r>
             <a:endParaRPr lang="en-US" sz="1500" dirty="0"/>
           </a:p>
@@ -5541,7 +5683,7 @@
                 <a:ea typeface="Meiryo" pitchFamily="34" charset="-122"/>
                 <a:cs typeface="Meiryo" pitchFamily="34" charset="-120"/>
               </a:rPr>
-              <a:t>左メニュー「Super Page Cache」→ 赤い「Purge Cache」を押してから、画面を再読み込みしてください。</a:t>
+              <a:t>左メニュー「Super Page Cache」→ 赤い「Purge Cache」を押してから、Ctrl キーを押しながら F5 で再読み込みしてください。</a:t>
             </a:r>
             <a:endParaRPr lang="en-US" sz="1500" dirty="0"/>
           </a:p>
@@ -12157,7 +12299,7 @@
         <p:spPr>
           <a:xfrm>
             <a:off x="566928" y="3218688"/>
-            <a:ext cx="2697480" cy="3694176"/>
+            <a:ext cx="2606040" cy="3566160"/>
           </a:xfrm>
           <a:prstGeom prst="rect">
             <a:avLst/>
@@ -12173,7 +12315,7 @@
         <p:spPr>
           <a:xfrm>
             <a:off x="566928" y="3218688"/>
-            <a:ext cx="2697480" cy="3694176"/>
+            <a:ext cx="2606040" cy="3566160"/>
           </a:xfrm>
           <a:prstGeom prst="rect">
             <a:avLst/>
@@ -12199,7 +12341,7 @@
         </p:nvSpPr>
         <p:spPr>
           <a:xfrm>
-            <a:off x="3338802" y="6281533"/>
+            <a:off x="3238331" y="6168740"/>
             <a:ext cx="384048" cy="384048"/>
           </a:xfrm>
           <a:prstGeom prst="ellipse">
@@ -12231,7 +12373,7 @@
         </p:nvSpPr>
         <p:spPr>
           <a:xfrm>
-            <a:off x="3338802" y="6281533"/>
+            <a:off x="3238331" y="6168740"/>
             <a:ext cx="384048" cy="384048"/>
           </a:xfrm>
           <a:prstGeom prst="rect">

--- a/_wp移行素材/★引継ぎ資料/★ASPATH_サイト運用マニュアル_基本編.pptx
+++ b/_wp移行素材/★引継ぎ資料/★ASPATH_サイト運用マニュアル_基本編.pptx
@@ -2121,7 +2121,7 @@
               <a:buNone/>
             </a:pPr>
             <a:r>
-              <a:rPr lang="en-US" sz="1500" b="1" spc="600" kern="0" dirty="0">
+              <a:rPr lang="ja-JP" altLang="en-US" sz="1500" b="1" spc="600" kern="0" dirty="0">
                 <a:solidFill>
                   <a:srgbClr val="F4A261"/>
                 </a:solidFill>
@@ -2131,7 +2131,7 @@
               </a:rPr>
               <a:t>ASPATH</a:t>
             </a:r>
-            <a:endParaRPr lang="en-US" sz="1500" dirty="0"/>
+            <a:endParaRPr lang="ja-JP" sz="1500" dirty="0"/>
           </a:p>
         </p:txBody>
       </p:sp>
@@ -2163,7 +2163,7 @@
               <a:buNone/>
             </a:pPr>
             <a:r>
-              <a:rPr lang="en-US" sz="3600" b="1" dirty="0">
+              <a:rPr lang="ja-JP" altLang="en-US" sz="3600" b="1" dirty="0">
                 <a:solidFill>
                   <a:srgbClr val="264653"/>
                 </a:solidFill>
@@ -2173,7 +2173,7 @@
               </a:rPr>
               <a:t>サイト運用マニュアル</a:t>
             </a:r>
-            <a:endParaRPr lang="en-US" sz="3600" dirty="0"/>
+            <a:endParaRPr lang="ja-JP" sz="3600" dirty="0"/>
           </a:p>
         </p:txBody>
       </p:sp>
@@ -2224,7 +2224,7 @@
               <a:buNone/>
             </a:pPr>
             <a:r>
-              <a:rPr lang="en-US" sz="1700" b="1" dirty="0">
+              <a:rPr lang="ja-JP" altLang="en-US" sz="1700" b="1" dirty="0">
                 <a:solidFill>
                   <a:srgbClr val="FFFFFF"/>
                 </a:solidFill>
@@ -2234,7 +2234,7 @@
               </a:rPr>
               <a:t>基 本 編</a:t>
             </a:r>
-            <a:endParaRPr lang="en-US" sz="1700" dirty="0"/>
+            <a:endParaRPr lang="ja-JP" sz="1700" dirty="0"/>
           </a:p>
         </p:txBody>
       </p:sp>
@@ -2266,7 +2266,7 @@
               <a:buNone/>
             </a:pPr>
             <a:r>
-              <a:rPr lang="en-US" sz="1500" dirty="0">
+              <a:rPr lang="ja-JP" altLang="en-US" sz="1500" dirty="0">
                 <a:solidFill>
                   <a:srgbClr val="52707A"/>
                 </a:solidFill>
@@ -2276,7 +2276,7 @@
               </a:rPr>
               <a:t>この1冊で、日々の更新はひととおりできるようになります。</a:t>
             </a:r>
-            <a:endParaRPr lang="en-US" sz="1500" dirty="0"/>
+            <a:endParaRPr lang="ja-JP" sz="1500" dirty="0"/>
           </a:p>
         </p:txBody>
       </p:sp>
@@ -2325,7 +2325,7 @@
               <a:buNone/>
             </a:pPr>
             <a:r>
-              <a:rPr lang="en-US" sz="1250" b="1" dirty="0">
+              <a:rPr lang="ja-JP" altLang="en-US" sz="1250" b="1" dirty="0">
                 <a:solidFill>
                   <a:srgbClr val="264653"/>
                 </a:solidFill>
@@ -2335,7 +2335,7 @@
               </a:rPr>
               <a:t>鹿児島のパーキンソン病専門トレーニングスタジオ</a:t>
             </a:r>
-            <a:endParaRPr lang="en-US" sz="1250" dirty="0"/>
+            <a:endParaRPr lang="ja-JP" sz="1250" dirty="0"/>
           </a:p>
         </p:txBody>
       </p:sp>
@@ -2364,7 +2364,7 @@
               <a:buNone/>
             </a:pPr>
             <a:r>
-              <a:rPr lang="en-US" sz="1150" dirty="0">
+              <a:rPr lang="ja-JP" altLang="en-US" sz="1150" dirty="0">
                 <a:solidFill>
                   <a:srgbClr val="52707A"/>
                 </a:solidFill>
@@ -2374,7 +2374,7 @@
               </a:rPr>
               <a:t>動くことを楽しむ。明日につながる。</a:t>
             </a:r>
-            <a:endParaRPr lang="en-US" sz="1150" dirty="0"/>
+            <a:endParaRPr lang="ja-JP" sz="1150" dirty="0"/>
           </a:p>
         </p:txBody>
       </p:sp>
@@ -2403,7 +2403,7 @@
               <a:buNone/>
             </a:pPr>
             <a:r>
-              <a:rPr lang="en-US" sz="1050" dirty="0">
+              <a:rPr lang="ja-JP" altLang="en-US" sz="1050" dirty="0">
                 <a:solidFill>
                   <a:srgbClr val="8A9CA2"/>
                 </a:solidFill>
@@ -2413,7 +2413,7 @@
               </a:rPr>
               <a:t>aspath-life.com　／　2026年9月　ASPATH 様　ご納品資料</a:t>
             </a:r>
-            <a:endParaRPr lang="en-US" sz="1050" dirty="0"/>
+            <a:endParaRPr lang="ja-JP" sz="1050" dirty="0"/>
           </a:p>
         </p:txBody>
       </p:sp>
@@ -2498,7 +2498,7 @@
               <a:buNone/>
             </a:pPr>
             <a:r>
-              <a:rPr lang="en-US" sz="750" dirty="0">
+              <a:rPr lang="ja-JP" altLang="en-US" sz="750" dirty="0">
                 <a:solidFill>
                   <a:srgbClr val="97A9AF"/>
                 </a:solidFill>
@@ -2508,7 +2508,7 @@
               </a:rPr>
               <a:t>鹿児島のパーキンソン病専門トレーニングスタジオ</a:t>
             </a:r>
-            <a:endParaRPr lang="en-US" sz="750" dirty="0"/>
+            <a:endParaRPr lang="ja-JP" sz="750" dirty="0"/>
           </a:p>
         </p:txBody>
       </p:sp>
@@ -2557,7 +2557,7 @@
               <a:buNone/>
             </a:pPr>
             <a:r>
-              <a:rPr lang="en-US" sz="2400" b="1" dirty="0">
+              <a:rPr lang="ja-JP" altLang="en-US" sz="2400" b="1" dirty="0">
                 <a:solidFill>
                   <a:srgbClr val="FFFFFF"/>
                 </a:solidFill>
@@ -2567,7 +2567,7 @@
               </a:rPr>
               <a:t>3</a:t>
             </a:r>
-            <a:endParaRPr lang="en-US" sz="2400" dirty="0"/>
+            <a:endParaRPr lang="ja-JP" sz="2400" dirty="0"/>
           </a:p>
         </p:txBody>
       </p:sp>
@@ -2596,7 +2596,7 @@
               <a:buNone/>
             </a:pPr>
             <a:r>
-              <a:rPr lang="en-US" sz="3000" b="1" dirty="0">
+              <a:rPr lang="ja-JP" altLang="en-US" sz="3000" b="1" dirty="0">
                 <a:solidFill>
                   <a:srgbClr val="264653"/>
                 </a:solidFill>
@@ -2606,7 +2606,7 @@
               </a:rPr>
               <a:t>写真を差し替える</a:t>
             </a:r>
-            <a:endParaRPr lang="en-US" sz="3000" dirty="0"/>
+            <a:endParaRPr lang="ja-JP" sz="3000" dirty="0"/>
           </a:p>
         </p:txBody>
       </p:sp>
@@ -2718,7 +2718,7 @@
               <a:buNone/>
             </a:pPr>
             <a:r>
-              <a:rPr lang="en-US" sz="1400" b="1" dirty="0">
+              <a:rPr lang="ja-JP" altLang="en-US" sz="1400" b="1" dirty="0">
                 <a:solidFill>
                   <a:srgbClr val="FFFFFF"/>
                 </a:solidFill>
@@ -2728,7 +2728,7 @@
               </a:rPr>
               <a:t>1</a:t>
             </a:r>
-            <a:endParaRPr lang="en-US" sz="1400" dirty="0"/>
+            <a:endParaRPr lang="ja-JP" sz="1400" dirty="0"/>
           </a:p>
         </p:txBody>
       </p:sp>
@@ -2789,7 +2789,7 @@
               <a:buNone/>
             </a:pPr>
             <a:r>
-              <a:rPr lang="en-US" sz="1400" b="1" dirty="0">
+              <a:rPr lang="ja-JP" altLang="en-US" sz="1400" b="1" dirty="0">
                 <a:solidFill>
                   <a:srgbClr val="FFFFFF"/>
                 </a:solidFill>
@@ -2799,7 +2799,7 @@
               </a:rPr>
               <a:t>2</a:t>
             </a:r>
-            <a:endParaRPr lang="en-US" sz="1400" dirty="0"/>
+            <a:endParaRPr lang="ja-JP" sz="1400" dirty="0"/>
           </a:p>
         </p:txBody>
       </p:sp>
@@ -2848,7 +2848,7 @@
               <a:buNone/>
             </a:pPr>
             <a:r>
-              <a:rPr lang="en-US" sz="1300" b="1" dirty="0">
+              <a:rPr lang="ja-JP" altLang="en-US" sz="1300" b="1" dirty="0">
                 <a:solidFill>
                   <a:srgbClr val="FFFFFF"/>
                 </a:solidFill>
@@ -2858,7 +2858,7 @@
               </a:rPr>
               <a:t>1</a:t>
             </a:r>
-            <a:endParaRPr lang="en-US" sz="1300" dirty="0"/>
+            <a:endParaRPr lang="ja-JP" sz="1300" dirty="0"/>
           </a:p>
         </p:txBody>
       </p:sp>
@@ -2887,7 +2887,7 @@
               <a:buNone/>
             </a:pPr>
             <a:r>
-              <a:rPr lang="en-US" sz="1500" b="1" dirty="0">
+              <a:rPr lang="ja-JP" altLang="en-US" sz="1500" b="1" dirty="0">
                 <a:solidFill>
                   <a:srgbClr val="264653"/>
                 </a:solidFill>
@@ -2897,14 +2897,14 @@
               </a:rPr>
               <a:t>写真を1回押す</a:t>
             </a:r>
-            <a:endParaRPr lang="en-US" sz="1500" dirty="0"/>
+            <a:endParaRPr lang="ja-JP" sz="1500" dirty="0"/>
           </a:p>
           <a:p>
             <a:pPr indent="0" marL="0">
               <a:buNone/>
             </a:pPr>
             <a:r>
-              <a:rPr lang="en-US" sz="1300" dirty="0">
+              <a:rPr lang="ja-JP" altLang="en-US" sz="1300" dirty="0">
                 <a:solidFill>
                   <a:srgbClr val="52707A"/>
                 </a:solidFill>
@@ -2914,7 +2914,7 @@
               </a:rPr>
               <a:t>青い枠が付いて、上に道具が並びます</a:t>
             </a:r>
-            <a:endParaRPr lang="en-US" sz="1500" dirty="0"/>
+            <a:endParaRPr lang="ja-JP" sz="1500" dirty="0"/>
           </a:p>
         </p:txBody>
       </p:sp>
@@ -2963,7 +2963,7 @@
               <a:buNone/>
             </a:pPr>
             <a:r>
-              <a:rPr lang="en-US" sz="1300" b="1" dirty="0">
+              <a:rPr lang="ja-JP" altLang="en-US" sz="1300" b="1" dirty="0">
                 <a:solidFill>
                   <a:srgbClr val="FFFFFF"/>
                 </a:solidFill>
@@ -2973,7 +2973,7 @@
               </a:rPr>
               <a:t>2</a:t>
             </a:r>
-            <a:endParaRPr lang="en-US" sz="1300" dirty="0"/>
+            <a:endParaRPr lang="ja-JP" sz="1300" dirty="0"/>
           </a:p>
         </p:txBody>
       </p:sp>
@@ -3002,7 +3002,7 @@
               <a:buNone/>
             </a:pPr>
             <a:r>
-              <a:rPr lang="en-US" sz="1500" b="1" dirty="0">
+              <a:rPr lang="ja-JP" altLang="en-US" sz="1500" b="1" dirty="0">
                 <a:solidFill>
                   <a:srgbClr val="264653"/>
                 </a:solidFill>
@@ -3012,14 +3012,14 @@
               </a:rPr>
               <a:t>「置換」を押す</a:t>
             </a:r>
-            <a:endParaRPr lang="en-US" sz="1500" dirty="0"/>
+            <a:endParaRPr lang="ja-JP" sz="1500" dirty="0"/>
           </a:p>
           <a:p>
             <a:pPr indent="0" marL="0">
               <a:buNone/>
             </a:pPr>
             <a:r>
-              <a:rPr lang="en-US" sz="1300" dirty="0">
+              <a:rPr lang="ja-JP" altLang="en-US" sz="1300" dirty="0">
                 <a:solidFill>
                   <a:srgbClr val="52707A"/>
                 </a:solidFill>
@@ -3029,7 +3029,7 @@
               </a:rPr>
               <a:t>新しい写真を選ぶ画面が開きます</a:t>
             </a:r>
-            <a:endParaRPr lang="en-US" sz="1500" dirty="0"/>
+            <a:endParaRPr lang="ja-JP" sz="1500" dirty="0"/>
           </a:p>
         </p:txBody>
       </p:sp>
@@ -3078,7 +3078,7 @@
               <a:buNone/>
             </a:pPr>
             <a:r>
-              <a:rPr lang="en-US" sz="1300" b="1" dirty="0">
+              <a:rPr lang="ja-JP" altLang="en-US" sz="1300" b="1" dirty="0">
                 <a:solidFill>
                   <a:srgbClr val="FFFFFF"/>
                 </a:solidFill>
@@ -3088,7 +3088,7 @@
               </a:rPr>
               <a:t>3</a:t>
             </a:r>
-            <a:endParaRPr lang="en-US" sz="1300" dirty="0"/>
+            <a:endParaRPr lang="ja-JP" sz="1300" dirty="0"/>
           </a:p>
         </p:txBody>
       </p:sp>
@@ -3117,7 +3117,7 @@
               <a:buNone/>
             </a:pPr>
             <a:r>
-              <a:rPr lang="en-US" sz="1500" b="1" dirty="0">
+              <a:rPr lang="ja-JP" altLang="en-US" sz="1500" b="1" dirty="0">
                 <a:solidFill>
                   <a:srgbClr val="264653"/>
                 </a:solidFill>
@@ -3127,14 +3127,14 @@
               </a:rPr>
               <a:t>写真を選ぶ</a:t>
             </a:r>
-            <a:endParaRPr lang="en-US" sz="1500" dirty="0"/>
+            <a:endParaRPr lang="ja-JP" sz="1500" dirty="0"/>
           </a:p>
           <a:p>
             <a:pPr indent="0" marL="0">
               <a:buNone/>
             </a:pPr>
             <a:r>
-              <a:rPr lang="en-US" sz="1300" dirty="0">
+              <a:rPr lang="ja-JP" altLang="en-US" sz="1300" dirty="0">
                 <a:solidFill>
                   <a:srgbClr val="52707A"/>
                 </a:solidFill>
@@ -3144,7 +3144,7 @@
               </a:rPr>
               <a:t>パソコンから選ぶか、すでに入っているものから選びます</a:t>
             </a:r>
-            <a:endParaRPr lang="en-US" sz="1500" dirty="0"/>
+            <a:endParaRPr lang="ja-JP" sz="1500" dirty="0"/>
           </a:p>
         </p:txBody>
       </p:sp>
@@ -3193,7 +3193,7 @@
               <a:buNone/>
             </a:pPr>
             <a:r>
-              <a:rPr lang="en-US" sz="1300" b="1" dirty="0">
+              <a:rPr lang="ja-JP" altLang="en-US" sz="1300" b="1" dirty="0">
                 <a:solidFill>
                   <a:srgbClr val="FFFFFF"/>
                 </a:solidFill>
@@ -3203,7 +3203,7 @@
               </a:rPr>
               <a:t>4</a:t>
             </a:r>
-            <a:endParaRPr lang="en-US" sz="1300" dirty="0"/>
+            <a:endParaRPr lang="ja-JP" sz="1300" dirty="0"/>
           </a:p>
         </p:txBody>
       </p:sp>
@@ -3232,7 +3232,7 @@
               <a:buNone/>
             </a:pPr>
             <a:r>
-              <a:rPr lang="en-US" sz="1500" b="1" dirty="0">
+              <a:rPr lang="ja-JP" altLang="en-US" sz="1500" b="1" dirty="0">
                 <a:solidFill>
                   <a:srgbClr val="264653"/>
                 </a:solidFill>
@@ -3242,14 +3242,14 @@
               </a:rPr>
               <a:t>「更新」を押す</a:t>
             </a:r>
-            <a:endParaRPr lang="en-US" sz="1500" dirty="0"/>
+            <a:endParaRPr lang="ja-JP" sz="1500" dirty="0"/>
           </a:p>
           <a:p>
             <a:pPr indent="0" marL="0">
               <a:buNone/>
             </a:pPr>
             <a:r>
-              <a:rPr lang="en-US" sz="1300" dirty="0">
+              <a:rPr lang="ja-JP" altLang="en-US" sz="1300" dirty="0">
                 <a:solidFill>
                   <a:srgbClr val="52707A"/>
                 </a:solidFill>
@@ -3259,7 +3259,7 @@
               </a:rPr>
               <a:t>右上のボタンです</a:t>
             </a:r>
-            <a:endParaRPr lang="en-US" sz="1500" dirty="0"/>
+            <a:endParaRPr lang="ja-JP" sz="1500" dirty="0"/>
           </a:p>
         </p:txBody>
       </p:sp>
@@ -3335,7 +3335,7 @@
               <a:buNone/>
             </a:pPr>
             <a:r>
-              <a:rPr lang="en-US" sz="1500" b="1" dirty="0">
+              <a:rPr lang="ja-JP" altLang="en-US" sz="1500" b="1" dirty="0">
                 <a:solidFill>
                   <a:srgbClr val="FFFFFF"/>
                 </a:solidFill>
@@ -3345,7 +3345,7 @@
               </a:rPr>
               <a:t>i</a:t>
             </a:r>
-            <a:endParaRPr lang="en-US" sz="1500" dirty="0"/>
+            <a:endParaRPr lang="ja-JP" sz="1500" dirty="0"/>
           </a:p>
         </p:txBody>
       </p:sp>
@@ -3374,7 +3374,7 @@
               <a:buNone/>
             </a:pPr>
             <a:r>
-              <a:rPr lang="en-US" sz="1500" b="1" dirty="0">
+              <a:rPr lang="ja-JP" altLang="en-US" sz="1500" b="1" dirty="0">
                 <a:solidFill>
                   <a:srgbClr val="264653"/>
                 </a:solidFill>
@@ -3384,14 +3384,14 @@
               </a:rPr>
               <a:t>元の写真は消えません</a:t>
             </a:r>
-            <a:endParaRPr lang="en-US" sz="1500" dirty="0"/>
+            <a:endParaRPr lang="ja-JP" sz="1500" dirty="0"/>
           </a:p>
           <a:p>
             <a:pPr indent="0" marL="0">
               <a:buNone/>
             </a:pPr>
             <a:r>
-              <a:rPr lang="en-US" sz="1300" dirty="0">
+              <a:rPr lang="ja-JP" altLang="en-US" sz="1300" dirty="0">
                 <a:solidFill>
                   <a:srgbClr val="1E3A44"/>
                 </a:solidFill>
@@ -3401,7 +3401,7 @@
               </a:rPr>
               <a:t>差し替えても前の写真はメディアに残ります。戻したくなったら同じ手順で選び直せます。</a:t>
             </a:r>
-            <a:endParaRPr lang="en-US" sz="1500" dirty="0"/>
+            <a:endParaRPr lang="ja-JP" sz="1500" dirty="0"/>
           </a:p>
         </p:txBody>
       </p:sp>
@@ -3486,7 +3486,7 @@
               <a:buNone/>
             </a:pPr>
             <a:r>
-              <a:rPr lang="en-US" sz="750" dirty="0">
+              <a:rPr lang="ja-JP" altLang="en-US" sz="750" dirty="0">
                 <a:solidFill>
                   <a:srgbClr val="97A9AF"/>
                 </a:solidFill>
@@ -3496,7 +3496,7 @@
               </a:rPr>
               <a:t>鹿児島のパーキンソン病専門トレーニングスタジオ</a:t>
             </a:r>
-            <a:endParaRPr lang="en-US" sz="750" dirty="0"/>
+            <a:endParaRPr lang="ja-JP" sz="750" dirty="0"/>
           </a:p>
         </p:txBody>
       </p:sp>
@@ -3545,7 +3545,7 @@
               <a:buNone/>
             </a:pPr>
             <a:r>
-              <a:rPr lang="en-US" sz="2400" b="1" dirty="0">
+              <a:rPr lang="ja-JP" altLang="en-US" sz="2400" b="1" dirty="0">
                 <a:solidFill>
                   <a:srgbClr val="FFFFFF"/>
                 </a:solidFill>
@@ -3555,7 +3555,7 @@
               </a:rPr>
               <a:t>4</a:t>
             </a:r>
-            <a:endParaRPr lang="en-US" sz="2400" dirty="0"/>
+            <a:endParaRPr lang="ja-JP" sz="2400" dirty="0"/>
           </a:p>
         </p:txBody>
       </p:sp>
@@ -3584,7 +3584,7 @@
               <a:buNone/>
             </a:pPr>
             <a:r>
-              <a:rPr lang="en-US" sz="3000" b="1" dirty="0">
+              <a:rPr lang="ja-JP" altLang="en-US" sz="3000" b="1" dirty="0">
                 <a:solidFill>
                   <a:srgbClr val="264653"/>
                 </a:solidFill>
@@ -3594,7 +3594,7 @@
               </a:rPr>
               <a:t>コメントに対応する ─ 承認待ちを見る</a:t>
             </a:r>
-            <a:endParaRPr lang="en-US" sz="3000" dirty="0"/>
+            <a:endParaRPr lang="ja-JP" sz="3000" dirty="0"/>
           </a:p>
         </p:txBody>
       </p:sp>
@@ -3706,7 +3706,7 @@
               <a:buNone/>
             </a:pPr>
             <a:r>
-              <a:rPr lang="en-US" sz="1400" b="1" dirty="0">
+              <a:rPr lang="ja-JP" altLang="en-US" sz="1400" b="1" dirty="0">
                 <a:solidFill>
                   <a:srgbClr val="FFFFFF"/>
                 </a:solidFill>
@@ -3716,7 +3716,7 @@
               </a:rPr>
               <a:t>1</a:t>
             </a:r>
-            <a:endParaRPr lang="en-US" sz="1400" dirty="0"/>
+            <a:endParaRPr lang="ja-JP" sz="1400" dirty="0"/>
           </a:p>
         </p:txBody>
       </p:sp>
@@ -3777,7 +3777,7 @@
               <a:buNone/>
             </a:pPr>
             <a:r>
-              <a:rPr lang="en-US" sz="1400" b="1" dirty="0">
+              <a:rPr lang="ja-JP" altLang="en-US" sz="1400" b="1" dirty="0">
                 <a:solidFill>
                   <a:srgbClr val="FFFFFF"/>
                 </a:solidFill>
@@ -3787,7 +3787,7 @@
               </a:rPr>
               <a:t>2</a:t>
             </a:r>
-            <a:endParaRPr lang="en-US" sz="1400" dirty="0"/>
+            <a:endParaRPr lang="ja-JP" sz="1400" dirty="0"/>
           </a:p>
         </p:txBody>
       </p:sp>
@@ -3848,7 +3848,7 @@
               <a:buNone/>
             </a:pPr>
             <a:r>
-              <a:rPr lang="en-US" sz="1400" b="1" dirty="0">
+              <a:rPr lang="ja-JP" altLang="en-US" sz="1400" b="1" dirty="0">
                 <a:solidFill>
                   <a:srgbClr val="FFFFFF"/>
                 </a:solidFill>
@@ -3858,7 +3858,7 @@
               </a:rPr>
               <a:t>3</a:t>
             </a:r>
-            <a:endParaRPr lang="en-US" sz="1400" dirty="0"/>
+            <a:endParaRPr lang="ja-JP" sz="1400" dirty="0"/>
           </a:p>
         </p:txBody>
       </p:sp>
@@ -3907,7 +3907,7 @@
               <a:buNone/>
             </a:pPr>
             <a:r>
-              <a:rPr lang="en-US" sz="1400" b="1" dirty="0">
+              <a:rPr lang="ja-JP" altLang="en-US" sz="1400" b="1" dirty="0">
                 <a:solidFill>
                   <a:srgbClr val="FFFFFF"/>
                 </a:solidFill>
@@ -3917,7 +3917,7 @@
               </a:rPr>
               <a:t>1</a:t>
             </a:r>
-            <a:endParaRPr lang="en-US" sz="1400" dirty="0"/>
+            <a:endParaRPr lang="ja-JP" sz="1400" dirty="0"/>
           </a:p>
         </p:txBody>
       </p:sp>
@@ -3946,7 +3946,7 @@
               <a:buNone/>
             </a:pPr>
             <a:r>
-              <a:rPr lang="en-US" sz="1450" b="1" dirty="0">
+              <a:rPr lang="ja-JP" altLang="en-US" sz="1450" b="1" dirty="0">
                 <a:solidFill>
                   <a:srgbClr val="264653"/>
                 </a:solidFill>
@@ -3956,14 +3956,14 @@
               </a:rPr>
               <a:t>左メニュー「コメント」</a:t>
             </a:r>
-            <a:endParaRPr lang="en-US" sz="1450" dirty="0"/>
+            <a:endParaRPr lang="ja-JP" sz="1450" dirty="0"/>
           </a:p>
           <a:p>
             <a:pPr indent="0" marL="0">
               <a:buNone/>
             </a:pPr>
             <a:r>
-              <a:rPr lang="en-US" sz="1200" dirty="0">
+              <a:rPr lang="ja-JP" altLang="en-US" sz="1200" dirty="0">
                 <a:solidFill>
                   <a:srgbClr val="52707A"/>
                 </a:solidFill>
@@ -3973,7 +3973,7 @@
               </a:rPr>
               <a:t>数字は承認待ちの件数</a:t>
             </a:r>
-            <a:endParaRPr lang="en-US" sz="1450" dirty="0"/>
+            <a:endParaRPr lang="ja-JP" sz="1450" dirty="0"/>
           </a:p>
         </p:txBody>
       </p:sp>
@@ -4022,7 +4022,7 @@
               <a:buNone/>
             </a:pPr>
             <a:r>
-              <a:rPr lang="en-US" sz="1400" b="1" dirty="0">
+              <a:rPr lang="ja-JP" altLang="en-US" sz="1400" b="1" dirty="0">
                 <a:solidFill>
                   <a:srgbClr val="FFFFFF"/>
                 </a:solidFill>
@@ -4032,7 +4032,7 @@
               </a:rPr>
               <a:t>2</a:t>
             </a:r>
-            <a:endParaRPr lang="en-US" sz="1400" dirty="0"/>
+            <a:endParaRPr lang="ja-JP" sz="1400" dirty="0"/>
           </a:p>
         </p:txBody>
       </p:sp>
@@ -4061,7 +4061,7 @@
               <a:buNone/>
             </a:pPr>
             <a:r>
-              <a:rPr lang="en-US" sz="1450" b="1" dirty="0">
+              <a:rPr lang="ja-JP" altLang="en-US" sz="1450" b="1" dirty="0">
                 <a:solidFill>
                   <a:srgbClr val="264653"/>
                 </a:solidFill>
@@ -4071,14 +4071,14 @@
               </a:rPr>
               <a:t>「承認待ち」を押す</a:t>
             </a:r>
-            <a:endParaRPr lang="en-US" sz="1450" dirty="0"/>
+            <a:endParaRPr lang="ja-JP" sz="1450" dirty="0"/>
           </a:p>
           <a:p>
             <a:pPr indent="0" marL="0">
               <a:buNone/>
             </a:pPr>
             <a:r>
-              <a:rPr lang="en-US" sz="1200" dirty="0">
+              <a:rPr lang="ja-JP" altLang="en-US" sz="1200" dirty="0">
                 <a:solidFill>
                   <a:srgbClr val="52707A"/>
                 </a:solidFill>
@@ -4088,7 +4088,7 @@
               </a:rPr>
               <a:t>対応が必要なものだけ出ます</a:t>
             </a:r>
-            <a:endParaRPr lang="en-US" sz="1450" dirty="0"/>
+            <a:endParaRPr lang="ja-JP" sz="1450" dirty="0"/>
           </a:p>
         </p:txBody>
       </p:sp>
@@ -4137,7 +4137,7 @@
               <a:buNone/>
             </a:pPr>
             <a:r>
-              <a:rPr lang="en-US" sz="1400" b="1" dirty="0">
+              <a:rPr lang="ja-JP" altLang="en-US" sz="1400" b="1" dirty="0">
                 <a:solidFill>
                   <a:srgbClr val="FFFFFF"/>
                 </a:solidFill>
@@ -4147,7 +4147,7 @@
               </a:rPr>
               <a:t>3</a:t>
             </a:r>
-            <a:endParaRPr lang="en-US" sz="1400" dirty="0"/>
+            <a:endParaRPr lang="ja-JP" sz="1400" dirty="0"/>
           </a:p>
         </p:txBody>
       </p:sp>
@@ -4176,7 +4176,7 @@
               <a:buNone/>
             </a:pPr>
             <a:r>
-              <a:rPr lang="en-US" sz="1450" b="1" dirty="0">
+              <a:rPr lang="ja-JP" altLang="en-US" sz="1450" b="1" dirty="0">
                 <a:solidFill>
                   <a:srgbClr val="264653"/>
                 </a:solidFill>
@@ -4186,14 +4186,14 @@
               </a:rPr>
               <a:t>中身を読む</a:t>
             </a:r>
-            <a:endParaRPr lang="en-US" sz="1450" dirty="0"/>
+            <a:endParaRPr lang="ja-JP" sz="1450" dirty="0"/>
           </a:p>
           <a:p>
             <a:pPr indent="0" marL="0">
               <a:buNone/>
             </a:pPr>
             <a:r>
-              <a:rPr lang="en-US" sz="1200" dirty="0">
+              <a:rPr lang="ja-JP" altLang="en-US" sz="1200" dirty="0">
                 <a:solidFill>
                   <a:srgbClr val="52707A"/>
                 </a:solidFill>
@@ -4203,7 +4203,7 @@
               </a:rPr>
               <a:t>承認かスパムかを決めます</a:t>
             </a:r>
-            <a:endParaRPr lang="en-US" sz="1450" dirty="0"/>
+            <a:endParaRPr lang="ja-JP" sz="1450" dirty="0"/>
           </a:p>
         </p:txBody>
       </p:sp>
@@ -4279,7 +4279,7 @@
               <a:buNone/>
             </a:pPr>
             <a:r>
-              <a:rPr lang="en-US" sz="1500" b="1" dirty="0">
+              <a:rPr lang="ja-JP" altLang="en-US" sz="1500" b="1" dirty="0">
                 <a:solidFill>
                   <a:srgbClr val="FFFFFF"/>
                 </a:solidFill>
@@ -4289,7 +4289,7 @@
               </a:rPr>
               <a:t>i</a:t>
             </a:r>
-            <a:endParaRPr lang="en-US" sz="1500" dirty="0"/>
+            <a:endParaRPr lang="ja-JP" sz="1500" dirty="0"/>
           </a:p>
         </p:txBody>
       </p:sp>
@@ -4318,7 +4318,7 @@
               <a:buNone/>
             </a:pPr>
             <a:r>
-              <a:rPr lang="en-US" sz="1500" b="1" dirty="0">
+              <a:rPr lang="ja-JP" altLang="en-US" sz="1500" b="1" dirty="0">
                 <a:solidFill>
                   <a:srgbClr val="264653"/>
                 </a:solidFill>
@@ -4328,14 +4328,14 @@
               </a:rPr>
               <a:t>承認するまで、お客様には見えません</a:t>
             </a:r>
-            <a:endParaRPr lang="en-US" sz="1500" dirty="0"/>
+            <a:endParaRPr lang="ja-JP" sz="1500" dirty="0"/>
           </a:p>
           <a:p>
             <a:pPr indent="0" marL="0">
               <a:buNone/>
             </a:pPr>
             <a:r>
-              <a:rPr lang="en-US" sz="1300" dirty="0">
+              <a:rPr lang="ja-JP" altLang="en-US" sz="1300" dirty="0">
                 <a:solidFill>
                   <a:srgbClr val="1E3A44"/>
                 </a:solidFill>
@@ -4345,7 +4345,7 @@
               </a:rPr>
               <a:t>放置しても表示はされません。慌てなくて大丈夫です。上の2件は、実際に届いたスパムです。</a:t>
             </a:r>
-            <a:endParaRPr lang="en-US" sz="1500" dirty="0"/>
+            <a:endParaRPr lang="ja-JP" sz="1500" dirty="0"/>
           </a:p>
         </p:txBody>
       </p:sp>
@@ -4430,7 +4430,7 @@
               <a:buNone/>
             </a:pPr>
             <a:r>
-              <a:rPr lang="en-US" sz="750" dirty="0">
+              <a:rPr lang="ja-JP" altLang="en-US" sz="750" dirty="0">
                 <a:solidFill>
                   <a:srgbClr val="97A9AF"/>
                 </a:solidFill>
@@ -4440,7 +4440,7 @@
               </a:rPr>
               <a:t>鹿児島のパーキンソン病専門トレーニングスタジオ</a:t>
             </a:r>
-            <a:endParaRPr lang="en-US" sz="750" dirty="0"/>
+            <a:endParaRPr lang="ja-JP" sz="750" dirty="0"/>
           </a:p>
         </p:txBody>
       </p:sp>
@@ -4489,7 +4489,7 @@
               <a:buNone/>
             </a:pPr>
             <a:r>
-              <a:rPr lang="en-US" sz="2400" b="1" dirty="0">
+              <a:rPr lang="ja-JP" altLang="en-US" sz="2400" b="1" dirty="0">
                 <a:solidFill>
                   <a:srgbClr val="FFFFFF"/>
                 </a:solidFill>
@@ -4499,7 +4499,7 @@
               </a:rPr>
               <a:t>4</a:t>
             </a:r>
-            <a:endParaRPr lang="en-US" sz="2400" dirty="0"/>
+            <a:endParaRPr lang="ja-JP" sz="2400" dirty="0"/>
           </a:p>
         </p:txBody>
       </p:sp>
@@ -4528,7 +4528,7 @@
               <a:buNone/>
             </a:pPr>
             <a:r>
-              <a:rPr lang="en-US" sz="3000" b="1" dirty="0">
+              <a:rPr lang="ja-JP" altLang="en-US" sz="3000" b="1" dirty="0">
                 <a:solidFill>
                   <a:srgbClr val="264653"/>
                 </a:solidFill>
@@ -4538,7 +4538,7 @@
               </a:rPr>
               <a:t>コメントに対応する ─ スパムの見分け方</a:t>
             </a:r>
-            <a:endParaRPr lang="en-US" sz="3000" dirty="0"/>
+            <a:endParaRPr lang="ja-JP" sz="3000" dirty="0"/>
           </a:p>
         </p:txBody>
       </p:sp>
@@ -4567,7 +4567,7 @@
               <a:buNone/>
             </a:pPr>
             <a:r>
-              <a:rPr lang="en-US" sz="1600" b="1" dirty="0">
+              <a:rPr lang="ja-JP" altLang="en-US" sz="1600" b="1" dirty="0">
                 <a:solidFill>
                   <a:srgbClr val="264653"/>
                 </a:solidFill>
@@ -4577,7 +4577,7 @@
               </a:rPr>
               <a:t>いま届いている2件は、両方ともスパムでした</a:t>
             </a:r>
-            <a:endParaRPr lang="en-US" sz="1600" dirty="0"/>
+            <a:endParaRPr lang="ja-JP" sz="1600" dirty="0"/>
           </a:p>
         </p:txBody>
       </p:sp>
@@ -4653,7 +4653,7 @@
               <a:buNone/>
             </a:pPr>
             <a:r>
-              <a:rPr lang="en-US" sz="1600" b="1" dirty="0">
+              <a:rPr lang="ja-JP" altLang="en-US" sz="1600" b="1" dirty="0">
                 <a:solidFill>
                   <a:srgbClr val="FFFFFF"/>
                 </a:solidFill>
@@ -4663,7 +4663,7 @@
               </a:rPr>
               <a:t>!</a:t>
             </a:r>
-            <a:endParaRPr lang="en-US" sz="1600" dirty="0"/>
+            <a:endParaRPr lang="ja-JP" sz="1600" dirty="0"/>
           </a:p>
         </p:txBody>
       </p:sp>
@@ -4692,7 +4692,7 @@
               <a:buNone/>
             </a:pPr>
             <a:r>
-              <a:rPr lang="en-US" sz="1450" b="1" dirty="0">
+              <a:rPr lang="ja-JP" altLang="en-US" sz="1450" b="1" dirty="0">
                 <a:solidFill>
                   <a:srgbClr val="264653"/>
                 </a:solidFill>
@@ -4702,14 +4702,14 @@
               </a:rPr>
               <a:t>英語で書かれている</a:t>
             </a:r>
-            <a:endParaRPr lang="en-US" sz="1450" dirty="0"/>
+            <a:endParaRPr lang="ja-JP" sz="1450" dirty="0"/>
           </a:p>
           <a:p>
             <a:pPr indent="0" marL="0">
               <a:buNone/>
             </a:pPr>
             <a:r>
-              <a:rPr lang="en-US" sz="1200" dirty="0">
+              <a:rPr lang="ja-JP" altLang="en-US" sz="1200" dirty="0">
                 <a:solidFill>
                   <a:srgbClr val="52707A"/>
                 </a:solidFill>
@@ -4719,7 +4719,7 @@
               </a:rPr>
               <a:t>日本語のサイトに英語のコメントは、ほぼ宣伝です</a:t>
             </a:r>
-            <a:endParaRPr lang="en-US" sz="1450" dirty="0"/>
+            <a:endParaRPr lang="ja-JP" sz="1450" dirty="0"/>
           </a:p>
         </p:txBody>
       </p:sp>
@@ -4795,7 +4795,7 @@
               <a:buNone/>
             </a:pPr>
             <a:r>
-              <a:rPr lang="en-US" sz="1600" b="1" dirty="0">
+              <a:rPr lang="ja-JP" altLang="en-US" sz="1600" b="1" dirty="0">
                 <a:solidFill>
                   <a:srgbClr val="FFFFFF"/>
                 </a:solidFill>
@@ -4805,7 +4805,7 @@
               </a:rPr>
               <a:t>!</a:t>
             </a:r>
-            <a:endParaRPr lang="en-US" sz="1600" dirty="0"/>
+            <a:endParaRPr lang="ja-JP" sz="1600" dirty="0"/>
           </a:p>
         </p:txBody>
       </p:sp>
@@ -4834,7 +4834,7 @@
               <a:buNone/>
             </a:pPr>
             <a:r>
-              <a:rPr lang="en-US" sz="1450" b="1" dirty="0">
+              <a:rPr lang="ja-JP" altLang="en-US" sz="1450" b="1" dirty="0">
                 <a:solidFill>
                   <a:srgbClr val="264653"/>
                 </a:solidFill>
@@ -4844,14 +4844,14 @@
               </a:rPr>
               <a:t>知らないサイトへのリンク</a:t>
             </a:r>
-            <a:endParaRPr lang="en-US" sz="1450" dirty="0"/>
+            <a:endParaRPr lang="ja-JP" sz="1450" dirty="0"/>
           </a:p>
           <a:p>
             <a:pPr indent="0" marL="0">
               <a:buNone/>
             </a:pPr>
             <a:r>
-              <a:rPr lang="en-US" sz="1200" dirty="0">
+              <a:rPr lang="ja-JP" altLang="en-US" sz="1200" dirty="0">
                 <a:solidFill>
                   <a:srgbClr val="52707A"/>
                 </a:solidFill>
@@ -4861,7 +4861,7 @@
               </a:rPr>
               <a:t>カジノ・投資などのURLが本文や名前に入っています</a:t>
             </a:r>
-            <a:endParaRPr lang="en-US" sz="1450" dirty="0"/>
+            <a:endParaRPr lang="ja-JP" sz="1450" dirty="0"/>
           </a:p>
         </p:txBody>
       </p:sp>
@@ -4937,7 +4937,7 @@
               <a:buNone/>
             </a:pPr>
             <a:r>
-              <a:rPr lang="en-US" sz="1600" b="1" dirty="0">
+              <a:rPr lang="ja-JP" altLang="en-US" sz="1600" b="1" dirty="0">
                 <a:solidFill>
                   <a:srgbClr val="FFFFFF"/>
                 </a:solidFill>
@@ -4947,7 +4947,7 @@
               </a:rPr>
               <a:t>!</a:t>
             </a:r>
-            <a:endParaRPr lang="en-US" sz="1600" dirty="0"/>
+            <a:endParaRPr lang="ja-JP" sz="1600" dirty="0"/>
           </a:p>
         </p:txBody>
       </p:sp>
@@ -4976,7 +4976,7 @@
               <a:buNone/>
             </a:pPr>
             <a:r>
-              <a:rPr lang="en-US" sz="1450" b="1" dirty="0">
+              <a:rPr lang="ja-JP" altLang="en-US" sz="1450" b="1" dirty="0">
                 <a:solidFill>
                   <a:srgbClr val="264653"/>
                 </a:solidFill>
@@ -4986,14 +4986,14 @@
               </a:rPr>
               <a:t>記事と関係がない</a:t>
             </a:r>
-            <a:endParaRPr lang="en-US" sz="1450" dirty="0"/>
+            <a:endParaRPr lang="ja-JP" sz="1450" dirty="0"/>
           </a:p>
           <a:p>
             <a:pPr indent="0" marL="0">
               <a:buNone/>
             </a:pPr>
             <a:r>
-              <a:rPr lang="en-US" sz="1200" dirty="0">
+              <a:rPr lang="ja-JP" altLang="en-US" sz="1200" dirty="0">
                 <a:solidFill>
                   <a:srgbClr val="52707A"/>
                 </a:solidFill>
@@ -5003,7 +5003,7 @@
               </a:rPr>
               <a:t>体幹の記事に「ルーレット戦略」など、話が噛み合いません</a:t>
             </a:r>
-            <a:endParaRPr lang="en-US" sz="1450" dirty="0"/>
+            <a:endParaRPr lang="ja-JP" sz="1450" dirty="0"/>
           </a:p>
         </p:txBody>
       </p:sp>
@@ -5079,7 +5079,7 @@
               <a:buNone/>
             </a:pPr>
             <a:r>
-              <a:rPr lang="en-US" sz="1600" b="1" dirty="0">
+              <a:rPr lang="ja-JP" altLang="en-US" sz="1600" b="1" dirty="0">
                 <a:solidFill>
                   <a:srgbClr val="FFFFFF"/>
                 </a:solidFill>
@@ -5089,7 +5089,7 @@
               </a:rPr>
               <a:t>!</a:t>
             </a:r>
-            <a:endParaRPr lang="en-US" sz="1600" dirty="0"/>
+            <a:endParaRPr lang="ja-JP" sz="1600" dirty="0"/>
           </a:p>
         </p:txBody>
       </p:sp>
@@ -5118,7 +5118,7 @@
               <a:buNone/>
             </a:pPr>
             <a:r>
-              <a:rPr lang="en-US" sz="1450" b="1" dirty="0">
+              <a:rPr lang="ja-JP" altLang="en-US" sz="1450" b="1" dirty="0">
                 <a:solidFill>
                   <a:srgbClr val="264653"/>
                 </a:solidFill>
@@ -5128,14 +5128,14 @@
               </a:rPr>
               <a:t>妙に褒めてくる</a:t>
             </a:r>
-            <a:endParaRPr lang="en-US" sz="1450" dirty="0"/>
+            <a:endParaRPr lang="ja-JP" sz="1450" dirty="0"/>
           </a:p>
           <a:p>
             <a:pPr indent="0" marL="0">
               <a:buNone/>
             </a:pPr>
             <a:r>
-              <a:rPr lang="en-US" sz="1200" dirty="0">
+              <a:rPr lang="ja-JP" altLang="en-US" sz="1200" dirty="0">
                 <a:solidFill>
                   <a:srgbClr val="52707A"/>
                 </a:solidFill>
@@ -5145,7 +5145,7 @@
               </a:rPr>
               <a:t>中身のない称賛だけで、具体的な感想がありません</a:t>
             </a:r>
-            <a:endParaRPr lang="en-US" sz="1450" dirty="0"/>
+            <a:endParaRPr lang="ja-JP" sz="1450" dirty="0"/>
           </a:p>
         </p:txBody>
       </p:sp>
@@ -5221,7 +5221,7 @@
               <a:buNone/>
             </a:pPr>
             <a:r>
-              <a:rPr lang="en-US" sz="1500" b="1" dirty="0">
+              <a:rPr lang="ja-JP" altLang="en-US" sz="1500" b="1" dirty="0">
                 <a:solidFill>
                   <a:srgbClr val="FFFFFF"/>
                 </a:solidFill>
@@ -5231,7 +5231,7 @@
               </a:rPr>
               <a:t>!</a:t>
             </a:r>
-            <a:endParaRPr lang="en-US" sz="1500" dirty="0"/>
+            <a:endParaRPr lang="ja-JP" sz="1500" dirty="0"/>
           </a:p>
         </p:txBody>
       </p:sp>
@@ -5260,7 +5260,7 @@
               <a:buNone/>
             </a:pPr>
             <a:r>
-              <a:rPr lang="en-US" sz="1500" b="1" dirty="0">
+              <a:rPr lang="ja-JP" altLang="en-US" sz="1500" b="1" dirty="0">
                 <a:solidFill>
                   <a:srgbClr val="264653"/>
                 </a:solidFill>
@@ -5270,14 +5270,14 @@
               </a:rPr>
               <a:t>迷ったら「スパム」を選んでください</a:t>
             </a:r>
-            <a:endParaRPr lang="en-US" sz="1500" dirty="0"/>
+            <a:endParaRPr lang="ja-JP" sz="1500" dirty="0"/>
           </a:p>
           <a:p>
             <a:pPr indent="0" marL="0">
               <a:buNone/>
             </a:pPr>
             <a:r>
-              <a:rPr lang="en-US" sz="1300" dirty="0">
+              <a:rPr lang="ja-JP" altLang="en-US" sz="1300" dirty="0">
                 <a:solidFill>
                   <a:srgbClr val="1E3A44"/>
                 </a:solidFill>
@@ -5287,7 +5287,7 @@
               </a:rPr>
               <a:t>承認すると、パーキンソン病専門サイトにカジノへのリンクが載ってしまいます。間違えて本物をスパムにしても、あとから戻せます。</a:t>
             </a:r>
-            <a:endParaRPr lang="en-US" sz="1500" dirty="0"/>
+            <a:endParaRPr lang="ja-JP" sz="1500" dirty="0"/>
           </a:p>
         </p:txBody>
       </p:sp>
@@ -5363,7 +5363,7 @@
               <a:buNone/>
             </a:pPr>
             <a:r>
-              <a:rPr lang="en-US" sz="1500" b="1" dirty="0">
+              <a:rPr lang="ja-JP" altLang="en-US" sz="1500" b="1" dirty="0">
                 <a:solidFill>
                   <a:srgbClr val="FFFFFF"/>
                 </a:solidFill>
@@ -5373,7 +5373,7 @@
               </a:rPr>
               <a:t>i</a:t>
             </a:r>
-            <a:endParaRPr lang="en-US" sz="1500" dirty="0"/>
+            <a:endParaRPr lang="ja-JP" sz="1500" dirty="0"/>
           </a:p>
         </p:txBody>
       </p:sp>
@@ -5402,7 +5402,7 @@
               <a:buNone/>
             </a:pPr>
             <a:r>
-              <a:rPr lang="en-US" sz="1500" b="1" dirty="0">
+              <a:rPr lang="ja-JP" altLang="en-US" sz="1500" b="1" dirty="0">
                 <a:solidFill>
                   <a:srgbClr val="264653"/>
                 </a:solidFill>
@@ -5412,14 +5412,14 @@
               </a:rPr>
               <a:t>承認したコメントは、長いものだけ自動で折りたたまれ「もっと見る」で開きます（2026年9月〜）</a:t>
             </a:r>
-            <a:endParaRPr lang="en-US" sz="1500" dirty="0"/>
+            <a:endParaRPr lang="ja-JP" sz="1500" dirty="0"/>
           </a:p>
           <a:p>
             <a:pPr indent="0" marL="0">
               <a:buNone/>
             </a:pPr>
             <a:r>
-              <a:rPr lang="en-US" sz="1300" dirty="0">
+              <a:rPr lang="ja-JP" altLang="en-US" sz="1300" dirty="0">
                 <a:solidFill>
                   <a:srgbClr val="1E3A44"/>
                 </a:solidFill>
@@ -5429,7 +5429,7 @@
               </a:rPr>
               <a:t>文字も記事本文より少し小さくしてあります。次の方が書き込みやすいようにするための調整で、山口様の操作は不要です。</a:t>
             </a:r>
-            <a:endParaRPr lang="en-US" sz="1500" dirty="0"/>
+            <a:endParaRPr lang="ja-JP" sz="1500" dirty="0"/>
           </a:p>
         </p:txBody>
       </p:sp>
@@ -5514,7 +5514,7 @@
               <a:buNone/>
             </a:pPr>
             <a:r>
-              <a:rPr lang="en-US" sz="750" dirty="0">
+              <a:rPr lang="ja-JP" altLang="en-US" sz="750" dirty="0">
                 <a:solidFill>
                   <a:srgbClr val="97A9AF"/>
                 </a:solidFill>
@@ -5524,7 +5524,7 @@
               </a:rPr>
               <a:t>鹿児島のパーキンソン病専門トレーニングスタジオ</a:t>
             </a:r>
-            <a:endParaRPr lang="en-US" sz="750" dirty="0"/>
+            <a:endParaRPr lang="ja-JP" sz="750" dirty="0"/>
           </a:p>
         </p:txBody>
       </p:sp>
@@ -5553,7 +5553,7 @@
               <a:buNone/>
             </a:pPr>
             <a:r>
-              <a:rPr lang="en-US" sz="3000" b="1" dirty="0">
+              <a:rPr lang="ja-JP" altLang="en-US" sz="3000" b="1" dirty="0">
                 <a:solidFill>
                   <a:srgbClr val="264653"/>
                 </a:solidFill>
@@ -5563,7 +5563,7 @@
               </a:rPr>
               <a:t>困ったときは</a:t>
             </a:r>
-            <a:endParaRPr lang="en-US" sz="3000" dirty="0"/>
+            <a:endParaRPr lang="ja-JP" sz="3000" dirty="0"/>
           </a:p>
         </p:txBody>
       </p:sp>
@@ -5619,7 +5619,7 @@
               <a:buNone/>
             </a:pPr>
             <a:r>
-              <a:rPr lang="en-US" sz="1600" b="1" dirty="0">
+              <a:rPr lang="ja-JP" altLang="en-US" sz="1600" b="1" dirty="0">
                 <a:solidFill>
                   <a:srgbClr val="F4A261"/>
                 </a:solidFill>
@@ -5629,7 +5629,7 @@
               </a:rPr>
               <a:t>Q</a:t>
             </a:r>
-            <a:endParaRPr lang="en-US" sz="1600" dirty="0"/>
+            <a:endParaRPr lang="ja-JP" sz="1600" dirty="0"/>
           </a:p>
         </p:txBody>
       </p:sp>
@@ -5658,7 +5658,7 @@
               <a:buNone/>
             </a:pPr>
             <a:r>
-              <a:rPr lang="en-US" sz="1500" b="1" dirty="0">
+              <a:rPr lang="ja-JP" altLang="en-US" sz="1500" b="1" dirty="0">
                 <a:solidFill>
                   <a:srgbClr val="264653"/>
                 </a:solidFill>
@@ -5668,14 +5668,14 @@
               </a:rPr>
               <a:t>直したのに画面が変わらない</a:t>
             </a:r>
-            <a:endParaRPr lang="en-US" sz="1500" dirty="0"/>
+            <a:endParaRPr lang="ja-JP" sz="1500" dirty="0"/>
           </a:p>
           <a:p>
             <a:pPr indent="0" marL="0">
               <a:buNone/>
             </a:pPr>
             <a:r>
-              <a:rPr lang="en-US" sz="1250" dirty="0">
+              <a:rPr lang="ja-JP" altLang="en-US" sz="1250" dirty="0">
                 <a:solidFill>
                   <a:srgbClr val="1E3A44"/>
                 </a:solidFill>
@@ -5685,7 +5685,7 @@
               </a:rPr>
               <a:t>左メニュー「Super Page Cache」→ 赤い「Purge Cache」を押してから、Ctrl キーを押しながら F5 で再読み込みしてください。</a:t>
             </a:r>
-            <a:endParaRPr lang="en-US" sz="1500" dirty="0"/>
+            <a:endParaRPr lang="ja-JP" sz="1500" dirty="0"/>
           </a:p>
         </p:txBody>
       </p:sp>
@@ -5741,7 +5741,7 @@
               <a:buNone/>
             </a:pPr>
             <a:r>
-              <a:rPr lang="en-US" sz="1600" b="1" dirty="0">
+              <a:rPr lang="ja-JP" altLang="en-US" sz="1600" b="1" dirty="0">
                 <a:solidFill>
                   <a:srgbClr val="F4A261"/>
                 </a:solidFill>
@@ -5751,7 +5751,7 @@
               </a:rPr>
               <a:t>Q</a:t>
             </a:r>
-            <a:endParaRPr lang="en-US" sz="1600" dirty="0"/>
+            <a:endParaRPr lang="ja-JP" sz="1600" dirty="0"/>
           </a:p>
         </p:txBody>
       </p:sp>
@@ -5780,7 +5780,7 @@
               <a:buNone/>
             </a:pPr>
             <a:r>
-              <a:rPr lang="en-US" sz="1500" b="1" dirty="0">
+              <a:rPr lang="ja-JP" altLang="en-US" sz="1500" b="1" dirty="0">
                 <a:solidFill>
                   <a:srgbClr val="264653"/>
                 </a:solidFill>
@@ -5790,14 +5790,14 @@
               </a:rPr>
               <a:t>間違えて公開してしまった</a:t>
             </a:r>
-            <a:endParaRPr lang="en-US" sz="1500" dirty="0"/>
+            <a:endParaRPr lang="ja-JP" sz="1500" dirty="0"/>
           </a:p>
           <a:p>
             <a:pPr indent="0" marL="0">
               <a:buNone/>
             </a:pPr>
             <a:r>
-              <a:rPr lang="en-US" sz="1250" dirty="0">
+              <a:rPr lang="ja-JP" altLang="en-US" sz="1250" dirty="0">
                 <a:solidFill>
                   <a:srgbClr val="1E3A44"/>
                 </a:solidFill>
@@ -5807,7 +5807,7 @@
               </a:rPr>
               <a:t>その記事を開き、「ステータス」から「下書き」に戻せば、お客様には見えなくなります。</a:t>
             </a:r>
-            <a:endParaRPr lang="en-US" sz="1500" dirty="0"/>
+            <a:endParaRPr lang="ja-JP" sz="1500" dirty="0"/>
           </a:p>
         </p:txBody>
       </p:sp>
@@ -5863,7 +5863,7 @@
               <a:buNone/>
             </a:pPr>
             <a:r>
-              <a:rPr lang="en-US" sz="1600" b="1" dirty="0">
+              <a:rPr lang="ja-JP" altLang="en-US" sz="1600" b="1" dirty="0">
                 <a:solidFill>
                   <a:srgbClr val="F4A261"/>
                 </a:solidFill>
@@ -5873,7 +5873,7 @@
               </a:rPr>
               <a:t>Q</a:t>
             </a:r>
-            <a:endParaRPr lang="en-US" sz="1600" dirty="0"/>
+            <a:endParaRPr lang="ja-JP" sz="1600" dirty="0"/>
           </a:p>
         </p:txBody>
       </p:sp>
@@ -5902,7 +5902,7 @@
               <a:buNone/>
             </a:pPr>
             <a:r>
-              <a:rPr lang="en-US" sz="1500" b="1" dirty="0">
+              <a:rPr lang="ja-JP" altLang="en-US" sz="1500" b="1" dirty="0">
                 <a:solidFill>
                   <a:srgbClr val="264653"/>
                 </a:solidFill>
@@ -5912,14 +5912,14 @@
               </a:rPr>
               <a:t>消してしまった</a:t>
             </a:r>
-            <a:endParaRPr lang="en-US" sz="1500" dirty="0"/>
+            <a:endParaRPr lang="ja-JP" sz="1500" dirty="0"/>
           </a:p>
           <a:p>
             <a:pPr indent="0" marL="0">
               <a:buNone/>
             </a:pPr>
             <a:r>
-              <a:rPr lang="en-US" sz="1250" dirty="0">
+              <a:rPr lang="ja-JP" altLang="en-US" sz="1250" dirty="0">
                 <a:solidFill>
                   <a:srgbClr val="1E3A44"/>
                 </a:solidFill>
@@ -5929,7 +5929,7 @@
               </a:rPr>
               <a:t>「ゴミ箱」に残っています。ゴミ箱を開いて「復元」を押してください。</a:t>
             </a:r>
-            <a:endParaRPr lang="en-US" sz="1500" dirty="0"/>
+            <a:endParaRPr lang="ja-JP" sz="1500" dirty="0"/>
           </a:p>
         </p:txBody>
       </p:sp>
@@ -5985,7 +5985,7 @@
               <a:buNone/>
             </a:pPr>
             <a:r>
-              <a:rPr lang="en-US" sz="1600" b="1" dirty="0">
+              <a:rPr lang="ja-JP" altLang="en-US" sz="1600" b="1" dirty="0">
                 <a:solidFill>
                   <a:srgbClr val="F4A261"/>
                 </a:solidFill>
@@ -5995,7 +5995,7 @@
               </a:rPr>
               <a:t>Q</a:t>
             </a:r>
-            <a:endParaRPr lang="en-US" sz="1600" dirty="0"/>
+            <a:endParaRPr lang="ja-JP" sz="1600" dirty="0"/>
           </a:p>
         </p:txBody>
       </p:sp>
@@ -6024,7 +6024,7 @@
               <a:buNone/>
             </a:pPr>
             <a:r>
-              <a:rPr lang="en-US" sz="1500" b="1" dirty="0">
+              <a:rPr lang="ja-JP" altLang="en-US" sz="1500" b="1" dirty="0">
                 <a:solidFill>
                   <a:srgbClr val="264653"/>
                 </a:solidFill>
@@ -6034,14 +6034,14 @@
               </a:rPr>
               <a:t>パスワードが分からない</a:t>
             </a:r>
-            <a:endParaRPr lang="en-US" sz="1500" dirty="0"/>
+            <a:endParaRPr lang="ja-JP" sz="1500" dirty="0"/>
           </a:p>
           <a:p>
             <a:pPr indent="0" marL="0">
               <a:buNone/>
             </a:pPr>
             <a:r>
-              <a:rPr lang="en-US" sz="1250" dirty="0">
+              <a:rPr lang="ja-JP" altLang="en-US" sz="1250" dirty="0">
                 <a:solidFill>
                   <a:srgbClr val="1E3A44"/>
                 </a:solidFill>
@@ -6051,7 +6051,7 @@
               </a:rPr>
               <a:t>ログイン画面の「パスワードをお忘れですか？」から再設定できます。</a:t>
             </a:r>
-            <a:endParaRPr lang="en-US" sz="1500" dirty="0"/>
+            <a:endParaRPr lang="ja-JP" sz="1500" dirty="0"/>
           </a:p>
         </p:txBody>
       </p:sp>
@@ -6112,7 +6112,7 @@
               <a:buNone/>
             </a:pPr>
             <a:r>
-              <a:rPr lang="en-US" sz="3200" b="1" dirty="0">
+              <a:rPr lang="ja-JP" altLang="en-US" sz="3200" b="1" dirty="0">
                 <a:solidFill>
                   <a:srgbClr val="FFFFFF"/>
                 </a:solidFill>
@@ -6122,7 +6122,7 @@
               </a:rPr>
               <a:t>覚えていただきたいのは、3つだけです</a:t>
             </a:r>
-            <a:endParaRPr lang="en-US" sz="3200" dirty="0"/>
+            <a:endParaRPr lang="ja-JP" sz="3200" dirty="0"/>
           </a:p>
         </p:txBody>
       </p:sp>
@@ -6193,7 +6193,7 @@
               <a:buNone/>
             </a:pPr>
             <a:r>
-              <a:rPr lang="en-US" sz="2600" b="1" dirty="0">
+              <a:rPr lang="ja-JP" altLang="en-US" sz="2600" b="1" dirty="0">
                 <a:solidFill>
                   <a:srgbClr val="FFFFFF"/>
                 </a:solidFill>
@@ -6203,7 +6203,7 @@
               </a:rPr>
               <a:t>1</a:t>
             </a:r>
-            <a:endParaRPr lang="en-US" sz="2600" dirty="0"/>
+            <a:endParaRPr lang="ja-JP" sz="2600" dirty="0"/>
           </a:p>
         </p:txBody>
       </p:sp>
@@ -6235,7 +6235,7 @@
               <a:buNone/>
             </a:pPr>
             <a:r>
-              <a:rPr lang="en-US" sz="1600" b="1" dirty="0">
+              <a:rPr lang="ja-JP" altLang="en-US" sz="1600" b="1" dirty="0">
                 <a:solidFill>
                   <a:srgbClr val="FFFFFF"/>
                 </a:solidFill>
@@ -6245,7 +6245,7 @@
               </a:rPr>
               <a:t>公開を押すまで、</a:t>
             </a:r>
-            <a:endParaRPr lang="en-US" sz="1600" dirty="0"/>
+            <a:endParaRPr lang="ja-JP" sz="1600" dirty="0"/>
           </a:p>
           <a:p>
             <a:pPr algn="ctr" indent="0" marL="0">
@@ -6255,7 +6255,7 @@
               <a:buNone/>
             </a:pPr>
             <a:r>
-              <a:rPr lang="en-US" sz="1600" b="1" dirty="0">
+              <a:rPr lang="ja-JP" altLang="en-US" sz="1600" b="1" dirty="0">
                 <a:solidFill>
                   <a:srgbClr val="FFFFFF"/>
                 </a:solidFill>
@@ -6265,7 +6265,7 @@
               </a:rPr>
               <a:t>お客様には見えない</a:t>
             </a:r>
-            <a:endParaRPr lang="en-US" sz="1600" dirty="0"/>
+            <a:endParaRPr lang="ja-JP" sz="1600" dirty="0"/>
           </a:p>
         </p:txBody>
       </p:sp>
@@ -6294,7 +6294,7 @@
               <a:buNone/>
             </a:pPr>
             <a:r>
-              <a:rPr lang="en-US" sz="1200" dirty="0">
+              <a:rPr lang="ja-JP" altLang="en-US" sz="1200" dirty="0">
                 <a:solidFill>
                   <a:srgbClr val="AFC8CE"/>
                 </a:solidFill>
@@ -6304,7 +6304,7 @@
               </a:rPr>
               <a:t>安心して書きかけで保存してください</a:t>
             </a:r>
-            <a:endParaRPr lang="en-US" sz="1200" dirty="0"/>
+            <a:endParaRPr lang="ja-JP" sz="1200" dirty="0"/>
           </a:p>
         </p:txBody>
       </p:sp>
@@ -6375,7 +6375,7 @@
               <a:buNone/>
             </a:pPr>
             <a:r>
-              <a:rPr lang="en-US" sz="2600" b="1" dirty="0">
+              <a:rPr lang="ja-JP" altLang="en-US" sz="2600" b="1" dirty="0">
                 <a:solidFill>
                   <a:srgbClr val="FFFFFF"/>
                 </a:solidFill>
@@ -6385,7 +6385,7 @@
               </a:rPr>
               <a:t>2</a:t>
             </a:r>
-            <a:endParaRPr lang="en-US" sz="2600" dirty="0"/>
+            <a:endParaRPr lang="ja-JP" sz="2600" dirty="0"/>
           </a:p>
         </p:txBody>
       </p:sp>
@@ -6417,7 +6417,7 @@
               <a:buNone/>
             </a:pPr>
             <a:r>
-              <a:rPr lang="en-US" sz="1600" b="1" dirty="0">
+              <a:rPr lang="ja-JP" altLang="en-US" sz="1600" b="1" dirty="0">
                 <a:solidFill>
                   <a:srgbClr val="FFFFFF"/>
                 </a:solidFill>
@@ -6427,7 +6427,7 @@
               </a:rPr>
               <a:t>変わらないときは</a:t>
             </a:r>
-            <a:endParaRPr lang="en-US" sz="1600" dirty="0"/>
+            <a:endParaRPr lang="ja-JP" sz="1600" dirty="0"/>
           </a:p>
           <a:p>
             <a:pPr algn="ctr" indent="0" marL="0">
@@ -6437,7 +6437,7 @@
               <a:buNone/>
             </a:pPr>
             <a:r>
-              <a:rPr lang="en-US" sz="1600" b="1" dirty="0">
+              <a:rPr lang="ja-JP" altLang="en-US" sz="1600" b="1" dirty="0">
                 <a:solidFill>
                   <a:srgbClr val="FFFFFF"/>
                 </a:solidFill>
@@ -6447,7 +6447,7 @@
               </a:rPr>
               <a:t>キャッシュを消す</a:t>
             </a:r>
-            <a:endParaRPr lang="en-US" sz="1600" dirty="0"/>
+            <a:endParaRPr lang="ja-JP" sz="1600" dirty="0"/>
           </a:p>
         </p:txBody>
       </p:sp>
@@ -6476,7 +6476,7 @@
               <a:buNone/>
             </a:pPr>
             <a:r>
-              <a:rPr lang="en-US" sz="1200" dirty="0">
+              <a:rPr lang="ja-JP" altLang="en-US" sz="1200" dirty="0">
                 <a:solidFill>
                   <a:srgbClr val="AFC8CE"/>
                 </a:solidFill>
@@ -6486,7 +6486,7 @@
               </a:rPr>
               <a:t>Super Page Cache → Purge Cache</a:t>
             </a:r>
-            <a:endParaRPr lang="en-US" sz="1200" dirty="0"/>
+            <a:endParaRPr lang="ja-JP" sz="1200" dirty="0"/>
           </a:p>
         </p:txBody>
       </p:sp>
@@ -6557,7 +6557,7 @@
               <a:buNone/>
             </a:pPr>
             <a:r>
-              <a:rPr lang="en-US" sz="2600" b="1" dirty="0">
+              <a:rPr lang="ja-JP" altLang="en-US" sz="2600" b="1" dirty="0">
                 <a:solidFill>
                   <a:srgbClr val="FFFFFF"/>
                 </a:solidFill>
@@ -6567,7 +6567,7 @@
               </a:rPr>
               <a:t>3</a:t>
             </a:r>
-            <a:endParaRPr lang="en-US" sz="2600" dirty="0"/>
+            <a:endParaRPr lang="ja-JP" sz="2600" dirty="0"/>
           </a:p>
         </p:txBody>
       </p:sp>
@@ -6599,7 +6599,7 @@
               <a:buNone/>
             </a:pPr>
             <a:r>
-              <a:rPr lang="en-US" sz="1600" b="1" dirty="0">
+              <a:rPr lang="ja-JP" altLang="en-US" sz="1600" b="1" dirty="0">
                 <a:solidFill>
                   <a:srgbClr val="FFFFFF"/>
                 </a:solidFill>
@@ -6609,7 +6609,7 @@
               </a:rPr>
               <a:t>コメントは</a:t>
             </a:r>
-            <a:endParaRPr lang="en-US" sz="1600" dirty="0"/>
+            <a:endParaRPr lang="ja-JP" sz="1600" dirty="0"/>
           </a:p>
           <a:p>
             <a:pPr algn="ctr" indent="0" marL="0">
@@ -6619,7 +6619,7 @@
               <a:buNone/>
             </a:pPr>
             <a:r>
-              <a:rPr lang="en-US" sz="1600" b="1" dirty="0">
+              <a:rPr lang="ja-JP" altLang="en-US" sz="1600" b="1" dirty="0">
                 <a:solidFill>
                   <a:srgbClr val="FFFFFF"/>
                 </a:solidFill>
@@ -6629,7 +6629,7 @@
               </a:rPr>
               <a:t>迷ったらスパムへ</a:t>
             </a:r>
-            <a:endParaRPr lang="en-US" sz="1600" dirty="0"/>
+            <a:endParaRPr lang="ja-JP" sz="1600" dirty="0"/>
           </a:p>
         </p:txBody>
       </p:sp>
@@ -6658,7 +6658,7 @@
               <a:buNone/>
             </a:pPr>
             <a:r>
-              <a:rPr lang="en-US" sz="1200" dirty="0">
+              <a:rPr lang="ja-JP" altLang="en-US" sz="1200" dirty="0">
                 <a:solidFill>
                   <a:srgbClr val="AFC8CE"/>
                 </a:solidFill>
@@ -6668,7 +6668,7 @@
               </a:rPr>
               <a:t>承認して載せるより安全です</a:t>
             </a:r>
-            <a:endParaRPr lang="en-US" sz="1200" dirty="0"/>
+            <a:endParaRPr lang="ja-JP" sz="1200" dirty="0"/>
           </a:p>
         </p:txBody>
       </p:sp>
@@ -6697,7 +6697,7 @@
               <a:buNone/>
             </a:pPr>
             <a:r>
-              <a:rPr lang="en-US" sz="1350" dirty="0">
+              <a:rPr lang="ja-JP" altLang="en-US" sz="1350" dirty="0">
                 <a:solidFill>
                   <a:srgbClr val="CFE0E4"/>
                 </a:solidFill>
@@ -6707,7 +6707,7 @@
               </a:rPr>
               <a:t>さらに踏み込んだ作業（テーマの入れ替え・固定ページの修正・検索対策）は、別冊「応用編」にまとめています。</a:t>
             </a:r>
-            <a:endParaRPr lang="en-US" sz="1350" dirty="0"/>
+            <a:endParaRPr lang="ja-JP" sz="1350" dirty="0"/>
           </a:p>
         </p:txBody>
       </p:sp>
@@ -6792,7 +6792,7 @@
               <a:buNone/>
             </a:pPr>
             <a:r>
-              <a:rPr lang="en-US" sz="750" dirty="0">
+              <a:rPr lang="ja-JP" altLang="en-US" sz="750" dirty="0">
                 <a:solidFill>
                   <a:srgbClr val="97A9AF"/>
                 </a:solidFill>
@@ -6802,7 +6802,7 @@
               </a:rPr>
               <a:t>鹿児島のパーキンソン病専門トレーニングスタジオ</a:t>
             </a:r>
-            <a:endParaRPr lang="en-US" sz="750" dirty="0"/>
+            <a:endParaRPr lang="ja-JP" sz="750" dirty="0"/>
           </a:p>
         </p:txBody>
       </p:sp>
@@ -6831,7 +6831,7 @@
               <a:buNone/>
             </a:pPr>
             <a:r>
-              <a:rPr lang="en-US" sz="3000" b="1" dirty="0">
+              <a:rPr lang="ja-JP" altLang="en-US" sz="3000" b="1" dirty="0">
                 <a:solidFill>
                   <a:srgbClr val="264653"/>
                 </a:solidFill>
@@ -6841,7 +6841,7 @@
               </a:rPr>
               <a:t>この資料で、4つのことができるようになります</a:t>
             </a:r>
-            <a:endParaRPr lang="en-US" sz="3000" dirty="0"/>
+            <a:endParaRPr lang="ja-JP" sz="3000" dirty="0"/>
           </a:p>
         </p:txBody>
       </p:sp>
@@ -6917,7 +6917,7 @@
               <a:buNone/>
             </a:pPr>
             <a:r>
-              <a:rPr lang="en-US" sz="2200" b="1" dirty="0">
+              <a:rPr lang="ja-JP" altLang="en-US" sz="2200" b="1" dirty="0">
                 <a:solidFill>
                   <a:srgbClr val="FFFFFF"/>
                 </a:solidFill>
@@ -6927,7 +6927,7 @@
               </a:rPr>
               <a:t>1</a:t>
             </a:r>
-            <a:endParaRPr lang="en-US" sz="2200" dirty="0"/>
+            <a:endParaRPr lang="ja-JP" sz="2200" dirty="0"/>
           </a:p>
         </p:txBody>
       </p:sp>
@@ -6956,7 +6956,7 @@
               <a:buNone/>
             </a:pPr>
             <a:r>
-              <a:rPr lang="en-US" sz="1700" b="1" dirty="0">
+              <a:rPr lang="ja-JP" altLang="en-US" sz="1700" b="1" dirty="0">
                 <a:solidFill>
                   <a:srgbClr val="264653"/>
                 </a:solidFill>
@@ -6966,7 +6966,7 @@
               </a:rPr>
               <a:t>お知らせを出す</a:t>
             </a:r>
-            <a:endParaRPr lang="en-US" sz="1700" dirty="0"/>
+            <a:endParaRPr lang="ja-JP" sz="1700" dirty="0"/>
           </a:p>
         </p:txBody>
       </p:sp>
@@ -6998,7 +6998,7 @@
               <a:buNone/>
             </a:pPr>
             <a:r>
-              <a:rPr lang="en-US" sz="1250" dirty="0">
+              <a:rPr lang="ja-JP" altLang="en-US" sz="1250" dirty="0">
                 <a:solidFill>
                   <a:srgbClr val="52707A"/>
                 </a:solidFill>
@@ -7008,7 +7008,7 @@
               </a:rPr>
               <a:t>休業やキャンペーンを</a:t>
             </a:r>
-            <a:endParaRPr lang="en-US" sz="1250" dirty="0"/>
+            <a:endParaRPr lang="ja-JP" sz="1250" dirty="0"/>
           </a:p>
           <a:p>
             <a:pPr algn="ctr" indent="0" marL="0">
@@ -7018,7 +7018,7 @@
               <a:buNone/>
             </a:pPr>
             <a:r>
-              <a:rPr lang="en-US" sz="1250" dirty="0">
+              <a:rPr lang="ja-JP" altLang="en-US" sz="1250" dirty="0">
                 <a:solidFill>
                   <a:srgbClr val="52707A"/>
                 </a:solidFill>
@@ -7028,7 +7028,7 @@
               </a:rPr>
               <a:t>お客様に知らせる</a:t>
             </a:r>
-            <a:endParaRPr lang="en-US" sz="1250" dirty="0"/>
+            <a:endParaRPr lang="ja-JP" sz="1250" dirty="0"/>
           </a:p>
         </p:txBody>
       </p:sp>
@@ -7104,7 +7104,7 @@
               <a:buNone/>
             </a:pPr>
             <a:r>
-              <a:rPr lang="en-US" sz="2200" b="1" dirty="0">
+              <a:rPr lang="ja-JP" altLang="en-US" sz="2200" b="1" dirty="0">
                 <a:solidFill>
                   <a:srgbClr val="FFFFFF"/>
                 </a:solidFill>
@@ -7114,7 +7114,7 @@
               </a:rPr>
               <a:t>2</a:t>
             </a:r>
-            <a:endParaRPr lang="en-US" sz="2200" dirty="0"/>
+            <a:endParaRPr lang="ja-JP" sz="2200" dirty="0"/>
           </a:p>
         </p:txBody>
       </p:sp>
@@ -7143,7 +7143,7 @@
               <a:buNone/>
             </a:pPr>
             <a:r>
-              <a:rPr lang="en-US" sz="1700" b="1" dirty="0">
+              <a:rPr lang="ja-JP" altLang="en-US" sz="1700" b="1" dirty="0">
                 <a:solidFill>
                   <a:srgbClr val="264653"/>
                 </a:solidFill>
@@ -7153,7 +7153,7 @@
               </a:rPr>
               <a:t>申込を確認する</a:t>
             </a:r>
-            <a:endParaRPr lang="en-US" sz="1700" dirty="0"/>
+            <a:endParaRPr lang="ja-JP" sz="1700" dirty="0"/>
           </a:p>
         </p:txBody>
       </p:sp>
@@ -7185,7 +7185,7 @@
               <a:buNone/>
             </a:pPr>
             <a:r>
-              <a:rPr lang="en-US" sz="1250" dirty="0">
+              <a:rPr lang="ja-JP" altLang="en-US" sz="1250" dirty="0">
                 <a:solidFill>
                   <a:srgbClr val="52707A"/>
                 </a:solidFill>
@@ -7195,7 +7195,7 @@
               </a:rPr>
               <a:t>初回体験のお申し込みを</a:t>
             </a:r>
-            <a:endParaRPr lang="en-US" sz="1250" dirty="0"/>
+            <a:endParaRPr lang="ja-JP" sz="1250" dirty="0"/>
           </a:p>
           <a:p>
             <a:pPr algn="ctr" indent="0" marL="0">
@@ -7205,7 +7205,7 @@
               <a:buNone/>
             </a:pPr>
             <a:r>
-              <a:rPr lang="en-US" sz="1250" dirty="0">
+              <a:rPr lang="ja-JP" altLang="en-US" sz="1250" dirty="0">
                 <a:solidFill>
                   <a:srgbClr val="52707A"/>
                 </a:solidFill>
@@ -7215,7 +7215,7 @@
               </a:rPr>
               <a:t>見落とさない</a:t>
             </a:r>
-            <a:endParaRPr lang="en-US" sz="1250" dirty="0"/>
+            <a:endParaRPr lang="ja-JP" sz="1250" dirty="0"/>
           </a:p>
         </p:txBody>
       </p:sp>
@@ -7291,7 +7291,7 @@
               <a:buNone/>
             </a:pPr>
             <a:r>
-              <a:rPr lang="en-US" sz="2200" b="1" dirty="0">
+              <a:rPr lang="ja-JP" altLang="en-US" sz="2200" b="1" dirty="0">
                 <a:solidFill>
                   <a:srgbClr val="FFFFFF"/>
                 </a:solidFill>
@@ -7301,7 +7301,7 @@
               </a:rPr>
               <a:t>3</a:t>
             </a:r>
-            <a:endParaRPr lang="en-US" sz="2200" dirty="0"/>
+            <a:endParaRPr lang="ja-JP" sz="2200" dirty="0"/>
           </a:p>
         </p:txBody>
       </p:sp>
@@ -7330,7 +7330,7 @@
               <a:buNone/>
             </a:pPr>
             <a:r>
-              <a:rPr lang="en-US" sz="1700" b="1" dirty="0">
+              <a:rPr lang="ja-JP" altLang="en-US" sz="1700" b="1" dirty="0">
                 <a:solidFill>
                   <a:srgbClr val="264653"/>
                 </a:solidFill>
@@ -7340,7 +7340,7 @@
               </a:rPr>
               <a:t>写真を差し替える</a:t>
             </a:r>
-            <a:endParaRPr lang="en-US" sz="1700" dirty="0"/>
+            <a:endParaRPr lang="ja-JP" sz="1700" dirty="0"/>
           </a:p>
         </p:txBody>
       </p:sp>
@@ -7372,7 +7372,7 @@
               <a:buNone/>
             </a:pPr>
             <a:r>
-              <a:rPr lang="en-US" sz="1250" dirty="0">
+              <a:rPr lang="ja-JP" altLang="en-US" sz="1250" dirty="0">
                 <a:solidFill>
                   <a:srgbClr val="52707A"/>
                 </a:solidFill>
@@ -7382,7 +7382,7 @@
               </a:rPr>
               <a:t>記事の画像を</a:t>
             </a:r>
-            <a:endParaRPr lang="en-US" sz="1250" dirty="0"/>
+            <a:endParaRPr lang="ja-JP" sz="1250" dirty="0"/>
           </a:p>
           <a:p>
             <a:pPr algn="ctr" indent="0" marL="0">
@@ -7392,7 +7392,7 @@
               <a:buNone/>
             </a:pPr>
             <a:r>
-              <a:rPr lang="en-US" sz="1250" dirty="0">
+              <a:rPr lang="ja-JP" altLang="en-US" sz="1250" dirty="0">
                 <a:solidFill>
                   <a:srgbClr val="52707A"/>
                 </a:solidFill>
@@ -7402,7 +7402,7 @@
               </a:rPr>
               <a:t>新しいものに入れ替える</a:t>
             </a:r>
-            <a:endParaRPr lang="en-US" sz="1250" dirty="0"/>
+            <a:endParaRPr lang="ja-JP" sz="1250" dirty="0"/>
           </a:p>
         </p:txBody>
       </p:sp>
@@ -7478,7 +7478,7 @@
               <a:buNone/>
             </a:pPr>
             <a:r>
-              <a:rPr lang="en-US" sz="2200" b="1" dirty="0">
+              <a:rPr lang="ja-JP" altLang="en-US" sz="2200" b="1" dirty="0">
                 <a:solidFill>
                   <a:srgbClr val="FFFFFF"/>
                 </a:solidFill>
@@ -7488,7 +7488,7 @@
               </a:rPr>
               <a:t>4</a:t>
             </a:r>
-            <a:endParaRPr lang="en-US" sz="2200" dirty="0"/>
+            <a:endParaRPr lang="ja-JP" sz="2200" dirty="0"/>
           </a:p>
         </p:txBody>
       </p:sp>
@@ -7517,7 +7517,7 @@
               <a:buNone/>
             </a:pPr>
             <a:r>
-              <a:rPr lang="en-US" sz="1700" b="1" dirty="0">
+              <a:rPr lang="ja-JP" altLang="en-US" sz="1700" b="1" dirty="0">
                 <a:solidFill>
                   <a:srgbClr val="264653"/>
                 </a:solidFill>
@@ -7527,7 +7527,7 @@
               </a:rPr>
               <a:t>コメントに対応する</a:t>
             </a:r>
-            <a:endParaRPr lang="en-US" sz="1700" dirty="0"/>
+            <a:endParaRPr lang="ja-JP" sz="1700" dirty="0"/>
           </a:p>
         </p:txBody>
       </p:sp>
@@ -7559,7 +7559,7 @@
               <a:buNone/>
             </a:pPr>
             <a:r>
-              <a:rPr lang="en-US" sz="1250" dirty="0">
+              <a:rPr lang="ja-JP" altLang="en-US" sz="1250" dirty="0">
                 <a:solidFill>
                   <a:srgbClr val="52707A"/>
                 </a:solidFill>
@@ -7569,7 +7569,7 @@
               </a:rPr>
               <a:t>スパムを見分けて</a:t>
             </a:r>
-            <a:endParaRPr lang="en-US" sz="1250" dirty="0"/>
+            <a:endParaRPr lang="ja-JP" sz="1250" dirty="0"/>
           </a:p>
           <a:p>
             <a:pPr algn="ctr" indent="0" marL="0">
@@ -7579,7 +7579,7 @@
               <a:buNone/>
             </a:pPr>
             <a:r>
-              <a:rPr lang="en-US" sz="1250" dirty="0">
+              <a:rPr lang="ja-JP" altLang="en-US" sz="1250" dirty="0">
                 <a:solidFill>
                   <a:srgbClr val="52707A"/>
                 </a:solidFill>
@@ -7589,7 +7589,7 @@
               </a:rPr>
               <a:t>必要なものだけ承認する</a:t>
             </a:r>
-            <a:endParaRPr lang="en-US" sz="1250" dirty="0"/>
+            <a:endParaRPr lang="ja-JP" sz="1250" dirty="0"/>
           </a:p>
         </p:txBody>
       </p:sp>
@@ -7665,7 +7665,7 @@
               <a:buNone/>
             </a:pPr>
             <a:r>
-              <a:rPr lang="en-US" sz="1500" b="1" dirty="0">
+              <a:rPr lang="ja-JP" altLang="en-US" sz="1500" b="1" dirty="0">
                 <a:solidFill>
                   <a:srgbClr val="FFFFFF"/>
                 </a:solidFill>
@@ -7675,7 +7675,7 @@
               </a:rPr>
               <a:t>i</a:t>
             </a:r>
-            <a:endParaRPr lang="en-US" sz="1500" dirty="0"/>
+            <a:endParaRPr lang="ja-JP" sz="1500" dirty="0"/>
           </a:p>
         </p:txBody>
       </p:sp>
@@ -7704,7 +7704,7 @@
               <a:buNone/>
             </a:pPr>
             <a:r>
-              <a:rPr lang="en-US" sz="1500" b="1" dirty="0">
+              <a:rPr lang="ja-JP" altLang="en-US" sz="1500" b="1" dirty="0">
                 <a:solidFill>
                   <a:srgbClr val="264653"/>
                 </a:solidFill>
@@ -7714,14 +7714,14 @@
               </a:rPr>
               <a:t>コラムの書き方は、この資料には入れていません</a:t>
             </a:r>
-            <a:endParaRPr lang="en-US" sz="1500" dirty="0"/>
+            <a:endParaRPr lang="ja-JP" sz="1500" dirty="0"/>
           </a:p>
           <a:p>
             <a:pPr indent="0" marL="0">
               <a:buNone/>
             </a:pPr>
             <a:r>
-              <a:rPr lang="en-US" sz="1300" dirty="0">
+              <a:rPr lang="ja-JP" altLang="en-US" sz="1300" dirty="0">
                 <a:solidFill>
                   <a:srgbClr val="1E3A44"/>
                 </a:solidFill>
@@ -7731,7 +7731,7 @@
               </a:rPr>
               <a:t>既に山口様にご操作いただいているためです。手順を見返したいときは『山口様向け_ページの直し方.pdf』をご覧ください。</a:t>
             </a:r>
-            <a:endParaRPr lang="en-US" sz="1500" dirty="0"/>
+            <a:endParaRPr lang="ja-JP" sz="1500" dirty="0"/>
           </a:p>
         </p:txBody>
       </p:sp>
@@ -7816,7 +7816,7 @@
               <a:buNone/>
             </a:pPr>
             <a:r>
-              <a:rPr lang="en-US" sz="750" dirty="0">
+              <a:rPr lang="ja-JP" altLang="en-US" sz="750" dirty="0">
                 <a:solidFill>
                   <a:srgbClr val="97A9AF"/>
                 </a:solidFill>
@@ -7826,7 +7826,7 @@
               </a:rPr>
               <a:t>鹿児島のパーキンソン病専門トレーニングスタジオ</a:t>
             </a:r>
-            <a:endParaRPr lang="en-US" sz="750" dirty="0"/>
+            <a:endParaRPr lang="ja-JP" sz="750" dirty="0"/>
           </a:p>
         </p:txBody>
       </p:sp>
@@ -7855,7 +7855,7 @@
               <a:buNone/>
             </a:pPr>
             <a:r>
-              <a:rPr lang="en-US" sz="3000" b="1" dirty="0">
+              <a:rPr lang="ja-JP" altLang="en-US" sz="3000" b="1" dirty="0">
                 <a:solidFill>
                   <a:srgbClr val="264653"/>
                 </a:solidFill>
@@ -7865,7 +7865,7 @@
               </a:rPr>
               <a:t>はじめに ─ 管理画面の開き方</a:t>
             </a:r>
-            <a:endParaRPr lang="en-US" sz="3000" dirty="0"/>
+            <a:endParaRPr lang="ja-JP" sz="3000" dirty="0"/>
           </a:p>
         </p:txBody>
       </p:sp>
@@ -7916,7 +7916,7 @@
               <a:buNone/>
             </a:pPr>
             <a:r>
-              <a:rPr lang="en-US" sz="1500" b="1" dirty="0">
+              <a:rPr lang="ja-JP" altLang="en-US" sz="1500" b="1" dirty="0">
                 <a:solidFill>
                   <a:srgbClr val="FFFFFF"/>
                 </a:solidFill>
@@ -7926,7 +7926,7 @@
               </a:rPr>
               <a:t>https://aspath-life.com/wp-admin/</a:t>
             </a:r>
-            <a:endParaRPr lang="en-US" sz="1500" dirty="0"/>
+            <a:endParaRPr lang="ja-JP" sz="1500" dirty="0"/>
           </a:p>
         </p:txBody>
       </p:sp>
@@ -7955,7 +7955,7 @@
               <a:buNone/>
             </a:pPr>
             <a:r>
-              <a:rPr lang="en-US" sz="1200" dirty="0">
+              <a:rPr lang="ja-JP" altLang="en-US" sz="1200" dirty="0">
                 <a:solidFill>
                   <a:srgbClr val="BBD2D8"/>
                 </a:solidFill>
@@ -7965,7 +7965,7 @@
               </a:rPr>
               <a:t>このURLをお気に入りに入れておくと便利です</a:t>
             </a:r>
-            <a:endParaRPr lang="en-US" sz="1200" dirty="0"/>
+            <a:endParaRPr lang="ja-JP" sz="1200" dirty="0"/>
           </a:p>
         </p:txBody>
       </p:sp>
@@ -8014,7 +8014,7 @@
               <a:buNone/>
             </a:pPr>
             <a:r>
-              <a:rPr lang="en-US" sz="1300" b="1" dirty="0">
+              <a:rPr lang="ja-JP" altLang="en-US" sz="1300" b="1" dirty="0">
                 <a:solidFill>
                   <a:srgbClr val="FFFFFF"/>
                 </a:solidFill>
@@ -8024,7 +8024,7 @@
               </a:rPr>
               <a:t>1</a:t>
             </a:r>
-            <a:endParaRPr lang="en-US" sz="1300" dirty="0"/>
+            <a:endParaRPr lang="ja-JP" sz="1300" dirty="0"/>
           </a:p>
         </p:txBody>
       </p:sp>
@@ -8053,7 +8053,7 @@
               <a:buNone/>
             </a:pPr>
             <a:r>
-              <a:rPr lang="en-US" sz="1500" b="1" dirty="0">
+              <a:rPr lang="ja-JP" altLang="en-US" sz="1500" b="1" dirty="0">
                 <a:solidFill>
                   <a:srgbClr val="264653"/>
                 </a:solidFill>
@@ -8063,14 +8063,14 @@
               </a:rPr>
               <a:t>上のURLを開く</a:t>
             </a:r>
-            <a:endParaRPr lang="en-US" sz="1500" dirty="0"/>
+            <a:endParaRPr lang="ja-JP" sz="1500" dirty="0"/>
           </a:p>
           <a:p>
             <a:pPr indent="0" marL="0">
               <a:buNone/>
             </a:pPr>
             <a:r>
-              <a:rPr lang="en-US" sz="1300" dirty="0">
+              <a:rPr lang="ja-JP" altLang="en-US" sz="1300" dirty="0">
                 <a:solidFill>
                   <a:srgbClr val="52707A"/>
                 </a:solidFill>
@@ -8080,7 +8080,7 @@
               </a:rPr>
               <a:t>ブラウザ（Chrome など）のアドレス欄に入力します</a:t>
             </a:r>
-            <a:endParaRPr lang="en-US" sz="1500" dirty="0"/>
+            <a:endParaRPr lang="ja-JP" sz="1500" dirty="0"/>
           </a:p>
         </p:txBody>
       </p:sp>
@@ -8129,7 +8129,7 @@
               <a:buNone/>
             </a:pPr>
             <a:r>
-              <a:rPr lang="en-US" sz="1300" b="1" dirty="0">
+              <a:rPr lang="ja-JP" altLang="en-US" sz="1300" b="1" dirty="0">
                 <a:solidFill>
                   <a:srgbClr val="FFFFFF"/>
                 </a:solidFill>
@@ -8139,7 +8139,7 @@
               </a:rPr>
               <a:t>2</a:t>
             </a:r>
-            <a:endParaRPr lang="en-US" sz="1300" dirty="0"/>
+            <a:endParaRPr lang="ja-JP" sz="1300" dirty="0"/>
           </a:p>
         </p:txBody>
       </p:sp>
@@ -8168,7 +8168,7 @@
               <a:buNone/>
             </a:pPr>
             <a:r>
-              <a:rPr lang="en-US" sz="1500" b="1" dirty="0">
+              <a:rPr lang="ja-JP" altLang="en-US" sz="1500" b="1" dirty="0">
                 <a:solidFill>
                   <a:srgbClr val="264653"/>
                 </a:solidFill>
@@ -8178,14 +8178,14 @@
               </a:rPr>
               <a:t>ユーザー名とパスワードを入れる</a:t>
             </a:r>
-            <a:endParaRPr lang="en-US" sz="1500" dirty="0"/>
+            <a:endParaRPr lang="ja-JP" sz="1500" dirty="0"/>
           </a:p>
           <a:p>
             <a:pPr indent="0" marL="0">
               <a:buNone/>
             </a:pPr>
             <a:r>
-              <a:rPr lang="en-US" sz="1300" dirty="0">
+              <a:rPr lang="ja-JP" altLang="en-US" sz="1300" dirty="0">
                 <a:solidFill>
                   <a:srgbClr val="52707A"/>
                 </a:solidFill>
@@ -8195,7 +8195,7 @@
               </a:rPr>
               <a:t>ASPATH のアカウントでログインします</a:t>
             </a:r>
-            <a:endParaRPr lang="en-US" sz="1500" dirty="0"/>
+            <a:endParaRPr lang="ja-JP" sz="1500" dirty="0"/>
           </a:p>
         </p:txBody>
       </p:sp>
@@ -8244,7 +8244,7 @@
               <a:buNone/>
             </a:pPr>
             <a:r>
-              <a:rPr lang="en-US" sz="1300" b="1" dirty="0">
+              <a:rPr lang="ja-JP" altLang="en-US" sz="1300" b="1" dirty="0">
                 <a:solidFill>
                   <a:srgbClr val="FFFFFF"/>
                 </a:solidFill>
@@ -8254,7 +8254,7 @@
               </a:rPr>
               <a:t>3</a:t>
             </a:r>
-            <a:endParaRPr lang="en-US" sz="1300" dirty="0"/>
+            <a:endParaRPr lang="ja-JP" sz="1300" dirty="0"/>
           </a:p>
         </p:txBody>
       </p:sp>
@@ -8283,7 +8283,7 @@
               <a:buNone/>
             </a:pPr>
             <a:r>
-              <a:rPr lang="en-US" sz="1500" b="1" dirty="0">
+              <a:rPr lang="ja-JP" altLang="en-US" sz="1500" b="1" dirty="0">
                 <a:solidFill>
                   <a:srgbClr val="264653"/>
                 </a:solidFill>
@@ -8293,14 +8293,14 @@
               </a:rPr>
               <a:t>左側のメニューから作業を選ぶ</a:t>
             </a:r>
-            <a:endParaRPr lang="en-US" sz="1500" dirty="0"/>
+            <a:endParaRPr lang="ja-JP" sz="1500" dirty="0"/>
           </a:p>
           <a:p>
             <a:pPr indent="0" marL="0">
               <a:buNone/>
             </a:pPr>
             <a:r>
-              <a:rPr lang="en-US" sz="1300" dirty="0">
+              <a:rPr lang="ja-JP" altLang="en-US" sz="1300" dirty="0">
                 <a:solidFill>
                   <a:srgbClr val="52707A"/>
                 </a:solidFill>
@@ -8310,7 +8310,7 @@
               </a:rPr>
               <a:t>使うのは「投稿」「初回体験の申込」「コメント」の3つです</a:t>
             </a:r>
-            <a:endParaRPr lang="en-US" sz="1500" dirty="0"/>
+            <a:endParaRPr lang="ja-JP" sz="1500" dirty="0"/>
           </a:p>
         </p:txBody>
       </p:sp>
@@ -8437,7 +8437,7 @@
               <a:buNone/>
             </a:pPr>
             <a:r>
-              <a:rPr lang="en-US" sz="1500" b="1" dirty="0">
+              <a:rPr lang="ja-JP" altLang="en-US" sz="1500" b="1" dirty="0">
                 <a:solidFill>
                   <a:srgbClr val="FFFFFF"/>
                 </a:solidFill>
@@ -8447,7 +8447,7 @@
               </a:rPr>
               <a:t>i</a:t>
             </a:r>
-            <a:endParaRPr lang="en-US" sz="1500" dirty="0"/>
+            <a:endParaRPr lang="ja-JP" sz="1500" dirty="0"/>
           </a:p>
         </p:txBody>
       </p:sp>
@@ -8476,7 +8476,7 @@
               <a:buNone/>
             </a:pPr>
             <a:r>
-              <a:rPr lang="en-US" sz="1500" b="1" dirty="0">
+              <a:rPr lang="ja-JP" altLang="en-US" sz="1500" b="1" dirty="0">
                 <a:solidFill>
                   <a:srgbClr val="264653"/>
                 </a:solidFill>
@@ -8486,14 +8486,14 @@
               </a:rPr>
               <a:t>画面の上のほうに出るお知らせは、無視してかまいません</a:t>
             </a:r>
-            <a:endParaRPr lang="en-US" sz="1500" dirty="0"/>
+            <a:endParaRPr lang="ja-JP" sz="1500" dirty="0"/>
           </a:p>
           <a:p>
             <a:pPr indent="0" marL="0">
               <a:buNone/>
             </a:pPr>
             <a:r>
-              <a:rPr lang="en-US" sz="1300" dirty="0">
+              <a:rPr lang="ja-JP" altLang="en-US" sz="1300" dirty="0">
                 <a:solidFill>
                   <a:srgbClr val="1E3A44"/>
                 </a:solidFill>
@@ -8503,7 +8503,7 @@
               </a:rPr>
               <a:t>プラグインの宣伝です。×で閉じても、また出ることがあります。作業には影響しません。</a:t>
             </a:r>
-            <a:endParaRPr lang="en-US" sz="1500" dirty="0"/>
+            <a:endParaRPr lang="ja-JP" sz="1500" dirty="0"/>
           </a:p>
         </p:txBody>
       </p:sp>
@@ -8588,7 +8588,7 @@
               <a:buNone/>
             </a:pPr>
             <a:r>
-              <a:rPr lang="en-US" sz="750" dirty="0">
+              <a:rPr lang="ja-JP" altLang="en-US" sz="750" dirty="0">
                 <a:solidFill>
                   <a:srgbClr val="97A9AF"/>
                 </a:solidFill>
@@ -8598,7 +8598,7 @@
               </a:rPr>
               <a:t>鹿児島のパーキンソン病専門トレーニングスタジオ</a:t>
             </a:r>
-            <a:endParaRPr lang="en-US" sz="750" dirty="0"/>
+            <a:endParaRPr lang="ja-JP" sz="750" dirty="0"/>
           </a:p>
         </p:txBody>
       </p:sp>
@@ -8647,7 +8647,7 @@
               <a:buNone/>
             </a:pPr>
             <a:r>
-              <a:rPr lang="en-US" sz="2400" b="1" dirty="0">
+              <a:rPr lang="ja-JP" altLang="en-US" sz="2400" b="1" dirty="0">
                 <a:solidFill>
                   <a:srgbClr val="FFFFFF"/>
                 </a:solidFill>
@@ -8657,7 +8657,7 @@
               </a:rPr>
               <a:t>1</a:t>
             </a:r>
-            <a:endParaRPr lang="en-US" sz="2400" dirty="0"/>
+            <a:endParaRPr lang="ja-JP" sz="2400" dirty="0"/>
           </a:p>
         </p:txBody>
       </p:sp>
@@ -8686,7 +8686,7 @@
               <a:buNone/>
             </a:pPr>
             <a:r>
-              <a:rPr lang="en-US" sz="3000" b="1" dirty="0">
+              <a:rPr lang="ja-JP" altLang="en-US" sz="3000" b="1" dirty="0">
                 <a:solidFill>
                   <a:srgbClr val="264653"/>
                 </a:solidFill>
@@ -8696,7 +8696,7 @@
               </a:rPr>
               <a:t>お知らせを出す ─ 全体の流れ</a:t>
             </a:r>
-            <a:endParaRPr lang="en-US" sz="3000" dirty="0"/>
+            <a:endParaRPr lang="ja-JP" sz="3000" dirty="0"/>
           </a:p>
         </p:txBody>
       </p:sp>
@@ -8772,7 +8772,7 @@
               <a:buNone/>
             </a:pPr>
             <a:r>
-              <a:rPr lang="en-US" sz="1700" b="1" dirty="0">
+              <a:rPr lang="ja-JP" altLang="en-US" sz="1700" b="1" dirty="0">
                 <a:solidFill>
                   <a:srgbClr val="FFFFFF"/>
                 </a:solidFill>
@@ -8782,7 +8782,7 @@
               </a:rPr>
               <a:t>1</a:t>
             </a:r>
-            <a:endParaRPr lang="en-US" sz="1700" dirty="0"/>
+            <a:endParaRPr lang="ja-JP" sz="1700" dirty="0"/>
           </a:p>
         </p:txBody>
       </p:sp>
@@ -8811,7 +8811,7 @@
               <a:buNone/>
             </a:pPr>
             <a:r>
-              <a:rPr lang="en-US" sz="1400" b="1" dirty="0">
+              <a:rPr lang="ja-JP" altLang="en-US" sz="1400" b="1" dirty="0">
                 <a:solidFill>
                   <a:srgbClr val="264653"/>
                 </a:solidFill>
@@ -8821,7 +8821,7 @@
               </a:rPr>
               <a:t>新規追加</a:t>
             </a:r>
-            <a:endParaRPr lang="en-US" sz="1400" dirty="0"/>
+            <a:endParaRPr lang="ja-JP" sz="1400" dirty="0"/>
           </a:p>
         </p:txBody>
       </p:sp>
@@ -8850,7 +8850,7 @@
               <a:buNone/>
             </a:pPr>
             <a:r>
-              <a:rPr lang="en-US" sz="1100" dirty="0">
+              <a:rPr lang="ja-JP" altLang="en-US" sz="1100" dirty="0">
                 <a:solidFill>
                   <a:srgbClr val="52707A"/>
                 </a:solidFill>
@@ -8860,7 +8860,7 @@
               </a:rPr>
               <a:t>投稿 → 新規追加</a:t>
             </a:r>
-            <a:endParaRPr lang="en-US" sz="1100" dirty="0"/>
+            <a:endParaRPr lang="ja-JP" sz="1100" dirty="0"/>
           </a:p>
         </p:txBody>
       </p:sp>
@@ -8889,7 +8889,7 @@
               <a:buNone/>
             </a:pPr>
             <a:r>
-              <a:rPr lang="en-US" sz="2600" b="1" dirty="0">
+              <a:rPr lang="ja-JP" altLang="en-US" sz="2600" b="1" dirty="0">
                 <a:solidFill>
                   <a:srgbClr val="F4A261"/>
                 </a:solidFill>
@@ -8899,7 +8899,7 @@
               </a:rPr>
               <a:t>›</a:t>
             </a:r>
-            <a:endParaRPr lang="en-US" sz="2600" dirty="0"/>
+            <a:endParaRPr lang="ja-JP" sz="2600" dirty="0"/>
           </a:p>
         </p:txBody>
       </p:sp>
@@ -8975,7 +8975,7 @@
               <a:buNone/>
             </a:pPr>
             <a:r>
-              <a:rPr lang="en-US" sz="1700" b="1" dirty="0">
+              <a:rPr lang="ja-JP" altLang="en-US" sz="1700" b="1" dirty="0">
                 <a:solidFill>
                   <a:srgbClr val="FFFFFF"/>
                 </a:solidFill>
@@ -8985,7 +8985,7 @@
               </a:rPr>
               <a:t>2</a:t>
             </a:r>
-            <a:endParaRPr lang="en-US" sz="1700" dirty="0"/>
+            <a:endParaRPr lang="ja-JP" sz="1700" dirty="0"/>
           </a:p>
         </p:txBody>
       </p:sp>
@@ -9014,7 +9014,7 @@
               <a:buNone/>
             </a:pPr>
             <a:r>
-              <a:rPr lang="en-US" sz="1400" b="1" dirty="0">
+              <a:rPr lang="ja-JP" altLang="en-US" sz="1400" b="1" dirty="0">
                 <a:solidFill>
                   <a:srgbClr val="264653"/>
                 </a:solidFill>
@@ -9024,7 +9024,7 @@
               </a:rPr>
               <a:t>書く</a:t>
             </a:r>
-            <a:endParaRPr lang="en-US" sz="1400" dirty="0"/>
+            <a:endParaRPr lang="ja-JP" sz="1400" dirty="0"/>
           </a:p>
         </p:txBody>
       </p:sp>
@@ -9053,7 +9053,7 @@
               <a:buNone/>
             </a:pPr>
             <a:r>
-              <a:rPr lang="en-US" sz="1100" dirty="0">
+              <a:rPr lang="ja-JP" altLang="en-US" sz="1100" dirty="0">
                 <a:solidFill>
                   <a:srgbClr val="52707A"/>
                 </a:solidFill>
@@ -9063,7 +9063,7 @@
               </a:rPr>
               <a:t>題名と本文</a:t>
             </a:r>
-            <a:endParaRPr lang="en-US" sz="1100" dirty="0"/>
+            <a:endParaRPr lang="ja-JP" sz="1100" dirty="0"/>
           </a:p>
         </p:txBody>
       </p:sp>
@@ -9092,7 +9092,7 @@
               <a:buNone/>
             </a:pPr>
             <a:r>
-              <a:rPr lang="en-US" sz="2600" b="1" dirty="0">
+              <a:rPr lang="ja-JP" altLang="en-US" sz="2600" b="1" dirty="0">
                 <a:solidFill>
                   <a:srgbClr val="F4A261"/>
                 </a:solidFill>
@@ -9102,7 +9102,7 @@
               </a:rPr>
               <a:t>›</a:t>
             </a:r>
-            <a:endParaRPr lang="en-US" sz="2600" dirty="0"/>
+            <a:endParaRPr lang="ja-JP" sz="2600" dirty="0"/>
           </a:p>
         </p:txBody>
       </p:sp>
@@ -9178,7 +9178,7 @@
               <a:buNone/>
             </a:pPr>
             <a:r>
-              <a:rPr lang="en-US" sz="1700" b="1" dirty="0">
+              <a:rPr lang="ja-JP" altLang="en-US" sz="1700" b="1" dirty="0">
                 <a:solidFill>
                   <a:srgbClr val="FFFFFF"/>
                 </a:solidFill>
@@ -9188,7 +9188,7 @@
               </a:rPr>
               <a:t>3</a:t>
             </a:r>
-            <a:endParaRPr lang="en-US" sz="1700" dirty="0"/>
+            <a:endParaRPr lang="ja-JP" sz="1700" dirty="0"/>
           </a:p>
         </p:txBody>
       </p:sp>
@@ -9217,7 +9217,7 @@
               <a:buNone/>
             </a:pPr>
             <a:r>
-              <a:rPr lang="en-US" sz="1400" b="1" dirty="0">
+              <a:rPr lang="ja-JP" altLang="en-US" sz="1400" b="1" dirty="0">
                 <a:solidFill>
                   <a:srgbClr val="264653"/>
                 </a:solidFill>
@@ -9227,7 +9227,7 @@
               </a:rPr>
               <a:t>分類する</a:t>
             </a:r>
-            <a:endParaRPr lang="en-US" sz="1400" dirty="0"/>
+            <a:endParaRPr lang="ja-JP" sz="1400" dirty="0"/>
           </a:p>
         </p:txBody>
       </p:sp>
@@ -9256,7 +9256,7 @@
               <a:buNone/>
             </a:pPr>
             <a:r>
-              <a:rPr lang="en-US" sz="1100" dirty="0">
+              <a:rPr lang="ja-JP" altLang="en-US" sz="1100" dirty="0">
                 <a:solidFill>
                   <a:srgbClr val="52707A"/>
                 </a:solidFill>
@@ -9266,7 +9266,7 @@
               </a:rPr>
               <a:t>カテゴリー「お知らせ」</a:t>
             </a:r>
-            <a:endParaRPr lang="en-US" sz="1100" dirty="0"/>
+            <a:endParaRPr lang="ja-JP" sz="1100" dirty="0"/>
           </a:p>
         </p:txBody>
       </p:sp>
@@ -9295,7 +9295,7 @@
               <a:buNone/>
             </a:pPr>
             <a:r>
-              <a:rPr lang="en-US" sz="2600" b="1" dirty="0">
+              <a:rPr lang="ja-JP" altLang="en-US" sz="2600" b="1" dirty="0">
                 <a:solidFill>
                   <a:srgbClr val="F4A261"/>
                 </a:solidFill>
@@ -9305,7 +9305,7 @@
               </a:rPr>
               <a:t>›</a:t>
             </a:r>
-            <a:endParaRPr lang="en-US" sz="2600" dirty="0"/>
+            <a:endParaRPr lang="ja-JP" sz="2600" dirty="0"/>
           </a:p>
         </p:txBody>
       </p:sp>
@@ -9381,7 +9381,7 @@
               <a:buNone/>
             </a:pPr>
             <a:r>
-              <a:rPr lang="en-US" sz="1700" b="1" dirty="0">
+              <a:rPr lang="ja-JP" altLang="en-US" sz="1700" b="1" dirty="0">
                 <a:solidFill>
                   <a:srgbClr val="FFFFFF"/>
                 </a:solidFill>
@@ -9391,7 +9391,7 @@
               </a:rPr>
               <a:t>4</a:t>
             </a:r>
-            <a:endParaRPr lang="en-US" sz="1700" dirty="0"/>
+            <a:endParaRPr lang="ja-JP" sz="1700" dirty="0"/>
           </a:p>
         </p:txBody>
       </p:sp>
@@ -9420,7 +9420,7 @@
               <a:buNone/>
             </a:pPr>
             <a:r>
-              <a:rPr lang="en-US" sz="1400" b="1" dirty="0">
+              <a:rPr lang="ja-JP" altLang="en-US" sz="1400" b="1" dirty="0">
                 <a:solidFill>
                   <a:srgbClr val="264653"/>
                 </a:solidFill>
@@ -9430,7 +9430,7 @@
               </a:rPr>
               <a:t>必要なら固定</a:t>
             </a:r>
-            <a:endParaRPr lang="en-US" sz="1400" dirty="0"/>
+            <a:endParaRPr lang="ja-JP" sz="1400" dirty="0"/>
           </a:p>
         </p:txBody>
       </p:sp>
@@ -9459,7 +9459,7 @@
               <a:buNone/>
             </a:pPr>
             <a:r>
-              <a:rPr lang="en-US" sz="1100" dirty="0">
+              <a:rPr lang="ja-JP" altLang="en-US" sz="1100" dirty="0">
                 <a:solidFill>
                   <a:srgbClr val="52707A"/>
                 </a:solidFill>
@@ -9469,7 +9469,7 @@
               </a:rPr>
               <a:t>先頭固定表示</a:t>
             </a:r>
-            <a:endParaRPr lang="en-US" sz="1100" dirty="0"/>
+            <a:endParaRPr lang="ja-JP" sz="1100" dirty="0"/>
           </a:p>
         </p:txBody>
       </p:sp>
@@ -9498,7 +9498,7 @@
               <a:buNone/>
             </a:pPr>
             <a:r>
-              <a:rPr lang="en-US" sz="2600" b="1" dirty="0">
+              <a:rPr lang="ja-JP" altLang="en-US" sz="2600" b="1" dirty="0">
                 <a:solidFill>
                   <a:srgbClr val="F4A261"/>
                 </a:solidFill>
@@ -9508,7 +9508,7 @@
               </a:rPr>
               <a:t>›</a:t>
             </a:r>
-            <a:endParaRPr lang="en-US" sz="2600" dirty="0"/>
+            <a:endParaRPr lang="ja-JP" sz="2600" dirty="0"/>
           </a:p>
         </p:txBody>
       </p:sp>
@@ -9584,7 +9584,7 @@
               <a:buNone/>
             </a:pPr>
             <a:r>
-              <a:rPr lang="en-US" sz="1700" b="1" dirty="0">
+              <a:rPr lang="ja-JP" altLang="en-US" sz="1700" b="1" dirty="0">
                 <a:solidFill>
                   <a:srgbClr val="FFFFFF"/>
                 </a:solidFill>
@@ -9594,7 +9594,7 @@
               </a:rPr>
               <a:t>5</a:t>
             </a:r>
-            <a:endParaRPr lang="en-US" sz="1700" dirty="0"/>
+            <a:endParaRPr lang="ja-JP" sz="1700" dirty="0"/>
           </a:p>
         </p:txBody>
       </p:sp>
@@ -9623,7 +9623,7 @@
               <a:buNone/>
             </a:pPr>
             <a:r>
-              <a:rPr lang="en-US" sz="1400" b="1" dirty="0">
+              <a:rPr lang="ja-JP" altLang="en-US" sz="1400" b="1" dirty="0">
                 <a:solidFill>
                   <a:srgbClr val="264653"/>
                 </a:solidFill>
@@ -9633,7 +9633,7 @@
               </a:rPr>
               <a:t>公開</a:t>
             </a:r>
-            <a:endParaRPr lang="en-US" sz="1400" dirty="0"/>
+            <a:endParaRPr lang="ja-JP" sz="1400" dirty="0"/>
           </a:p>
         </p:txBody>
       </p:sp>
@@ -9662,7 +9662,7 @@
               <a:buNone/>
             </a:pPr>
             <a:r>
-              <a:rPr lang="en-US" sz="1100" dirty="0">
+              <a:rPr lang="ja-JP" altLang="en-US" sz="1100" dirty="0">
                 <a:solidFill>
                   <a:srgbClr val="52707A"/>
                 </a:solidFill>
@@ -9672,7 +9672,7 @@
               </a:rPr>
               <a:t>公開ボタン</a:t>
             </a:r>
-            <a:endParaRPr lang="en-US" sz="1100" dirty="0"/>
+            <a:endParaRPr lang="ja-JP" sz="1100" dirty="0"/>
           </a:p>
         </p:txBody>
       </p:sp>
@@ -9748,7 +9748,7 @@
               <a:buNone/>
             </a:pPr>
             <a:r>
-              <a:rPr lang="en-US" sz="1500" b="1" dirty="0">
+              <a:rPr lang="ja-JP" altLang="en-US" sz="1500" b="1" dirty="0">
                 <a:solidFill>
                   <a:srgbClr val="FFFFFF"/>
                 </a:solidFill>
@@ -9758,7 +9758,7 @@
               </a:rPr>
               <a:t>i</a:t>
             </a:r>
-            <a:endParaRPr lang="en-US" sz="1500" dirty="0"/>
+            <a:endParaRPr lang="ja-JP" sz="1500" dirty="0"/>
           </a:p>
         </p:txBody>
       </p:sp>
@@ -9787,7 +9787,7 @@
               <a:buNone/>
             </a:pPr>
             <a:r>
-              <a:rPr lang="en-US" sz="1500" b="1" dirty="0">
+              <a:rPr lang="ja-JP" altLang="en-US" sz="1500" b="1" dirty="0">
                 <a:solidFill>
                   <a:srgbClr val="264653"/>
                 </a:solidFill>
@@ -9797,14 +9797,14 @@
               </a:rPr>
               <a:t>「お知らせ」と「コラム」の違い</a:t>
             </a:r>
-            <a:endParaRPr lang="en-US" sz="1500" dirty="0"/>
+            <a:endParaRPr lang="ja-JP" sz="1500" dirty="0"/>
           </a:p>
           <a:p>
             <a:pPr indent="0" marL="0">
               <a:buNone/>
             </a:pPr>
             <a:r>
-              <a:rPr lang="en-US" sz="1300" dirty="0">
+              <a:rPr lang="ja-JP" altLang="en-US" sz="1300" dirty="0">
                 <a:solidFill>
                   <a:srgbClr val="1E3A44"/>
                 </a:solidFill>
@@ -9814,7 +9814,7 @@
               </a:rPr>
               <a:t>お知らせ＝休業・キャンペーンなどの連絡事項。コラム＝パーキンソン病に関する読みもの。分ける場所は同じ「カテゴリー」欄です。</a:t>
             </a:r>
-            <a:endParaRPr lang="en-US" sz="1500" dirty="0"/>
+            <a:endParaRPr lang="ja-JP" sz="1500" dirty="0"/>
           </a:p>
         </p:txBody>
       </p:sp>
@@ -9890,7 +9890,7 @@
               <a:buNone/>
             </a:pPr>
             <a:r>
-              <a:rPr lang="en-US" sz="1500" b="1" dirty="0">
+              <a:rPr lang="ja-JP" altLang="en-US" sz="1500" b="1" dirty="0">
                 <a:solidFill>
                   <a:srgbClr val="FFFFFF"/>
                 </a:solidFill>
@@ -9900,7 +9900,7 @@
               </a:rPr>
               <a:t>!</a:t>
             </a:r>
-            <a:endParaRPr lang="en-US" sz="1500" dirty="0"/>
+            <a:endParaRPr lang="ja-JP" sz="1500" dirty="0"/>
           </a:p>
         </p:txBody>
       </p:sp>
@@ -9929,7 +9929,7 @@
               <a:buNone/>
             </a:pPr>
             <a:r>
-              <a:rPr lang="en-US" sz="1500" b="1" dirty="0">
+              <a:rPr lang="ja-JP" altLang="en-US" sz="1500" b="1" dirty="0">
                 <a:solidFill>
                   <a:srgbClr val="264653"/>
                 </a:solidFill>
@@ -9939,14 +9939,14 @@
               </a:rPr>
               <a:t>書いている途中で閉じても大丈夫です</a:t>
             </a:r>
-            <a:endParaRPr lang="en-US" sz="1500" dirty="0"/>
+            <a:endParaRPr lang="ja-JP" sz="1500" dirty="0"/>
           </a:p>
           <a:p>
             <a:pPr indent="0" marL="0">
               <a:buNone/>
             </a:pPr>
             <a:r>
-              <a:rPr lang="en-US" sz="1300" dirty="0">
+              <a:rPr lang="ja-JP" altLang="en-US" sz="1300" dirty="0">
                 <a:solidFill>
                   <a:srgbClr val="1E3A44"/>
                 </a:solidFill>
@@ -9956,7 +9956,7 @@
               </a:rPr>
               <a:t>「下書き保存」を押しておけば、あとから続きを書けます。公開ボタンを押すまで、お客様には見えません。</a:t>
             </a:r>
-            <a:endParaRPr lang="en-US" sz="1500" dirty="0"/>
+            <a:endParaRPr lang="ja-JP" sz="1500" dirty="0"/>
           </a:p>
         </p:txBody>
       </p:sp>
@@ -10041,7 +10041,7 @@
               <a:buNone/>
             </a:pPr>
             <a:r>
-              <a:rPr lang="en-US" sz="750" dirty="0">
+              <a:rPr lang="ja-JP" altLang="en-US" sz="750" dirty="0">
                 <a:solidFill>
                   <a:srgbClr val="97A9AF"/>
                 </a:solidFill>
@@ -10051,7 +10051,7 @@
               </a:rPr>
               <a:t>鹿児島のパーキンソン病専門トレーニングスタジオ</a:t>
             </a:r>
-            <a:endParaRPr lang="en-US" sz="750" dirty="0"/>
+            <a:endParaRPr lang="ja-JP" sz="750" dirty="0"/>
           </a:p>
         </p:txBody>
       </p:sp>
@@ -10100,7 +10100,7 @@
               <a:buNone/>
             </a:pPr>
             <a:r>
-              <a:rPr lang="en-US" sz="2400" b="1" dirty="0">
+              <a:rPr lang="ja-JP" altLang="en-US" sz="2400" b="1" dirty="0">
                 <a:solidFill>
                   <a:srgbClr val="FFFFFF"/>
                 </a:solidFill>
@@ -10110,7 +10110,7 @@
               </a:rPr>
               <a:t>1</a:t>
             </a:r>
-            <a:endParaRPr lang="en-US" sz="2400" dirty="0"/>
+            <a:endParaRPr lang="ja-JP" sz="2400" dirty="0"/>
           </a:p>
         </p:txBody>
       </p:sp>
@@ -10139,7 +10139,7 @@
               <a:buNone/>
             </a:pPr>
             <a:r>
-              <a:rPr lang="en-US" sz="3000" b="1" dirty="0">
+              <a:rPr lang="ja-JP" altLang="en-US" sz="3000" b="1" dirty="0">
                 <a:solidFill>
                   <a:srgbClr val="264653"/>
                 </a:solidFill>
@@ -10149,7 +10149,7 @@
               </a:rPr>
               <a:t>お知らせを出す ─ 題名と本文を書く</a:t>
             </a:r>
-            <a:endParaRPr lang="en-US" sz="3000" dirty="0"/>
+            <a:endParaRPr lang="ja-JP" sz="3000" dirty="0"/>
           </a:p>
         </p:txBody>
       </p:sp>
@@ -10261,7 +10261,7 @@
               <a:buNone/>
             </a:pPr>
             <a:r>
-              <a:rPr lang="en-US" sz="1400" b="1" dirty="0">
+              <a:rPr lang="ja-JP" altLang="en-US" sz="1400" b="1" dirty="0">
                 <a:solidFill>
                   <a:srgbClr val="FFFFFF"/>
                 </a:solidFill>
@@ -10271,7 +10271,7 @@
               </a:rPr>
               <a:t>1</a:t>
             </a:r>
-            <a:endParaRPr lang="en-US" sz="1400" dirty="0"/>
+            <a:endParaRPr lang="ja-JP" sz="1400" dirty="0"/>
           </a:p>
         </p:txBody>
       </p:sp>
@@ -10332,7 +10332,7 @@
               <a:buNone/>
             </a:pPr>
             <a:r>
-              <a:rPr lang="en-US" sz="1400" b="1" dirty="0">
+              <a:rPr lang="ja-JP" altLang="en-US" sz="1400" b="1" dirty="0">
                 <a:solidFill>
                   <a:srgbClr val="FFFFFF"/>
                 </a:solidFill>
@@ -10342,7 +10342,7 @@
               </a:rPr>
               <a:t>2</a:t>
             </a:r>
-            <a:endParaRPr lang="en-US" sz="1400" dirty="0"/>
+            <a:endParaRPr lang="ja-JP" sz="1400" dirty="0"/>
           </a:p>
         </p:txBody>
       </p:sp>
@@ -10403,7 +10403,7 @@
               <a:buNone/>
             </a:pPr>
             <a:r>
-              <a:rPr lang="en-US" sz="1400" b="1" dirty="0">
+              <a:rPr lang="ja-JP" altLang="en-US" sz="1400" b="1" dirty="0">
                 <a:solidFill>
                   <a:srgbClr val="FFFFFF"/>
                 </a:solidFill>
@@ -10413,7 +10413,7 @@
               </a:rPr>
               <a:t>3</a:t>
             </a:r>
-            <a:endParaRPr lang="en-US" sz="1400" dirty="0"/>
+            <a:endParaRPr lang="ja-JP" sz="1400" dirty="0"/>
           </a:p>
         </p:txBody>
       </p:sp>
@@ -10474,7 +10474,7 @@
               <a:buNone/>
             </a:pPr>
             <a:r>
-              <a:rPr lang="en-US" sz="1400" b="1" dirty="0">
+              <a:rPr lang="ja-JP" altLang="en-US" sz="1400" b="1" dirty="0">
                 <a:solidFill>
                   <a:srgbClr val="FFFFFF"/>
                 </a:solidFill>
@@ -10484,7 +10484,7 @@
               </a:rPr>
               <a:t>4</a:t>
             </a:r>
-            <a:endParaRPr lang="en-US" sz="1400" dirty="0"/>
+            <a:endParaRPr lang="ja-JP" sz="1400" dirty="0"/>
           </a:p>
         </p:txBody>
       </p:sp>
@@ -10533,7 +10533,7 @@
               <a:buNone/>
             </a:pPr>
             <a:r>
-              <a:rPr lang="en-US" sz="1400" b="1" dirty="0">
+              <a:rPr lang="ja-JP" altLang="en-US" sz="1400" b="1" dirty="0">
                 <a:solidFill>
                   <a:srgbClr val="FFFFFF"/>
                 </a:solidFill>
@@ -10543,7 +10543,7 @@
               </a:rPr>
               <a:t>1</a:t>
             </a:r>
-            <a:endParaRPr lang="en-US" sz="1400" dirty="0"/>
+            <a:endParaRPr lang="ja-JP" sz="1400" dirty="0"/>
           </a:p>
         </p:txBody>
       </p:sp>
@@ -10572,7 +10572,7 @@
               <a:buNone/>
             </a:pPr>
             <a:r>
-              <a:rPr lang="en-US" sz="1450" b="1" dirty="0">
+              <a:rPr lang="ja-JP" altLang="en-US" sz="1450" b="1" dirty="0">
                 <a:solidFill>
                   <a:srgbClr val="264653"/>
                 </a:solidFill>
@@ -10582,14 +10582,14 @@
               </a:rPr>
               <a:t>題名を入れる</a:t>
             </a:r>
-            <a:endParaRPr lang="en-US" sz="1450" dirty="0"/>
+            <a:endParaRPr lang="ja-JP" sz="1450" dirty="0"/>
           </a:p>
           <a:p>
             <a:pPr indent="0" marL="0">
               <a:buNone/>
             </a:pPr>
             <a:r>
-              <a:rPr lang="en-US" sz="1200" dirty="0">
+              <a:rPr lang="ja-JP" altLang="en-US" sz="1200" dirty="0">
                 <a:solidFill>
                   <a:srgbClr val="52707A"/>
                 </a:solidFill>
@@ -10599,7 +10599,7 @@
               </a:rPr>
               <a:t>「年末年始の休業のお知らせ」など</a:t>
             </a:r>
-            <a:endParaRPr lang="en-US" sz="1450" dirty="0"/>
+            <a:endParaRPr lang="ja-JP" sz="1450" dirty="0"/>
           </a:p>
         </p:txBody>
       </p:sp>
@@ -10648,7 +10648,7 @@
               <a:buNone/>
             </a:pPr>
             <a:r>
-              <a:rPr lang="en-US" sz="1400" b="1" dirty="0">
+              <a:rPr lang="ja-JP" altLang="en-US" sz="1400" b="1" dirty="0">
                 <a:solidFill>
                   <a:srgbClr val="FFFFFF"/>
                 </a:solidFill>
@@ -10658,7 +10658,7 @@
               </a:rPr>
               <a:t>2</a:t>
             </a:r>
-            <a:endParaRPr lang="en-US" sz="1400" dirty="0"/>
+            <a:endParaRPr lang="ja-JP" sz="1400" dirty="0"/>
           </a:p>
         </p:txBody>
       </p:sp>
@@ -10687,7 +10687,7 @@
               <a:buNone/>
             </a:pPr>
             <a:r>
-              <a:rPr lang="en-US" sz="1450" b="1" dirty="0">
+              <a:rPr lang="ja-JP" altLang="en-US" sz="1450" b="1" dirty="0">
                 <a:solidFill>
                   <a:srgbClr val="264653"/>
                 </a:solidFill>
@@ -10697,14 +10697,14 @@
               </a:rPr>
               <a:t>本文を書く</a:t>
             </a:r>
-            <a:endParaRPr lang="en-US" sz="1450" dirty="0"/>
+            <a:endParaRPr lang="ja-JP" sz="1450" dirty="0"/>
           </a:p>
           <a:p>
             <a:pPr indent="0" marL="0">
               <a:buNone/>
             </a:pPr>
             <a:r>
-              <a:rPr lang="en-US" sz="1200" dirty="0">
+              <a:rPr lang="ja-JP" altLang="en-US" sz="1200" dirty="0">
                 <a:solidFill>
                   <a:srgbClr val="52707A"/>
                 </a:solidFill>
@@ -10714,7 +10714,7 @@
               </a:rPr>
               <a:t>そのまま打ち込めます</a:t>
             </a:r>
-            <a:endParaRPr lang="en-US" sz="1450" dirty="0"/>
+            <a:endParaRPr lang="ja-JP" sz="1450" dirty="0"/>
           </a:p>
         </p:txBody>
       </p:sp>
@@ -10763,7 +10763,7 @@
               <a:buNone/>
             </a:pPr>
             <a:r>
-              <a:rPr lang="en-US" sz="1400" b="1" dirty="0">
+              <a:rPr lang="ja-JP" altLang="en-US" sz="1400" b="1" dirty="0">
                 <a:solidFill>
                   <a:srgbClr val="FFFFFF"/>
                 </a:solidFill>
@@ -10773,7 +10773,7 @@
               </a:rPr>
               <a:t>3</a:t>
             </a:r>
-            <a:endParaRPr lang="en-US" sz="1400" dirty="0"/>
+            <a:endParaRPr lang="ja-JP" sz="1400" dirty="0"/>
           </a:p>
         </p:txBody>
       </p:sp>
@@ -10802,7 +10802,7 @@
               <a:buNone/>
             </a:pPr>
             <a:r>
-              <a:rPr lang="en-US" sz="1450" b="1" dirty="0">
+              <a:rPr lang="ja-JP" altLang="en-US" sz="1450" b="1" dirty="0">
                 <a:solidFill>
                   <a:srgbClr val="264653"/>
                 </a:solidFill>
@@ -10812,14 +10812,14 @@
               </a:rPr>
               <a:t>公開する</a:t>
             </a:r>
-            <a:endParaRPr lang="en-US" sz="1450" dirty="0"/>
+            <a:endParaRPr lang="ja-JP" sz="1450" dirty="0"/>
           </a:p>
           <a:p>
             <a:pPr indent="0" marL="0">
               <a:buNone/>
             </a:pPr>
             <a:r>
-              <a:rPr lang="en-US" sz="1200" dirty="0">
+              <a:rPr lang="ja-JP" altLang="en-US" sz="1200" dirty="0">
                 <a:solidFill>
                   <a:srgbClr val="52707A"/>
                 </a:solidFill>
@@ -10829,7 +10829,7 @@
               </a:rPr>
               <a:t>押した瞬間に載ります</a:t>
             </a:r>
-            <a:endParaRPr lang="en-US" sz="1450" dirty="0"/>
+            <a:endParaRPr lang="ja-JP" sz="1450" dirty="0"/>
           </a:p>
         </p:txBody>
       </p:sp>
@@ -10878,7 +10878,7 @@
               <a:buNone/>
             </a:pPr>
             <a:r>
-              <a:rPr lang="en-US" sz="1400" b="1" dirty="0">
+              <a:rPr lang="ja-JP" altLang="en-US" sz="1400" b="1" dirty="0">
                 <a:solidFill>
                   <a:srgbClr val="FFFFFF"/>
                 </a:solidFill>
@@ -10888,7 +10888,7 @@
               </a:rPr>
               <a:t>4</a:t>
             </a:r>
-            <a:endParaRPr lang="en-US" sz="1400" dirty="0"/>
+            <a:endParaRPr lang="ja-JP" sz="1400" dirty="0"/>
           </a:p>
         </p:txBody>
       </p:sp>
@@ -10917,7 +10917,7 @@
               <a:buNone/>
             </a:pPr>
             <a:r>
-              <a:rPr lang="en-US" sz="1450" b="1" dirty="0">
+              <a:rPr lang="ja-JP" altLang="en-US" sz="1450" b="1" dirty="0">
                 <a:solidFill>
                   <a:srgbClr val="264653"/>
                 </a:solidFill>
@@ -10927,14 +10927,14 @@
               </a:rPr>
               <a:t>下書き保存</a:t>
             </a:r>
-            <a:endParaRPr lang="en-US" sz="1450" dirty="0"/>
+            <a:endParaRPr lang="ja-JP" sz="1450" dirty="0"/>
           </a:p>
           <a:p>
             <a:pPr indent="0" marL="0">
               <a:buNone/>
             </a:pPr>
             <a:r>
-              <a:rPr lang="en-US" sz="1200" dirty="0">
+              <a:rPr lang="ja-JP" altLang="en-US" sz="1200" dirty="0">
                 <a:solidFill>
                   <a:srgbClr val="52707A"/>
                 </a:solidFill>
@@ -10944,7 +10944,7 @@
               </a:rPr>
               <a:t>まだ載せたくないとき</a:t>
             </a:r>
-            <a:endParaRPr lang="en-US" sz="1450" dirty="0"/>
+            <a:endParaRPr lang="ja-JP" sz="1450" dirty="0"/>
           </a:p>
         </p:txBody>
       </p:sp>
@@ -11020,7 +11020,7 @@
               <a:buNone/>
             </a:pPr>
             <a:r>
-              <a:rPr lang="en-US" sz="1500" b="1" dirty="0">
+              <a:rPr lang="ja-JP" altLang="en-US" sz="1500" b="1" dirty="0">
                 <a:solidFill>
                   <a:srgbClr val="FFFFFF"/>
                 </a:solidFill>
@@ -11030,7 +11030,7 @@
               </a:rPr>
               <a:t>!</a:t>
             </a:r>
-            <a:endParaRPr lang="en-US" sz="1500" dirty="0"/>
+            <a:endParaRPr lang="ja-JP" sz="1500" dirty="0"/>
           </a:p>
         </p:txBody>
       </p:sp>
@@ -11059,7 +11059,7 @@
               <a:buNone/>
             </a:pPr>
             <a:r>
-              <a:rPr lang="en-US" sz="1500" b="1" dirty="0">
+              <a:rPr lang="ja-JP" altLang="en-US" sz="1500" b="1" dirty="0">
                 <a:solidFill>
                   <a:srgbClr val="264653"/>
                 </a:solidFill>
@@ -11069,14 +11069,14 @@
               </a:rPr>
               <a:t>改行は Enter で問題ありません</a:t>
             </a:r>
-            <a:endParaRPr lang="en-US" sz="1500" dirty="0"/>
+            <a:endParaRPr lang="ja-JP" sz="1500" dirty="0"/>
           </a:p>
           <a:p>
             <a:pPr indent="0" marL="0">
               <a:buNone/>
             </a:pPr>
             <a:r>
-              <a:rPr lang="en-US" sz="1300" dirty="0">
+              <a:rPr lang="ja-JP" altLang="en-US" sz="1300" dirty="0">
                 <a:solidFill>
                   <a:srgbClr val="1E3A44"/>
                 </a:solidFill>
@@ -11086,7 +11086,7 @@
               </a:rPr>
               <a:t>Shift＋Enter は使わないでください。行間が崩れることがあります。</a:t>
             </a:r>
-            <a:endParaRPr lang="en-US" sz="1500" dirty="0"/>
+            <a:endParaRPr lang="ja-JP" sz="1500" dirty="0"/>
           </a:p>
         </p:txBody>
       </p:sp>
@@ -11171,7 +11171,7 @@
               <a:buNone/>
             </a:pPr>
             <a:r>
-              <a:rPr lang="en-US" sz="750" dirty="0">
+              <a:rPr lang="ja-JP" altLang="en-US" sz="750" dirty="0">
                 <a:solidFill>
                   <a:srgbClr val="97A9AF"/>
                 </a:solidFill>
@@ -11181,7 +11181,7 @@
               </a:rPr>
               <a:t>鹿児島のパーキンソン病専門トレーニングスタジオ</a:t>
             </a:r>
-            <a:endParaRPr lang="en-US" sz="750" dirty="0"/>
+            <a:endParaRPr lang="ja-JP" sz="750" dirty="0"/>
           </a:p>
         </p:txBody>
       </p:sp>
@@ -11230,7 +11230,7 @@
               <a:buNone/>
             </a:pPr>
             <a:r>
-              <a:rPr lang="en-US" sz="2400" b="1" dirty="0">
+              <a:rPr lang="ja-JP" altLang="en-US" sz="2400" b="1" dirty="0">
                 <a:solidFill>
                   <a:srgbClr val="FFFFFF"/>
                 </a:solidFill>
@@ -11240,7 +11240,7 @@
               </a:rPr>
               <a:t>1</a:t>
             </a:r>
-            <a:endParaRPr lang="en-US" sz="2400" dirty="0"/>
+            <a:endParaRPr lang="ja-JP" sz="2400" dirty="0"/>
           </a:p>
         </p:txBody>
       </p:sp>
@@ -11269,7 +11269,7 @@
               <a:buNone/>
             </a:pPr>
             <a:r>
-              <a:rPr lang="en-US" sz="3000" b="1" dirty="0">
+              <a:rPr lang="ja-JP" altLang="en-US" sz="3000" b="1" dirty="0">
                 <a:solidFill>
                   <a:srgbClr val="264653"/>
                 </a:solidFill>
@@ -11279,7 +11279,7 @@
               </a:rPr>
               <a:t>お知らせを出す ─ 「お知らせ」に分類する</a:t>
             </a:r>
-            <a:endParaRPr lang="en-US" sz="3000" dirty="0"/>
+            <a:endParaRPr lang="ja-JP" sz="3000" dirty="0"/>
           </a:p>
         </p:txBody>
       </p:sp>
@@ -11308,7 +11308,7 @@
               <a:buNone/>
             </a:pPr>
             <a:r>
-              <a:rPr lang="en-US" sz="1500" b="1" dirty="0">
+              <a:rPr lang="ja-JP" altLang="en-US" sz="1500" b="1" dirty="0">
                 <a:solidFill>
                   <a:srgbClr val="264653"/>
                 </a:solidFill>
@@ -11318,7 +11318,7 @@
               </a:rPr>
               <a:t>① 右上の四角いアイコンを押して、設定パネルを開く</a:t>
             </a:r>
-            <a:endParaRPr lang="en-US" sz="1500" dirty="0"/>
+            <a:endParaRPr lang="ja-JP" sz="1500" dirty="0"/>
           </a:p>
         </p:txBody>
       </p:sp>
@@ -11430,7 +11430,7 @@
               <a:buNone/>
             </a:pPr>
             <a:r>
-              <a:rPr lang="en-US" sz="1400" b="1" dirty="0">
+              <a:rPr lang="ja-JP" altLang="en-US" sz="1400" b="1" dirty="0">
                 <a:solidFill>
                   <a:srgbClr val="FFFFFF"/>
                 </a:solidFill>
@@ -11440,7 +11440,7 @@
               </a:rPr>
               <a:t>1</a:t>
             </a:r>
-            <a:endParaRPr lang="en-US" sz="1400" dirty="0"/>
+            <a:endParaRPr lang="ja-JP" sz="1400" dirty="0"/>
           </a:p>
         </p:txBody>
       </p:sp>
@@ -11469,7 +11469,7 @@
               <a:buNone/>
             </a:pPr>
             <a:r>
-              <a:rPr lang="en-US" sz="1500" b="1" dirty="0">
+              <a:rPr lang="ja-JP" altLang="en-US" sz="1500" b="1" dirty="0">
                 <a:solidFill>
                   <a:srgbClr val="264653"/>
                 </a:solidFill>
@@ -11479,7 +11479,7 @@
               </a:rPr>
               <a:t>② カテゴリーの「お知らせ」にチェックを入れる</a:t>
             </a:r>
-            <a:endParaRPr lang="en-US" sz="1500" dirty="0"/>
+            <a:endParaRPr lang="ja-JP" sz="1500" dirty="0"/>
           </a:p>
         </p:txBody>
       </p:sp>
@@ -11591,7 +11591,7 @@
               <a:buNone/>
             </a:pPr>
             <a:r>
-              <a:rPr lang="en-US" sz="1400" b="1" dirty="0">
+              <a:rPr lang="ja-JP" altLang="en-US" sz="1400" b="1" dirty="0">
                 <a:solidFill>
                   <a:srgbClr val="FFFFFF"/>
                 </a:solidFill>
@@ -11601,7 +11601,7 @@
               </a:rPr>
               <a:t>2</a:t>
             </a:r>
-            <a:endParaRPr lang="en-US" sz="1400" dirty="0"/>
+            <a:endParaRPr lang="ja-JP" sz="1400" dirty="0"/>
           </a:p>
         </p:txBody>
       </p:sp>
@@ -11677,7 +11677,7 @@
               <a:buNone/>
             </a:pPr>
             <a:r>
-              <a:rPr lang="en-US" sz="1500" b="1" dirty="0">
+              <a:rPr lang="ja-JP" altLang="en-US" sz="1500" b="1" dirty="0">
                 <a:solidFill>
                   <a:srgbClr val="FFFFFF"/>
                 </a:solidFill>
@@ -11687,7 +11687,7 @@
               </a:rPr>
               <a:t>i</a:t>
             </a:r>
-            <a:endParaRPr lang="en-US" sz="1500" dirty="0"/>
+            <a:endParaRPr lang="ja-JP" sz="1500" dirty="0"/>
           </a:p>
         </p:txBody>
       </p:sp>
@@ -11716,7 +11716,7 @@
               <a:buNone/>
             </a:pPr>
             <a:r>
-              <a:rPr lang="en-US" sz="1500" b="1" dirty="0">
+              <a:rPr lang="ja-JP" altLang="en-US" sz="1500" b="1" dirty="0">
                 <a:solidFill>
                   <a:srgbClr val="264653"/>
                 </a:solidFill>
@@ -11726,14 +11726,14 @@
               </a:rPr>
               <a:t>「コラム」のチェックは外してください</a:t>
             </a:r>
-            <a:endParaRPr lang="en-US" sz="1500" dirty="0"/>
+            <a:endParaRPr lang="ja-JP" sz="1500" dirty="0"/>
           </a:p>
           <a:p>
             <a:pPr indent="0" marL="0">
               <a:buNone/>
             </a:pPr>
             <a:r>
-              <a:rPr lang="en-US" sz="1300" dirty="0">
+              <a:rPr lang="ja-JP" altLang="en-US" sz="1300" dirty="0">
                 <a:solidFill>
                   <a:srgbClr val="1E3A44"/>
                 </a:solidFill>
@@ -11743,7 +11743,7 @@
               </a:rPr>
               <a:t>両方に入っていると、コラム一覧にも休業のお知らせが並びます。</a:t>
             </a:r>
-            <a:endParaRPr lang="en-US" sz="1500" dirty="0"/>
+            <a:endParaRPr lang="ja-JP" sz="1500" dirty="0"/>
           </a:p>
         </p:txBody>
       </p:sp>
@@ -11819,7 +11819,7 @@
               <a:buNone/>
             </a:pPr>
             <a:r>
-              <a:rPr lang="en-US" sz="1500" b="1" dirty="0">
+              <a:rPr lang="ja-JP" altLang="en-US" sz="1500" b="1" dirty="0">
                 <a:solidFill>
                   <a:srgbClr val="FFFFFF"/>
                 </a:solidFill>
@@ -11829,7 +11829,7 @@
               </a:rPr>
               <a:t>!</a:t>
             </a:r>
-            <a:endParaRPr lang="en-US" sz="1500" dirty="0"/>
+            <a:endParaRPr lang="ja-JP" sz="1500" dirty="0"/>
           </a:p>
         </p:txBody>
       </p:sp>
@@ -11858,7 +11858,7 @@
               <a:buNone/>
             </a:pPr>
             <a:r>
-              <a:rPr lang="en-US" sz="1500" b="1" dirty="0">
+              <a:rPr lang="ja-JP" altLang="en-US" sz="1500" b="1" dirty="0">
                 <a:solidFill>
                   <a:srgbClr val="264653"/>
                 </a:solidFill>
@@ -11868,14 +11868,14 @@
               </a:rPr>
               <a:t>ここを間違えると</a:t>
             </a:r>
-            <a:endParaRPr lang="en-US" sz="1500" dirty="0"/>
+            <a:endParaRPr lang="ja-JP" sz="1500" dirty="0"/>
           </a:p>
           <a:p>
             <a:pPr indent="0" marL="0">
               <a:buNone/>
             </a:pPr>
             <a:r>
-              <a:rPr lang="en-US" sz="1300" dirty="0">
+              <a:rPr lang="ja-JP" altLang="en-US" sz="1300" dirty="0">
                 <a:solidFill>
                   <a:srgbClr val="1E3A44"/>
                 </a:solidFill>
@@ -11885,7 +11885,7 @@
               </a:rPr>
               <a:t>読みものを探しに来た方が、休業のお知らせに行き当たって戸惑います。あとから直せますので、慌てなくて大丈夫です。</a:t>
             </a:r>
-            <a:endParaRPr lang="en-US" sz="1500" dirty="0"/>
+            <a:endParaRPr lang="ja-JP" sz="1500" dirty="0"/>
           </a:p>
         </p:txBody>
       </p:sp>
@@ -11970,7 +11970,7 @@
               <a:buNone/>
             </a:pPr>
             <a:r>
-              <a:rPr lang="en-US" sz="750" dirty="0">
+              <a:rPr lang="ja-JP" altLang="en-US" sz="750" dirty="0">
                 <a:solidFill>
                   <a:srgbClr val="97A9AF"/>
                 </a:solidFill>
@@ -11980,7 +11980,7 @@
               </a:rPr>
               <a:t>鹿児島のパーキンソン病専門トレーニングスタジオ</a:t>
             </a:r>
-            <a:endParaRPr lang="en-US" sz="750" dirty="0"/>
+            <a:endParaRPr lang="ja-JP" sz="750" dirty="0"/>
           </a:p>
         </p:txBody>
       </p:sp>
@@ -12029,7 +12029,7 @@
               <a:buNone/>
             </a:pPr>
             <a:r>
-              <a:rPr lang="en-US" sz="2400" b="1" dirty="0">
+              <a:rPr lang="ja-JP" altLang="en-US" sz="2400" b="1" dirty="0">
                 <a:solidFill>
                   <a:srgbClr val="FFFFFF"/>
                 </a:solidFill>
@@ -12039,7 +12039,7 @@
               </a:rPr>
               <a:t>1</a:t>
             </a:r>
-            <a:endParaRPr lang="en-US" sz="2400" dirty="0"/>
+            <a:endParaRPr lang="ja-JP" sz="2400" dirty="0"/>
           </a:p>
         </p:txBody>
       </p:sp>
@@ -12068,7 +12068,7 @@
               <a:buNone/>
             </a:pPr>
             <a:r>
-              <a:rPr lang="en-US" sz="3000" b="1" dirty="0">
+              <a:rPr lang="ja-JP" altLang="en-US" sz="3000" b="1" dirty="0">
                 <a:solidFill>
                   <a:srgbClr val="264653"/>
                 </a:solidFill>
@@ -12078,7 +12078,7 @@
               </a:rPr>
               <a:t>お知らせを出す ─ 大事なお知らせを先頭に固定する</a:t>
             </a:r>
-            <a:endParaRPr lang="en-US" sz="3000" dirty="0"/>
+            <a:endParaRPr lang="ja-JP" sz="3000" dirty="0"/>
           </a:p>
         </p:txBody>
       </p:sp>
@@ -12107,7 +12107,7 @@
               <a:buNone/>
             </a:pPr>
             <a:r>
-              <a:rPr lang="en-US" sz="1500" b="1" dirty="0">
+              <a:rPr lang="ja-JP" altLang="en-US" sz="1500" b="1" dirty="0">
                 <a:solidFill>
                   <a:srgbClr val="264653"/>
                 </a:solidFill>
@@ -12117,7 +12117,7 @@
               </a:rPr>
               <a:t>① 右側の「ステータス」の文字を押す</a:t>
             </a:r>
-            <a:endParaRPr lang="en-US" sz="1500" dirty="0"/>
+            <a:endParaRPr lang="ja-JP" sz="1500" dirty="0"/>
           </a:p>
         </p:txBody>
       </p:sp>
@@ -12229,7 +12229,7 @@
               <a:buNone/>
             </a:pPr>
             <a:r>
-              <a:rPr lang="en-US" sz="1400" b="1" dirty="0">
+              <a:rPr lang="ja-JP" altLang="en-US" sz="1400" b="1" dirty="0">
                 <a:solidFill>
                   <a:srgbClr val="FFFFFF"/>
                 </a:solidFill>
@@ -12239,7 +12239,7 @@
               </a:rPr>
               <a:t>1</a:t>
             </a:r>
-            <a:endParaRPr lang="en-US" sz="1400" dirty="0"/>
+            <a:endParaRPr lang="ja-JP" sz="1400" dirty="0"/>
           </a:p>
         </p:txBody>
       </p:sp>
@@ -12268,7 +12268,7 @@
               <a:buNone/>
             </a:pPr>
             <a:r>
-              <a:rPr lang="en-US" sz="1500" b="1" dirty="0">
+              <a:rPr lang="ja-JP" altLang="en-US" sz="1500" b="1" dirty="0">
                 <a:solidFill>
                   <a:srgbClr val="264653"/>
                 </a:solidFill>
@@ -12278,7 +12278,7 @@
               </a:rPr>
               <a:t>② 開いた窓で「先頭固定表示」にチェック</a:t>
             </a:r>
-            <a:endParaRPr lang="en-US" sz="1500" dirty="0"/>
+            <a:endParaRPr lang="ja-JP" sz="1500" dirty="0"/>
           </a:p>
         </p:txBody>
       </p:sp>
@@ -12390,7 +12390,7 @@
               <a:buNone/>
             </a:pPr>
             <a:r>
-              <a:rPr lang="en-US" sz="1400" b="1" dirty="0">
+              <a:rPr lang="ja-JP" altLang="en-US" sz="1400" b="1" dirty="0">
                 <a:solidFill>
                   <a:srgbClr val="FFFFFF"/>
                 </a:solidFill>
@@ -12400,7 +12400,7 @@
               </a:rPr>
               <a:t>2</a:t>
             </a:r>
-            <a:endParaRPr lang="en-US" sz="1400" dirty="0"/>
+            <a:endParaRPr lang="ja-JP" sz="1400" dirty="0"/>
           </a:p>
         </p:txBody>
       </p:sp>
@@ -12476,7 +12476,7 @@
               <a:buNone/>
             </a:pPr>
             <a:r>
-              <a:rPr lang="en-US" sz="1500" b="1" dirty="0">
+              <a:rPr lang="ja-JP" altLang="en-US" sz="1500" b="1" dirty="0">
                 <a:solidFill>
                   <a:srgbClr val="FFFFFF"/>
                 </a:solidFill>
@@ -12486,7 +12486,7 @@
               </a:rPr>
               <a:t>i</a:t>
             </a:r>
-            <a:endParaRPr lang="en-US" sz="1500" dirty="0"/>
+            <a:endParaRPr lang="ja-JP" sz="1500" dirty="0"/>
           </a:p>
         </p:txBody>
       </p:sp>
@@ -12515,7 +12515,7 @@
               <a:buNone/>
             </a:pPr>
             <a:r>
-              <a:rPr lang="en-US" sz="1500" b="1" dirty="0">
+              <a:rPr lang="ja-JP" altLang="en-US" sz="1500" b="1" dirty="0">
                 <a:solidFill>
                   <a:srgbClr val="264653"/>
                 </a:solidFill>
@@ -12525,14 +12525,14 @@
               </a:rPr>
               <a:t>使いどころ</a:t>
             </a:r>
-            <a:endParaRPr lang="en-US" sz="1500" dirty="0"/>
+            <a:endParaRPr lang="ja-JP" sz="1500" dirty="0"/>
           </a:p>
           <a:p>
             <a:pPr indent="0" marL="0">
               <a:buNone/>
             </a:pPr>
             <a:r>
-              <a:rPr lang="en-US" sz="1300" dirty="0">
+              <a:rPr lang="ja-JP" altLang="en-US" sz="1300" dirty="0">
                 <a:solidFill>
                   <a:srgbClr val="1E3A44"/>
                 </a:solidFill>
@@ -12542,7 +12542,7 @@
               </a:rPr>
               <a:t>休業のお知らせ、キャンペーンなど「今いちばん見てほしいもの」だけに使ってください。何件も固定すると、どれが大事か分からなくなります。</a:t>
             </a:r>
-            <a:endParaRPr lang="en-US" sz="1500" dirty="0"/>
+            <a:endParaRPr lang="ja-JP" sz="1500" dirty="0"/>
           </a:p>
         </p:txBody>
       </p:sp>
@@ -12618,7 +12618,7 @@
               <a:buNone/>
             </a:pPr>
             <a:r>
-              <a:rPr lang="en-US" sz="1500" b="1" dirty="0">
+              <a:rPr lang="ja-JP" altLang="en-US" sz="1500" b="1" dirty="0">
                 <a:solidFill>
                   <a:srgbClr val="FFFFFF"/>
                 </a:solidFill>
@@ -12628,7 +12628,7 @@
               </a:rPr>
               <a:t>!</a:t>
             </a:r>
-            <a:endParaRPr lang="en-US" sz="1500" dirty="0"/>
+            <a:endParaRPr lang="ja-JP" sz="1500" dirty="0"/>
           </a:p>
         </p:txBody>
       </p:sp>
@@ -12657,7 +12657,7 @@
               <a:buNone/>
             </a:pPr>
             <a:r>
-              <a:rPr lang="en-US" sz="1500" b="1" dirty="0">
+              <a:rPr lang="ja-JP" altLang="en-US" sz="1500" b="1" dirty="0">
                 <a:solidFill>
                   <a:srgbClr val="264653"/>
                 </a:solidFill>
@@ -12667,14 +12667,14 @@
               </a:rPr>
               <a:t>終わったら外してください</a:t>
             </a:r>
-            <a:endParaRPr lang="en-US" sz="1500" dirty="0"/>
+            <a:endParaRPr lang="ja-JP" sz="1500" dirty="0"/>
           </a:p>
           <a:p>
             <a:pPr indent="0" marL="0">
               <a:buNone/>
             </a:pPr>
             <a:r>
-              <a:rPr lang="en-US" sz="1300" dirty="0">
+              <a:rPr lang="ja-JP" altLang="en-US" sz="1300" dirty="0">
                 <a:solidFill>
                   <a:srgbClr val="1E3A44"/>
                 </a:solidFill>
@@ -12684,7 +12684,7 @@
               </a:rPr>
               <a:t>期間が過ぎたお知らせが先頭に残っていると、情報が古いサイトに見えてしまいます。同じ手順でチェックを外すだけです。</a:t>
             </a:r>
-            <a:endParaRPr lang="en-US" sz="1500" dirty="0"/>
+            <a:endParaRPr lang="ja-JP" sz="1500" dirty="0"/>
           </a:p>
         </p:txBody>
       </p:sp>
@@ -12769,7 +12769,7 @@
               <a:buNone/>
             </a:pPr>
             <a:r>
-              <a:rPr lang="en-US" sz="750" dirty="0">
+              <a:rPr lang="ja-JP" altLang="en-US" sz="750" dirty="0">
                 <a:solidFill>
                   <a:srgbClr val="97A9AF"/>
                 </a:solidFill>
@@ -12779,7 +12779,7 @@
               </a:rPr>
               <a:t>鹿児島のパーキンソン病専門トレーニングスタジオ</a:t>
             </a:r>
-            <a:endParaRPr lang="en-US" sz="750" dirty="0"/>
+            <a:endParaRPr lang="ja-JP" sz="750" dirty="0"/>
           </a:p>
         </p:txBody>
       </p:sp>
@@ -12828,7 +12828,7 @@
               <a:buNone/>
             </a:pPr>
             <a:r>
-              <a:rPr lang="en-US" sz="2400" b="1" dirty="0">
+              <a:rPr lang="ja-JP" altLang="en-US" sz="2400" b="1" dirty="0">
                 <a:solidFill>
                   <a:srgbClr val="FFFFFF"/>
                 </a:solidFill>
@@ -12838,7 +12838,7 @@
               </a:rPr>
               <a:t>2</a:t>
             </a:r>
-            <a:endParaRPr lang="en-US" sz="2400" dirty="0"/>
+            <a:endParaRPr lang="ja-JP" sz="2400" dirty="0"/>
           </a:p>
         </p:txBody>
       </p:sp>
@@ -12867,7 +12867,7 @@
               <a:buNone/>
             </a:pPr>
             <a:r>
-              <a:rPr lang="en-US" sz="3000" b="1" dirty="0">
+              <a:rPr lang="ja-JP" altLang="en-US" sz="3000" b="1" dirty="0">
                 <a:solidFill>
                   <a:srgbClr val="264653"/>
                 </a:solidFill>
@@ -12877,7 +12877,7 @@
               </a:rPr>
               <a:t>初回体験の申込を見る ─ 一覧を開く</a:t>
             </a:r>
-            <a:endParaRPr lang="en-US" sz="3000" dirty="0"/>
+            <a:endParaRPr lang="ja-JP" sz="3000" dirty="0"/>
           </a:p>
         </p:txBody>
       </p:sp>
@@ -12989,7 +12989,7 @@
               <a:buNone/>
             </a:pPr>
             <a:r>
-              <a:rPr lang="en-US" sz="1400" b="1" dirty="0">
+              <a:rPr lang="ja-JP" altLang="en-US" sz="1400" b="1" dirty="0">
                 <a:solidFill>
                   <a:srgbClr val="FFFFFF"/>
                 </a:solidFill>
@@ -12999,7 +12999,7 @@
               </a:rPr>
               <a:t>1</a:t>
             </a:r>
-            <a:endParaRPr lang="en-US" sz="1400" dirty="0"/>
+            <a:endParaRPr lang="ja-JP" sz="1400" dirty="0"/>
           </a:p>
         </p:txBody>
       </p:sp>
@@ -13060,7 +13060,7 @@
               <a:buNone/>
             </a:pPr>
             <a:r>
-              <a:rPr lang="en-US" sz="1400" b="1" dirty="0">
+              <a:rPr lang="ja-JP" altLang="en-US" sz="1400" b="1" dirty="0">
                 <a:solidFill>
                   <a:srgbClr val="FFFFFF"/>
                 </a:solidFill>
@@ -13070,7 +13070,7 @@
               </a:rPr>
               <a:t>2</a:t>
             </a:r>
-            <a:endParaRPr lang="en-US" sz="1400" dirty="0"/>
+            <a:endParaRPr lang="ja-JP" sz="1400" dirty="0"/>
           </a:p>
         </p:txBody>
       </p:sp>
@@ -13119,7 +13119,7 @@
               <a:buNone/>
             </a:pPr>
             <a:r>
-              <a:rPr lang="en-US" sz="1400" b="1" dirty="0">
+              <a:rPr lang="ja-JP" altLang="en-US" sz="1400" b="1" dirty="0">
                 <a:solidFill>
                   <a:srgbClr val="FFFFFF"/>
                 </a:solidFill>
@@ -13129,7 +13129,7 @@
               </a:rPr>
               <a:t>1</a:t>
             </a:r>
-            <a:endParaRPr lang="en-US" sz="1400" dirty="0"/>
+            <a:endParaRPr lang="ja-JP" sz="1400" dirty="0"/>
           </a:p>
         </p:txBody>
       </p:sp>
@@ -13158,7 +13158,7 @@
               <a:buNone/>
             </a:pPr>
             <a:r>
-              <a:rPr lang="en-US" sz="1500" b="1" dirty="0">
+              <a:rPr lang="ja-JP" altLang="en-US" sz="1500" b="1" dirty="0">
                 <a:solidFill>
                   <a:srgbClr val="264653"/>
                 </a:solidFill>
@@ -13168,14 +13168,14 @@
               </a:rPr>
               <a:t>左メニュー「初回体験の申込」</a:t>
             </a:r>
-            <a:endParaRPr lang="en-US" sz="1500" dirty="0"/>
+            <a:endParaRPr lang="ja-JP" sz="1500" dirty="0"/>
           </a:p>
           <a:p>
             <a:pPr indent="0" marL="0">
               <a:buNone/>
             </a:pPr>
             <a:r>
-              <a:rPr lang="en-US" sz="1250" dirty="0">
+              <a:rPr lang="ja-JP" altLang="en-US" sz="1250" dirty="0">
                 <a:solidFill>
                   <a:srgbClr val="52707A"/>
                 </a:solidFill>
@@ -13185,7 +13185,7 @@
               </a:rPr>
               <a:t>お申し込みはすべてここに入ります</a:t>
             </a:r>
-            <a:endParaRPr lang="en-US" sz="1500" dirty="0"/>
+            <a:endParaRPr lang="ja-JP" sz="1500" dirty="0"/>
           </a:p>
         </p:txBody>
       </p:sp>
@@ -13234,7 +13234,7 @@
               <a:buNone/>
             </a:pPr>
             <a:r>
-              <a:rPr lang="en-US" sz="1400" b="1" dirty="0">
+              <a:rPr lang="ja-JP" altLang="en-US" sz="1400" b="1" dirty="0">
                 <a:solidFill>
                   <a:srgbClr val="FFFFFF"/>
                 </a:solidFill>
@@ -13244,7 +13244,7 @@
               </a:rPr>
               <a:t>2</a:t>
             </a:r>
-            <a:endParaRPr lang="en-US" sz="1400" dirty="0"/>
+            <a:endParaRPr lang="ja-JP" sz="1400" dirty="0"/>
           </a:p>
         </p:txBody>
       </p:sp>
@@ -13273,7 +13273,7 @@
               <a:buNone/>
             </a:pPr>
             <a:r>
-              <a:rPr lang="en-US" sz="1500" b="1" dirty="0">
+              <a:rPr lang="ja-JP" altLang="en-US" sz="1500" b="1" dirty="0">
                 <a:solidFill>
                   <a:srgbClr val="264653"/>
                 </a:solidFill>
@@ -13283,14 +13283,14 @@
               </a:rPr>
               <a:t>お名前の部分を押す</a:t>
             </a:r>
-            <a:endParaRPr lang="en-US" sz="1500" dirty="0"/>
+            <a:endParaRPr lang="ja-JP" sz="1500" dirty="0"/>
           </a:p>
           <a:p>
             <a:pPr indent="0" marL="0">
               <a:buNone/>
             </a:pPr>
             <a:r>
-              <a:rPr lang="en-US" sz="1250" dirty="0">
+              <a:rPr lang="ja-JP" altLang="en-US" sz="1250" dirty="0">
                 <a:solidFill>
                   <a:srgbClr val="52707A"/>
                 </a:solidFill>
@@ -13300,7 +13300,7 @@
               </a:rPr>
               <a:t>申込の中身が開きます</a:t>
             </a:r>
-            <a:endParaRPr lang="en-US" sz="1500" dirty="0"/>
+            <a:endParaRPr lang="ja-JP" sz="1500" dirty="0"/>
           </a:p>
         </p:txBody>
       </p:sp>
@@ -13376,7 +13376,7 @@
               <a:buNone/>
             </a:pPr>
             <a:r>
-              <a:rPr lang="en-US" sz="1500" b="1" dirty="0">
+              <a:rPr lang="ja-JP" altLang="en-US" sz="1500" b="1" dirty="0">
                 <a:solidFill>
                   <a:srgbClr val="FFFFFF"/>
                 </a:solidFill>
@@ -13386,7 +13386,7 @@
               </a:rPr>
               <a:t>!</a:t>
             </a:r>
-            <a:endParaRPr lang="en-US" sz="1500" dirty="0"/>
+            <a:endParaRPr lang="ja-JP" sz="1500" dirty="0"/>
           </a:p>
         </p:txBody>
       </p:sp>
@@ -13415,7 +13415,7 @@
               <a:buNone/>
             </a:pPr>
             <a:r>
-              <a:rPr lang="en-US" sz="1500" b="1" dirty="0">
+              <a:rPr lang="ja-JP" altLang="en-US" sz="1500" b="1" dirty="0">
                 <a:solidFill>
                   <a:srgbClr val="264653"/>
                 </a:solidFill>
@@ -13425,14 +13425,14 @@
               </a:rPr>
               <a:t>毎日1回は開いてください</a:t>
             </a:r>
-            <a:endParaRPr lang="en-US" sz="1500" dirty="0"/>
+            <a:endParaRPr lang="ja-JP" sz="1500" dirty="0"/>
           </a:p>
           <a:p>
             <a:pPr indent="0" marL="0">
               <a:buNone/>
             </a:pPr>
             <a:r>
-              <a:rPr lang="en-US" sz="1300" dirty="0">
+              <a:rPr lang="ja-JP" altLang="en-US" sz="1300" dirty="0">
                 <a:solidFill>
                   <a:srgbClr val="1E3A44"/>
                 </a:solidFill>
@@ -13442,7 +13442,7 @@
               </a:rPr>
               <a:t>メールが迷惑メールフォルダに入ってしまっても、お申し込みはこの画面に必ず残ります。ここが最後の砦です。</a:t>
             </a:r>
-            <a:endParaRPr lang="en-US" sz="1500" dirty="0"/>
+            <a:endParaRPr lang="ja-JP" sz="1500" dirty="0"/>
           </a:p>
         </p:txBody>
       </p:sp>
@@ -13527,7 +13527,7 @@
               <a:buNone/>
             </a:pPr>
             <a:r>
-              <a:rPr lang="en-US" sz="750" dirty="0">
+              <a:rPr lang="ja-JP" altLang="en-US" sz="750" dirty="0">
                 <a:solidFill>
                   <a:srgbClr val="97A9AF"/>
                 </a:solidFill>
@@ -13537,7 +13537,7 @@
               </a:rPr>
               <a:t>鹿児島のパーキンソン病専門トレーニングスタジオ</a:t>
             </a:r>
-            <a:endParaRPr lang="en-US" sz="750" dirty="0"/>
+            <a:endParaRPr lang="ja-JP" sz="750" dirty="0"/>
           </a:p>
         </p:txBody>
       </p:sp>
@@ -13586,7 +13586,7 @@
               <a:buNone/>
             </a:pPr>
             <a:r>
-              <a:rPr lang="en-US" sz="2400" b="1" dirty="0">
+              <a:rPr lang="ja-JP" altLang="en-US" sz="2400" b="1" dirty="0">
                 <a:solidFill>
                   <a:srgbClr val="FFFFFF"/>
                 </a:solidFill>
@@ -13596,7 +13596,7 @@
               </a:rPr>
               <a:t>2</a:t>
             </a:r>
-            <a:endParaRPr lang="en-US" sz="2400" dirty="0"/>
+            <a:endParaRPr lang="ja-JP" sz="2400" dirty="0"/>
           </a:p>
         </p:txBody>
       </p:sp>
@@ -13625,7 +13625,7 @@
               <a:buNone/>
             </a:pPr>
             <a:r>
-              <a:rPr lang="en-US" sz="3000" b="1" dirty="0">
+              <a:rPr lang="ja-JP" altLang="en-US" sz="3000" b="1" dirty="0">
                 <a:solidFill>
                   <a:srgbClr val="264653"/>
                 </a:solidFill>
@@ -13635,7 +13635,7 @@
               </a:rPr>
               <a:t>初回体験の申込を見る ─ 中身を確認する</a:t>
             </a:r>
-            <a:endParaRPr lang="en-US" sz="3000" dirty="0"/>
+            <a:endParaRPr lang="ja-JP" sz="3000" dirty="0"/>
           </a:p>
         </p:txBody>
       </p:sp>
@@ -13715,7 +13715,7 @@
               <a:buNone/>
             </a:pPr>
             <a:r>
-              <a:rPr lang="en-US" sz="1500" b="1" dirty="0">
+              <a:rPr lang="ja-JP" altLang="en-US" sz="1500" b="1" dirty="0">
                 <a:solidFill>
                   <a:srgbClr val="264653"/>
                 </a:solidFill>
@@ -13725,7 +13725,7 @@
               </a:rPr>
               <a:t>1画面で分かること</a:t>
             </a:r>
-            <a:endParaRPr lang="en-US" sz="1500" dirty="0"/>
+            <a:endParaRPr lang="ja-JP" sz="1500" dirty="0"/>
           </a:p>
         </p:txBody>
       </p:sp>
@@ -13758,7 +13758,7 @@
               <a:buChar char="•"/>
             </a:pPr>
             <a:r>
-              <a:rPr lang="en-US" sz="1250" dirty="0">
+              <a:rPr lang="ja-JP" altLang="en-US" sz="1250" dirty="0">
                 <a:solidFill>
                   <a:srgbClr val="1E3A44"/>
                 </a:solidFill>
@@ -13768,7 +13768,7 @@
               </a:rPr>
               <a:t>お名前・フリガナ</a:t>
             </a:r>
-            <a:endParaRPr lang="en-US" sz="1250" dirty="0"/>
+            <a:endParaRPr lang="ja-JP" sz="1250" dirty="0"/>
           </a:p>
           <a:p>
             <a:pPr marL="342900" indent="-342900">
@@ -13779,7 +13779,7 @@
               <a:buChar char="•"/>
             </a:pPr>
             <a:r>
-              <a:rPr lang="en-US" sz="1250" dirty="0">
+              <a:rPr lang="ja-JP" altLang="en-US" sz="1250" dirty="0">
                 <a:solidFill>
                   <a:srgbClr val="1E3A44"/>
                 </a:solidFill>
@@ -13789,7 +13789,7 @@
               </a:rPr>
               <a:t>生年月日</a:t>
             </a:r>
-            <a:endParaRPr lang="en-US" sz="1250" dirty="0"/>
+            <a:endParaRPr lang="ja-JP" sz="1250" dirty="0"/>
           </a:p>
           <a:p>
             <a:pPr marL="342900" indent="-342900">
@@ -13800,7 +13800,7 @@
               <a:buChar char="•"/>
             </a:pPr>
             <a:r>
-              <a:rPr lang="en-US" sz="1250" dirty="0">
+              <a:rPr lang="ja-JP" altLang="en-US" sz="1250" dirty="0">
                 <a:solidFill>
                   <a:srgbClr val="1E3A44"/>
                 </a:solidFill>
@@ -13810,7 +13810,7 @@
               </a:rPr>
               <a:t>メールアドレス</a:t>
             </a:r>
-            <a:endParaRPr lang="en-US" sz="1250" dirty="0"/>
+            <a:endParaRPr lang="ja-JP" sz="1250" dirty="0"/>
           </a:p>
           <a:p>
             <a:pPr marL="342900" indent="-342900">
@@ -13821,7 +13821,7 @@
               <a:buChar char="•"/>
             </a:pPr>
             <a:r>
-              <a:rPr lang="en-US" sz="1250" dirty="0">
+              <a:rPr lang="ja-JP" altLang="en-US" sz="1250" dirty="0">
                 <a:solidFill>
                   <a:srgbClr val="1E3A44"/>
                 </a:solidFill>
@@ -13831,7 +13831,7 @@
               </a:rPr>
               <a:t>お電話番号</a:t>
             </a:r>
-            <a:endParaRPr lang="en-US" sz="1250" dirty="0"/>
+            <a:endParaRPr lang="ja-JP" sz="1250" dirty="0"/>
           </a:p>
           <a:p>
             <a:pPr marL="342900" indent="-342900">
@@ -13842,7 +13842,7 @@
               <a:buChar char="•"/>
             </a:pPr>
             <a:r>
-              <a:rPr lang="en-US" sz="1250" dirty="0">
+              <a:rPr lang="ja-JP" altLang="en-US" sz="1250" dirty="0">
                 <a:solidFill>
                   <a:srgbClr val="1E3A44"/>
                 </a:solidFill>
@@ -13852,7 +13852,7 @@
               </a:rPr>
               <a:t>ご住所</a:t>
             </a:r>
-            <a:endParaRPr lang="en-US" sz="1250" dirty="0"/>
+            <a:endParaRPr lang="ja-JP" sz="1250" dirty="0"/>
           </a:p>
           <a:p>
             <a:pPr marL="342900" indent="-342900">
@@ -13863,7 +13863,7 @@
               <a:buChar char="•"/>
             </a:pPr>
             <a:r>
-              <a:rPr lang="en-US" sz="1250" dirty="0">
+              <a:rPr lang="ja-JP" altLang="en-US" sz="1250" dirty="0">
                 <a:solidFill>
                   <a:srgbClr val="1E3A44"/>
                 </a:solidFill>
@@ -13873,7 +13873,7 @@
               </a:rPr>
               <a:t>どなたのご相談か</a:t>
             </a:r>
-            <a:endParaRPr lang="en-US" sz="1250" dirty="0"/>
+            <a:endParaRPr lang="ja-JP" sz="1250" dirty="0"/>
           </a:p>
           <a:p>
             <a:pPr marL="342900" indent="-342900">
@@ -13884,7 +13884,7 @@
               <a:buChar char="•"/>
             </a:pPr>
             <a:r>
-              <a:rPr lang="en-US" sz="1250" dirty="0">
+              <a:rPr lang="ja-JP" altLang="en-US" sz="1250" dirty="0">
                 <a:solidFill>
                   <a:srgbClr val="1E3A44"/>
                 </a:solidFill>
@@ -13894,7 +13894,7 @@
               </a:rPr>
               <a:t>医師からの診断名</a:t>
             </a:r>
-            <a:endParaRPr lang="en-US" sz="1250" dirty="0"/>
+            <a:endParaRPr lang="ja-JP" sz="1250" dirty="0"/>
           </a:p>
           <a:p>
             <a:pPr marL="342900" indent="-342900">
@@ -13905,7 +13905,7 @@
               <a:buChar char="•"/>
             </a:pPr>
             <a:r>
-              <a:rPr lang="en-US" sz="1250" dirty="0">
+              <a:rPr lang="ja-JP" altLang="en-US" sz="1250" dirty="0">
                 <a:solidFill>
                   <a:srgbClr val="1E3A44"/>
                 </a:solidFill>
@@ -13915,7 +13915,7 @@
               </a:rPr>
               <a:t>困っていること</a:t>
             </a:r>
-            <a:endParaRPr lang="en-US" sz="1250" dirty="0"/>
+            <a:endParaRPr lang="ja-JP" sz="1250" dirty="0"/>
           </a:p>
           <a:p>
             <a:pPr marL="342900" indent="-342900">
@@ -13926,7 +13926,7 @@
               <a:buChar char="•"/>
             </a:pPr>
             <a:r>
-              <a:rPr lang="en-US" sz="1250" dirty="0">
+              <a:rPr lang="ja-JP" altLang="en-US" sz="1250" dirty="0">
                 <a:solidFill>
                   <a:srgbClr val="1E3A44"/>
                 </a:solidFill>
@@ -13936,7 +13936,7 @@
               </a:rPr>
               <a:t>ASPATHを知ったきっかけ</a:t>
             </a:r>
-            <a:endParaRPr lang="en-US" sz="1250" dirty="0"/>
+            <a:endParaRPr lang="ja-JP" sz="1250" dirty="0"/>
           </a:p>
         </p:txBody>
       </p:sp>
@@ -14012,7 +14012,7 @@
               <a:buNone/>
             </a:pPr>
             <a:r>
-              <a:rPr lang="en-US" sz="1500" b="1" dirty="0">
+              <a:rPr lang="ja-JP" altLang="en-US" sz="1500" b="1" dirty="0">
                 <a:solidFill>
                   <a:srgbClr val="FFFFFF"/>
                 </a:solidFill>
@@ -14022,7 +14022,7 @@
               </a:rPr>
               <a:t>!</a:t>
             </a:r>
-            <a:endParaRPr lang="en-US" sz="1500" dirty="0"/>
+            <a:endParaRPr lang="ja-JP" sz="1500" dirty="0"/>
           </a:p>
         </p:txBody>
       </p:sp>
@@ -14051,7 +14051,7 @@
               <a:buNone/>
             </a:pPr>
             <a:r>
-              <a:rPr lang="en-US" sz="1500" b="1" dirty="0">
+              <a:rPr lang="ja-JP" altLang="en-US" sz="1500" b="1" dirty="0">
                 <a:solidFill>
                   <a:srgbClr val="264653"/>
                 </a:solidFill>
@@ -14061,14 +14061,14 @@
               </a:rPr>
               <a:t>この画面は編集しないでください</a:t>
             </a:r>
-            <a:endParaRPr lang="en-US" sz="1500" dirty="0"/>
+            <a:endParaRPr lang="ja-JP" sz="1500" dirty="0"/>
           </a:p>
           <a:p>
             <a:pPr indent="0" marL="0">
               <a:buNone/>
             </a:pPr>
             <a:r>
-              <a:rPr lang="en-US" sz="1300" dirty="0">
+              <a:rPr lang="ja-JP" altLang="en-US" sz="1300" dirty="0">
                 <a:solidFill>
                   <a:srgbClr val="1E3A44"/>
                 </a:solidFill>
@@ -14078,7 +14078,7 @@
               </a:rPr>
               <a:t>お客様が送ってくださった内容の控えです。書き換えると、あとで確認できなくなります。</a:t>
             </a:r>
-            <a:endParaRPr lang="en-US" sz="1500" dirty="0"/>
+            <a:endParaRPr lang="ja-JP" sz="1500" dirty="0"/>
           </a:p>
         </p:txBody>
       </p:sp>
@@ -14154,7 +14154,7 @@
               <a:buNone/>
             </a:pPr>
             <a:r>
-              <a:rPr lang="en-US" sz="1500" b="1" dirty="0">
+              <a:rPr lang="ja-JP" altLang="en-US" sz="1500" b="1" dirty="0">
                 <a:solidFill>
                   <a:srgbClr val="FFFFFF"/>
                 </a:solidFill>
@@ -14164,7 +14164,7 @@
               </a:rPr>
               <a:t>!</a:t>
             </a:r>
-            <a:endParaRPr lang="en-US" sz="1500" dirty="0"/>
+            <a:endParaRPr lang="ja-JP" sz="1500" dirty="0"/>
           </a:p>
         </p:txBody>
       </p:sp>
@@ -14193,7 +14193,7 @@
               <a:buNone/>
             </a:pPr>
             <a:r>
-              <a:rPr lang="en-US" sz="1500" b="1" dirty="0">
+              <a:rPr lang="ja-JP" altLang="en-US" sz="1500" b="1" dirty="0">
                 <a:solidFill>
                   <a:srgbClr val="264653"/>
                 </a:solidFill>
@@ -14203,14 +14203,14 @@
               </a:rPr>
               <a:t>診断名などの大切な情報が入っています</a:t>
             </a:r>
-            <a:endParaRPr lang="en-US" sz="1500" dirty="0"/>
+            <a:endParaRPr lang="ja-JP" sz="1500" dirty="0"/>
           </a:p>
           <a:p>
             <a:pPr indent="0" marL="0">
               <a:buNone/>
             </a:pPr>
             <a:r>
-              <a:rPr lang="en-US" sz="1300" dirty="0">
+              <a:rPr lang="ja-JP" altLang="en-US" sz="1300" dirty="0">
                 <a:solidFill>
                   <a:srgbClr val="1E3A44"/>
                 </a:solidFill>
@@ -14220,7 +14220,7 @@
               </a:rPr>
               <a:t>画面を開いたまま席を離れない、印刷物を放置しない。ご本人以外の目に触れないよう、取り扱いにご注意ください。</a:t>
             </a:r>
-            <a:endParaRPr lang="en-US" sz="1500" dirty="0"/>
+            <a:endParaRPr lang="ja-JP" sz="1500" dirty="0"/>
           </a:p>
         </p:txBody>
       </p:sp>
